--- a/analysis/slides/血糖値比較分析.pptx
+++ b/analysis/slides/血糖値比較分析.pptx
@@ -2140,7 +2140,7 @@
               <c:strCache>
                 <c:ptCount val="1"/>
                 <c:pt idx="0">
-                  <c:v>満腹感 (0-10)</c:v>
+                  <c:v>固形</c:v>
                 </c:pt>
               </c:strCache>
             </c:strRef>
@@ -2149,7 +2149,7 @@
             <a:solidFill>
               <a:srgbClr val="2A78D6"/>
             </a:solidFill>
-            <a:ln w="31750" cap="flat">
+            <a:ln w="25400" cap="flat">
               <a:solidFill>
                 <a:srgbClr val="2A78D6"/>
               </a:solidFill>
@@ -2185,7 +2185,7 @@
           </c:dLbls>
           <c:marker>
             <c:symbol val="circle"/>
-            <c:size val="6"/>
+            <c:size val="5"/>
             <c:spPr>
               <a:solidFill>
                 <a:srgbClr val="2A78D6"/>
@@ -2232,19 +2232,19 @@
                 <c:formatCode>General</c:formatCode>
                 <c:ptCount val="5"/>
                 <c:pt idx="0">
-                  <c:v>2.33</c:v>
+                  <c:v>1.67</c:v>
                 </c:pt>
                 <c:pt idx="1">
-                  <c:v>7.67</c:v>
+                  <c:v>4</c:v>
                 </c:pt>
                 <c:pt idx="2">
-                  <c:v>5.33</c:v>
+                  <c:v>4</c:v>
                 </c:pt>
                 <c:pt idx="3">
-                  <c:v>5.5</c:v>
+                  <c:v>2</c:v>
                 </c:pt>
                 <c:pt idx="4">
-                  <c:v>3.33</c:v>
+                  <c:v>2</c:v>
                 </c:pt>
               </c:numCache>
             </c:numRef>
@@ -2260,18 +2260,18 @@
               <c:strCache>
                 <c:ptCount val="1"/>
                 <c:pt idx="0">
-                  <c:v>吐き気 (1-5)</c:v>
+                  <c:v>スムージー</c:v>
                 </c:pt>
               </c:strCache>
             </c:strRef>
           </c:tx>
           <c:spPr>
             <a:solidFill>
-              <a:srgbClr val="E34948"/>
+              <a:srgbClr val="EB6834"/>
             </a:solidFill>
-            <a:ln w="31750" cap="flat">
+            <a:ln w="25400" cap="flat">
               <a:solidFill>
-                <a:srgbClr val="E34948"/>
+                <a:srgbClr val="EB6834"/>
               </a:solidFill>
               <a:prstDash val="solid"/>
               <a:round/>
@@ -2305,14 +2305,14 @@
           </c:dLbls>
           <c:marker>
             <c:symbol val="circle"/>
-            <c:size val="6"/>
+            <c:size val="5"/>
             <c:spPr>
               <a:solidFill>
-                <a:srgbClr val="E34948"/>
+                <a:srgbClr val="EB6834"/>
               </a:solidFill>
               <a:ln w="9525" cap="flat">
                 <a:solidFill>
-                  <a:srgbClr val="E34948"/>
+                  <a:srgbClr val="EB6834"/>
                 </a:solidFill>
                 <a:prstDash val="solid"/>
                 <a:round/>
@@ -2352,19 +2352,19 @@
                 <c:formatCode>General</c:formatCode>
                 <c:ptCount val="5"/>
                 <c:pt idx="0">
-                  <c:v>1</c:v>
+                  <c:v>3.33</c:v>
                 </c:pt>
                 <c:pt idx="1">
-                  <c:v>1</c:v>
+                  <c:v>3.67</c:v>
                 </c:pt>
                 <c:pt idx="2">
-                  <c:v>1</c:v>
+                  <c:v>5</c:v>
                 </c:pt>
                 <c:pt idx="3">
                   <c:v>2</c:v>
                 </c:pt>
                 <c:pt idx="4">
-                  <c:v>1</c:v>
+                  <c:v>1.33</c:v>
                 </c:pt>
               </c:numCache>
             </c:numRef>
@@ -2380,7 +2380,7 @@
               <c:strCache>
                 <c:ptCount val="1"/>
                 <c:pt idx="0">
-                  <c:v>食欲 (0-10)</c:v>
+                  <c:v>おにぎり+スムージー</c:v>
                 </c:pt>
               </c:strCache>
             </c:strRef>
@@ -2389,7 +2389,7 @@
             <a:solidFill>
               <a:srgbClr val="1BAF7A"/>
             </a:solidFill>
-            <a:ln w="31750" cap="flat">
+            <a:ln w="25400" cap="flat">
               <a:solidFill>
                 <a:srgbClr val="1BAF7A"/>
               </a:solidFill>
@@ -2425,7 +2425,7 @@
           </c:dLbls>
           <c:marker>
             <c:symbol val="circle"/>
-            <c:size val="6"/>
+            <c:size val="5"/>
             <c:spPr>
               <a:solidFill>
                 <a:srgbClr val="1BAF7A"/>
@@ -2472,10 +2472,10 @@
                 <c:formatCode>General</c:formatCode>
                 <c:ptCount val="5"/>
                 <c:pt idx="0">
-                  <c:v>7</c:v>
+                  <c:v>2.33</c:v>
                 </c:pt>
                 <c:pt idx="1">
-                  <c:v>3.67</c:v>
+                  <c:v>7.67</c:v>
                 </c:pt>
                 <c:pt idx="2">
                   <c:v>5.33</c:v>
@@ -2484,7 +2484,127 @@
                   <c:v>5.5</c:v>
                 </c:pt>
                 <c:pt idx="4">
-                  <c:v>5.67</c:v>
+                  <c:v>3.33</c:v>
+                </c:pt>
+              </c:numCache>
+            </c:numRef>
+          </c:val>
+          <c:smooth val="0"/>
+        </c:ser>
+        <c:ser>
+          <c:idx val="3"/>
+          <c:order val="3"/>
+          <c:tx>
+            <c:strRef>
+              <c:f>Sheet1!$E$1</c:f>
+              <c:strCache>
+                <c:ptCount val="1"/>
+                <c:pt idx="0">
+                  <c:v>おにぎり+糖質減</c:v>
+                </c:pt>
+              </c:strCache>
+            </c:strRef>
+          </c:tx>
+          <c:spPr>
+            <a:solidFill>
+              <a:srgbClr val="EDA100"/>
+            </a:solidFill>
+            <a:ln w="25400" cap="flat">
+              <a:solidFill>
+                <a:srgbClr val="EDA100"/>
+              </a:solidFill>
+              <a:prstDash val="solid"/>
+              <a:round/>
+            </a:ln>
+            <a:effectLst/>
+          </c:spPr>
+          <c:invertIfNegative val="0"/>
+          <c:dLbls>
+            <c:numFmt formatCode="#,##0" sourceLinked="0"/>
+            <c:txPr>
+              <a:bodyPr/>
+              <a:lstStyle/>
+              <a:p>
+                <a:pPr>
+                  <a:defRPr b="0" i="0" strike="noStrike" sz="1200" u="none">
+                    <a:solidFill>
+                      <a:srgbClr val="000000"/>
+                    </a:solidFill>
+                    <a:latin typeface="Arial"/>
+                  </a:defRPr>
+                </a:pPr>
+              </a:p>
+            </c:txPr>
+            <c:showLegendKey val="0"/>
+            <c:showVal val="0"/>
+            <c:showCatName val="0"/>
+            <c:showSerName val="0"/>
+            <c:showPercent val="0"/>
+            <c:showBubbleSize val="0"/>
+            <c:showLeaderLines val="0"/>
+          </c:dLbls>
+          <c:marker>
+            <c:symbol val="circle"/>
+            <c:size val="5"/>
+            <c:spPr>
+              <a:solidFill>
+                <a:srgbClr val="EDA100"/>
+              </a:solidFill>
+              <a:ln w="9525" cap="flat">
+                <a:solidFill>
+                  <a:srgbClr val="EDA100"/>
+                </a:solidFill>
+                <a:prstDash val="solid"/>
+                <a:round/>
+              </a:ln>
+              <a:effectLst/>
+            </c:spPr>
+          </c:marker>
+          <c:cat>
+            <c:multiLvlStrRef>
+              <c:f>Sheet1!$A$2:$A$6</c:f>
+              <c:multiLvlStrCache>
+                <c:ptCount val="5"/>
+                <c:lvl>
+                  <c:pt idx="0">
+                    <c:v>8:00</c:v>
+                  </c:pt>
+                  <c:pt idx="1">
+                    <c:v>8:30</c:v>
+                  </c:pt>
+                  <c:pt idx="2">
+                    <c:v>9:00</c:v>
+                  </c:pt>
+                  <c:pt idx="3">
+                    <c:v>9:30</c:v>
+                  </c:pt>
+                  <c:pt idx="4">
+                    <c:v>10:00</c:v>
+                  </c:pt>
+                </c:lvl>
+              </c:multiLvlStrCache>
+            </c:multiLvlStrRef>
+          </c:cat>
+          <c:val>
+            <c:numRef>
+              <c:f>Sheet1!$E$2:$E$6</c:f>
+              <c:numCache>
+                <c:formatCode>General</c:formatCode>
+                <c:ptCount val="5"/>
+                <c:pt idx="0">
+                  <c:v>1.67</c:v>
+                </c:pt>
+                <c:pt idx="1">
+                  <c:v>9</c:v>
+                </c:pt>
+                <c:pt idx="2">
+                  <c:v>8</c:v>
+                </c:pt>
+                <c:pt idx="3">
+                  <c:v>5.5</c:v>
+                </c:pt>
+                <c:pt idx="4">
+                  <c:v>4.67</c:v>
                 </c:pt>
               </c:numCache>
             </c:numRef>
@@ -2545,7 +2665,7 @@
           <a:lstStyle/>
           <a:p>
             <a:pPr>
-              <a:defRPr sz="1050" b="0" i="0" u="none" strike="noStrike">
+              <a:defRPr sz="950" b="0" i="0" u="none" strike="noStrike">
                 <a:solidFill>
                   <a:srgbClr val="5C6570"/>
                 </a:solidFill>
@@ -2599,7 +2719,7 @@
           <a:lstStyle/>
           <a:p>
             <a:pPr>
-              <a:defRPr sz="1050" b="0" i="0" u="none" strike="noStrike">
+              <a:defRPr sz="950" b="0" i="0" u="none" strike="noStrike">
                 <a:solidFill>
                   <a:srgbClr val="5C6570"/>
                 </a:solidFill>
@@ -2621,24 +2741,642 @@
         <a:effectLst/>
       </c:spPr>
     </c:plotArea>
-    <c:legend>
-      <c:legendPos val="b"/>
-      <c:overlay val="0"/>
-      <c:txPr>
-        <a:bodyPr/>
-        <a:lstStyle/>
-        <a:p>
-          <a:pPr>
-            <a:defRPr sz="1100">
+    <c:plotVisOnly val="1"/>
+    <c:dispBlanksAs val="span"/>
+  </c:chart>
+  <c:spPr>
+    <a:noFill/>
+    <a:ln>
+      <a:noFill/>
+    </a:ln>
+    <a:effectLst/>
+  </c:spPr>
+  <c:externalData r:id="rId1">
+    <c:autoUpdate val="0"/>
+  </c:externalData>
+</c:chartSpace>
+</file>
+
+<file path=ppt/charts/chart6.xml><?xml version="1.0" encoding="utf-8"?>
+<c:chartSpace xmlns:c="http://schemas.openxmlformats.org/drawingml/2006/chart" xmlns:a="http://schemas.openxmlformats.org/drawingml/2006/main" xmlns:r="http://schemas.openxmlformats.org/officeDocument/2006/relationships">
+  <c:date1904 val="0"/>
+  <c:roundedCorners val="1"/>
+  <c:chart>
+    <c:autoTitleDeleted val="1"/>
+    <c:plotArea>
+      <c:layout/>
+      <c:lineChart>
+        <c:varyColors val="0"/>
+        <c:ser>
+          <c:idx val="0"/>
+          <c:order val="0"/>
+          <c:tx>
+            <c:strRef>
+              <c:f>Sheet1!$B$1</c:f>
+              <c:strCache>
+                <c:ptCount val="1"/>
+                <c:pt idx="0">
+                  <c:v>固形</c:v>
+                </c:pt>
+              </c:strCache>
+            </c:strRef>
+          </c:tx>
+          <c:spPr>
+            <a:solidFill>
+              <a:srgbClr val="2A78D6"/>
+            </a:solidFill>
+            <a:ln w="25400" cap="flat">
               <a:solidFill>
-                <a:srgbClr val="1A1A1A"/>
+                <a:srgbClr val="2A78D6"/>
               </a:solidFill>
-            </a:defRPr>
-          </a:pPr>
-          <a:endParaRPr lang="en-US"/>
-        </a:p>
-      </c:txPr>
-    </c:legend>
+              <a:prstDash val="solid"/>
+              <a:round/>
+            </a:ln>
+            <a:effectLst/>
+          </c:spPr>
+          <c:invertIfNegative val="0"/>
+          <c:dLbls>
+            <c:numFmt formatCode="#,##0" sourceLinked="0"/>
+            <c:txPr>
+              <a:bodyPr/>
+              <a:lstStyle/>
+              <a:p>
+                <a:pPr>
+                  <a:defRPr b="0" i="0" strike="noStrike" sz="1200" u="none">
+                    <a:solidFill>
+                      <a:srgbClr val="000000"/>
+                    </a:solidFill>
+                    <a:latin typeface="Arial"/>
+                  </a:defRPr>
+                </a:pPr>
+              </a:p>
+            </c:txPr>
+            <c:showLegendKey val="0"/>
+            <c:showVal val="0"/>
+            <c:showCatName val="0"/>
+            <c:showSerName val="0"/>
+            <c:showPercent val="0"/>
+            <c:showBubbleSize val="0"/>
+            <c:showLeaderLines val="0"/>
+          </c:dLbls>
+          <c:marker>
+            <c:symbol val="circle"/>
+            <c:size val="5"/>
+            <c:spPr>
+              <a:solidFill>
+                <a:srgbClr val="2A78D6"/>
+              </a:solidFill>
+              <a:ln w="9525" cap="flat">
+                <a:solidFill>
+                  <a:srgbClr val="2A78D6"/>
+                </a:solidFill>
+                <a:prstDash val="solid"/>
+                <a:round/>
+              </a:ln>
+              <a:effectLst/>
+            </c:spPr>
+          </c:marker>
+          <c:cat>
+            <c:multiLvlStrRef>
+              <c:f>Sheet1!$A$2:$A$6</c:f>
+              <c:multiLvlStrCache>
+                <c:ptCount val="5"/>
+                <c:lvl>
+                  <c:pt idx="0">
+                    <c:v>8:00</c:v>
+                  </c:pt>
+                  <c:pt idx="1">
+                    <c:v>8:30</c:v>
+                  </c:pt>
+                  <c:pt idx="2">
+                    <c:v>9:00</c:v>
+                  </c:pt>
+                  <c:pt idx="3">
+                    <c:v>9:30</c:v>
+                  </c:pt>
+                  <c:pt idx="4">
+                    <c:v>10:00</c:v>
+                  </c:pt>
+                </c:lvl>
+              </c:multiLvlStrCache>
+            </c:multiLvlStrRef>
+          </c:cat>
+          <c:val>
+            <c:numRef>
+              <c:f>Sheet1!$B$2:$B$6</c:f>
+              <c:numCache>
+                <c:formatCode>General</c:formatCode>
+                <c:ptCount val="5"/>
+                <c:pt idx="0">
+                  <c:v>7.67</c:v>
+                </c:pt>
+                <c:pt idx="1">
+                  <c:v>8</c:v>
+                </c:pt>
+                <c:pt idx="2">
+                  <c:v>7</c:v>
+                </c:pt>
+                <c:pt idx="3">
+                  <c:v>7.67</c:v>
+                </c:pt>
+                <c:pt idx="4">
+                  <c:v>7.67</c:v>
+                </c:pt>
+              </c:numCache>
+            </c:numRef>
+          </c:val>
+          <c:smooth val="0"/>
+        </c:ser>
+        <c:ser>
+          <c:idx val="1"/>
+          <c:order val="1"/>
+          <c:tx>
+            <c:strRef>
+              <c:f>Sheet1!$C$1</c:f>
+              <c:strCache>
+                <c:ptCount val="1"/>
+                <c:pt idx="0">
+                  <c:v>スムージー</c:v>
+                </c:pt>
+              </c:strCache>
+            </c:strRef>
+          </c:tx>
+          <c:spPr>
+            <a:solidFill>
+              <a:srgbClr val="EB6834"/>
+            </a:solidFill>
+            <a:ln w="25400" cap="flat">
+              <a:solidFill>
+                <a:srgbClr val="EB6834"/>
+              </a:solidFill>
+              <a:prstDash val="solid"/>
+              <a:round/>
+            </a:ln>
+            <a:effectLst/>
+          </c:spPr>
+          <c:invertIfNegative val="0"/>
+          <c:dLbls>
+            <c:numFmt formatCode="#,##0" sourceLinked="0"/>
+            <c:txPr>
+              <a:bodyPr/>
+              <a:lstStyle/>
+              <a:p>
+                <a:pPr>
+                  <a:defRPr b="0" i="0" strike="noStrike" sz="1200" u="none">
+                    <a:solidFill>
+                      <a:srgbClr val="000000"/>
+                    </a:solidFill>
+                    <a:latin typeface="Arial"/>
+                  </a:defRPr>
+                </a:pPr>
+              </a:p>
+            </c:txPr>
+            <c:showLegendKey val="0"/>
+            <c:showVal val="0"/>
+            <c:showCatName val="0"/>
+            <c:showSerName val="0"/>
+            <c:showPercent val="0"/>
+            <c:showBubbleSize val="0"/>
+            <c:showLeaderLines val="0"/>
+          </c:dLbls>
+          <c:marker>
+            <c:symbol val="circle"/>
+            <c:size val="5"/>
+            <c:spPr>
+              <a:solidFill>
+                <a:srgbClr val="EB6834"/>
+              </a:solidFill>
+              <a:ln w="9525" cap="flat">
+                <a:solidFill>
+                  <a:srgbClr val="EB6834"/>
+                </a:solidFill>
+                <a:prstDash val="solid"/>
+                <a:round/>
+              </a:ln>
+              <a:effectLst/>
+            </c:spPr>
+          </c:marker>
+          <c:cat>
+            <c:multiLvlStrRef>
+              <c:f>Sheet1!$A$2:$A$6</c:f>
+              <c:multiLvlStrCache>
+                <c:ptCount val="5"/>
+                <c:lvl>
+                  <c:pt idx="0">
+                    <c:v>8:00</c:v>
+                  </c:pt>
+                  <c:pt idx="1">
+                    <c:v>8:30</c:v>
+                  </c:pt>
+                  <c:pt idx="2">
+                    <c:v>9:00</c:v>
+                  </c:pt>
+                  <c:pt idx="3">
+                    <c:v>9:30</c:v>
+                  </c:pt>
+                  <c:pt idx="4">
+                    <c:v>10:00</c:v>
+                  </c:pt>
+                </c:lvl>
+              </c:multiLvlStrCache>
+            </c:multiLvlStrRef>
+          </c:cat>
+          <c:val>
+            <c:numRef>
+              <c:f>Sheet1!$C$2:$C$6</c:f>
+              <c:numCache>
+                <c:formatCode>General</c:formatCode>
+                <c:ptCount val="5"/>
+                <c:pt idx="0">
+                  <c:v>8.67</c:v>
+                </c:pt>
+                <c:pt idx="1">
+                  <c:v>6.33</c:v>
+                </c:pt>
+                <c:pt idx="2">
+                  <c:v>5.5</c:v>
+                </c:pt>
+                <c:pt idx="3">
+                  <c:v>7.67</c:v>
+                </c:pt>
+                <c:pt idx="4">
+                  <c:v>8.67</c:v>
+                </c:pt>
+              </c:numCache>
+            </c:numRef>
+          </c:val>
+          <c:smooth val="0"/>
+        </c:ser>
+        <c:ser>
+          <c:idx val="2"/>
+          <c:order val="2"/>
+          <c:tx>
+            <c:strRef>
+              <c:f>Sheet1!$D$1</c:f>
+              <c:strCache>
+                <c:ptCount val="1"/>
+                <c:pt idx="0">
+                  <c:v>おにぎり+スムージー</c:v>
+                </c:pt>
+              </c:strCache>
+            </c:strRef>
+          </c:tx>
+          <c:spPr>
+            <a:solidFill>
+              <a:srgbClr val="1BAF7A"/>
+            </a:solidFill>
+            <a:ln w="25400" cap="flat">
+              <a:solidFill>
+                <a:srgbClr val="1BAF7A"/>
+              </a:solidFill>
+              <a:prstDash val="solid"/>
+              <a:round/>
+            </a:ln>
+            <a:effectLst/>
+          </c:spPr>
+          <c:invertIfNegative val="0"/>
+          <c:dLbls>
+            <c:numFmt formatCode="#,##0" sourceLinked="0"/>
+            <c:txPr>
+              <a:bodyPr/>
+              <a:lstStyle/>
+              <a:p>
+                <a:pPr>
+                  <a:defRPr b="0" i="0" strike="noStrike" sz="1200" u="none">
+                    <a:solidFill>
+                      <a:srgbClr val="000000"/>
+                    </a:solidFill>
+                    <a:latin typeface="Arial"/>
+                  </a:defRPr>
+                </a:pPr>
+              </a:p>
+            </c:txPr>
+            <c:showLegendKey val="0"/>
+            <c:showVal val="0"/>
+            <c:showCatName val="0"/>
+            <c:showSerName val="0"/>
+            <c:showPercent val="0"/>
+            <c:showBubbleSize val="0"/>
+            <c:showLeaderLines val="0"/>
+          </c:dLbls>
+          <c:marker>
+            <c:symbol val="circle"/>
+            <c:size val="5"/>
+            <c:spPr>
+              <a:solidFill>
+                <a:srgbClr val="1BAF7A"/>
+              </a:solidFill>
+              <a:ln w="9525" cap="flat">
+                <a:solidFill>
+                  <a:srgbClr val="1BAF7A"/>
+                </a:solidFill>
+                <a:prstDash val="solid"/>
+                <a:round/>
+              </a:ln>
+              <a:effectLst/>
+            </c:spPr>
+          </c:marker>
+          <c:cat>
+            <c:multiLvlStrRef>
+              <c:f>Sheet1!$A$2:$A$6</c:f>
+              <c:multiLvlStrCache>
+                <c:ptCount val="5"/>
+                <c:lvl>
+                  <c:pt idx="0">
+                    <c:v>8:00</c:v>
+                  </c:pt>
+                  <c:pt idx="1">
+                    <c:v>8:30</c:v>
+                  </c:pt>
+                  <c:pt idx="2">
+                    <c:v>9:00</c:v>
+                  </c:pt>
+                  <c:pt idx="3">
+                    <c:v>9:30</c:v>
+                  </c:pt>
+                  <c:pt idx="4">
+                    <c:v>10:00</c:v>
+                  </c:pt>
+                </c:lvl>
+              </c:multiLvlStrCache>
+            </c:multiLvlStrRef>
+          </c:cat>
+          <c:val>
+            <c:numRef>
+              <c:f>Sheet1!$D$2:$D$6</c:f>
+              <c:numCache>
+                <c:formatCode>General</c:formatCode>
+                <c:ptCount val="5"/>
+                <c:pt idx="0">
+                  <c:v>7</c:v>
+                </c:pt>
+                <c:pt idx="1">
+                  <c:v>3.67</c:v>
+                </c:pt>
+                <c:pt idx="2">
+                  <c:v>5.33</c:v>
+                </c:pt>
+                <c:pt idx="3">
+                  <c:v>5.5</c:v>
+                </c:pt>
+                <c:pt idx="4">
+                  <c:v>5.67</c:v>
+                </c:pt>
+              </c:numCache>
+            </c:numRef>
+          </c:val>
+          <c:smooth val="0"/>
+        </c:ser>
+        <c:ser>
+          <c:idx val="3"/>
+          <c:order val="3"/>
+          <c:tx>
+            <c:strRef>
+              <c:f>Sheet1!$E$1</c:f>
+              <c:strCache>
+                <c:ptCount val="1"/>
+                <c:pt idx="0">
+                  <c:v>おにぎり+糖質減</c:v>
+                </c:pt>
+              </c:strCache>
+            </c:strRef>
+          </c:tx>
+          <c:spPr>
+            <a:solidFill>
+              <a:srgbClr val="EDA100"/>
+            </a:solidFill>
+            <a:ln w="25400" cap="flat">
+              <a:solidFill>
+                <a:srgbClr val="EDA100"/>
+              </a:solidFill>
+              <a:prstDash val="solid"/>
+              <a:round/>
+            </a:ln>
+            <a:effectLst/>
+          </c:spPr>
+          <c:invertIfNegative val="0"/>
+          <c:dLbls>
+            <c:numFmt formatCode="#,##0" sourceLinked="0"/>
+            <c:txPr>
+              <a:bodyPr/>
+              <a:lstStyle/>
+              <a:p>
+                <a:pPr>
+                  <a:defRPr b="0" i="0" strike="noStrike" sz="1200" u="none">
+                    <a:solidFill>
+                      <a:srgbClr val="000000"/>
+                    </a:solidFill>
+                    <a:latin typeface="Arial"/>
+                  </a:defRPr>
+                </a:pPr>
+              </a:p>
+            </c:txPr>
+            <c:showLegendKey val="0"/>
+            <c:showVal val="0"/>
+            <c:showCatName val="0"/>
+            <c:showSerName val="0"/>
+            <c:showPercent val="0"/>
+            <c:showBubbleSize val="0"/>
+            <c:showLeaderLines val="0"/>
+          </c:dLbls>
+          <c:marker>
+            <c:symbol val="circle"/>
+            <c:size val="5"/>
+            <c:spPr>
+              <a:solidFill>
+                <a:srgbClr val="EDA100"/>
+              </a:solidFill>
+              <a:ln w="9525" cap="flat">
+                <a:solidFill>
+                  <a:srgbClr val="EDA100"/>
+                </a:solidFill>
+                <a:prstDash val="solid"/>
+                <a:round/>
+              </a:ln>
+              <a:effectLst/>
+            </c:spPr>
+          </c:marker>
+          <c:cat>
+            <c:multiLvlStrRef>
+              <c:f>Sheet1!$A$2:$A$6</c:f>
+              <c:multiLvlStrCache>
+                <c:ptCount val="5"/>
+                <c:lvl>
+                  <c:pt idx="0">
+                    <c:v>8:00</c:v>
+                  </c:pt>
+                  <c:pt idx="1">
+                    <c:v>8:30</c:v>
+                  </c:pt>
+                  <c:pt idx="2">
+                    <c:v>9:00</c:v>
+                  </c:pt>
+                  <c:pt idx="3">
+                    <c:v>9:30</c:v>
+                  </c:pt>
+                  <c:pt idx="4">
+                    <c:v>10:00</c:v>
+                  </c:pt>
+                </c:lvl>
+              </c:multiLvlStrCache>
+            </c:multiLvlStrRef>
+          </c:cat>
+          <c:val>
+            <c:numRef>
+              <c:f>Sheet1!$E$2:$E$6</c:f>
+              <c:numCache>
+                <c:formatCode>General</c:formatCode>
+                <c:ptCount val="5"/>
+                <c:pt idx="0">
+                  <c:v>9</c:v>
+                </c:pt>
+                <c:pt idx="1">
+                  <c:v>3.33</c:v>
+                </c:pt>
+                <c:pt idx="2">
+                  <c:v>3</c:v>
+                </c:pt>
+                <c:pt idx="3">
+                  <c:v>4.5</c:v>
+                </c:pt>
+                <c:pt idx="4">
+                  <c:v>5.33</c:v>
+                </c:pt>
+              </c:numCache>
+            </c:numRef>
+          </c:val>
+          <c:smooth val="0"/>
+        </c:ser>
+        <c:dLbls>
+          <c:numFmt formatCode="#,##0" sourceLinked="0"/>
+          <c:txPr>
+            <a:bodyPr/>
+            <a:lstStyle/>
+            <a:p>
+              <a:pPr>
+                <a:defRPr b="0" i="0" strike="noStrike" sz="1200" u="none">
+                  <a:solidFill>
+                    <a:srgbClr val="000000"/>
+                  </a:solidFill>
+                  <a:latin typeface="Arial"/>
+                </a:defRPr>
+              </a:pPr>
+            </a:p>
+          </c:txPr>
+          <c:showLegendKey val="0"/>
+          <c:showVal val="0"/>
+          <c:showCatName val="0"/>
+          <c:showSerName val="0"/>
+          <c:showPercent val="0"/>
+          <c:showBubbleSize val="0"/>
+          <c:showLeaderLines val="0"/>
+        </c:dLbls>
+        <c:marker val="1"/>
+        <c:axId val="2094734554"/>
+        <c:axId val="2094734552"/>
+        <c:axId val="2094734556"/>
+      </c:lineChart>
+      <c:catAx>
+        <c:axId val="2094734554"/>
+        <c:scaling>
+          <c:orientation val="minMax"/>
+        </c:scaling>
+        <c:delete val="0"/>
+        <c:axPos val="b"/>
+        <c:numFmt formatCode="General" sourceLinked="1"/>
+        <c:majorTickMark val="out"/>
+        <c:minorTickMark val="none"/>
+        <c:tickLblPos val="low"/>
+        <c:spPr>
+          <a:ln w="12700" cap="flat">
+            <a:solidFill>
+              <a:srgbClr val="E3E1DB"/>
+            </a:solidFill>
+            <a:prstDash val="solid"/>
+            <a:round/>
+          </a:ln>
+        </c:spPr>
+        <c:txPr>
+          <a:bodyPr/>
+          <a:lstStyle/>
+          <a:p>
+            <a:pPr>
+              <a:defRPr sz="950" b="0" i="0" u="none" strike="noStrike">
+                <a:solidFill>
+                  <a:srgbClr val="5C6570"/>
+                </a:solidFill>
+                <a:latin typeface="Arial"/>
+              </a:defRPr>
+            </a:pPr>
+            <a:endParaRPr lang="en-US"/>
+          </a:p>
+        </c:txPr>
+        <c:crossAx val="2094734552"/>
+        <c:crosses val="autoZero"/>
+        <c:auto val="1"/>
+        <c:lblAlgn val="ctr"/>
+        <c:noMultiLvlLbl val="1"/>
+      </c:catAx>
+      <c:valAx>
+        <c:axId val="2094734552"/>
+        <c:scaling>
+          <c:orientation val="minMax"/>
+          <c:max val="10"/>
+          <c:min val="0"/>
+        </c:scaling>
+        <c:delete val="0"/>
+        <c:axPos val="l"/>
+        <c:majorGridlines>
+          <c:spPr>
+            <a:ln w="9525" cap="flat">
+              <a:solidFill>
+                <a:srgbClr val="E3E1DB"/>
+              </a:solidFill>
+              <a:prstDash val="solid"/>
+              <a:round/>
+            </a:ln>
+          </c:spPr>
+        </c:majorGridlines>
+        <c:numFmt formatCode="General" sourceLinked="0"/>
+        <c:majorTickMark val="out"/>
+        <c:minorTickMark val="none"/>
+        <c:tickLblPos val="nextTo"/>
+        <c:spPr>
+          <a:ln w="12700" cap="flat">
+            <a:solidFill>
+              <a:srgbClr val="E3E1DB"/>
+            </a:solidFill>
+            <a:prstDash val="solid"/>
+            <a:round/>
+          </a:ln>
+        </c:spPr>
+        <c:txPr>
+          <a:bodyPr/>
+          <a:lstStyle/>
+          <a:p>
+            <a:pPr>
+              <a:defRPr sz="950" b="0" i="0" u="none" strike="noStrike">
+                <a:solidFill>
+                  <a:srgbClr val="5C6570"/>
+                </a:solidFill>
+                <a:latin typeface="Arial"/>
+              </a:defRPr>
+            </a:pPr>
+            <a:endParaRPr lang="en-US"/>
+          </a:p>
+        </c:txPr>
+        <c:crossAx val="2094734554"/>
+        <c:crosses val="autoZero"/>
+        <c:crossBetween val="between"/>
+      </c:valAx>
+      <c:spPr>
+        <a:noFill/>
+        <a:ln>
+          <a:noFill/>
+        </a:ln>
+        <a:effectLst/>
+      </c:spPr>
+    </c:plotArea>
     <c:plotVisOnly val="1"/>
     <c:dispBlanksAs val="span"/>
   </c:chart>
@@ -5085,7 +5823,7 @@
                 <a:ea typeface="Calibri" pitchFamily="34" charset="-122"/>
                 <a:cs typeface="Calibri" pitchFamily="34" charset="-120"/>
               </a:rPr>
-              <a:t>おにぎり＋スムージー条件では自覚的な消化器症状（頭痛・吐き気）は軽微で忍容性は良好</a:t>
+              <a:t>頭痛・吐き気は4条件とも軽微で差がなく、血糖動態の違いが消化器症状の悪化にはつながっていない</a:t>
             </a:r>
             <a:endParaRPr lang="en-US" sz="1400" dirty="0"/>
           </a:p>
@@ -5224,7 +5962,7 @@
                 <a:ea typeface="Calibri" pitchFamily="34" charset="-122"/>
                 <a:cs typeface="Calibri" pitchFamily="34" charset="-120"/>
               </a:rPr>
-              <a:t>•  固形・スムージー・糖質減の3条件でも同形式のコンディションアンケートを取得し4条件フル比較を実現</a:t>
+              <a:t>•  満腹感・食欲の条件差は「おにぎり同時摂取による食事量の違い」であり、形態そのものの効果ではない点に留意</a:t>
             </a:r>
             <a:endParaRPr lang="en-US" sz="1250" dirty="0"/>
           </a:p>
@@ -10413,21 +11151,60 @@
                 <a:ea typeface="Cambria" pitchFamily="34" charset="-122"/>
                 <a:cs typeface="Cambria" pitchFamily="34" charset="-120"/>
               </a:rPr>
-              <a:t>自覚コンディション（おにぎり＋スムージー条件, DAY8〜10）</a:t>
+              <a:t>自覚コンディション（4条件比較）</a:t>
             </a:r>
             <a:endParaRPr lang="en-US" sz="2800" dirty="0"/>
+          </a:p>
+        </p:txBody>
+      </p:sp>
+      <p:sp>
+        <p:nvSpPr>
+          <p:cNvPr id="4" name="Text 2"/>
+          <p:cNvSpPr txBox="1"/>
+          <p:nvPr/>
+        </p:nvSpPr>
+        <p:spPr>
+          <a:xfrm>
+            <a:off x="548640" y="1600200"/>
+            <a:ext cx="6309360" cy="256032"/>
+          </a:xfrm>
+          <a:prstGeom prst="rect">
+            <a:avLst/>
+          </a:prstGeom>
+          <a:noFill/>
+          <a:ln/>
+        </p:spPr>
+        <p:txBody>
+          <a:bodyPr wrap="square" lIns="0" tIns="0" rIns="0" bIns="0" rtlCol="0" anchor="ctr"/>
+          <a:lstStyle/>
+          <a:p>
+            <a:pPr indent="0" marL="0">
+              <a:buNone/>
+            </a:pPr>
+            <a:r>
+              <a:rPr lang="en-US" sz="1250" b="1" dirty="0">
+                <a:solidFill>
+                  <a:srgbClr val="21295C"/>
+                </a:solidFill>
+                <a:latin typeface="Calibri" pitchFamily="34" charset="0"/>
+                <a:ea typeface="Calibri" pitchFamily="34" charset="-122"/>
+                <a:cs typeface="Calibri" pitchFamily="34" charset="-120"/>
+              </a:rPr>
+              <a:t>満腹感の推移 (0=空腹〜10=満腹)</a:t>
+            </a:r>
+            <a:endParaRPr lang="en-US" sz="1250" dirty="0"/>
           </a:p>
         </p:txBody>
       </p:sp>
       <p:graphicFrame>
         <p:nvGraphicFramePr>
-          <p:cNvPr id="4" name="Chart 0" descr=""/>
+          <p:cNvPr id="5" name="Chart 0" descr=""/>
           <p:cNvGraphicFramePr/>
           <p:nvPr/>
         </p:nvGraphicFramePr>
         <p:xfrm>
-          <a:off x="548640" y="1691640"/>
-          <a:ext cx="6675120" cy="4114800"/>
+          <a:off x="548640" y="1874520"/>
+          <a:ext cx="6309360" cy="1691640"/>
         </p:xfrm>
         <a:graphic xmlns:a="http://schemas.openxmlformats.org/drawingml/2006/main">
           <a:graphicData uri="http://schemas.openxmlformats.org/drawingml/2006/chart">
@@ -10437,36 +11214,14 @@
       </p:graphicFrame>
       <p:sp>
         <p:nvSpPr>
-          <p:cNvPr id="5" name="Shape 2"/>
-          <p:cNvSpPr/>
-          <p:nvPr/>
-        </p:nvSpPr>
-        <p:spPr>
-          <a:xfrm>
-            <a:off x="7909560" y="1691640"/>
-            <a:ext cx="3730752" cy="4114800"/>
-          </a:xfrm>
-          <a:prstGeom prst="roundRect">
-            <a:avLst>
-              <a:gd name="adj" fmla="val 2451"/>
-            </a:avLst>
-          </a:prstGeom>
-          <a:solidFill>
-            <a:srgbClr val="EAF7F0"/>
-          </a:solidFill>
-          <a:ln/>
-        </p:spPr>
-      </p:sp>
-      <p:sp>
-        <p:nvSpPr>
           <p:cNvPr id="6" name="Text 3"/>
           <p:cNvSpPr txBox="1"/>
           <p:nvPr/>
         </p:nvSpPr>
         <p:spPr>
           <a:xfrm>
-            <a:off x="8183880" y="1920240"/>
-            <a:ext cx="3200400" cy="365760"/>
+            <a:off x="548640" y="3703320"/>
+            <a:ext cx="6309360" cy="256032"/>
           </a:xfrm>
           <a:prstGeom prst="rect">
             <a:avLst/>
@@ -10482,30 +11237,66 @@
               <a:buNone/>
             </a:pPr>
             <a:r>
-              <a:rPr lang="en-US" sz="1400" b="1" dirty="0">
-                <a:solidFill>
-                  <a:srgbClr val="0F5C3D"/>
+              <a:rPr lang="en-US" sz="1250" b="1" dirty="0">
+                <a:solidFill>
+                  <a:srgbClr val="21295C"/>
                 </a:solidFill>
                 <a:latin typeface="Calibri" pitchFamily="34" charset="0"/>
                 <a:ea typeface="Calibri" pitchFamily="34" charset="-122"/>
                 <a:cs typeface="Calibri" pitchFamily="34" charset="-120"/>
               </a:rPr>
-              <a:t>✓ 良好な忍容性</a:t>
-            </a:r>
-            <a:endParaRPr lang="en-US" sz="1400" dirty="0"/>
-          </a:p>
-        </p:txBody>
-      </p:sp>
-      <p:sp>
-        <p:nvSpPr>
-          <p:cNvPr id="7" name="Text 4"/>
+              <a:t>食欲(摂食可能感)の推移 (0=食べられない〜10=まだ食べられる)</a:t>
+            </a:r>
+            <a:endParaRPr lang="en-US" sz="1250" dirty="0"/>
+          </a:p>
+        </p:txBody>
+      </p:sp>
+      <p:graphicFrame>
+        <p:nvGraphicFramePr>
+          <p:cNvPr id="7" name="Chart 1" descr=""/>
+          <p:cNvGraphicFramePr/>
+          <p:nvPr/>
+        </p:nvGraphicFramePr>
+        <p:xfrm>
+          <a:off x="548640" y="3977640"/>
+          <a:ext cx="6309360" cy="1691640"/>
+        </p:xfrm>
+        <a:graphic xmlns:a="http://schemas.openxmlformats.org/drawingml/2006/main">
+          <a:graphicData uri="http://schemas.openxmlformats.org/drawingml/2006/chart">
+            <c:chart xmlns:c="http://schemas.openxmlformats.org/drawingml/2006/chart" r:id="rId2"/>
+          </a:graphicData>
+        </a:graphic>
+      </p:graphicFrame>
+      <p:sp>
+        <p:nvSpPr>
+          <p:cNvPr id="8" name="Shape 4"/>
+          <p:cNvSpPr/>
+          <p:nvPr/>
+        </p:nvSpPr>
+        <p:spPr>
+          <a:xfrm>
+            <a:off x="548640" y="5870448"/>
+            <a:ext cx="146304" cy="118872"/>
+          </a:xfrm>
+          <a:prstGeom prst="rect">
+            <a:avLst/>
+          </a:prstGeom>
+          <a:solidFill>
+            <a:srgbClr val="2A78D6"/>
+          </a:solidFill>
+          <a:ln/>
+        </p:spPr>
+      </p:sp>
+      <p:sp>
+        <p:nvSpPr>
+          <p:cNvPr id="9" name="Text 5"/>
           <p:cNvSpPr txBox="1"/>
           <p:nvPr/>
         </p:nvSpPr>
         <p:spPr>
           <a:xfrm>
-            <a:off x="8183880" y="2423160"/>
-            <a:ext cx="3246120" cy="594360"/>
+            <a:off x="749808" y="5760720"/>
+            <a:ext cx="1554480" cy="274320"/>
           </a:xfrm>
           <a:prstGeom prst="rect">
             <a:avLst/>
@@ -10521,30 +11312,50 @@
               <a:buNone/>
             </a:pPr>
             <a:r>
-              <a:rPr lang="en-US" sz="1150" dirty="0">
-                <a:solidFill>
-                  <a:srgbClr val="1A1A1A"/>
+              <a:rPr lang="en-US" sz="950" dirty="0">
+                <a:solidFill>
+                  <a:srgbClr val="5C6570"/>
                 </a:solidFill>
                 <a:latin typeface="Calibri" pitchFamily="34" charset="0"/>
                 <a:ea typeface="Calibri" pitchFamily="34" charset="-122"/>
                 <a:cs typeface="Calibri" pitchFamily="34" charset="-120"/>
               </a:rPr>
-              <a:t>•  頭痛：全測定点で最小値(1)のまま変化なし</a:t>
-            </a:r>
-            <a:endParaRPr lang="en-US" sz="1150" dirty="0"/>
-          </a:p>
-        </p:txBody>
-      </p:sp>
-      <p:sp>
-        <p:nvSpPr>
-          <p:cNvPr id="8" name="Text 5"/>
+              <a:t>固形</a:t>
+            </a:r>
+            <a:endParaRPr lang="en-US" sz="950" dirty="0"/>
+          </a:p>
+        </p:txBody>
+      </p:sp>
+      <p:sp>
+        <p:nvSpPr>
+          <p:cNvPr id="10" name="Shape 6"/>
+          <p:cNvSpPr/>
+          <p:nvPr/>
+        </p:nvSpPr>
+        <p:spPr>
+          <a:xfrm>
+            <a:off x="2176272" y="5870448"/>
+            <a:ext cx="146304" cy="118872"/>
+          </a:xfrm>
+          <a:prstGeom prst="rect">
+            <a:avLst/>
+          </a:prstGeom>
+          <a:solidFill>
+            <a:srgbClr val="EB6834"/>
+          </a:solidFill>
+          <a:ln/>
+        </p:spPr>
+      </p:sp>
+      <p:sp>
+        <p:nvSpPr>
+          <p:cNvPr id="11" name="Text 7"/>
           <p:cNvSpPr txBox="1"/>
           <p:nvPr/>
         </p:nvSpPr>
         <p:spPr>
           <a:xfrm>
-            <a:off x="8183880" y="3081528"/>
-            <a:ext cx="3246120" cy="594360"/>
+            <a:off x="2377440" y="5760720"/>
+            <a:ext cx="1554480" cy="274320"/>
           </a:xfrm>
           <a:prstGeom prst="rect">
             <a:avLst/>
@@ -10560,30 +11371,50 @@
               <a:buNone/>
             </a:pPr>
             <a:r>
-              <a:rPr lang="en-US" sz="1150" dirty="0">
-                <a:solidFill>
-                  <a:srgbClr val="1A1A1A"/>
+              <a:rPr lang="en-US" sz="950" dirty="0">
+                <a:solidFill>
+                  <a:srgbClr val="5C6570"/>
                 </a:solidFill>
                 <a:latin typeface="Calibri" pitchFamily="34" charset="0"/>
                 <a:ea typeface="Calibri" pitchFamily="34" charset="-122"/>
                 <a:cs typeface="Calibri" pitchFamily="34" charset="-120"/>
               </a:rPr>
-              <a:t>•  吐き気：ほぼ1（DAY10の9:30のみ一時的に3）</a:t>
-            </a:r>
-            <a:endParaRPr lang="en-US" sz="1150" dirty="0"/>
-          </a:p>
-        </p:txBody>
-      </p:sp>
-      <p:sp>
-        <p:nvSpPr>
-          <p:cNvPr id="9" name="Text 6"/>
+              <a:t>スムージー</a:t>
+            </a:r>
+            <a:endParaRPr lang="en-US" sz="950" dirty="0"/>
+          </a:p>
+        </p:txBody>
+      </p:sp>
+      <p:sp>
+        <p:nvSpPr>
+          <p:cNvPr id="12" name="Shape 8"/>
+          <p:cNvSpPr/>
+          <p:nvPr/>
+        </p:nvSpPr>
+        <p:spPr>
+          <a:xfrm>
+            <a:off x="3803904" y="5870448"/>
+            <a:ext cx="146304" cy="118872"/>
+          </a:xfrm>
+          <a:prstGeom prst="rect">
+            <a:avLst/>
+          </a:prstGeom>
+          <a:solidFill>
+            <a:srgbClr val="1BAF7A"/>
+          </a:solidFill>
+          <a:ln/>
+        </p:spPr>
+      </p:sp>
+      <p:sp>
+        <p:nvSpPr>
+          <p:cNvPr id="13" name="Text 9"/>
           <p:cNvSpPr txBox="1"/>
           <p:nvPr/>
         </p:nvSpPr>
         <p:spPr>
           <a:xfrm>
-            <a:off x="8183880" y="3739896"/>
-            <a:ext cx="3246120" cy="594360"/>
+            <a:off x="4005072" y="5760720"/>
+            <a:ext cx="1554480" cy="274320"/>
           </a:xfrm>
           <a:prstGeom prst="rect">
             <a:avLst/>
@@ -10599,30 +11430,50 @@
               <a:buNone/>
             </a:pPr>
             <a:r>
-              <a:rPr lang="en-US" sz="1150" dirty="0">
-                <a:solidFill>
-                  <a:srgbClr val="1A1A1A"/>
+              <a:rPr lang="en-US" sz="950" dirty="0">
+                <a:solidFill>
+                  <a:srgbClr val="5C6570"/>
                 </a:solidFill>
                 <a:latin typeface="Calibri" pitchFamily="34" charset="0"/>
                 <a:ea typeface="Calibri" pitchFamily="34" charset="-122"/>
                 <a:cs typeface="Calibri" pitchFamily="34" charset="-120"/>
               </a:rPr>
-              <a:t>•  満腹感：摂取30分後にピーク(7.7/10)、10:00には3.3まで回復</a:t>
-            </a:r>
-            <a:endParaRPr lang="en-US" sz="1150" dirty="0"/>
-          </a:p>
-        </p:txBody>
-      </p:sp>
-      <p:sp>
-        <p:nvSpPr>
-          <p:cNvPr id="10" name="Text 7"/>
+              <a:t>おにぎり+スムージー</a:t>
+            </a:r>
+            <a:endParaRPr lang="en-US" sz="950" dirty="0"/>
+          </a:p>
+        </p:txBody>
+      </p:sp>
+      <p:sp>
+        <p:nvSpPr>
+          <p:cNvPr id="14" name="Shape 10"/>
+          <p:cNvSpPr/>
+          <p:nvPr/>
+        </p:nvSpPr>
+        <p:spPr>
+          <a:xfrm>
+            <a:off x="5431536" y="5870448"/>
+            <a:ext cx="146304" cy="118872"/>
+          </a:xfrm>
+          <a:prstGeom prst="rect">
+            <a:avLst/>
+          </a:prstGeom>
+          <a:solidFill>
+            <a:srgbClr val="EDA100"/>
+          </a:solidFill>
+          <a:ln/>
+        </p:spPr>
+      </p:sp>
+      <p:sp>
+        <p:nvSpPr>
+          <p:cNvPr id="15" name="Text 11"/>
           <p:cNvSpPr txBox="1"/>
           <p:nvPr/>
         </p:nvSpPr>
         <p:spPr>
           <a:xfrm>
-            <a:off x="8183880" y="4398264"/>
-            <a:ext cx="3246120" cy="594360"/>
+            <a:off x="5632704" y="5760720"/>
+            <a:ext cx="1554480" cy="274320"/>
           </a:xfrm>
           <a:prstGeom prst="rect">
             <a:avLst/>
@@ -10638,30 +11489,52 @@
               <a:buNone/>
             </a:pPr>
             <a:r>
-              <a:rPr lang="en-US" sz="1150" dirty="0">
-                <a:solidFill>
-                  <a:srgbClr val="1A1A1A"/>
+              <a:rPr lang="en-US" sz="950" dirty="0">
+                <a:solidFill>
+                  <a:srgbClr val="5C6570"/>
                 </a:solidFill>
                 <a:latin typeface="Calibri" pitchFamily="34" charset="0"/>
                 <a:ea typeface="Calibri" pitchFamily="34" charset="-122"/>
                 <a:cs typeface="Calibri" pitchFamily="34" charset="-120"/>
               </a:rPr>
-              <a:t>•  食欲：満腹感と同期して回復</a:t>
-            </a:r>
-            <a:endParaRPr lang="en-US" sz="1150" dirty="0"/>
-          </a:p>
-        </p:txBody>
-      </p:sp>
-      <p:sp>
-        <p:nvSpPr>
-          <p:cNvPr id="11" name="Text 8"/>
+              <a:t>おにぎり+糖質減</a:t>
+            </a:r>
+            <a:endParaRPr lang="en-US" sz="950" dirty="0"/>
+          </a:p>
+        </p:txBody>
+      </p:sp>
+      <p:sp>
+        <p:nvSpPr>
+          <p:cNvPr id="16" name="Shape 12"/>
+          <p:cNvSpPr/>
+          <p:nvPr/>
+        </p:nvSpPr>
+        <p:spPr>
+          <a:xfrm>
+            <a:off x="7635240" y="1600200"/>
+            <a:ext cx="4005072" cy="4434840"/>
+          </a:xfrm>
+          <a:prstGeom prst="roundRect">
+            <a:avLst>
+              <a:gd name="adj" fmla="val 2283"/>
+            </a:avLst>
+          </a:prstGeom>
+          <a:solidFill>
+            <a:srgbClr val="EAF7F0"/>
+          </a:solidFill>
+          <a:ln/>
+        </p:spPr>
+      </p:sp>
+      <p:sp>
+        <p:nvSpPr>
+          <p:cNvPr id="17" name="Text 13"/>
           <p:cNvSpPr txBox="1"/>
           <p:nvPr/>
         </p:nvSpPr>
         <p:spPr>
           <a:xfrm>
-            <a:off x="8183880" y="5056632"/>
-            <a:ext cx="3246120" cy="594360"/>
+            <a:off x="7909560" y="1828800"/>
+            <a:ext cx="3566160" cy="365760"/>
           </a:xfrm>
           <a:prstGeom prst="rect">
             <a:avLst/>
@@ -10677,30 +11550,30 @@
               <a:buNone/>
             </a:pPr>
             <a:r>
-              <a:rPr lang="en-US" sz="1150" dirty="0">
-                <a:solidFill>
-                  <a:srgbClr val="1A1A1A"/>
+              <a:rPr lang="en-US" sz="1350" b="1" dirty="0">
+                <a:solidFill>
+                  <a:srgbClr val="0F5C3D"/>
                 </a:solidFill>
                 <a:latin typeface="Calibri" pitchFamily="34" charset="0"/>
                 <a:ea typeface="Calibri" pitchFamily="34" charset="-122"/>
                 <a:cs typeface="Calibri" pitchFamily="34" charset="-120"/>
               </a:rPr>
-              <a:t>•  血糖値は高めに推移する一方、自覚的な消化器症状は軽微</a:t>
-            </a:r>
-            <a:endParaRPr lang="en-US" sz="1150" dirty="0"/>
-          </a:p>
-        </p:txBody>
-      </p:sp>
-      <p:sp>
-        <p:nvSpPr>
-          <p:cNvPr id="12" name="Text 9"/>
-          <p:cNvSpPr/>
-          <p:nvPr/>
-        </p:nvSpPr>
-        <p:spPr>
-          <a:xfrm>
-            <a:off x="548640" y="6473952"/>
-            <a:ext cx="11091672" cy="274320"/>
+              <a:t>✓ 消化器症状は4条件とも良好</a:t>
+            </a:r>
+            <a:endParaRPr lang="en-US" sz="1350" dirty="0"/>
+          </a:p>
+        </p:txBody>
+      </p:sp>
+      <p:sp>
+        <p:nvSpPr>
+          <p:cNvPr id="18" name="Text 14"/>
+          <p:cNvSpPr txBox="1"/>
+          <p:nvPr/>
+        </p:nvSpPr>
+        <p:spPr>
+          <a:xfrm>
+            <a:off x="7909560" y="2331720"/>
+            <a:ext cx="3520440" cy="868680"/>
           </a:xfrm>
           <a:prstGeom prst="rect">
             <a:avLst/>
@@ -10709,24 +11582,141 @@
           <a:ln/>
         </p:spPr>
         <p:txBody>
-          <a:bodyPr wrap="square" rtlCol="0" anchor="ctr"/>
-          <a:lstStyle/>
-          <a:p>
-            <a:pPr algn="l" indent="0" marL="0">
+          <a:bodyPr wrap="square" lIns="0" tIns="0" rIns="0" bIns="0" rtlCol="0" anchor="ctr"/>
+          <a:lstStyle/>
+          <a:p>
+            <a:pPr indent="0" marL="0">
               <a:buNone/>
             </a:pPr>
             <a:r>
-              <a:rPr lang="en-US" sz="1000" dirty="0">
-                <a:solidFill>
-                  <a:srgbClr val="5C6570"/>
+              <a:rPr lang="en-US" sz="1100" dirty="0">
+                <a:solidFill>
+                  <a:srgbClr val="1A1A1A"/>
                 </a:solidFill>
                 <a:latin typeface="Calibri" pitchFamily="34" charset="0"/>
                 <a:ea typeface="Calibri" pitchFamily="34" charset="-122"/>
                 <a:cs typeface="Calibri" pitchFamily="34" charset="-120"/>
               </a:rPr>
-              <a:t>他3条件の同形式データは提供ファイルに未収録のため、条件間の直接比較は不可。</a:t>
-            </a:r>
-            <a:endParaRPr lang="en-US" sz="1000" dirty="0"/>
+              <a:t>•  頭痛：4条件すべて全測定点で最小値(1)、変化なし</a:t>
+            </a:r>
+            <a:endParaRPr lang="en-US" sz="1100" dirty="0"/>
+          </a:p>
+        </p:txBody>
+      </p:sp>
+      <p:sp>
+        <p:nvSpPr>
+          <p:cNvPr id="19" name="Text 15"/>
+          <p:cNvSpPr txBox="1"/>
+          <p:nvPr/>
+        </p:nvSpPr>
+        <p:spPr>
+          <a:xfrm>
+            <a:off x="7909560" y="3264408"/>
+            <a:ext cx="3520440" cy="868680"/>
+          </a:xfrm>
+          <a:prstGeom prst="rect">
+            <a:avLst/>
+          </a:prstGeom>
+          <a:noFill/>
+          <a:ln/>
+        </p:spPr>
+        <p:txBody>
+          <a:bodyPr wrap="square" lIns="0" tIns="0" rIns="0" bIns="0" rtlCol="0" anchor="ctr"/>
+          <a:lstStyle/>
+          <a:p>
+            <a:pPr indent="0" marL="0">
+              <a:buNone/>
+            </a:pPr>
+            <a:r>
+              <a:rPr lang="en-US" sz="1100" dirty="0">
+                <a:solidFill>
+                  <a:srgbClr val="1A1A1A"/>
+                </a:solidFill>
+                <a:latin typeface="Calibri" pitchFamily="34" charset="0"/>
+                <a:ea typeface="Calibri" pitchFamily="34" charset="-122"/>
+                <a:cs typeface="Calibri" pitchFamily="34" charset="-120"/>
+              </a:rPr>
+              <a:t>•  吐き気：4条件すべてほぼ1（おにぎり+スムージーのDAY10 9:30のみ一時的に2）</a:t>
+            </a:r>
+            <a:endParaRPr lang="en-US" sz="1100" dirty="0"/>
+          </a:p>
+        </p:txBody>
+      </p:sp>
+      <p:sp>
+        <p:nvSpPr>
+          <p:cNvPr id="20" name="Text 16"/>
+          <p:cNvSpPr txBox="1"/>
+          <p:nvPr/>
+        </p:nvSpPr>
+        <p:spPr>
+          <a:xfrm>
+            <a:off x="7909560" y="4197096"/>
+            <a:ext cx="3520440" cy="868680"/>
+          </a:xfrm>
+          <a:prstGeom prst="rect">
+            <a:avLst/>
+          </a:prstGeom>
+          <a:noFill/>
+          <a:ln/>
+        </p:spPr>
+        <p:txBody>
+          <a:bodyPr wrap="square" lIns="0" tIns="0" rIns="0" bIns="0" rtlCol="0" anchor="ctr"/>
+          <a:lstStyle/>
+          <a:p>
+            <a:pPr indent="0" marL="0">
+              <a:buNone/>
+            </a:pPr>
+            <a:r>
+              <a:rPr lang="en-US" sz="1100" dirty="0">
+                <a:solidFill>
+                  <a:srgbClr val="1A1A1A"/>
+                </a:solidFill>
+                <a:latin typeface="Calibri" pitchFamily="34" charset="0"/>
+                <a:ea typeface="Calibri" pitchFamily="34" charset="-122"/>
+                <a:cs typeface="Calibri" pitchFamily="34" charset="-120"/>
+              </a:rPr>
+              <a:t>•  血糖値が高めに推移するおにぎり同時摂取条件でも、消化器症状は悪化していない</a:t>
+            </a:r>
+            <a:endParaRPr lang="en-US" sz="1100" dirty="0"/>
+          </a:p>
+        </p:txBody>
+      </p:sp>
+      <p:sp>
+        <p:nvSpPr>
+          <p:cNvPr id="21" name="Text 17"/>
+          <p:cNvSpPr txBox="1"/>
+          <p:nvPr/>
+        </p:nvSpPr>
+        <p:spPr>
+          <a:xfrm>
+            <a:off x="7909560" y="5129784"/>
+            <a:ext cx="3520440" cy="868680"/>
+          </a:xfrm>
+          <a:prstGeom prst="rect">
+            <a:avLst/>
+          </a:prstGeom>
+          <a:noFill/>
+          <a:ln/>
+        </p:spPr>
+        <p:txBody>
+          <a:bodyPr wrap="square" lIns="0" tIns="0" rIns="0" bIns="0" rtlCol="0" anchor="ctr"/>
+          <a:lstStyle/>
+          <a:p>
+            <a:pPr indent="0" marL="0">
+              <a:buNone/>
+            </a:pPr>
+            <a:r>
+              <a:rPr lang="en-US" sz="1100" dirty="0">
+                <a:solidFill>
+                  <a:srgbClr val="1A1A1A"/>
+                </a:solidFill>
+                <a:latin typeface="Calibri" pitchFamily="34" charset="0"/>
+                <a:ea typeface="Calibri" pitchFamily="34" charset="-122"/>
+                <a:cs typeface="Calibri" pitchFamily="34" charset="-120"/>
+              </a:rPr>
+              <a:t>•  満腹感・食欲の差は「おにぎりを同時に食べたか」による食事量の違いを反映しており、副食の形態（固形/液状）そのものの効果ではない</a:t>
+            </a:r>
+            <a:endParaRPr lang="en-US" sz="1100" dirty="0"/>
           </a:p>
         </p:txBody>
       </p:sp>

--- a/analysis/slides/血糖値比較分析.pptx
+++ b/analysis/slides/血糖値比較分析.pptx
@@ -15,9 +15,12 @@
     <p:sldId id="263" r:id="rId9"/>
     <p:sldId id="264" r:id="rId10"/>
     <p:sldId id="265" r:id="rId11"/>
+    <p:sldId id="266" r:id="rId12"/>
+    <p:sldId id="267" r:id="rId13"/>
+    <p:sldId id="268" r:id="rId14"/>
   </p:sldIdLst>
   <p:notesMasterIdLst>
-    <p:notesMasterId r:id="rId12"/>
+    <p:notesMasterId r:id="rId15"/>
   </p:notesMasterIdLst>
   <p:sldSz cx="12192000" cy="6858000"/>
   <p:notesSz cx="6858000" cy="12192000"/>
@@ -1278,6 +1281,849 @@
 </c:chartSpace>
 </file>
 
+<file path=ppt/charts/chart10.xml><?xml version="1.0" encoding="utf-8"?>
+<c:chartSpace xmlns:c="http://schemas.openxmlformats.org/drawingml/2006/chart" xmlns:a="http://schemas.openxmlformats.org/drawingml/2006/main" xmlns:r="http://schemas.openxmlformats.org/officeDocument/2006/relationships">
+  <c:date1904 val="0"/>
+  <c:roundedCorners val="1"/>
+  <c:chart>
+    <c:autoTitleDeleted val="1"/>
+    <c:plotArea>
+      <c:layout/>
+      <c:barChart>
+        <c:barDir val="col"/>
+        <c:grouping val="clustered"/>
+        <c:varyColors val="0"/>
+        <c:ser>
+          <c:idx val="0"/>
+          <c:order val="0"/>
+          <c:tx>
+            <c:strRef>
+              <c:f>Sheet1!$B$1</c:f>
+              <c:strCache>
+                <c:ptCount val="1"/>
+                <c:pt idx="0">
+                  <c:v>爆発力（自己評価）</c:v>
+                </c:pt>
+              </c:strCache>
+            </c:strRef>
+          </c:tx>
+          <c:spPr>
+            <a:solidFill>
+              <a:srgbClr val="2A78D6">
+                <a:alpha val="100000"/>
+              </a:srgbClr>
+            </a:solidFill>
+            <a:effectLst/>
+          </c:spPr>
+          <c:invertIfNegative val="0"/>
+          <c:dLbls>
+            <c:numFmt formatCode="0.0" sourceLinked="0"/>
+            <c:txPr>
+              <a:bodyPr/>
+              <a:lstStyle/>
+              <a:p>
+                <a:pPr>
+                  <a:defRPr b="0" i="0" strike="noStrike" sz="950" u="none">
+                    <a:solidFill>
+                      <a:srgbClr val="1A1A1A"/>
+                    </a:solidFill>
+                    <a:latin typeface="Arial"/>
+                  </a:defRPr>
+                </a:pPr>
+              </a:p>
+            </c:txPr>
+            <c:showLegendKey val="0"/>
+            <c:showVal val="1"/>
+            <c:showCatName val="0"/>
+            <c:showSerName val="0"/>
+            <c:showPercent val="0"/>
+            <c:showBubbleSize val="0"/>
+            <c:showLeaderLines val="0"/>
+          </c:dLbls>
+          <c:dPt>
+            <c:idx val="0"/>
+            <c:invertIfNegative val="0"/>
+            <c:bubble3D val="0"/>
+            <c:spPr>
+              <a:solidFill>
+                <a:srgbClr val="2A78D6"/>
+              </a:solidFill>
+              <a:effectLst/>
+            </c:spPr>
+          </c:dPt>
+          <c:dPt>
+            <c:idx val="1"/>
+            <c:invertIfNegative val="0"/>
+            <c:bubble3D val="0"/>
+            <c:spPr>
+              <a:solidFill>
+                <a:srgbClr val="EB6834"/>
+              </a:solidFill>
+              <a:effectLst/>
+            </c:spPr>
+          </c:dPt>
+          <c:dPt>
+            <c:idx val="2"/>
+            <c:invertIfNegative val="0"/>
+            <c:bubble3D val="0"/>
+            <c:spPr>
+              <a:solidFill>
+                <a:srgbClr val="1BAF7A"/>
+              </a:solidFill>
+              <a:effectLst/>
+            </c:spPr>
+          </c:dPt>
+          <c:dPt>
+            <c:idx val="3"/>
+            <c:invertIfNegative val="0"/>
+            <c:bubble3D val="0"/>
+            <c:spPr>
+              <a:solidFill>
+                <a:srgbClr val="EDA100"/>
+              </a:solidFill>
+              <a:effectLst/>
+            </c:spPr>
+          </c:dPt>
+          <c:cat>
+            <c:multiLvlStrRef>
+              <c:f>Sheet1!$A$2:$A$5</c:f>
+              <c:multiLvlStrCache>
+                <c:ptCount val="4"/>
+                <c:lvl>
+                  <c:pt idx="0">
+                    <c:v>固形</c:v>
+                  </c:pt>
+                  <c:pt idx="1">
+                    <c:v>スムージー</c:v>
+                  </c:pt>
+                  <c:pt idx="2">
+                    <c:v>おにぎり+スムージー</c:v>
+                  </c:pt>
+                  <c:pt idx="3">
+                    <c:v>おにぎり+糖質減</c:v>
+                  </c:pt>
+                </c:lvl>
+              </c:multiLvlStrCache>
+            </c:multiLvlStrRef>
+          </c:cat>
+          <c:val>
+            <c:numRef>
+              <c:f>Sheet1!$B$2:$B$5</c:f>
+              <c:numCache>
+                <c:formatCode>General</c:formatCode>
+                <c:ptCount val="4"/>
+                <c:pt idx="0">
+                  <c:v>4</c:v>
+                </c:pt>
+                <c:pt idx="1">
+                  <c:v>3.67</c:v>
+                </c:pt>
+                <c:pt idx="2">
+                  <c:v>3.5</c:v>
+                </c:pt>
+                <c:pt idx="3">
+                  <c:v>3.33</c:v>
+                </c:pt>
+              </c:numCache>
+            </c:numRef>
+          </c:val>
+        </c:ser>
+        <c:dLbls>
+          <c:numFmt formatCode="0.0" sourceLinked="0"/>
+          <c:txPr>
+            <a:bodyPr/>
+            <a:lstStyle/>
+            <a:p>
+              <a:pPr>
+                <a:defRPr b="0" i="0" strike="noStrike" sz="950" u="none">
+                  <a:solidFill>
+                    <a:srgbClr val="1A1A1A"/>
+                  </a:solidFill>
+                  <a:latin typeface="Arial"/>
+                </a:defRPr>
+              </a:pPr>
+            </a:p>
+          </c:txPr>
+          <c:showLegendKey val="0"/>
+          <c:showVal val="1"/>
+          <c:showCatName val="0"/>
+          <c:showSerName val="0"/>
+          <c:showPercent val="0"/>
+          <c:showBubbleSize val="0"/>
+          <c:showLeaderLines val="0"/>
+        </c:dLbls>
+        <c:gapWidth val="35"/>
+        <c:overlap val="0"/>
+        <c:axId val="2094734554"/>
+        <c:axId val="2094734552"/>
+        <c:axId val="2094734556"/>
+      </c:barChart>
+      <c:catAx>
+        <c:axId val="2094734554"/>
+        <c:scaling>
+          <c:orientation val="minMax"/>
+        </c:scaling>
+        <c:delete val="0"/>
+        <c:axPos val="b"/>
+        <c:numFmt formatCode="General" sourceLinked="1"/>
+        <c:majorTickMark val="out"/>
+        <c:minorTickMark val="none"/>
+        <c:tickLblPos val="low"/>
+        <c:spPr>
+          <a:ln w="12700" cap="flat">
+            <a:solidFill>
+              <a:srgbClr val="E3E1DB"/>
+            </a:solidFill>
+            <a:prstDash val="solid"/>
+            <a:round/>
+          </a:ln>
+        </c:spPr>
+        <c:txPr>
+          <a:bodyPr rot="1200000"/>
+          <a:lstStyle/>
+          <a:p>
+            <a:pPr>
+              <a:defRPr sz="850" b="0" i="0" u="none" strike="noStrike">
+                <a:solidFill>
+                  <a:srgbClr val="5C6570"/>
+                </a:solidFill>
+                <a:latin typeface="Arial"/>
+              </a:defRPr>
+            </a:pPr>
+            <a:endParaRPr lang="en-US"/>
+          </a:p>
+        </c:txPr>
+        <c:crossAx val="2094734552"/>
+        <c:crosses val="autoZero"/>
+        <c:auto val="1"/>
+        <c:lblAlgn val="ctr"/>
+        <c:noMultiLvlLbl val="1"/>
+      </c:catAx>
+      <c:valAx>
+        <c:axId val="2094734552"/>
+        <c:scaling>
+          <c:orientation val="minMax"/>
+        </c:scaling>
+        <c:delete val="1"/>
+        <c:axPos val="l"/>
+        <c:numFmt formatCode="General" sourceLinked="0"/>
+        <c:majorTickMark val="out"/>
+        <c:minorTickMark val="none"/>
+        <c:tickLblPos val="nextTo"/>
+        <c:spPr>
+          <a:ln w="12700" cap="flat">
+            <a:solidFill>
+              <a:srgbClr val="E3E1DB"/>
+            </a:solidFill>
+            <a:prstDash val="solid"/>
+            <a:round/>
+          </a:ln>
+        </c:spPr>
+        <c:txPr>
+          <a:bodyPr/>
+          <a:lstStyle/>
+          <a:p>
+            <a:pPr>
+              <a:defRPr sz="1200" b="0" i="0" u="none" strike="noStrike">
+                <a:solidFill>
+                  <a:srgbClr val="000000"/>
+                </a:solidFill>
+                <a:latin typeface="Arial"/>
+              </a:defRPr>
+            </a:pPr>
+            <a:endParaRPr lang="en-US"/>
+          </a:p>
+        </c:txPr>
+        <c:crossAx val="2094734554"/>
+        <c:crosses val="autoZero"/>
+        <c:crossBetween val="between"/>
+      </c:valAx>
+      <c:spPr>
+        <a:noFill/>
+        <a:ln>
+          <a:noFill/>
+        </a:ln>
+        <a:effectLst/>
+      </c:spPr>
+    </c:plotArea>
+    <c:plotVisOnly val="1"/>
+    <c:dispBlanksAs val="span"/>
+  </c:chart>
+  <c:spPr>
+    <a:noFill/>
+    <a:ln>
+      <a:noFill/>
+    </a:ln>
+    <a:effectLst/>
+  </c:spPr>
+  <c:externalData r:id="rId1">
+    <c:autoUpdate val="0"/>
+  </c:externalData>
+</c:chartSpace>
+</file>
+
+<file path=ppt/charts/chart11.xml><?xml version="1.0" encoding="utf-8"?>
+<c:chartSpace xmlns:c="http://schemas.openxmlformats.org/drawingml/2006/chart" xmlns:a="http://schemas.openxmlformats.org/drawingml/2006/main" xmlns:r="http://schemas.openxmlformats.org/officeDocument/2006/relationships">
+  <c:date1904 val="0"/>
+  <c:roundedCorners val="1"/>
+  <c:chart>
+    <c:autoTitleDeleted val="1"/>
+    <c:plotArea>
+      <c:layout/>
+      <c:barChart>
+        <c:barDir val="col"/>
+        <c:grouping val="clustered"/>
+        <c:varyColors val="0"/>
+        <c:ser>
+          <c:idx val="0"/>
+          <c:order val="0"/>
+          <c:tx>
+            <c:strRef>
+              <c:f>Sheet1!$B$1</c:f>
+              <c:strCache>
+                <c:ptCount val="1"/>
+                <c:pt idx="0">
+                  <c:v>RPE（主観的運動強度）</c:v>
+                </c:pt>
+              </c:strCache>
+            </c:strRef>
+          </c:tx>
+          <c:spPr>
+            <a:solidFill>
+              <a:srgbClr val="2A78D6">
+                <a:alpha val="100000"/>
+              </a:srgbClr>
+            </a:solidFill>
+            <a:effectLst/>
+          </c:spPr>
+          <c:invertIfNegative val="0"/>
+          <c:dLbls>
+            <c:numFmt formatCode="0.0" sourceLinked="0"/>
+            <c:txPr>
+              <a:bodyPr/>
+              <a:lstStyle/>
+              <a:p>
+                <a:pPr>
+                  <a:defRPr b="0" i="0" strike="noStrike" sz="950" u="none">
+                    <a:solidFill>
+                      <a:srgbClr val="1A1A1A"/>
+                    </a:solidFill>
+                    <a:latin typeface="Arial"/>
+                  </a:defRPr>
+                </a:pPr>
+              </a:p>
+            </c:txPr>
+            <c:showLegendKey val="0"/>
+            <c:showVal val="1"/>
+            <c:showCatName val="0"/>
+            <c:showSerName val="0"/>
+            <c:showPercent val="0"/>
+            <c:showBubbleSize val="0"/>
+            <c:showLeaderLines val="0"/>
+          </c:dLbls>
+          <c:dPt>
+            <c:idx val="0"/>
+            <c:invertIfNegative val="0"/>
+            <c:bubble3D val="0"/>
+            <c:spPr>
+              <a:solidFill>
+                <a:srgbClr val="2A78D6"/>
+              </a:solidFill>
+              <a:effectLst/>
+            </c:spPr>
+          </c:dPt>
+          <c:dPt>
+            <c:idx val="1"/>
+            <c:invertIfNegative val="0"/>
+            <c:bubble3D val="0"/>
+            <c:spPr>
+              <a:solidFill>
+                <a:srgbClr val="EB6834"/>
+              </a:solidFill>
+              <a:effectLst/>
+            </c:spPr>
+          </c:dPt>
+          <c:dPt>
+            <c:idx val="2"/>
+            <c:invertIfNegative val="0"/>
+            <c:bubble3D val="0"/>
+            <c:spPr>
+              <a:solidFill>
+                <a:srgbClr val="1BAF7A"/>
+              </a:solidFill>
+              <a:effectLst/>
+            </c:spPr>
+          </c:dPt>
+          <c:dPt>
+            <c:idx val="3"/>
+            <c:invertIfNegative val="0"/>
+            <c:bubble3D val="0"/>
+            <c:spPr>
+              <a:solidFill>
+                <a:srgbClr val="EDA100"/>
+              </a:solidFill>
+              <a:effectLst/>
+            </c:spPr>
+          </c:dPt>
+          <c:cat>
+            <c:multiLvlStrRef>
+              <c:f>Sheet1!$A$2:$A$5</c:f>
+              <c:multiLvlStrCache>
+                <c:ptCount val="4"/>
+                <c:lvl>
+                  <c:pt idx="0">
+                    <c:v>固形</c:v>
+                  </c:pt>
+                  <c:pt idx="1">
+                    <c:v>スムージー</c:v>
+                  </c:pt>
+                  <c:pt idx="2">
+                    <c:v>おにぎり+スムージー</c:v>
+                  </c:pt>
+                  <c:pt idx="3">
+                    <c:v>おにぎり+糖質減</c:v>
+                  </c:pt>
+                </c:lvl>
+              </c:multiLvlStrCache>
+            </c:multiLvlStrRef>
+          </c:cat>
+          <c:val>
+            <c:numRef>
+              <c:f>Sheet1!$B$2:$B$5</c:f>
+              <c:numCache>
+                <c:formatCode>General</c:formatCode>
+                <c:ptCount val="4"/>
+                <c:pt idx="0">
+                  <c:v>6.67</c:v>
+                </c:pt>
+                <c:pt idx="1">
+                  <c:v>5.67</c:v>
+                </c:pt>
+                <c:pt idx="2">
+                  <c:v>5.5</c:v>
+                </c:pt>
+                <c:pt idx="3">
+                  <c:v>6.33</c:v>
+                </c:pt>
+              </c:numCache>
+            </c:numRef>
+          </c:val>
+        </c:ser>
+        <c:dLbls>
+          <c:numFmt formatCode="0.0" sourceLinked="0"/>
+          <c:txPr>
+            <a:bodyPr/>
+            <a:lstStyle/>
+            <a:p>
+              <a:pPr>
+                <a:defRPr b="0" i="0" strike="noStrike" sz="950" u="none">
+                  <a:solidFill>
+                    <a:srgbClr val="1A1A1A"/>
+                  </a:solidFill>
+                  <a:latin typeface="Arial"/>
+                </a:defRPr>
+              </a:pPr>
+            </a:p>
+          </c:txPr>
+          <c:showLegendKey val="0"/>
+          <c:showVal val="1"/>
+          <c:showCatName val="0"/>
+          <c:showSerName val="0"/>
+          <c:showPercent val="0"/>
+          <c:showBubbleSize val="0"/>
+          <c:showLeaderLines val="0"/>
+        </c:dLbls>
+        <c:gapWidth val="35"/>
+        <c:overlap val="0"/>
+        <c:axId val="2094734554"/>
+        <c:axId val="2094734552"/>
+        <c:axId val="2094734556"/>
+      </c:barChart>
+      <c:catAx>
+        <c:axId val="2094734554"/>
+        <c:scaling>
+          <c:orientation val="minMax"/>
+        </c:scaling>
+        <c:delete val="0"/>
+        <c:axPos val="b"/>
+        <c:numFmt formatCode="General" sourceLinked="1"/>
+        <c:majorTickMark val="out"/>
+        <c:minorTickMark val="none"/>
+        <c:tickLblPos val="low"/>
+        <c:spPr>
+          <a:ln w="12700" cap="flat">
+            <a:solidFill>
+              <a:srgbClr val="E3E1DB"/>
+            </a:solidFill>
+            <a:prstDash val="solid"/>
+            <a:round/>
+          </a:ln>
+        </c:spPr>
+        <c:txPr>
+          <a:bodyPr rot="1200000"/>
+          <a:lstStyle/>
+          <a:p>
+            <a:pPr>
+              <a:defRPr sz="850" b="0" i="0" u="none" strike="noStrike">
+                <a:solidFill>
+                  <a:srgbClr val="5C6570"/>
+                </a:solidFill>
+                <a:latin typeface="Arial"/>
+              </a:defRPr>
+            </a:pPr>
+            <a:endParaRPr lang="en-US"/>
+          </a:p>
+        </c:txPr>
+        <c:crossAx val="2094734552"/>
+        <c:crosses val="autoZero"/>
+        <c:auto val="1"/>
+        <c:lblAlgn val="ctr"/>
+        <c:noMultiLvlLbl val="1"/>
+      </c:catAx>
+      <c:valAx>
+        <c:axId val="2094734552"/>
+        <c:scaling>
+          <c:orientation val="minMax"/>
+        </c:scaling>
+        <c:delete val="1"/>
+        <c:axPos val="l"/>
+        <c:numFmt formatCode="General" sourceLinked="0"/>
+        <c:majorTickMark val="out"/>
+        <c:minorTickMark val="none"/>
+        <c:tickLblPos val="nextTo"/>
+        <c:spPr>
+          <a:ln w="12700" cap="flat">
+            <a:solidFill>
+              <a:srgbClr val="E3E1DB"/>
+            </a:solidFill>
+            <a:prstDash val="solid"/>
+            <a:round/>
+          </a:ln>
+        </c:spPr>
+        <c:txPr>
+          <a:bodyPr/>
+          <a:lstStyle/>
+          <a:p>
+            <a:pPr>
+              <a:defRPr sz="1200" b="0" i="0" u="none" strike="noStrike">
+                <a:solidFill>
+                  <a:srgbClr val="000000"/>
+                </a:solidFill>
+                <a:latin typeface="Arial"/>
+              </a:defRPr>
+            </a:pPr>
+            <a:endParaRPr lang="en-US"/>
+          </a:p>
+        </c:txPr>
+        <c:crossAx val="2094734554"/>
+        <c:crosses val="autoZero"/>
+        <c:crossBetween val="between"/>
+      </c:valAx>
+      <c:spPr>
+        <a:noFill/>
+        <a:ln>
+          <a:noFill/>
+        </a:ln>
+        <a:effectLst/>
+      </c:spPr>
+    </c:plotArea>
+    <c:plotVisOnly val="1"/>
+    <c:dispBlanksAs val="span"/>
+  </c:chart>
+  <c:spPr>
+    <a:noFill/>
+    <a:ln>
+      <a:noFill/>
+    </a:ln>
+    <a:effectLst/>
+  </c:spPr>
+  <c:externalData r:id="rId1">
+    <c:autoUpdate val="0"/>
+  </c:externalData>
+</c:chartSpace>
+</file>
+
+<file path=ppt/charts/chart12.xml><?xml version="1.0" encoding="utf-8"?>
+<c:chartSpace xmlns:c="http://schemas.openxmlformats.org/drawingml/2006/chart" xmlns:a="http://schemas.openxmlformats.org/drawingml/2006/main" xmlns:r="http://schemas.openxmlformats.org/officeDocument/2006/relationships">
+  <c:date1904 val="0"/>
+  <c:roundedCorners val="1"/>
+  <c:chart>
+    <c:autoTitleDeleted val="1"/>
+    <c:plotArea>
+      <c:layout/>
+      <c:barChart>
+        <c:barDir val="col"/>
+        <c:grouping val="clustered"/>
+        <c:varyColors val="0"/>
+        <c:ser>
+          <c:idx val="0"/>
+          <c:order val="0"/>
+          <c:tx>
+            <c:strRef>
+              <c:f>Sheet1!$B$1</c:f>
+              <c:strCache>
+                <c:ptCount val="1"/>
+                <c:pt idx="0">
+                  <c:v>練習時間 (分/日)</c:v>
+                </c:pt>
+              </c:strCache>
+            </c:strRef>
+          </c:tx>
+          <c:spPr>
+            <a:solidFill>
+              <a:srgbClr val="2A78D6">
+                <a:alpha val="100000"/>
+              </a:srgbClr>
+            </a:solidFill>
+            <a:effectLst/>
+          </c:spPr>
+          <c:invertIfNegative val="0"/>
+          <c:dLbls>
+            <c:numFmt formatCode="#,##0" sourceLinked="0"/>
+            <c:txPr>
+              <a:bodyPr/>
+              <a:lstStyle/>
+              <a:p>
+                <a:pPr>
+                  <a:defRPr b="0" i="0" strike="noStrike" sz="950" u="none">
+                    <a:solidFill>
+                      <a:srgbClr val="1A1A1A"/>
+                    </a:solidFill>
+                    <a:latin typeface="Arial"/>
+                  </a:defRPr>
+                </a:pPr>
+              </a:p>
+            </c:txPr>
+            <c:showLegendKey val="0"/>
+            <c:showVal val="1"/>
+            <c:showCatName val="0"/>
+            <c:showSerName val="0"/>
+            <c:showPercent val="0"/>
+            <c:showBubbleSize val="0"/>
+            <c:showLeaderLines val="0"/>
+          </c:dLbls>
+          <c:dPt>
+            <c:idx val="0"/>
+            <c:invertIfNegative val="0"/>
+            <c:bubble3D val="0"/>
+            <c:spPr>
+              <a:solidFill>
+                <a:srgbClr val="2A78D6"/>
+              </a:solidFill>
+              <a:effectLst/>
+            </c:spPr>
+          </c:dPt>
+          <c:dPt>
+            <c:idx val="1"/>
+            <c:invertIfNegative val="0"/>
+            <c:bubble3D val="0"/>
+            <c:spPr>
+              <a:solidFill>
+                <a:srgbClr val="EB6834"/>
+              </a:solidFill>
+              <a:effectLst/>
+            </c:spPr>
+          </c:dPt>
+          <c:dPt>
+            <c:idx val="2"/>
+            <c:invertIfNegative val="0"/>
+            <c:bubble3D val="0"/>
+            <c:spPr>
+              <a:solidFill>
+                <a:srgbClr val="1BAF7A"/>
+              </a:solidFill>
+              <a:effectLst/>
+            </c:spPr>
+          </c:dPt>
+          <c:dPt>
+            <c:idx val="3"/>
+            <c:invertIfNegative val="0"/>
+            <c:bubble3D val="0"/>
+            <c:spPr>
+              <a:solidFill>
+                <a:srgbClr val="EDA100"/>
+              </a:solidFill>
+              <a:effectLst/>
+            </c:spPr>
+          </c:dPt>
+          <c:cat>
+            <c:multiLvlStrRef>
+              <c:f>Sheet1!$A$2:$A$5</c:f>
+              <c:multiLvlStrCache>
+                <c:ptCount val="4"/>
+                <c:lvl>
+                  <c:pt idx="0">
+                    <c:v>固形</c:v>
+                  </c:pt>
+                  <c:pt idx="1">
+                    <c:v>スムージー</c:v>
+                  </c:pt>
+                  <c:pt idx="2">
+                    <c:v>おにぎり+スムージー</c:v>
+                  </c:pt>
+                  <c:pt idx="3">
+                    <c:v>おにぎり+糖質減</c:v>
+                  </c:pt>
+                </c:lvl>
+              </c:multiLvlStrCache>
+            </c:multiLvlStrRef>
+          </c:cat>
+          <c:val>
+            <c:numRef>
+              <c:f>Sheet1!$B$2:$B$5</c:f>
+              <c:numCache>
+                <c:formatCode>General</c:formatCode>
+                <c:ptCount val="4"/>
+                <c:pt idx="0">
+                  <c:v>140</c:v>
+                </c:pt>
+                <c:pt idx="1">
+                  <c:v>60</c:v>
+                </c:pt>
+                <c:pt idx="2">
+                  <c:v>80</c:v>
+                </c:pt>
+                <c:pt idx="3">
+                  <c:v>100</c:v>
+                </c:pt>
+              </c:numCache>
+            </c:numRef>
+          </c:val>
+        </c:ser>
+        <c:dLbls>
+          <c:numFmt formatCode="#,##0" sourceLinked="0"/>
+          <c:txPr>
+            <a:bodyPr/>
+            <a:lstStyle/>
+            <a:p>
+              <a:pPr>
+                <a:defRPr b="0" i="0" strike="noStrike" sz="950" u="none">
+                  <a:solidFill>
+                    <a:srgbClr val="1A1A1A"/>
+                  </a:solidFill>
+                  <a:latin typeface="Arial"/>
+                </a:defRPr>
+              </a:pPr>
+            </a:p>
+          </c:txPr>
+          <c:showLegendKey val="0"/>
+          <c:showVal val="1"/>
+          <c:showCatName val="0"/>
+          <c:showSerName val="0"/>
+          <c:showPercent val="0"/>
+          <c:showBubbleSize val="0"/>
+          <c:showLeaderLines val="0"/>
+        </c:dLbls>
+        <c:gapWidth val="35"/>
+        <c:overlap val="0"/>
+        <c:axId val="2094734554"/>
+        <c:axId val="2094734552"/>
+        <c:axId val="2094734556"/>
+      </c:barChart>
+      <c:catAx>
+        <c:axId val="2094734554"/>
+        <c:scaling>
+          <c:orientation val="minMax"/>
+        </c:scaling>
+        <c:delete val="0"/>
+        <c:axPos val="b"/>
+        <c:numFmt formatCode="General" sourceLinked="1"/>
+        <c:majorTickMark val="out"/>
+        <c:minorTickMark val="none"/>
+        <c:tickLblPos val="low"/>
+        <c:spPr>
+          <a:ln w="12700" cap="flat">
+            <a:solidFill>
+              <a:srgbClr val="E3E1DB"/>
+            </a:solidFill>
+            <a:prstDash val="solid"/>
+            <a:round/>
+          </a:ln>
+        </c:spPr>
+        <c:txPr>
+          <a:bodyPr rot="1200000"/>
+          <a:lstStyle/>
+          <a:p>
+            <a:pPr>
+              <a:defRPr sz="850" b="0" i="0" u="none" strike="noStrike">
+                <a:solidFill>
+                  <a:srgbClr val="5C6570"/>
+                </a:solidFill>
+                <a:latin typeface="Arial"/>
+              </a:defRPr>
+            </a:pPr>
+            <a:endParaRPr lang="en-US"/>
+          </a:p>
+        </c:txPr>
+        <c:crossAx val="2094734552"/>
+        <c:crosses val="autoZero"/>
+        <c:auto val="1"/>
+        <c:lblAlgn val="ctr"/>
+        <c:noMultiLvlLbl val="1"/>
+      </c:catAx>
+      <c:valAx>
+        <c:axId val="2094734552"/>
+        <c:scaling>
+          <c:orientation val="minMax"/>
+        </c:scaling>
+        <c:delete val="1"/>
+        <c:axPos val="l"/>
+        <c:numFmt formatCode="General" sourceLinked="0"/>
+        <c:majorTickMark val="out"/>
+        <c:minorTickMark val="none"/>
+        <c:tickLblPos val="nextTo"/>
+        <c:spPr>
+          <a:ln w="12700" cap="flat">
+            <a:solidFill>
+              <a:srgbClr val="E3E1DB"/>
+            </a:solidFill>
+            <a:prstDash val="solid"/>
+            <a:round/>
+          </a:ln>
+        </c:spPr>
+        <c:txPr>
+          <a:bodyPr/>
+          <a:lstStyle/>
+          <a:p>
+            <a:pPr>
+              <a:defRPr sz="1200" b="0" i="0" u="none" strike="noStrike">
+                <a:solidFill>
+                  <a:srgbClr val="000000"/>
+                </a:solidFill>
+                <a:latin typeface="Arial"/>
+              </a:defRPr>
+            </a:pPr>
+            <a:endParaRPr lang="en-US"/>
+          </a:p>
+        </c:txPr>
+        <c:crossAx val="2094734554"/>
+        <c:crosses val="autoZero"/>
+        <c:crossBetween val="between"/>
+      </c:valAx>
+      <c:spPr>
+        <a:noFill/>
+        <a:ln>
+          <a:noFill/>
+        </a:ln>
+        <a:effectLst/>
+      </c:spPr>
+    </c:plotArea>
+    <c:plotVisOnly val="1"/>
+    <c:dispBlanksAs val="span"/>
+  </c:chart>
+  <c:spPr>
+    <a:noFill/>
+    <a:ln>
+      <a:noFill/>
+    </a:ln>
+    <a:effectLst/>
+  </c:spPr>
+  <c:externalData r:id="rId1">
+    <c:autoUpdate val="0"/>
+  </c:externalData>
+</c:chartSpace>
+</file>
+
 <file path=ppt/charts/chart2.xml><?xml version="1.0" encoding="utf-8"?>
 <c:chartSpace xmlns:c="http://schemas.openxmlformats.org/drawingml/2006/chart" xmlns:a="http://schemas.openxmlformats.org/drawingml/2006/main" xmlns:r="http://schemas.openxmlformats.org/officeDocument/2006/relationships">
   <c:date1904 val="0"/>
@@ -3358,6 +4204,849 @@
               <a:defRPr sz="950" b="0" i="0" u="none" strike="noStrike">
                 <a:solidFill>
                   <a:srgbClr val="5C6570"/>
+                </a:solidFill>
+                <a:latin typeface="Arial"/>
+              </a:defRPr>
+            </a:pPr>
+            <a:endParaRPr lang="en-US"/>
+          </a:p>
+        </c:txPr>
+        <c:crossAx val="2094734554"/>
+        <c:crosses val="autoZero"/>
+        <c:crossBetween val="between"/>
+      </c:valAx>
+      <c:spPr>
+        <a:noFill/>
+        <a:ln>
+          <a:noFill/>
+        </a:ln>
+        <a:effectLst/>
+      </c:spPr>
+    </c:plotArea>
+    <c:plotVisOnly val="1"/>
+    <c:dispBlanksAs val="span"/>
+  </c:chart>
+  <c:spPr>
+    <a:noFill/>
+    <a:ln>
+      <a:noFill/>
+    </a:ln>
+    <a:effectLst/>
+  </c:spPr>
+  <c:externalData r:id="rId1">
+    <c:autoUpdate val="0"/>
+  </c:externalData>
+</c:chartSpace>
+</file>
+
+<file path=ppt/charts/chart7.xml><?xml version="1.0" encoding="utf-8"?>
+<c:chartSpace xmlns:c="http://schemas.openxmlformats.org/drawingml/2006/chart" xmlns:a="http://schemas.openxmlformats.org/drawingml/2006/main" xmlns:r="http://schemas.openxmlformats.org/officeDocument/2006/relationships">
+  <c:date1904 val="0"/>
+  <c:roundedCorners val="1"/>
+  <c:chart>
+    <c:autoTitleDeleted val="1"/>
+    <c:plotArea>
+      <c:layout/>
+      <c:barChart>
+        <c:barDir val="col"/>
+        <c:grouping val="clustered"/>
+        <c:varyColors val="0"/>
+        <c:ser>
+          <c:idx val="0"/>
+          <c:order val="0"/>
+          <c:tx>
+            <c:strRef>
+              <c:f>Sheet1!$B$1</c:f>
+              <c:strCache>
+                <c:ptCount val="1"/>
+                <c:pt idx="0">
+                  <c:v>起床時コンディション</c:v>
+                </c:pt>
+              </c:strCache>
+            </c:strRef>
+          </c:tx>
+          <c:spPr>
+            <a:solidFill>
+              <a:srgbClr val="2A78D6">
+                <a:alpha val="100000"/>
+              </a:srgbClr>
+            </a:solidFill>
+            <a:effectLst/>
+          </c:spPr>
+          <c:invertIfNegative val="0"/>
+          <c:dLbls>
+            <c:numFmt formatCode="0.0" sourceLinked="0"/>
+            <c:txPr>
+              <a:bodyPr/>
+              <a:lstStyle/>
+              <a:p>
+                <a:pPr>
+                  <a:defRPr b="0" i="0" strike="noStrike" sz="950" u="none">
+                    <a:solidFill>
+                      <a:srgbClr val="1A1A1A"/>
+                    </a:solidFill>
+                    <a:latin typeface="Arial"/>
+                  </a:defRPr>
+                </a:pPr>
+              </a:p>
+            </c:txPr>
+            <c:showLegendKey val="0"/>
+            <c:showVal val="1"/>
+            <c:showCatName val="0"/>
+            <c:showSerName val="0"/>
+            <c:showPercent val="0"/>
+            <c:showBubbleSize val="0"/>
+            <c:showLeaderLines val="0"/>
+          </c:dLbls>
+          <c:dPt>
+            <c:idx val="0"/>
+            <c:invertIfNegative val="0"/>
+            <c:bubble3D val="0"/>
+            <c:spPr>
+              <a:solidFill>
+                <a:srgbClr val="2A78D6"/>
+              </a:solidFill>
+              <a:effectLst/>
+            </c:spPr>
+          </c:dPt>
+          <c:dPt>
+            <c:idx val="1"/>
+            <c:invertIfNegative val="0"/>
+            <c:bubble3D val="0"/>
+            <c:spPr>
+              <a:solidFill>
+                <a:srgbClr val="EB6834"/>
+              </a:solidFill>
+              <a:effectLst/>
+            </c:spPr>
+          </c:dPt>
+          <c:dPt>
+            <c:idx val="2"/>
+            <c:invertIfNegative val="0"/>
+            <c:bubble3D val="0"/>
+            <c:spPr>
+              <a:solidFill>
+                <a:srgbClr val="1BAF7A"/>
+              </a:solidFill>
+              <a:effectLst/>
+            </c:spPr>
+          </c:dPt>
+          <c:dPt>
+            <c:idx val="3"/>
+            <c:invertIfNegative val="0"/>
+            <c:bubble3D val="0"/>
+            <c:spPr>
+              <a:solidFill>
+                <a:srgbClr val="EDA100"/>
+              </a:solidFill>
+              <a:effectLst/>
+            </c:spPr>
+          </c:dPt>
+          <c:cat>
+            <c:multiLvlStrRef>
+              <c:f>Sheet1!$A$2:$A$5</c:f>
+              <c:multiLvlStrCache>
+                <c:ptCount val="4"/>
+                <c:lvl>
+                  <c:pt idx="0">
+                    <c:v>固形</c:v>
+                  </c:pt>
+                  <c:pt idx="1">
+                    <c:v>スムージー</c:v>
+                  </c:pt>
+                  <c:pt idx="2">
+                    <c:v>おにぎり+スムージー</c:v>
+                  </c:pt>
+                  <c:pt idx="3">
+                    <c:v>おにぎり+糖質減</c:v>
+                  </c:pt>
+                </c:lvl>
+              </c:multiLvlStrCache>
+            </c:multiLvlStrRef>
+          </c:cat>
+          <c:val>
+            <c:numRef>
+              <c:f>Sheet1!$B$2:$B$5</c:f>
+              <c:numCache>
+                <c:formatCode>General</c:formatCode>
+                <c:ptCount val="4"/>
+                <c:pt idx="0">
+                  <c:v>2</c:v>
+                </c:pt>
+                <c:pt idx="1">
+                  <c:v>2.33</c:v>
+                </c:pt>
+                <c:pt idx="2">
+                  <c:v>2.33</c:v>
+                </c:pt>
+                <c:pt idx="3">
+                  <c:v>2.67</c:v>
+                </c:pt>
+              </c:numCache>
+            </c:numRef>
+          </c:val>
+        </c:ser>
+        <c:dLbls>
+          <c:numFmt formatCode="0.0" sourceLinked="0"/>
+          <c:txPr>
+            <a:bodyPr/>
+            <a:lstStyle/>
+            <a:p>
+              <a:pPr>
+                <a:defRPr b="0" i="0" strike="noStrike" sz="950" u="none">
+                  <a:solidFill>
+                    <a:srgbClr val="1A1A1A"/>
+                  </a:solidFill>
+                  <a:latin typeface="Arial"/>
+                </a:defRPr>
+              </a:pPr>
+            </a:p>
+          </c:txPr>
+          <c:showLegendKey val="0"/>
+          <c:showVal val="1"/>
+          <c:showCatName val="0"/>
+          <c:showSerName val="0"/>
+          <c:showPercent val="0"/>
+          <c:showBubbleSize val="0"/>
+          <c:showLeaderLines val="0"/>
+        </c:dLbls>
+        <c:gapWidth val="35"/>
+        <c:overlap val="0"/>
+        <c:axId val="2094734554"/>
+        <c:axId val="2094734552"/>
+        <c:axId val="2094734556"/>
+      </c:barChart>
+      <c:catAx>
+        <c:axId val="2094734554"/>
+        <c:scaling>
+          <c:orientation val="minMax"/>
+        </c:scaling>
+        <c:delete val="0"/>
+        <c:axPos val="b"/>
+        <c:numFmt formatCode="General" sourceLinked="1"/>
+        <c:majorTickMark val="out"/>
+        <c:minorTickMark val="none"/>
+        <c:tickLblPos val="low"/>
+        <c:spPr>
+          <a:ln w="12700" cap="flat">
+            <a:solidFill>
+              <a:srgbClr val="E3E1DB"/>
+            </a:solidFill>
+            <a:prstDash val="solid"/>
+            <a:round/>
+          </a:ln>
+        </c:spPr>
+        <c:txPr>
+          <a:bodyPr rot="1200000"/>
+          <a:lstStyle/>
+          <a:p>
+            <a:pPr>
+              <a:defRPr sz="850" b="0" i="0" u="none" strike="noStrike">
+                <a:solidFill>
+                  <a:srgbClr val="5C6570"/>
+                </a:solidFill>
+                <a:latin typeface="Arial"/>
+              </a:defRPr>
+            </a:pPr>
+            <a:endParaRPr lang="en-US"/>
+          </a:p>
+        </c:txPr>
+        <c:crossAx val="2094734552"/>
+        <c:crosses val="autoZero"/>
+        <c:auto val="1"/>
+        <c:lblAlgn val="ctr"/>
+        <c:noMultiLvlLbl val="1"/>
+      </c:catAx>
+      <c:valAx>
+        <c:axId val="2094734552"/>
+        <c:scaling>
+          <c:orientation val="minMax"/>
+        </c:scaling>
+        <c:delete val="1"/>
+        <c:axPos val="l"/>
+        <c:numFmt formatCode="General" sourceLinked="0"/>
+        <c:majorTickMark val="out"/>
+        <c:minorTickMark val="none"/>
+        <c:tickLblPos val="nextTo"/>
+        <c:spPr>
+          <a:ln w="12700" cap="flat">
+            <a:solidFill>
+              <a:srgbClr val="E3E1DB"/>
+            </a:solidFill>
+            <a:prstDash val="solid"/>
+            <a:round/>
+          </a:ln>
+        </c:spPr>
+        <c:txPr>
+          <a:bodyPr/>
+          <a:lstStyle/>
+          <a:p>
+            <a:pPr>
+              <a:defRPr sz="1200" b="0" i="0" u="none" strike="noStrike">
+                <a:solidFill>
+                  <a:srgbClr val="000000"/>
+                </a:solidFill>
+                <a:latin typeface="Arial"/>
+              </a:defRPr>
+            </a:pPr>
+            <a:endParaRPr lang="en-US"/>
+          </a:p>
+        </c:txPr>
+        <c:crossAx val="2094734554"/>
+        <c:crosses val="autoZero"/>
+        <c:crossBetween val="between"/>
+      </c:valAx>
+      <c:spPr>
+        <a:noFill/>
+        <a:ln>
+          <a:noFill/>
+        </a:ln>
+        <a:effectLst/>
+      </c:spPr>
+    </c:plotArea>
+    <c:plotVisOnly val="1"/>
+    <c:dispBlanksAs val="span"/>
+  </c:chart>
+  <c:spPr>
+    <a:noFill/>
+    <a:ln>
+      <a:noFill/>
+    </a:ln>
+    <a:effectLst/>
+  </c:spPr>
+  <c:externalData r:id="rId1">
+    <c:autoUpdate val="0"/>
+  </c:externalData>
+</c:chartSpace>
+</file>
+
+<file path=ppt/charts/chart8.xml><?xml version="1.0" encoding="utf-8"?>
+<c:chartSpace xmlns:c="http://schemas.openxmlformats.org/drawingml/2006/chart" xmlns:a="http://schemas.openxmlformats.org/drawingml/2006/main" xmlns:r="http://schemas.openxmlformats.org/officeDocument/2006/relationships">
+  <c:date1904 val="0"/>
+  <c:roundedCorners val="1"/>
+  <c:chart>
+    <c:autoTitleDeleted val="1"/>
+    <c:plotArea>
+      <c:layout/>
+      <c:barChart>
+        <c:barDir val="col"/>
+        <c:grouping val="clustered"/>
+        <c:varyColors val="0"/>
+        <c:ser>
+          <c:idx val="0"/>
+          <c:order val="0"/>
+          <c:tx>
+            <c:strRef>
+              <c:f>Sheet1!$B$1</c:f>
+              <c:strCache>
+                <c:ptCount val="1"/>
+                <c:pt idx="0">
+                  <c:v>睡眠の質</c:v>
+                </c:pt>
+              </c:strCache>
+            </c:strRef>
+          </c:tx>
+          <c:spPr>
+            <a:solidFill>
+              <a:srgbClr val="2A78D6">
+                <a:alpha val="100000"/>
+              </a:srgbClr>
+            </a:solidFill>
+            <a:effectLst/>
+          </c:spPr>
+          <c:invertIfNegative val="0"/>
+          <c:dLbls>
+            <c:numFmt formatCode="0.0" sourceLinked="0"/>
+            <c:txPr>
+              <a:bodyPr/>
+              <a:lstStyle/>
+              <a:p>
+                <a:pPr>
+                  <a:defRPr b="0" i="0" strike="noStrike" sz="950" u="none">
+                    <a:solidFill>
+                      <a:srgbClr val="1A1A1A"/>
+                    </a:solidFill>
+                    <a:latin typeface="Arial"/>
+                  </a:defRPr>
+                </a:pPr>
+              </a:p>
+            </c:txPr>
+            <c:showLegendKey val="0"/>
+            <c:showVal val="1"/>
+            <c:showCatName val="0"/>
+            <c:showSerName val="0"/>
+            <c:showPercent val="0"/>
+            <c:showBubbleSize val="0"/>
+            <c:showLeaderLines val="0"/>
+          </c:dLbls>
+          <c:dPt>
+            <c:idx val="0"/>
+            <c:invertIfNegative val="0"/>
+            <c:bubble3D val="0"/>
+            <c:spPr>
+              <a:solidFill>
+                <a:srgbClr val="2A78D6"/>
+              </a:solidFill>
+              <a:effectLst/>
+            </c:spPr>
+          </c:dPt>
+          <c:dPt>
+            <c:idx val="1"/>
+            <c:invertIfNegative val="0"/>
+            <c:bubble3D val="0"/>
+            <c:spPr>
+              <a:solidFill>
+                <a:srgbClr val="EB6834"/>
+              </a:solidFill>
+              <a:effectLst/>
+            </c:spPr>
+          </c:dPt>
+          <c:dPt>
+            <c:idx val="2"/>
+            <c:invertIfNegative val="0"/>
+            <c:bubble3D val="0"/>
+            <c:spPr>
+              <a:solidFill>
+                <a:srgbClr val="1BAF7A"/>
+              </a:solidFill>
+              <a:effectLst/>
+            </c:spPr>
+          </c:dPt>
+          <c:dPt>
+            <c:idx val="3"/>
+            <c:invertIfNegative val="0"/>
+            <c:bubble3D val="0"/>
+            <c:spPr>
+              <a:solidFill>
+                <a:srgbClr val="EDA100"/>
+              </a:solidFill>
+              <a:effectLst/>
+            </c:spPr>
+          </c:dPt>
+          <c:cat>
+            <c:multiLvlStrRef>
+              <c:f>Sheet1!$A$2:$A$5</c:f>
+              <c:multiLvlStrCache>
+                <c:ptCount val="4"/>
+                <c:lvl>
+                  <c:pt idx="0">
+                    <c:v>固形</c:v>
+                  </c:pt>
+                  <c:pt idx="1">
+                    <c:v>スムージー</c:v>
+                  </c:pt>
+                  <c:pt idx="2">
+                    <c:v>おにぎり+スムージー</c:v>
+                  </c:pt>
+                  <c:pt idx="3">
+                    <c:v>おにぎり+糖質減</c:v>
+                  </c:pt>
+                </c:lvl>
+              </c:multiLvlStrCache>
+            </c:multiLvlStrRef>
+          </c:cat>
+          <c:val>
+            <c:numRef>
+              <c:f>Sheet1!$B$2:$B$5</c:f>
+              <c:numCache>
+                <c:formatCode>General</c:formatCode>
+                <c:ptCount val="4"/>
+                <c:pt idx="0">
+                  <c:v>2</c:v>
+                </c:pt>
+                <c:pt idx="1">
+                  <c:v>2</c:v>
+                </c:pt>
+                <c:pt idx="2">
+                  <c:v>2</c:v>
+                </c:pt>
+                <c:pt idx="3">
+                  <c:v>2.67</c:v>
+                </c:pt>
+              </c:numCache>
+            </c:numRef>
+          </c:val>
+        </c:ser>
+        <c:dLbls>
+          <c:numFmt formatCode="0.0" sourceLinked="0"/>
+          <c:txPr>
+            <a:bodyPr/>
+            <a:lstStyle/>
+            <a:p>
+              <a:pPr>
+                <a:defRPr b="0" i="0" strike="noStrike" sz="950" u="none">
+                  <a:solidFill>
+                    <a:srgbClr val="1A1A1A"/>
+                  </a:solidFill>
+                  <a:latin typeface="Arial"/>
+                </a:defRPr>
+              </a:pPr>
+            </a:p>
+          </c:txPr>
+          <c:showLegendKey val="0"/>
+          <c:showVal val="1"/>
+          <c:showCatName val="0"/>
+          <c:showSerName val="0"/>
+          <c:showPercent val="0"/>
+          <c:showBubbleSize val="0"/>
+          <c:showLeaderLines val="0"/>
+        </c:dLbls>
+        <c:gapWidth val="35"/>
+        <c:overlap val="0"/>
+        <c:axId val="2094734554"/>
+        <c:axId val="2094734552"/>
+        <c:axId val="2094734556"/>
+      </c:barChart>
+      <c:catAx>
+        <c:axId val="2094734554"/>
+        <c:scaling>
+          <c:orientation val="minMax"/>
+        </c:scaling>
+        <c:delete val="0"/>
+        <c:axPos val="b"/>
+        <c:numFmt formatCode="General" sourceLinked="1"/>
+        <c:majorTickMark val="out"/>
+        <c:minorTickMark val="none"/>
+        <c:tickLblPos val="low"/>
+        <c:spPr>
+          <a:ln w="12700" cap="flat">
+            <a:solidFill>
+              <a:srgbClr val="E3E1DB"/>
+            </a:solidFill>
+            <a:prstDash val="solid"/>
+            <a:round/>
+          </a:ln>
+        </c:spPr>
+        <c:txPr>
+          <a:bodyPr rot="1200000"/>
+          <a:lstStyle/>
+          <a:p>
+            <a:pPr>
+              <a:defRPr sz="850" b="0" i="0" u="none" strike="noStrike">
+                <a:solidFill>
+                  <a:srgbClr val="5C6570"/>
+                </a:solidFill>
+                <a:latin typeface="Arial"/>
+              </a:defRPr>
+            </a:pPr>
+            <a:endParaRPr lang="en-US"/>
+          </a:p>
+        </c:txPr>
+        <c:crossAx val="2094734552"/>
+        <c:crosses val="autoZero"/>
+        <c:auto val="1"/>
+        <c:lblAlgn val="ctr"/>
+        <c:noMultiLvlLbl val="1"/>
+      </c:catAx>
+      <c:valAx>
+        <c:axId val="2094734552"/>
+        <c:scaling>
+          <c:orientation val="minMax"/>
+        </c:scaling>
+        <c:delete val="1"/>
+        <c:axPos val="l"/>
+        <c:numFmt formatCode="General" sourceLinked="0"/>
+        <c:majorTickMark val="out"/>
+        <c:minorTickMark val="none"/>
+        <c:tickLblPos val="nextTo"/>
+        <c:spPr>
+          <a:ln w="12700" cap="flat">
+            <a:solidFill>
+              <a:srgbClr val="E3E1DB"/>
+            </a:solidFill>
+            <a:prstDash val="solid"/>
+            <a:round/>
+          </a:ln>
+        </c:spPr>
+        <c:txPr>
+          <a:bodyPr/>
+          <a:lstStyle/>
+          <a:p>
+            <a:pPr>
+              <a:defRPr sz="1200" b="0" i="0" u="none" strike="noStrike">
+                <a:solidFill>
+                  <a:srgbClr val="000000"/>
+                </a:solidFill>
+                <a:latin typeface="Arial"/>
+              </a:defRPr>
+            </a:pPr>
+            <a:endParaRPr lang="en-US"/>
+          </a:p>
+        </c:txPr>
+        <c:crossAx val="2094734554"/>
+        <c:crosses val="autoZero"/>
+        <c:crossBetween val="between"/>
+      </c:valAx>
+      <c:spPr>
+        <a:noFill/>
+        <a:ln>
+          <a:noFill/>
+        </a:ln>
+        <a:effectLst/>
+      </c:spPr>
+    </c:plotArea>
+    <c:plotVisOnly val="1"/>
+    <c:dispBlanksAs val="span"/>
+  </c:chart>
+  <c:spPr>
+    <a:noFill/>
+    <a:ln>
+      <a:noFill/>
+    </a:ln>
+    <a:effectLst/>
+  </c:spPr>
+  <c:externalData r:id="rId1">
+    <c:autoUpdate val="0"/>
+  </c:externalData>
+</c:chartSpace>
+</file>
+
+<file path=ppt/charts/chart9.xml><?xml version="1.0" encoding="utf-8"?>
+<c:chartSpace xmlns:c="http://schemas.openxmlformats.org/drawingml/2006/chart" xmlns:a="http://schemas.openxmlformats.org/drawingml/2006/main" xmlns:r="http://schemas.openxmlformats.org/officeDocument/2006/relationships">
+  <c:date1904 val="0"/>
+  <c:roundedCorners val="1"/>
+  <c:chart>
+    <c:autoTitleDeleted val="1"/>
+    <c:plotArea>
+      <c:layout/>
+      <c:barChart>
+        <c:barDir val="col"/>
+        <c:grouping val="clustered"/>
+        <c:varyColors val="0"/>
+        <c:ser>
+          <c:idx val="0"/>
+          <c:order val="0"/>
+          <c:tx>
+            <c:strRef>
+              <c:f>Sheet1!$B$1</c:f>
+              <c:strCache>
+                <c:ptCount val="1"/>
+                <c:pt idx="0">
+                  <c:v>持久力（自己評価）</c:v>
+                </c:pt>
+              </c:strCache>
+            </c:strRef>
+          </c:tx>
+          <c:spPr>
+            <a:solidFill>
+              <a:srgbClr val="2A78D6">
+                <a:alpha val="100000"/>
+              </a:srgbClr>
+            </a:solidFill>
+            <a:effectLst/>
+          </c:spPr>
+          <c:invertIfNegative val="0"/>
+          <c:dLbls>
+            <c:numFmt formatCode="0.0" sourceLinked="0"/>
+            <c:txPr>
+              <a:bodyPr/>
+              <a:lstStyle/>
+              <a:p>
+                <a:pPr>
+                  <a:defRPr b="0" i="0" strike="noStrike" sz="950" u="none">
+                    <a:solidFill>
+                      <a:srgbClr val="1A1A1A"/>
+                    </a:solidFill>
+                    <a:latin typeface="Arial"/>
+                  </a:defRPr>
+                </a:pPr>
+              </a:p>
+            </c:txPr>
+            <c:showLegendKey val="0"/>
+            <c:showVal val="1"/>
+            <c:showCatName val="0"/>
+            <c:showSerName val="0"/>
+            <c:showPercent val="0"/>
+            <c:showBubbleSize val="0"/>
+            <c:showLeaderLines val="0"/>
+          </c:dLbls>
+          <c:dPt>
+            <c:idx val="0"/>
+            <c:invertIfNegative val="0"/>
+            <c:bubble3D val="0"/>
+            <c:spPr>
+              <a:solidFill>
+                <a:srgbClr val="2A78D6"/>
+              </a:solidFill>
+              <a:effectLst/>
+            </c:spPr>
+          </c:dPt>
+          <c:dPt>
+            <c:idx val="1"/>
+            <c:invertIfNegative val="0"/>
+            <c:bubble3D val="0"/>
+            <c:spPr>
+              <a:solidFill>
+                <a:srgbClr val="EB6834"/>
+              </a:solidFill>
+              <a:effectLst/>
+            </c:spPr>
+          </c:dPt>
+          <c:dPt>
+            <c:idx val="2"/>
+            <c:invertIfNegative val="0"/>
+            <c:bubble3D val="0"/>
+            <c:spPr>
+              <a:solidFill>
+                <a:srgbClr val="1BAF7A"/>
+              </a:solidFill>
+              <a:effectLst/>
+            </c:spPr>
+          </c:dPt>
+          <c:dPt>
+            <c:idx val="3"/>
+            <c:invertIfNegative val="0"/>
+            <c:bubble3D val="0"/>
+            <c:spPr>
+              <a:solidFill>
+                <a:srgbClr val="EDA100"/>
+              </a:solidFill>
+              <a:effectLst/>
+            </c:spPr>
+          </c:dPt>
+          <c:cat>
+            <c:multiLvlStrRef>
+              <c:f>Sheet1!$A$2:$A$5</c:f>
+              <c:multiLvlStrCache>
+                <c:ptCount val="4"/>
+                <c:lvl>
+                  <c:pt idx="0">
+                    <c:v>固形</c:v>
+                  </c:pt>
+                  <c:pt idx="1">
+                    <c:v>スムージー</c:v>
+                  </c:pt>
+                  <c:pt idx="2">
+                    <c:v>おにぎり+スムージー</c:v>
+                  </c:pt>
+                  <c:pt idx="3">
+                    <c:v>おにぎり+糖質減</c:v>
+                  </c:pt>
+                </c:lvl>
+              </c:multiLvlStrCache>
+            </c:multiLvlStrRef>
+          </c:cat>
+          <c:val>
+            <c:numRef>
+              <c:f>Sheet1!$B$2:$B$5</c:f>
+              <c:numCache>
+                <c:formatCode>General</c:formatCode>
+                <c:ptCount val="4"/>
+                <c:pt idx="0">
+                  <c:v>3</c:v>
+                </c:pt>
+                <c:pt idx="1">
+                  <c:v>3.67</c:v>
+                </c:pt>
+                <c:pt idx="2">
+                  <c:v>3.83</c:v>
+                </c:pt>
+                <c:pt idx="3">
+                  <c:v>2.33</c:v>
+                </c:pt>
+              </c:numCache>
+            </c:numRef>
+          </c:val>
+        </c:ser>
+        <c:dLbls>
+          <c:numFmt formatCode="0.0" sourceLinked="0"/>
+          <c:txPr>
+            <a:bodyPr/>
+            <a:lstStyle/>
+            <a:p>
+              <a:pPr>
+                <a:defRPr b="0" i="0" strike="noStrike" sz="950" u="none">
+                  <a:solidFill>
+                    <a:srgbClr val="1A1A1A"/>
+                  </a:solidFill>
+                  <a:latin typeface="Arial"/>
+                </a:defRPr>
+              </a:pPr>
+            </a:p>
+          </c:txPr>
+          <c:showLegendKey val="0"/>
+          <c:showVal val="1"/>
+          <c:showCatName val="0"/>
+          <c:showSerName val="0"/>
+          <c:showPercent val="0"/>
+          <c:showBubbleSize val="0"/>
+          <c:showLeaderLines val="0"/>
+        </c:dLbls>
+        <c:gapWidth val="35"/>
+        <c:overlap val="0"/>
+        <c:axId val="2094734554"/>
+        <c:axId val="2094734552"/>
+        <c:axId val="2094734556"/>
+      </c:barChart>
+      <c:catAx>
+        <c:axId val="2094734554"/>
+        <c:scaling>
+          <c:orientation val="minMax"/>
+        </c:scaling>
+        <c:delete val="0"/>
+        <c:axPos val="b"/>
+        <c:numFmt formatCode="General" sourceLinked="1"/>
+        <c:majorTickMark val="out"/>
+        <c:minorTickMark val="none"/>
+        <c:tickLblPos val="low"/>
+        <c:spPr>
+          <a:ln w="12700" cap="flat">
+            <a:solidFill>
+              <a:srgbClr val="E3E1DB"/>
+            </a:solidFill>
+            <a:prstDash val="solid"/>
+            <a:round/>
+          </a:ln>
+        </c:spPr>
+        <c:txPr>
+          <a:bodyPr rot="1200000"/>
+          <a:lstStyle/>
+          <a:p>
+            <a:pPr>
+              <a:defRPr sz="850" b="0" i="0" u="none" strike="noStrike">
+                <a:solidFill>
+                  <a:srgbClr val="5C6570"/>
+                </a:solidFill>
+                <a:latin typeface="Arial"/>
+              </a:defRPr>
+            </a:pPr>
+            <a:endParaRPr lang="en-US"/>
+          </a:p>
+        </c:txPr>
+        <c:crossAx val="2094734552"/>
+        <c:crosses val="autoZero"/>
+        <c:auto val="1"/>
+        <c:lblAlgn val="ctr"/>
+        <c:noMultiLvlLbl val="1"/>
+      </c:catAx>
+      <c:valAx>
+        <c:axId val="2094734552"/>
+        <c:scaling>
+          <c:orientation val="minMax"/>
+        </c:scaling>
+        <c:delete val="1"/>
+        <c:axPos val="l"/>
+        <c:numFmt formatCode="General" sourceLinked="0"/>
+        <c:majorTickMark val="out"/>
+        <c:minorTickMark val="none"/>
+        <c:tickLblPos val="nextTo"/>
+        <c:spPr>
+          <a:ln w="12700" cap="flat">
+            <a:solidFill>
+              <a:srgbClr val="E3E1DB"/>
+            </a:solidFill>
+            <a:prstDash val="solid"/>
+            <a:round/>
+          </a:ln>
+        </c:spPr>
+        <c:txPr>
+          <a:bodyPr/>
+          <a:lstStyle/>
+          <a:p>
+            <a:pPr>
+              <a:defRPr sz="1200" b="0" i="0" u="none" strike="noStrike">
+                <a:solidFill>
+                  <a:srgbClr val="000000"/>
                 </a:solidFill>
                 <a:latin typeface="Arial"/>
               </a:defRPr>
@@ -3900,6 +5589,270 @@
             <a:fld id="{F7021451-1387-4CA6-816F-3879F97B5CBC}" type="slidenum">
               <a:rPr lang="en-US"/>
               <a:t>10</a:t>
+            </a:fld>
+            <a:endParaRPr lang="en-US"/>
+          </a:p>
+        </p:txBody>
+      </p:sp>
+    </p:spTree>
+    <p:extLst>
+      <p:ext uri="{BB962C8B-B14F-4D97-AF65-F5344CB8AC3E}">
+        <p14:creationId xmlns:p14="http://schemas.microsoft.com/office/powerpoint/2010/main" val="1024086991"/>
+      </p:ext>
+    </p:extLst>
+  </p:cSld>
+  <p:clrMapOvr>
+    <a:masterClrMapping/>
+  </p:clrMapOvr>
+</p:notes>
+</file>
+
+<file path=ppt/notesSlides/notesSlide11.xml><?xml version="1.0" encoding="utf-8"?>
+<p:notes xmlns:a="http://schemas.openxmlformats.org/drawingml/2006/main" xmlns:r="http://schemas.openxmlformats.org/officeDocument/2006/relationships" xmlns:p="http://schemas.openxmlformats.org/presentationml/2006/main">
+  <p:cSld>
+    <p:spTree>
+      <p:nvGrpSpPr>
+        <p:cNvPr id="1" name=""/>
+        <p:cNvGrpSpPr/>
+        <p:nvPr/>
+      </p:nvGrpSpPr>
+      <p:grpSpPr>
+        <a:xfrm>
+          <a:off x="0" y="0"/>
+          <a:ext cx="0" cy="0"/>
+          <a:chOff x="0" y="0"/>
+          <a:chExt cx="0" cy="0"/>
+        </a:xfrm>
+      </p:grpSpPr>
+      <p:sp>
+        <p:nvSpPr>
+          <p:cNvPr id="2" name="Slide Image Placeholder 1"/>
+          <p:cNvSpPr>
+            <a:spLocks noGrp="1" noRot="1" noChangeAspect="1"/>
+          </p:cNvSpPr>
+          <p:nvPr>
+            <p:ph type="sldImg"/>
+          </p:nvPr>
+        </p:nvSpPr>
+        <p:spPr/>
+      </p:sp>
+      <p:sp>
+        <p:nvSpPr>
+          <p:cNvPr id="3" name="Notes Placeholder 2"/>
+          <p:cNvSpPr>
+            <a:spLocks noGrp="1"/>
+          </p:cNvSpPr>
+          <p:nvPr>
+            <p:ph type="body" idx="1"/>
+          </p:nvPr>
+        </p:nvSpPr>
+        <p:spPr/>
+        <p:txBody>
+          <a:bodyPr/>
+          <a:lstStyle/>
+          <a:p>
+            <a:r>
+              <a:rPr lang="en-US" dirty="0"/>
+              <a:t/>
+            </a:r>
+            <a:endParaRPr lang="en-US" dirty="0"/>
+          </a:p>
+        </p:txBody>
+      </p:sp>
+      <p:sp>
+        <p:nvSpPr>
+          <p:cNvPr id="4" name="Slide Number Placeholder 3"/>
+          <p:cNvSpPr>
+            <a:spLocks noGrp="1"/>
+          </p:cNvSpPr>
+          <p:nvPr>
+            <p:ph type="sldNum" sz="quarter" idx="10"/>
+          </p:nvPr>
+        </p:nvSpPr>
+        <p:spPr/>
+        <p:txBody>
+          <a:bodyPr/>
+          <a:lstStyle/>
+          <a:p>
+            <a:fld id="{F7021451-1387-4CA6-816F-3879F97B5CBC}" type="slidenum">
+              <a:rPr lang="en-US"/>
+              <a:t>11</a:t>
+            </a:fld>
+            <a:endParaRPr lang="en-US"/>
+          </a:p>
+        </p:txBody>
+      </p:sp>
+    </p:spTree>
+    <p:extLst>
+      <p:ext uri="{BB962C8B-B14F-4D97-AF65-F5344CB8AC3E}">
+        <p14:creationId xmlns:p14="http://schemas.microsoft.com/office/powerpoint/2010/main" val="1024086991"/>
+      </p:ext>
+    </p:extLst>
+  </p:cSld>
+  <p:clrMapOvr>
+    <a:masterClrMapping/>
+  </p:clrMapOvr>
+</p:notes>
+</file>
+
+<file path=ppt/notesSlides/notesSlide12.xml><?xml version="1.0" encoding="utf-8"?>
+<p:notes xmlns:a="http://schemas.openxmlformats.org/drawingml/2006/main" xmlns:r="http://schemas.openxmlformats.org/officeDocument/2006/relationships" xmlns:p="http://schemas.openxmlformats.org/presentationml/2006/main">
+  <p:cSld>
+    <p:spTree>
+      <p:nvGrpSpPr>
+        <p:cNvPr id="1" name=""/>
+        <p:cNvGrpSpPr/>
+        <p:nvPr/>
+      </p:nvGrpSpPr>
+      <p:grpSpPr>
+        <a:xfrm>
+          <a:off x="0" y="0"/>
+          <a:ext cx="0" cy="0"/>
+          <a:chOff x="0" y="0"/>
+          <a:chExt cx="0" cy="0"/>
+        </a:xfrm>
+      </p:grpSpPr>
+      <p:sp>
+        <p:nvSpPr>
+          <p:cNvPr id="2" name="Slide Image Placeholder 1"/>
+          <p:cNvSpPr>
+            <a:spLocks noGrp="1" noRot="1" noChangeAspect="1"/>
+          </p:cNvSpPr>
+          <p:nvPr>
+            <p:ph type="sldImg"/>
+          </p:nvPr>
+        </p:nvSpPr>
+        <p:spPr/>
+      </p:sp>
+      <p:sp>
+        <p:nvSpPr>
+          <p:cNvPr id="3" name="Notes Placeholder 2"/>
+          <p:cNvSpPr>
+            <a:spLocks noGrp="1"/>
+          </p:cNvSpPr>
+          <p:nvPr>
+            <p:ph type="body" idx="1"/>
+          </p:nvPr>
+        </p:nvSpPr>
+        <p:spPr/>
+        <p:txBody>
+          <a:bodyPr/>
+          <a:lstStyle/>
+          <a:p>
+            <a:r>
+              <a:rPr lang="en-US" dirty="0"/>
+              <a:t/>
+            </a:r>
+            <a:endParaRPr lang="en-US" dirty="0"/>
+          </a:p>
+        </p:txBody>
+      </p:sp>
+      <p:sp>
+        <p:nvSpPr>
+          <p:cNvPr id="4" name="Slide Number Placeholder 3"/>
+          <p:cNvSpPr>
+            <a:spLocks noGrp="1"/>
+          </p:cNvSpPr>
+          <p:nvPr>
+            <p:ph type="sldNum" sz="quarter" idx="10"/>
+          </p:nvPr>
+        </p:nvSpPr>
+        <p:spPr/>
+        <p:txBody>
+          <a:bodyPr/>
+          <a:lstStyle/>
+          <a:p>
+            <a:fld id="{F7021451-1387-4CA6-816F-3879F97B5CBC}" type="slidenum">
+              <a:rPr lang="en-US"/>
+              <a:t>12</a:t>
+            </a:fld>
+            <a:endParaRPr lang="en-US"/>
+          </a:p>
+        </p:txBody>
+      </p:sp>
+    </p:spTree>
+    <p:extLst>
+      <p:ext uri="{BB962C8B-B14F-4D97-AF65-F5344CB8AC3E}">
+        <p14:creationId xmlns:p14="http://schemas.microsoft.com/office/powerpoint/2010/main" val="1024086991"/>
+      </p:ext>
+    </p:extLst>
+  </p:cSld>
+  <p:clrMapOvr>
+    <a:masterClrMapping/>
+  </p:clrMapOvr>
+</p:notes>
+</file>
+
+<file path=ppt/notesSlides/notesSlide13.xml><?xml version="1.0" encoding="utf-8"?>
+<p:notes xmlns:a="http://schemas.openxmlformats.org/drawingml/2006/main" xmlns:r="http://schemas.openxmlformats.org/officeDocument/2006/relationships" xmlns:p="http://schemas.openxmlformats.org/presentationml/2006/main">
+  <p:cSld>
+    <p:spTree>
+      <p:nvGrpSpPr>
+        <p:cNvPr id="1" name=""/>
+        <p:cNvGrpSpPr/>
+        <p:nvPr/>
+      </p:nvGrpSpPr>
+      <p:grpSpPr>
+        <a:xfrm>
+          <a:off x="0" y="0"/>
+          <a:ext cx="0" cy="0"/>
+          <a:chOff x="0" y="0"/>
+          <a:chExt cx="0" cy="0"/>
+        </a:xfrm>
+      </p:grpSpPr>
+      <p:sp>
+        <p:nvSpPr>
+          <p:cNvPr id="2" name="Slide Image Placeholder 1"/>
+          <p:cNvSpPr>
+            <a:spLocks noGrp="1" noRot="1" noChangeAspect="1"/>
+          </p:cNvSpPr>
+          <p:nvPr>
+            <p:ph type="sldImg"/>
+          </p:nvPr>
+        </p:nvSpPr>
+        <p:spPr/>
+      </p:sp>
+      <p:sp>
+        <p:nvSpPr>
+          <p:cNvPr id="3" name="Notes Placeholder 2"/>
+          <p:cNvSpPr>
+            <a:spLocks noGrp="1"/>
+          </p:cNvSpPr>
+          <p:nvPr>
+            <p:ph type="body" idx="1"/>
+          </p:nvPr>
+        </p:nvSpPr>
+        <p:spPr/>
+        <p:txBody>
+          <a:bodyPr/>
+          <a:lstStyle/>
+          <a:p>
+            <a:r>
+              <a:rPr lang="en-US" dirty="0"/>
+              <a:t/>
+            </a:r>
+            <a:endParaRPr lang="en-US" dirty="0"/>
+          </a:p>
+        </p:txBody>
+      </p:sp>
+      <p:sp>
+        <p:nvSpPr>
+          <p:cNvPr id="4" name="Slide Number Placeholder 3"/>
+          <p:cNvSpPr>
+            <a:spLocks noGrp="1"/>
+          </p:cNvSpPr>
+          <p:nvPr>
+            <p:ph type="sldNum" sz="quarter" idx="10"/>
+          </p:nvPr>
+        </p:nvSpPr>
+        <p:spPr/>
+        <p:txBody>
+          <a:bodyPr/>
+          <a:lstStyle/>
+          <a:p>
+            <a:fld id="{F7021451-1387-4CA6-816F-3879F97B5CBC}" type="slidenum">
+              <a:rPr lang="en-US"/>
+              <a:t>13</a:t>
             </a:fld>
             <a:endParaRPr lang="en-US"/>
           </a:p>
@@ -5439,6 +7392,2064 @@
     <p:bg>
       <p:bgPr>
         <a:solidFill>
+          <a:srgbClr val="FFFFFF"/>
+        </a:solidFill>
+      </p:bgPr>
+    </p:bg>
+    <p:spTree>
+      <p:nvGrpSpPr>
+        <p:cNvPr id="1" name=""/>
+        <p:cNvGrpSpPr/>
+        <p:nvPr/>
+      </p:nvGrpSpPr>
+      <p:grpSpPr>
+        <a:xfrm>
+          <a:off x="0" y="0"/>
+          <a:ext cx="0" cy="0"/>
+          <a:chOff x="0" y="0"/>
+          <a:chExt cx="0" cy="0"/>
+        </a:xfrm>
+      </p:grpSpPr>
+      <p:sp>
+        <p:nvSpPr>
+          <p:cNvPr id="2" name="Text 0"/>
+          <p:cNvSpPr txBox="1"/>
+          <p:nvPr/>
+        </p:nvSpPr>
+        <p:spPr>
+          <a:xfrm>
+            <a:off x="548640" y="457200"/>
+            <a:ext cx="11091672" cy="365760"/>
+          </a:xfrm>
+          <a:prstGeom prst="rect">
+            <a:avLst/>
+          </a:prstGeom>
+          <a:noFill/>
+          <a:ln/>
+        </p:spPr>
+        <p:txBody>
+          <a:bodyPr wrap="square" rtlCol="0" anchor="ctr"/>
+          <a:lstStyle/>
+          <a:p>
+            <a:pPr indent="0" marL="0">
+              <a:buNone/>
+            </a:pPr>
+            <a:r>
+              <a:rPr lang="en-US" sz="1300" b="1" spc="100" kern="0" dirty="0">
+                <a:solidFill>
+                  <a:srgbClr val="1C7293"/>
+                </a:solidFill>
+                <a:latin typeface="Calibri" pitchFamily="34" charset="0"/>
+                <a:ea typeface="Calibri" pitchFamily="34" charset="-122"/>
+                <a:cs typeface="Calibri" pitchFamily="34" charset="-120"/>
+              </a:rPr>
+              <a:t>CONDITION</a:t>
+            </a:r>
+            <a:endParaRPr lang="en-US" sz="1300" dirty="0"/>
+          </a:p>
+        </p:txBody>
+      </p:sp>
+      <p:sp>
+        <p:nvSpPr>
+          <p:cNvPr id="3" name="Text 1"/>
+          <p:cNvSpPr txBox="1"/>
+          <p:nvPr/>
+        </p:nvSpPr>
+        <p:spPr>
+          <a:xfrm>
+            <a:off x="548640" y="786384"/>
+            <a:ext cx="11091672" cy="640080"/>
+          </a:xfrm>
+          <a:prstGeom prst="rect">
+            <a:avLst/>
+          </a:prstGeom>
+          <a:noFill/>
+          <a:ln/>
+        </p:spPr>
+        <p:txBody>
+          <a:bodyPr wrap="square" rtlCol="0" anchor="ctr"/>
+          <a:lstStyle/>
+          <a:p>
+            <a:pPr indent="0" marL="0">
+              <a:buNone/>
+            </a:pPr>
+            <a:r>
+              <a:rPr lang="en-US" sz="2800" b="1" dirty="0">
+                <a:solidFill>
+                  <a:srgbClr val="21295C"/>
+                </a:solidFill>
+                <a:latin typeface="Cambria" pitchFamily="34" charset="0"/>
+                <a:ea typeface="Cambria" pitchFamily="34" charset="-122"/>
+                <a:cs typeface="Cambria" pitchFamily="34" charset="-120"/>
+              </a:rPr>
+              <a:t>自覚コンディション（4条件比較）</a:t>
+            </a:r>
+            <a:endParaRPr lang="en-US" sz="2800" dirty="0"/>
+          </a:p>
+        </p:txBody>
+      </p:sp>
+      <p:sp>
+        <p:nvSpPr>
+          <p:cNvPr id="4" name="Text 2"/>
+          <p:cNvSpPr txBox="1"/>
+          <p:nvPr/>
+        </p:nvSpPr>
+        <p:spPr>
+          <a:xfrm>
+            <a:off x="548640" y="1600200"/>
+            <a:ext cx="6309360" cy="256032"/>
+          </a:xfrm>
+          <a:prstGeom prst="rect">
+            <a:avLst/>
+          </a:prstGeom>
+          <a:noFill/>
+          <a:ln/>
+        </p:spPr>
+        <p:txBody>
+          <a:bodyPr wrap="square" lIns="0" tIns="0" rIns="0" bIns="0" rtlCol="0" anchor="ctr"/>
+          <a:lstStyle/>
+          <a:p>
+            <a:pPr indent="0" marL="0">
+              <a:buNone/>
+            </a:pPr>
+            <a:r>
+              <a:rPr lang="en-US" sz="1250" b="1" dirty="0">
+                <a:solidFill>
+                  <a:srgbClr val="21295C"/>
+                </a:solidFill>
+                <a:latin typeface="Calibri" pitchFamily="34" charset="0"/>
+                <a:ea typeface="Calibri" pitchFamily="34" charset="-122"/>
+                <a:cs typeface="Calibri" pitchFamily="34" charset="-120"/>
+              </a:rPr>
+              <a:t>満腹感の推移 (0=空腹〜10=満腹)</a:t>
+            </a:r>
+            <a:endParaRPr lang="en-US" sz="1250" dirty="0"/>
+          </a:p>
+        </p:txBody>
+      </p:sp>
+      <p:graphicFrame>
+        <p:nvGraphicFramePr>
+          <p:cNvPr id="5" name="Chart 0" descr=""/>
+          <p:cNvGraphicFramePr/>
+          <p:nvPr/>
+        </p:nvGraphicFramePr>
+        <p:xfrm>
+          <a:off x="548640" y="1874520"/>
+          <a:ext cx="6309360" cy="1691640"/>
+        </p:xfrm>
+        <a:graphic xmlns:a="http://schemas.openxmlformats.org/drawingml/2006/main">
+          <a:graphicData uri="http://schemas.openxmlformats.org/drawingml/2006/chart">
+            <c:chart xmlns:c="http://schemas.openxmlformats.org/drawingml/2006/chart" r:id="rId1"/>
+          </a:graphicData>
+        </a:graphic>
+      </p:graphicFrame>
+      <p:sp>
+        <p:nvSpPr>
+          <p:cNvPr id="6" name="Text 3"/>
+          <p:cNvSpPr txBox="1"/>
+          <p:nvPr/>
+        </p:nvSpPr>
+        <p:spPr>
+          <a:xfrm>
+            <a:off x="548640" y="3703320"/>
+            <a:ext cx="6309360" cy="256032"/>
+          </a:xfrm>
+          <a:prstGeom prst="rect">
+            <a:avLst/>
+          </a:prstGeom>
+          <a:noFill/>
+          <a:ln/>
+        </p:spPr>
+        <p:txBody>
+          <a:bodyPr wrap="square" lIns="0" tIns="0" rIns="0" bIns="0" rtlCol="0" anchor="ctr"/>
+          <a:lstStyle/>
+          <a:p>
+            <a:pPr indent="0" marL="0">
+              <a:buNone/>
+            </a:pPr>
+            <a:r>
+              <a:rPr lang="en-US" sz="1250" b="1" dirty="0">
+                <a:solidFill>
+                  <a:srgbClr val="21295C"/>
+                </a:solidFill>
+                <a:latin typeface="Calibri" pitchFamily="34" charset="0"/>
+                <a:ea typeface="Calibri" pitchFamily="34" charset="-122"/>
+                <a:cs typeface="Calibri" pitchFamily="34" charset="-120"/>
+              </a:rPr>
+              <a:t>食欲(摂食可能感)の推移 (0=食べられない〜10=まだ食べられる)</a:t>
+            </a:r>
+            <a:endParaRPr lang="en-US" sz="1250" dirty="0"/>
+          </a:p>
+        </p:txBody>
+      </p:sp>
+      <p:graphicFrame>
+        <p:nvGraphicFramePr>
+          <p:cNvPr id="7" name="Chart 1" descr=""/>
+          <p:cNvGraphicFramePr/>
+          <p:nvPr/>
+        </p:nvGraphicFramePr>
+        <p:xfrm>
+          <a:off x="548640" y="3977640"/>
+          <a:ext cx="6309360" cy="1691640"/>
+        </p:xfrm>
+        <a:graphic xmlns:a="http://schemas.openxmlformats.org/drawingml/2006/main">
+          <a:graphicData uri="http://schemas.openxmlformats.org/drawingml/2006/chart">
+            <c:chart xmlns:c="http://schemas.openxmlformats.org/drawingml/2006/chart" r:id="rId2"/>
+          </a:graphicData>
+        </a:graphic>
+      </p:graphicFrame>
+      <p:sp>
+        <p:nvSpPr>
+          <p:cNvPr id="8" name="Shape 4"/>
+          <p:cNvSpPr/>
+          <p:nvPr/>
+        </p:nvSpPr>
+        <p:spPr>
+          <a:xfrm>
+            <a:off x="548640" y="5870448"/>
+            <a:ext cx="146304" cy="118872"/>
+          </a:xfrm>
+          <a:prstGeom prst="rect">
+            <a:avLst/>
+          </a:prstGeom>
+          <a:solidFill>
+            <a:srgbClr val="2A78D6"/>
+          </a:solidFill>
+          <a:ln/>
+        </p:spPr>
+      </p:sp>
+      <p:sp>
+        <p:nvSpPr>
+          <p:cNvPr id="9" name="Text 5"/>
+          <p:cNvSpPr txBox="1"/>
+          <p:nvPr/>
+        </p:nvSpPr>
+        <p:spPr>
+          <a:xfrm>
+            <a:off x="749808" y="5760720"/>
+            <a:ext cx="1554480" cy="274320"/>
+          </a:xfrm>
+          <a:prstGeom prst="rect">
+            <a:avLst/>
+          </a:prstGeom>
+          <a:noFill/>
+          <a:ln/>
+        </p:spPr>
+        <p:txBody>
+          <a:bodyPr wrap="square" lIns="0" tIns="0" rIns="0" bIns="0" rtlCol="0" anchor="ctr"/>
+          <a:lstStyle/>
+          <a:p>
+            <a:pPr indent="0" marL="0">
+              <a:buNone/>
+            </a:pPr>
+            <a:r>
+              <a:rPr lang="en-US" sz="950" dirty="0">
+                <a:solidFill>
+                  <a:srgbClr val="5C6570"/>
+                </a:solidFill>
+                <a:latin typeface="Calibri" pitchFamily="34" charset="0"/>
+                <a:ea typeface="Calibri" pitchFamily="34" charset="-122"/>
+                <a:cs typeface="Calibri" pitchFamily="34" charset="-120"/>
+              </a:rPr>
+              <a:t>固形</a:t>
+            </a:r>
+            <a:endParaRPr lang="en-US" sz="950" dirty="0"/>
+          </a:p>
+        </p:txBody>
+      </p:sp>
+      <p:sp>
+        <p:nvSpPr>
+          <p:cNvPr id="10" name="Shape 6"/>
+          <p:cNvSpPr/>
+          <p:nvPr/>
+        </p:nvSpPr>
+        <p:spPr>
+          <a:xfrm>
+            <a:off x="2176272" y="5870448"/>
+            <a:ext cx="146304" cy="118872"/>
+          </a:xfrm>
+          <a:prstGeom prst="rect">
+            <a:avLst/>
+          </a:prstGeom>
+          <a:solidFill>
+            <a:srgbClr val="EB6834"/>
+          </a:solidFill>
+          <a:ln/>
+        </p:spPr>
+      </p:sp>
+      <p:sp>
+        <p:nvSpPr>
+          <p:cNvPr id="11" name="Text 7"/>
+          <p:cNvSpPr txBox="1"/>
+          <p:nvPr/>
+        </p:nvSpPr>
+        <p:spPr>
+          <a:xfrm>
+            <a:off x="2377440" y="5760720"/>
+            <a:ext cx="1554480" cy="274320"/>
+          </a:xfrm>
+          <a:prstGeom prst="rect">
+            <a:avLst/>
+          </a:prstGeom>
+          <a:noFill/>
+          <a:ln/>
+        </p:spPr>
+        <p:txBody>
+          <a:bodyPr wrap="square" lIns="0" tIns="0" rIns="0" bIns="0" rtlCol="0" anchor="ctr"/>
+          <a:lstStyle/>
+          <a:p>
+            <a:pPr indent="0" marL="0">
+              <a:buNone/>
+            </a:pPr>
+            <a:r>
+              <a:rPr lang="en-US" sz="950" dirty="0">
+                <a:solidFill>
+                  <a:srgbClr val="5C6570"/>
+                </a:solidFill>
+                <a:latin typeface="Calibri" pitchFamily="34" charset="0"/>
+                <a:ea typeface="Calibri" pitchFamily="34" charset="-122"/>
+                <a:cs typeface="Calibri" pitchFamily="34" charset="-120"/>
+              </a:rPr>
+              <a:t>スムージー</a:t>
+            </a:r>
+            <a:endParaRPr lang="en-US" sz="950" dirty="0"/>
+          </a:p>
+        </p:txBody>
+      </p:sp>
+      <p:sp>
+        <p:nvSpPr>
+          <p:cNvPr id="12" name="Shape 8"/>
+          <p:cNvSpPr/>
+          <p:nvPr/>
+        </p:nvSpPr>
+        <p:spPr>
+          <a:xfrm>
+            <a:off x="3803904" y="5870448"/>
+            <a:ext cx="146304" cy="118872"/>
+          </a:xfrm>
+          <a:prstGeom prst="rect">
+            <a:avLst/>
+          </a:prstGeom>
+          <a:solidFill>
+            <a:srgbClr val="1BAF7A"/>
+          </a:solidFill>
+          <a:ln/>
+        </p:spPr>
+      </p:sp>
+      <p:sp>
+        <p:nvSpPr>
+          <p:cNvPr id="13" name="Text 9"/>
+          <p:cNvSpPr txBox="1"/>
+          <p:nvPr/>
+        </p:nvSpPr>
+        <p:spPr>
+          <a:xfrm>
+            <a:off x="4005072" y="5760720"/>
+            <a:ext cx="1554480" cy="274320"/>
+          </a:xfrm>
+          <a:prstGeom prst="rect">
+            <a:avLst/>
+          </a:prstGeom>
+          <a:noFill/>
+          <a:ln/>
+        </p:spPr>
+        <p:txBody>
+          <a:bodyPr wrap="square" lIns="0" tIns="0" rIns="0" bIns="0" rtlCol="0" anchor="ctr"/>
+          <a:lstStyle/>
+          <a:p>
+            <a:pPr indent="0" marL="0">
+              <a:buNone/>
+            </a:pPr>
+            <a:r>
+              <a:rPr lang="en-US" sz="950" dirty="0">
+                <a:solidFill>
+                  <a:srgbClr val="5C6570"/>
+                </a:solidFill>
+                <a:latin typeface="Calibri" pitchFamily="34" charset="0"/>
+                <a:ea typeface="Calibri" pitchFamily="34" charset="-122"/>
+                <a:cs typeface="Calibri" pitchFamily="34" charset="-120"/>
+              </a:rPr>
+              <a:t>おにぎり+スムージー</a:t>
+            </a:r>
+            <a:endParaRPr lang="en-US" sz="950" dirty="0"/>
+          </a:p>
+        </p:txBody>
+      </p:sp>
+      <p:sp>
+        <p:nvSpPr>
+          <p:cNvPr id="14" name="Shape 10"/>
+          <p:cNvSpPr/>
+          <p:nvPr/>
+        </p:nvSpPr>
+        <p:spPr>
+          <a:xfrm>
+            <a:off x="5431536" y="5870448"/>
+            <a:ext cx="146304" cy="118872"/>
+          </a:xfrm>
+          <a:prstGeom prst="rect">
+            <a:avLst/>
+          </a:prstGeom>
+          <a:solidFill>
+            <a:srgbClr val="EDA100"/>
+          </a:solidFill>
+          <a:ln/>
+        </p:spPr>
+      </p:sp>
+      <p:sp>
+        <p:nvSpPr>
+          <p:cNvPr id="15" name="Text 11"/>
+          <p:cNvSpPr txBox="1"/>
+          <p:nvPr/>
+        </p:nvSpPr>
+        <p:spPr>
+          <a:xfrm>
+            <a:off x="5632704" y="5760720"/>
+            <a:ext cx="1554480" cy="274320"/>
+          </a:xfrm>
+          <a:prstGeom prst="rect">
+            <a:avLst/>
+          </a:prstGeom>
+          <a:noFill/>
+          <a:ln/>
+        </p:spPr>
+        <p:txBody>
+          <a:bodyPr wrap="square" lIns="0" tIns="0" rIns="0" bIns="0" rtlCol="0" anchor="ctr"/>
+          <a:lstStyle/>
+          <a:p>
+            <a:pPr indent="0" marL="0">
+              <a:buNone/>
+            </a:pPr>
+            <a:r>
+              <a:rPr lang="en-US" sz="950" dirty="0">
+                <a:solidFill>
+                  <a:srgbClr val="5C6570"/>
+                </a:solidFill>
+                <a:latin typeface="Calibri" pitchFamily="34" charset="0"/>
+                <a:ea typeface="Calibri" pitchFamily="34" charset="-122"/>
+                <a:cs typeface="Calibri" pitchFamily="34" charset="-120"/>
+              </a:rPr>
+              <a:t>おにぎり+糖質減</a:t>
+            </a:r>
+            <a:endParaRPr lang="en-US" sz="950" dirty="0"/>
+          </a:p>
+        </p:txBody>
+      </p:sp>
+      <p:sp>
+        <p:nvSpPr>
+          <p:cNvPr id="16" name="Shape 12"/>
+          <p:cNvSpPr/>
+          <p:nvPr/>
+        </p:nvSpPr>
+        <p:spPr>
+          <a:xfrm>
+            <a:off x="7635240" y="1600200"/>
+            <a:ext cx="4005072" cy="4434840"/>
+          </a:xfrm>
+          <a:prstGeom prst="roundRect">
+            <a:avLst>
+              <a:gd name="adj" fmla="val 2283"/>
+            </a:avLst>
+          </a:prstGeom>
+          <a:solidFill>
+            <a:srgbClr val="EAF7F0"/>
+          </a:solidFill>
+          <a:ln/>
+        </p:spPr>
+      </p:sp>
+      <p:sp>
+        <p:nvSpPr>
+          <p:cNvPr id="17" name="Text 13"/>
+          <p:cNvSpPr txBox="1"/>
+          <p:nvPr/>
+        </p:nvSpPr>
+        <p:spPr>
+          <a:xfrm>
+            <a:off x="7909560" y="1828800"/>
+            <a:ext cx="3566160" cy="365760"/>
+          </a:xfrm>
+          <a:prstGeom prst="rect">
+            <a:avLst/>
+          </a:prstGeom>
+          <a:noFill/>
+          <a:ln/>
+        </p:spPr>
+        <p:txBody>
+          <a:bodyPr wrap="square" lIns="0" tIns="0" rIns="0" bIns="0" rtlCol="0" anchor="ctr"/>
+          <a:lstStyle/>
+          <a:p>
+            <a:pPr indent="0" marL="0">
+              <a:buNone/>
+            </a:pPr>
+            <a:r>
+              <a:rPr lang="en-US" sz="1350" b="1" dirty="0">
+                <a:solidFill>
+                  <a:srgbClr val="0F5C3D"/>
+                </a:solidFill>
+                <a:latin typeface="Calibri" pitchFamily="34" charset="0"/>
+                <a:ea typeface="Calibri" pitchFamily="34" charset="-122"/>
+                <a:cs typeface="Calibri" pitchFamily="34" charset="-120"/>
+              </a:rPr>
+              <a:t>✓ 消化器症状は4条件とも良好</a:t>
+            </a:r>
+            <a:endParaRPr lang="en-US" sz="1350" dirty="0"/>
+          </a:p>
+        </p:txBody>
+      </p:sp>
+      <p:sp>
+        <p:nvSpPr>
+          <p:cNvPr id="18" name="Text 14"/>
+          <p:cNvSpPr txBox="1"/>
+          <p:nvPr/>
+        </p:nvSpPr>
+        <p:spPr>
+          <a:xfrm>
+            <a:off x="7909560" y="2331720"/>
+            <a:ext cx="3520440" cy="868680"/>
+          </a:xfrm>
+          <a:prstGeom prst="rect">
+            <a:avLst/>
+          </a:prstGeom>
+          <a:noFill/>
+          <a:ln/>
+        </p:spPr>
+        <p:txBody>
+          <a:bodyPr wrap="square" lIns="0" tIns="0" rIns="0" bIns="0" rtlCol="0" anchor="ctr"/>
+          <a:lstStyle/>
+          <a:p>
+            <a:pPr indent="0" marL="0">
+              <a:buNone/>
+            </a:pPr>
+            <a:r>
+              <a:rPr lang="en-US" sz="1100" dirty="0">
+                <a:solidFill>
+                  <a:srgbClr val="1A1A1A"/>
+                </a:solidFill>
+                <a:latin typeface="Calibri" pitchFamily="34" charset="0"/>
+                <a:ea typeface="Calibri" pitchFamily="34" charset="-122"/>
+                <a:cs typeface="Calibri" pitchFamily="34" charset="-120"/>
+              </a:rPr>
+              <a:t>•  頭痛：4条件すべて全測定点で最小値(1)、変化なし</a:t>
+            </a:r>
+            <a:endParaRPr lang="en-US" sz="1100" dirty="0"/>
+          </a:p>
+        </p:txBody>
+      </p:sp>
+      <p:sp>
+        <p:nvSpPr>
+          <p:cNvPr id="19" name="Text 15"/>
+          <p:cNvSpPr txBox="1"/>
+          <p:nvPr/>
+        </p:nvSpPr>
+        <p:spPr>
+          <a:xfrm>
+            <a:off x="7909560" y="3264408"/>
+            <a:ext cx="3520440" cy="868680"/>
+          </a:xfrm>
+          <a:prstGeom prst="rect">
+            <a:avLst/>
+          </a:prstGeom>
+          <a:noFill/>
+          <a:ln/>
+        </p:spPr>
+        <p:txBody>
+          <a:bodyPr wrap="square" lIns="0" tIns="0" rIns="0" bIns="0" rtlCol="0" anchor="ctr"/>
+          <a:lstStyle/>
+          <a:p>
+            <a:pPr indent="0" marL="0">
+              <a:buNone/>
+            </a:pPr>
+            <a:r>
+              <a:rPr lang="en-US" sz="1100" dirty="0">
+                <a:solidFill>
+                  <a:srgbClr val="1A1A1A"/>
+                </a:solidFill>
+                <a:latin typeface="Calibri" pitchFamily="34" charset="0"/>
+                <a:ea typeface="Calibri" pitchFamily="34" charset="-122"/>
+                <a:cs typeface="Calibri" pitchFamily="34" charset="-120"/>
+              </a:rPr>
+              <a:t>•  吐き気：4条件すべてほぼ1（おにぎり+スムージーのDAY10 9:30のみ一時的に2）</a:t>
+            </a:r>
+            <a:endParaRPr lang="en-US" sz="1100" dirty="0"/>
+          </a:p>
+        </p:txBody>
+      </p:sp>
+      <p:sp>
+        <p:nvSpPr>
+          <p:cNvPr id="20" name="Text 16"/>
+          <p:cNvSpPr txBox="1"/>
+          <p:nvPr/>
+        </p:nvSpPr>
+        <p:spPr>
+          <a:xfrm>
+            <a:off x="7909560" y="4197096"/>
+            <a:ext cx="3520440" cy="868680"/>
+          </a:xfrm>
+          <a:prstGeom prst="rect">
+            <a:avLst/>
+          </a:prstGeom>
+          <a:noFill/>
+          <a:ln/>
+        </p:spPr>
+        <p:txBody>
+          <a:bodyPr wrap="square" lIns="0" tIns="0" rIns="0" bIns="0" rtlCol="0" anchor="ctr"/>
+          <a:lstStyle/>
+          <a:p>
+            <a:pPr indent="0" marL="0">
+              <a:buNone/>
+            </a:pPr>
+            <a:r>
+              <a:rPr lang="en-US" sz="1100" dirty="0">
+                <a:solidFill>
+                  <a:srgbClr val="1A1A1A"/>
+                </a:solidFill>
+                <a:latin typeface="Calibri" pitchFamily="34" charset="0"/>
+                <a:ea typeface="Calibri" pitchFamily="34" charset="-122"/>
+                <a:cs typeface="Calibri" pitchFamily="34" charset="-120"/>
+              </a:rPr>
+              <a:t>•  血糖値が高めに推移するおにぎり同時摂取条件でも、消化器症状は悪化していない</a:t>
+            </a:r>
+            <a:endParaRPr lang="en-US" sz="1100" dirty="0"/>
+          </a:p>
+        </p:txBody>
+      </p:sp>
+      <p:sp>
+        <p:nvSpPr>
+          <p:cNvPr id="21" name="Text 17"/>
+          <p:cNvSpPr txBox="1"/>
+          <p:nvPr/>
+        </p:nvSpPr>
+        <p:spPr>
+          <a:xfrm>
+            <a:off x="7909560" y="5129784"/>
+            <a:ext cx="3520440" cy="868680"/>
+          </a:xfrm>
+          <a:prstGeom prst="rect">
+            <a:avLst/>
+          </a:prstGeom>
+          <a:noFill/>
+          <a:ln/>
+        </p:spPr>
+        <p:txBody>
+          <a:bodyPr wrap="square" lIns="0" tIns="0" rIns="0" bIns="0" rtlCol="0" anchor="ctr"/>
+          <a:lstStyle/>
+          <a:p>
+            <a:pPr indent="0" marL="0">
+              <a:buNone/>
+            </a:pPr>
+            <a:r>
+              <a:rPr lang="en-US" sz="1100" dirty="0">
+                <a:solidFill>
+                  <a:srgbClr val="1A1A1A"/>
+                </a:solidFill>
+                <a:latin typeface="Calibri" pitchFamily="34" charset="0"/>
+                <a:ea typeface="Calibri" pitchFamily="34" charset="-122"/>
+                <a:cs typeface="Calibri" pitchFamily="34" charset="-120"/>
+              </a:rPr>
+              <a:t>•  満腹感・食欲の差は「おにぎりを同時に食べたか」による食事量の違いを反映しており、副食の形態（固形/液状）そのものの効果ではない</a:t>
+            </a:r>
+            <a:endParaRPr lang="en-US" sz="1100" dirty="0"/>
+          </a:p>
+        </p:txBody>
+      </p:sp>
+    </p:spTree>
+  </p:cSld>
+  <p:clrMapOvr>
+    <a:masterClrMapping/>
+  </p:clrMapOvr>
+</p:sld>
+</file>
+
+<file path=ppt/slides/slide11.xml><?xml version="1.0" encoding="utf-8"?>
+<p:sld xmlns:a="http://schemas.openxmlformats.org/drawingml/2006/main" xmlns:r="http://schemas.openxmlformats.org/officeDocument/2006/relationships" xmlns:p="http://schemas.openxmlformats.org/presentationml/2006/main">
+  <p:cSld name="Slide 11">
+    <p:bg>
+      <p:bgPr>
+        <a:solidFill>
+          <a:srgbClr val="FFFFFF"/>
+        </a:solidFill>
+      </p:bgPr>
+    </p:bg>
+    <p:spTree>
+      <p:nvGrpSpPr>
+        <p:cNvPr id="1" name=""/>
+        <p:cNvGrpSpPr/>
+        <p:nvPr/>
+      </p:nvGrpSpPr>
+      <p:grpSpPr>
+        <a:xfrm>
+          <a:off x="0" y="0"/>
+          <a:ext cx="0" cy="0"/>
+          <a:chOff x="0" y="0"/>
+          <a:chExt cx="0" cy="0"/>
+        </a:xfrm>
+      </p:grpSpPr>
+      <p:sp>
+        <p:nvSpPr>
+          <p:cNvPr id="2" name="Text 0"/>
+          <p:cNvSpPr txBox="1"/>
+          <p:nvPr/>
+        </p:nvSpPr>
+        <p:spPr>
+          <a:xfrm>
+            <a:off x="548640" y="457200"/>
+            <a:ext cx="11091672" cy="365760"/>
+          </a:xfrm>
+          <a:prstGeom prst="rect">
+            <a:avLst/>
+          </a:prstGeom>
+          <a:noFill/>
+          <a:ln/>
+        </p:spPr>
+        <p:txBody>
+          <a:bodyPr wrap="square" rtlCol="0" anchor="ctr"/>
+          <a:lstStyle/>
+          <a:p>
+            <a:pPr indent="0" marL="0">
+              <a:buNone/>
+            </a:pPr>
+            <a:r>
+              <a:rPr lang="en-US" sz="1300" b="1" spc="100" kern="0" dirty="0">
+                <a:solidFill>
+                  <a:srgbClr val="1C7293"/>
+                </a:solidFill>
+                <a:latin typeface="Calibri" pitchFamily="34" charset="0"/>
+                <a:ea typeface="Calibri" pitchFamily="34" charset="-122"/>
+                <a:cs typeface="Calibri" pitchFamily="34" charset="-120"/>
+              </a:rPr>
+              <a:t>PERFORMANCE</a:t>
+            </a:r>
+            <a:endParaRPr lang="en-US" sz="1300" dirty="0"/>
+          </a:p>
+        </p:txBody>
+      </p:sp>
+      <p:sp>
+        <p:nvSpPr>
+          <p:cNvPr id="3" name="Text 1"/>
+          <p:cNvSpPr txBox="1"/>
+          <p:nvPr/>
+        </p:nvSpPr>
+        <p:spPr>
+          <a:xfrm>
+            <a:off x="548640" y="786384"/>
+            <a:ext cx="11091672" cy="640080"/>
+          </a:xfrm>
+          <a:prstGeom prst="rect">
+            <a:avLst/>
+          </a:prstGeom>
+          <a:noFill/>
+          <a:ln/>
+        </p:spPr>
+        <p:txBody>
+          <a:bodyPr wrap="square" rtlCol="0" anchor="ctr"/>
+          <a:lstStyle/>
+          <a:p>
+            <a:pPr indent="0" marL="0">
+              <a:buNone/>
+            </a:pPr>
+            <a:r>
+              <a:rPr lang="en-US" sz="2800" b="1" dirty="0">
+                <a:solidFill>
+                  <a:srgbClr val="21295C"/>
+                </a:solidFill>
+                <a:latin typeface="Cambria" pitchFamily="34" charset="0"/>
+                <a:ea typeface="Cambria" pitchFamily="34" charset="-122"/>
+                <a:cs typeface="Cambria" pitchFamily="34" charset="-120"/>
+              </a:rPr>
+              <a:t>毎晩のコンディション・トレーニング指標（4条件比較）</a:t>
+            </a:r>
+            <a:endParaRPr lang="en-US" sz="2800" dirty="0"/>
+          </a:p>
+        </p:txBody>
+      </p:sp>
+      <p:sp>
+        <p:nvSpPr>
+          <p:cNvPr id="4" name="Text 2"/>
+          <p:cNvSpPr txBox="1"/>
+          <p:nvPr/>
+        </p:nvSpPr>
+        <p:spPr>
+          <a:xfrm>
+            <a:off x="548640" y="1572768"/>
+            <a:ext cx="3429000" cy="256032"/>
+          </a:xfrm>
+          <a:prstGeom prst="rect">
+            <a:avLst/>
+          </a:prstGeom>
+          <a:noFill/>
+          <a:ln/>
+        </p:spPr>
+        <p:txBody>
+          <a:bodyPr wrap="square" lIns="0" tIns="0" rIns="0" bIns="0" rtlCol="0" anchor="ctr"/>
+          <a:lstStyle/>
+          <a:p>
+            <a:pPr indent="0" marL="0">
+              <a:buNone/>
+            </a:pPr>
+            <a:r>
+              <a:rPr lang="en-US" sz="1200" b="1" dirty="0">
+                <a:solidFill>
+                  <a:srgbClr val="21295C"/>
+                </a:solidFill>
+                <a:latin typeface="Calibri" pitchFamily="34" charset="0"/>
+                <a:ea typeface="Calibri" pitchFamily="34" charset="-122"/>
+                <a:cs typeface="Calibri" pitchFamily="34" charset="-120"/>
+              </a:rPr>
+              <a:t>起床時コンディション</a:t>
+            </a:r>
+            <a:endParaRPr lang="en-US" sz="1200" dirty="0"/>
+          </a:p>
+        </p:txBody>
+      </p:sp>
+      <p:sp>
+        <p:nvSpPr>
+          <p:cNvPr id="5" name="Text 3"/>
+          <p:cNvSpPr txBox="1"/>
+          <p:nvPr/>
+        </p:nvSpPr>
+        <p:spPr>
+          <a:xfrm>
+            <a:off x="548640" y="1819656"/>
+            <a:ext cx="3429000" cy="219456"/>
+          </a:xfrm>
+          <a:prstGeom prst="rect">
+            <a:avLst/>
+          </a:prstGeom>
+          <a:noFill/>
+          <a:ln/>
+        </p:spPr>
+        <p:txBody>
+          <a:bodyPr wrap="square" lIns="0" tIns="0" rIns="0" bIns="0" rtlCol="0" anchor="ctr"/>
+          <a:lstStyle/>
+          <a:p>
+            <a:pPr indent="0" marL="0">
+              <a:buNone/>
+            </a:pPr>
+            <a:r>
+              <a:rPr lang="en-US" sz="950" dirty="0">
+                <a:solidFill>
+                  <a:srgbClr val="5C6570"/>
+                </a:solidFill>
+                <a:latin typeface="Calibri" pitchFamily="34" charset="0"/>
+                <a:ea typeface="Calibri" pitchFamily="34" charset="-122"/>
+                <a:cs typeface="Calibri" pitchFamily="34" charset="-120"/>
+              </a:rPr>
+              <a:t>高いほど良好</a:t>
+            </a:r>
+            <a:endParaRPr lang="en-US" sz="950" dirty="0"/>
+          </a:p>
+        </p:txBody>
+      </p:sp>
+      <p:graphicFrame>
+        <p:nvGraphicFramePr>
+          <p:cNvPr id="6" name="Chart 0" descr=""/>
+          <p:cNvGraphicFramePr/>
+          <p:nvPr/>
+        </p:nvGraphicFramePr>
+        <p:xfrm>
+          <a:off x="548640" y="2103120"/>
+          <a:ext cx="3429000" cy="1691640"/>
+        </p:xfrm>
+        <a:graphic xmlns:a="http://schemas.openxmlformats.org/drawingml/2006/main">
+          <a:graphicData uri="http://schemas.openxmlformats.org/drawingml/2006/chart">
+            <c:chart xmlns:c="http://schemas.openxmlformats.org/drawingml/2006/chart" r:id="rId1"/>
+          </a:graphicData>
+        </a:graphic>
+      </p:graphicFrame>
+      <p:sp>
+        <p:nvSpPr>
+          <p:cNvPr id="7" name="Text 4"/>
+          <p:cNvSpPr txBox="1"/>
+          <p:nvPr/>
+        </p:nvSpPr>
+        <p:spPr>
+          <a:xfrm>
+            <a:off x="4343400" y="1572768"/>
+            <a:ext cx="3429000" cy="256032"/>
+          </a:xfrm>
+          <a:prstGeom prst="rect">
+            <a:avLst/>
+          </a:prstGeom>
+          <a:noFill/>
+          <a:ln/>
+        </p:spPr>
+        <p:txBody>
+          <a:bodyPr wrap="square" lIns="0" tIns="0" rIns="0" bIns="0" rtlCol="0" anchor="ctr"/>
+          <a:lstStyle/>
+          <a:p>
+            <a:pPr indent="0" marL="0">
+              <a:buNone/>
+            </a:pPr>
+            <a:r>
+              <a:rPr lang="en-US" sz="1200" b="1" dirty="0">
+                <a:solidFill>
+                  <a:srgbClr val="21295C"/>
+                </a:solidFill>
+                <a:latin typeface="Calibri" pitchFamily="34" charset="0"/>
+                <a:ea typeface="Calibri" pitchFamily="34" charset="-122"/>
+                <a:cs typeface="Calibri" pitchFamily="34" charset="-120"/>
+              </a:rPr>
+              <a:t>睡眠の質</a:t>
+            </a:r>
+            <a:endParaRPr lang="en-US" sz="1200" dirty="0"/>
+          </a:p>
+        </p:txBody>
+      </p:sp>
+      <p:sp>
+        <p:nvSpPr>
+          <p:cNvPr id="8" name="Text 5"/>
+          <p:cNvSpPr txBox="1"/>
+          <p:nvPr/>
+        </p:nvSpPr>
+        <p:spPr>
+          <a:xfrm>
+            <a:off x="4343400" y="1819656"/>
+            <a:ext cx="3429000" cy="219456"/>
+          </a:xfrm>
+          <a:prstGeom prst="rect">
+            <a:avLst/>
+          </a:prstGeom>
+          <a:noFill/>
+          <a:ln/>
+        </p:spPr>
+        <p:txBody>
+          <a:bodyPr wrap="square" lIns="0" tIns="0" rIns="0" bIns="0" rtlCol="0" anchor="ctr"/>
+          <a:lstStyle/>
+          <a:p>
+            <a:pPr indent="0" marL="0">
+              <a:buNone/>
+            </a:pPr>
+            <a:r>
+              <a:rPr lang="en-US" sz="950" dirty="0">
+                <a:solidFill>
+                  <a:srgbClr val="5C6570"/>
+                </a:solidFill>
+                <a:latin typeface="Calibri" pitchFamily="34" charset="0"/>
+                <a:ea typeface="Calibri" pitchFamily="34" charset="-122"/>
+                <a:cs typeface="Calibri" pitchFamily="34" charset="-120"/>
+              </a:rPr>
+              <a:t>高いほど良好</a:t>
+            </a:r>
+            <a:endParaRPr lang="en-US" sz="950" dirty="0"/>
+          </a:p>
+        </p:txBody>
+      </p:sp>
+      <p:graphicFrame>
+        <p:nvGraphicFramePr>
+          <p:cNvPr id="9" name="Chart 1" descr=""/>
+          <p:cNvGraphicFramePr/>
+          <p:nvPr/>
+        </p:nvGraphicFramePr>
+        <p:xfrm>
+          <a:off x="4343400" y="2103120"/>
+          <a:ext cx="3429000" cy="1691640"/>
+        </p:xfrm>
+        <a:graphic xmlns:a="http://schemas.openxmlformats.org/drawingml/2006/main">
+          <a:graphicData uri="http://schemas.openxmlformats.org/drawingml/2006/chart">
+            <c:chart xmlns:c="http://schemas.openxmlformats.org/drawingml/2006/chart" r:id="rId2"/>
+          </a:graphicData>
+        </a:graphic>
+      </p:graphicFrame>
+      <p:sp>
+        <p:nvSpPr>
+          <p:cNvPr id="10" name="Text 6"/>
+          <p:cNvSpPr txBox="1"/>
+          <p:nvPr/>
+        </p:nvSpPr>
+        <p:spPr>
+          <a:xfrm>
+            <a:off x="8138160" y="1572768"/>
+            <a:ext cx="3429000" cy="256032"/>
+          </a:xfrm>
+          <a:prstGeom prst="rect">
+            <a:avLst/>
+          </a:prstGeom>
+          <a:noFill/>
+          <a:ln/>
+        </p:spPr>
+        <p:txBody>
+          <a:bodyPr wrap="square" lIns="0" tIns="0" rIns="0" bIns="0" rtlCol="0" anchor="ctr"/>
+          <a:lstStyle/>
+          <a:p>
+            <a:pPr indent="0" marL="0">
+              <a:buNone/>
+            </a:pPr>
+            <a:r>
+              <a:rPr lang="en-US" sz="1200" b="1" dirty="0">
+                <a:solidFill>
+                  <a:srgbClr val="21295C"/>
+                </a:solidFill>
+                <a:latin typeface="Calibri" pitchFamily="34" charset="0"/>
+                <a:ea typeface="Calibri" pitchFamily="34" charset="-122"/>
+                <a:cs typeface="Calibri" pitchFamily="34" charset="-120"/>
+              </a:rPr>
+              <a:t>持久力（自己評価）</a:t>
+            </a:r>
+            <a:endParaRPr lang="en-US" sz="1200" dirty="0"/>
+          </a:p>
+        </p:txBody>
+      </p:sp>
+      <p:sp>
+        <p:nvSpPr>
+          <p:cNvPr id="11" name="Text 7"/>
+          <p:cNvSpPr txBox="1"/>
+          <p:nvPr/>
+        </p:nvSpPr>
+        <p:spPr>
+          <a:xfrm>
+            <a:off x="8138160" y="1819656"/>
+            <a:ext cx="3429000" cy="219456"/>
+          </a:xfrm>
+          <a:prstGeom prst="rect">
+            <a:avLst/>
+          </a:prstGeom>
+          <a:noFill/>
+          <a:ln/>
+        </p:spPr>
+        <p:txBody>
+          <a:bodyPr wrap="square" lIns="0" tIns="0" rIns="0" bIns="0" rtlCol="0" anchor="ctr"/>
+          <a:lstStyle/>
+          <a:p>
+            <a:pPr indent="0" marL="0">
+              <a:buNone/>
+            </a:pPr>
+            <a:r>
+              <a:rPr lang="en-US" sz="950" dirty="0">
+                <a:solidFill>
+                  <a:srgbClr val="5C6570"/>
+                </a:solidFill>
+                <a:latin typeface="Calibri" pitchFamily="34" charset="0"/>
+                <a:ea typeface="Calibri" pitchFamily="34" charset="-122"/>
+                <a:cs typeface="Calibri" pitchFamily="34" charset="-120"/>
+              </a:rPr>
+              <a:t>高いほど良好</a:t>
+            </a:r>
+            <a:endParaRPr lang="en-US" sz="950" dirty="0"/>
+          </a:p>
+        </p:txBody>
+      </p:sp>
+      <p:graphicFrame>
+        <p:nvGraphicFramePr>
+          <p:cNvPr id="12" name="Chart 2" descr=""/>
+          <p:cNvGraphicFramePr/>
+          <p:nvPr/>
+        </p:nvGraphicFramePr>
+        <p:xfrm>
+          <a:off x="8138160" y="2103120"/>
+          <a:ext cx="3429000" cy="1691640"/>
+        </p:xfrm>
+        <a:graphic xmlns:a="http://schemas.openxmlformats.org/drawingml/2006/main">
+          <a:graphicData uri="http://schemas.openxmlformats.org/drawingml/2006/chart">
+            <c:chart xmlns:c="http://schemas.openxmlformats.org/drawingml/2006/chart" r:id="rId3"/>
+          </a:graphicData>
+        </a:graphic>
+      </p:graphicFrame>
+      <p:sp>
+        <p:nvSpPr>
+          <p:cNvPr id="13" name="Text 8"/>
+          <p:cNvSpPr txBox="1"/>
+          <p:nvPr/>
+        </p:nvSpPr>
+        <p:spPr>
+          <a:xfrm>
+            <a:off x="548640" y="3904488"/>
+            <a:ext cx="3429000" cy="256032"/>
+          </a:xfrm>
+          <a:prstGeom prst="rect">
+            <a:avLst/>
+          </a:prstGeom>
+          <a:noFill/>
+          <a:ln/>
+        </p:spPr>
+        <p:txBody>
+          <a:bodyPr wrap="square" lIns="0" tIns="0" rIns="0" bIns="0" rtlCol="0" anchor="ctr"/>
+          <a:lstStyle/>
+          <a:p>
+            <a:pPr indent="0" marL="0">
+              <a:buNone/>
+            </a:pPr>
+            <a:r>
+              <a:rPr lang="en-US" sz="1200" b="1" dirty="0">
+                <a:solidFill>
+                  <a:srgbClr val="21295C"/>
+                </a:solidFill>
+                <a:latin typeface="Calibri" pitchFamily="34" charset="0"/>
+                <a:ea typeface="Calibri" pitchFamily="34" charset="-122"/>
+                <a:cs typeface="Calibri" pitchFamily="34" charset="-120"/>
+              </a:rPr>
+              <a:t>爆発力（自己評価）</a:t>
+            </a:r>
+            <a:endParaRPr lang="en-US" sz="1200" dirty="0"/>
+          </a:p>
+        </p:txBody>
+      </p:sp>
+      <p:sp>
+        <p:nvSpPr>
+          <p:cNvPr id="14" name="Text 9"/>
+          <p:cNvSpPr txBox="1"/>
+          <p:nvPr/>
+        </p:nvSpPr>
+        <p:spPr>
+          <a:xfrm>
+            <a:off x="548640" y="4151376"/>
+            <a:ext cx="3429000" cy="219456"/>
+          </a:xfrm>
+          <a:prstGeom prst="rect">
+            <a:avLst/>
+          </a:prstGeom>
+          <a:noFill/>
+          <a:ln/>
+        </p:spPr>
+        <p:txBody>
+          <a:bodyPr wrap="square" lIns="0" tIns="0" rIns="0" bIns="0" rtlCol="0" anchor="ctr"/>
+          <a:lstStyle/>
+          <a:p>
+            <a:pPr indent="0" marL="0">
+              <a:buNone/>
+            </a:pPr>
+            <a:r>
+              <a:rPr lang="en-US" sz="950" dirty="0">
+                <a:solidFill>
+                  <a:srgbClr val="5C6570"/>
+                </a:solidFill>
+                <a:latin typeface="Calibri" pitchFamily="34" charset="0"/>
+                <a:ea typeface="Calibri" pitchFamily="34" charset="-122"/>
+                <a:cs typeface="Calibri" pitchFamily="34" charset="-120"/>
+              </a:rPr>
+              <a:t>高いほど良好</a:t>
+            </a:r>
+            <a:endParaRPr lang="en-US" sz="950" dirty="0"/>
+          </a:p>
+        </p:txBody>
+      </p:sp>
+      <p:graphicFrame>
+        <p:nvGraphicFramePr>
+          <p:cNvPr id="15" name="Chart 3" descr=""/>
+          <p:cNvGraphicFramePr/>
+          <p:nvPr/>
+        </p:nvGraphicFramePr>
+        <p:xfrm>
+          <a:off x="548640" y="4434840"/>
+          <a:ext cx="3429000" cy="1691640"/>
+        </p:xfrm>
+        <a:graphic xmlns:a="http://schemas.openxmlformats.org/drawingml/2006/main">
+          <a:graphicData uri="http://schemas.openxmlformats.org/drawingml/2006/chart">
+            <c:chart xmlns:c="http://schemas.openxmlformats.org/drawingml/2006/chart" r:id="rId4"/>
+          </a:graphicData>
+        </a:graphic>
+      </p:graphicFrame>
+      <p:sp>
+        <p:nvSpPr>
+          <p:cNvPr id="16" name="Text 10"/>
+          <p:cNvSpPr txBox="1"/>
+          <p:nvPr/>
+        </p:nvSpPr>
+        <p:spPr>
+          <a:xfrm>
+            <a:off x="4343400" y="3904488"/>
+            <a:ext cx="3429000" cy="256032"/>
+          </a:xfrm>
+          <a:prstGeom prst="rect">
+            <a:avLst/>
+          </a:prstGeom>
+          <a:noFill/>
+          <a:ln/>
+        </p:spPr>
+        <p:txBody>
+          <a:bodyPr wrap="square" lIns="0" tIns="0" rIns="0" bIns="0" rtlCol="0" anchor="ctr"/>
+          <a:lstStyle/>
+          <a:p>
+            <a:pPr indent="0" marL="0">
+              <a:buNone/>
+            </a:pPr>
+            <a:r>
+              <a:rPr lang="en-US" sz="1200" b="1" dirty="0">
+                <a:solidFill>
+                  <a:srgbClr val="21295C"/>
+                </a:solidFill>
+                <a:latin typeface="Calibri" pitchFamily="34" charset="0"/>
+                <a:ea typeface="Calibri" pitchFamily="34" charset="-122"/>
+                <a:cs typeface="Calibri" pitchFamily="34" charset="-120"/>
+              </a:rPr>
+              <a:t>RPE（主観的運動強度）</a:t>
+            </a:r>
+            <a:endParaRPr lang="en-US" sz="1200" dirty="0"/>
+          </a:p>
+        </p:txBody>
+      </p:sp>
+      <p:sp>
+        <p:nvSpPr>
+          <p:cNvPr id="17" name="Text 11"/>
+          <p:cNvSpPr txBox="1"/>
+          <p:nvPr/>
+        </p:nvSpPr>
+        <p:spPr>
+          <a:xfrm>
+            <a:off x="4343400" y="4151376"/>
+            <a:ext cx="3429000" cy="219456"/>
+          </a:xfrm>
+          <a:prstGeom prst="rect">
+            <a:avLst/>
+          </a:prstGeom>
+          <a:noFill/>
+          <a:ln/>
+        </p:spPr>
+        <p:txBody>
+          <a:bodyPr wrap="square" lIns="0" tIns="0" rIns="0" bIns="0" rtlCol="0" anchor="ctr"/>
+          <a:lstStyle/>
+          <a:p>
+            <a:pPr indent="0" marL="0">
+              <a:buNone/>
+            </a:pPr>
+            <a:r>
+              <a:rPr lang="en-US" sz="950" dirty="0">
+                <a:solidFill>
+                  <a:srgbClr val="5C6570"/>
+                </a:solidFill>
+                <a:latin typeface="Calibri" pitchFamily="34" charset="0"/>
+                <a:ea typeface="Calibri" pitchFamily="34" charset="-122"/>
+                <a:cs typeface="Calibri" pitchFamily="34" charset="-120"/>
+              </a:rPr>
+              <a:t>高いほどきつい</a:t>
+            </a:r>
+            <a:endParaRPr lang="en-US" sz="950" dirty="0"/>
+          </a:p>
+        </p:txBody>
+      </p:sp>
+      <p:graphicFrame>
+        <p:nvGraphicFramePr>
+          <p:cNvPr id="18" name="Chart 4" descr=""/>
+          <p:cNvGraphicFramePr/>
+          <p:nvPr/>
+        </p:nvGraphicFramePr>
+        <p:xfrm>
+          <a:off x="4343400" y="4434840"/>
+          <a:ext cx="3429000" cy="1691640"/>
+        </p:xfrm>
+        <a:graphic xmlns:a="http://schemas.openxmlformats.org/drawingml/2006/main">
+          <a:graphicData uri="http://schemas.openxmlformats.org/drawingml/2006/chart">
+            <c:chart xmlns:c="http://schemas.openxmlformats.org/drawingml/2006/chart" r:id="rId5"/>
+          </a:graphicData>
+        </a:graphic>
+      </p:graphicFrame>
+      <p:sp>
+        <p:nvSpPr>
+          <p:cNvPr id="19" name="Text 12"/>
+          <p:cNvSpPr txBox="1"/>
+          <p:nvPr/>
+        </p:nvSpPr>
+        <p:spPr>
+          <a:xfrm>
+            <a:off x="8138160" y="3904488"/>
+            <a:ext cx="3429000" cy="256032"/>
+          </a:xfrm>
+          <a:prstGeom prst="rect">
+            <a:avLst/>
+          </a:prstGeom>
+          <a:noFill/>
+          <a:ln/>
+        </p:spPr>
+        <p:txBody>
+          <a:bodyPr wrap="square" lIns="0" tIns="0" rIns="0" bIns="0" rtlCol="0" anchor="ctr"/>
+          <a:lstStyle/>
+          <a:p>
+            <a:pPr indent="0" marL="0">
+              <a:buNone/>
+            </a:pPr>
+            <a:r>
+              <a:rPr lang="en-US" sz="1200" b="1" dirty="0">
+                <a:solidFill>
+                  <a:srgbClr val="21295C"/>
+                </a:solidFill>
+                <a:latin typeface="Calibri" pitchFamily="34" charset="0"/>
+                <a:ea typeface="Calibri" pitchFamily="34" charset="-122"/>
+                <a:cs typeface="Calibri" pitchFamily="34" charset="-120"/>
+              </a:rPr>
+              <a:t>練習時間 (分/日)</a:t>
+            </a:r>
+            <a:endParaRPr lang="en-US" sz="1200" dirty="0"/>
+          </a:p>
+        </p:txBody>
+      </p:sp>
+      <p:sp>
+        <p:nvSpPr>
+          <p:cNvPr id="20" name="Text 13"/>
+          <p:cNvSpPr txBox="1"/>
+          <p:nvPr/>
+        </p:nvSpPr>
+        <p:spPr>
+          <a:xfrm>
+            <a:off x="8138160" y="4151376"/>
+            <a:ext cx="3429000" cy="219456"/>
+          </a:xfrm>
+          <a:prstGeom prst="rect">
+            <a:avLst/>
+          </a:prstGeom>
+          <a:noFill/>
+          <a:ln/>
+        </p:spPr>
+        <p:txBody>
+          <a:bodyPr wrap="square" lIns="0" tIns="0" rIns="0" bIns="0" rtlCol="0" anchor="ctr"/>
+          <a:lstStyle/>
+          <a:p>
+            <a:pPr indent="0" marL="0">
+              <a:buNone/>
+            </a:pPr>
+            <a:r>
+              <a:rPr lang="en-US" sz="950" dirty="0">
+                <a:solidFill>
+                  <a:srgbClr val="5C6570"/>
+                </a:solidFill>
+                <a:latin typeface="Calibri" pitchFamily="34" charset="0"/>
+                <a:ea typeface="Calibri" pitchFamily="34" charset="-122"/>
+                <a:cs typeface="Calibri" pitchFamily="34" charset="-120"/>
+              </a:rPr>
+              <a:t>条件ブロックにより変動</a:t>
+            </a:r>
+            <a:endParaRPr lang="en-US" sz="950" dirty="0"/>
+          </a:p>
+        </p:txBody>
+      </p:sp>
+      <p:graphicFrame>
+        <p:nvGraphicFramePr>
+          <p:cNvPr id="21" name="Chart 5" descr=""/>
+          <p:cNvGraphicFramePr/>
+          <p:nvPr/>
+        </p:nvGraphicFramePr>
+        <p:xfrm>
+          <a:off x="8138160" y="4434840"/>
+          <a:ext cx="3429000" cy="1691640"/>
+        </p:xfrm>
+        <a:graphic xmlns:a="http://schemas.openxmlformats.org/drawingml/2006/main">
+          <a:graphicData uri="http://schemas.openxmlformats.org/drawingml/2006/chart">
+            <c:chart xmlns:c="http://schemas.openxmlformats.org/drawingml/2006/chart" r:id="rId6"/>
+          </a:graphicData>
+        </a:graphic>
+      </p:graphicFrame>
+      <p:sp>
+        <p:nvSpPr>
+          <p:cNvPr id="22" name="Text 14"/>
+          <p:cNvSpPr/>
+          <p:nvPr/>
+        </p:nvSpPr>
+        <p:spPr>
+          <a:xfrm>
+            <a:off x="548640" y="6473952"/>
+            <a:ext cx="11091672" cy="274320"/>
+          </a:xfrm>
+          <a:prstGeom prst="rect">
+            <a:avLst/>
+          </a:prstGeom>
+          <a:noFill/>
+          <a:ln/>
+        </p:spPr>
+        <p:txBody>
+          <a:bodyPr wrap="square" rtlCol="0" anchor="ctr"/>
+          <a:lstStyle/>
+          <a:p>
+            <a:pPr algn="l" indent="0" marL="0">
+              <a:buNone/>
+            </a:pPr>
+            <a:r>
+              <a:rPr lang="en-US" sz="1000" dirty="0">
+                <a:solidFill>
+                  <a:srgbClr val="5C6570"/>
+                </a:solidFill>
+                <a:latin typeface="Calibri" pitchFamily="34" charset="0"/>
+                <a:ea typeface="Calibri" pitchFamily="34" charset="-122"/>
+                <a:cs typeface="Calibri" pitchFamily="34" charset="-120"/>
+              </a:rPr>
+              <a:t>各条件3日間平均。起床時コンディション・睡眠の質・持久力・爆発力は高いほど良好、運動後疲労・RPEは高いほど負荷が大きいと仮定（原データに尺度定義なし）。</a:t>
+            </a:r>
+            <a:endParaRPr lang="en-US" sz="1000" dirty="0"/>
+          </a:p>
+        </p:txBody>
+      </p:sp>
+    </p:spTree>
+  </p:cSld>
+  <p:clrMapOvr>
+    <a:masterClrMapping/>
+  </p:clrMapOvr>
+</p:sld>
+</file>
+
+<file path=ppt/slides/slide12.xml><?xml version="1.0" encoding="utf-8"?>
+<p:sld xmlns:a="http://schemas.openxmlformats.org/drawingml/2006/main" xmlns:r="http://schemas.openxmlformats.org/officeDocument/2006/relationships" xmlns:p="http://schemas.openxmlformats.org/presentationml/2006/main">
+  <p:cSld name="Slide 12">
+    <p:bg>
+      <p:bgPr>
+        <a:solidFill>
+          <a:srgbClr val="FFFFFF"/>
+        </a:solidFill>
+      </p:bgPr>
+    </p:bg>
+    <p:spTree>
+      <p:nvGrpSpPr>
+        <p:cNvPr id="1" name=""/>
+        <p:cNvGrpSpPr/>
+        <p:nvPr/>
+      </p:nvGrpSpPr>
+      <p:grpSpPr>
+        <a:xfrm>
+          <a:off x="0" y="0"/>
+          <a:ext cx="0" cy="0"/>
+          <a:chOff x="0" y="0"/>
+          <a:chExt cx="0" cy="0"/>
+        </a:xfrm>
+      </p:grpSpPr>
+      <p:sp>
+        <p:nvSpPr>
+          <p:cNvPr id="2" name="Text 0"/>
+          <p:cNvSpPr txBox="1"/>
+          <p:nvPr/>
+        </p:nvSpPr>
+        <p:spPr>
+          <a:xfrm>
+            <a:off x="548640" y="457200"/>
+            <a:ext cx="11091672" cy="365760"/>
+          </a:xfrm>
+          <a:prstGeom prst="rect">
+            <a:avLst/>
+          </a:prstGeom>
+          <a:noFill/>
+          <a:ln/>
+        </p:spPr>
+        <p:txBody>
+          <a:bodyPr wrap="square" rtlCol="0" anchor="ctr"/>
+          <a:lstStyle/>
+          <a:p>
+            <a:pPr indent="0" marL="0">
+              <a:buNone/>
+            </a:pPr>
+            <a:r>
+              <a:rPr lang="en-US" sz="1300" b="1" spc="100" kern="0" dirty="0">
+                <a:solidFill>
+                  <a:srgbClr val="1C7293"/>
+                </a:solidFill>
+                <a:latin typeface="Calibri" pitchFamily="34" charset="0"/>
+                <a:ea typeface="Calibri" pitchFamily="34" charset="-122"/>
+                <a:cs typeface="Calibri" pitchFamily="34" charset="-120"/>
+              </a:rPr>
+              <a:t>SYNTHESIS</a:t>
+            </a:r>
+            <a:endParaRPr lang="en-US" sz="1300" dirty="0"/>
+          </a:p>
+        </p:txBody>
+      </p:sp>
+      <p:sp>
+        <p:nvSpPr>
+          <p:cNvPr id="3" name="Text 1"/>
+          <p:cNvSpPr txBox="1"/>
+          <p:nvPr/>
+        </p:nvSpPr>
+        <p:spPr>
+          <a:xfrm>
+            <a:off x="548640" y="786384"/>
+            <a:ext cx="11091672" cy="640080"/>
+          </a:xfrm>
+          <a:prstGeom prst="rect">
+            <a:avLst/>
+          </a:prstGeom>
+          <a:noFill/>
+          <a:ln/>
+        </p:spPr>
+        <p:txBody>
+          <a:bodyPr wrap="square" rtlCol="0" anchor="ctr"/>
+          <a:lstStyle/>
+          <a:p>
+            <a:pPr indent="0" marL="0">
+              <a:buNone/>
+            </a:pPr>
+            <a:r>
+              <a:rPr lang="en-US" sz="2800" b="1" dirty="0">
+                <a:solidFill>
+                  <a:srgbClr val="21295C"/>
+                </a:solidFill>
+                <a:latin typeface="Cambria" pitchFamily="34" charset="0"/>
+                <a:ea typeface="Cambria" pitchFamily="34" charset="-122"/>
+                <a:cs typeface="Cambria" pitchFamily="34" charset="-120"/>
+              </a:rPr>
+              <a:t>総合考察：食事 × トレーニング × 血糖</a:t>
+            </a:r>
+            <a:endParaRPr lang="en-US" sz="2800" dirty="0"/>
+          </a:p>
+        </p:txBody>
+      </p:sp>
+      <p:sp>
+        <p:nvSpPr>
+          <p:cNvPr id="4" name="Shape 2"/>
+          <p:cNvSpPr/>
+          <p:nvPr/>
+        </p:nvSpPr>
+        <p:spPr>
+          <a:xfrm>
+            <a:off x="548640" y="1600200"/>
+            <a:ext cx="11091672" cy="1417320"/>
+          </a:xfrm>
+          <a:prstGeom prst="roundRect">
+            <a:avLst>
+              <a:gd name="adj" fmla="val 7742"/>
+            </a:avLst>
+          </a:prstGeom>
+          <a:solidFill>
+            <a:srgbClr val="FDF3E2"/>
+          </a:solidFill>
+          <a:ln w="12700">
+            <a:solidFill>
+              <a:srgbClr val="EDA100"/>
+            </a:solidFill>
+            <a:prstDash val="solid"/>
+          </a:ln>
+        </p:spPr>
+      </p:sp>
+      <p:sp>
+        <p:nvSpPr>
+          <p:cNvPr id="5" name="Text 3"/>
+          <p:cNvSpPr txBox="1"/>
+          <p:nvPr/>
+        </p:nvSpPr>
+        <p:spPr>
+          <a:xfrm>
+            <a:off x="822960" y="1737360"/>
+            <a:ext cx="10543032" cy="274320"/>
+          </a:xfrm>
+          <a:prstGeom prst="rect">
+            <a:avLst/>
+          </a:prstGeom>
+          <a:noFill/>
+          <a:ln/>
+        </p:spPr>
+        <p:txBody>
+          <a:bodyPr wrap="square" lIns="0" tIns="0" rIns="0" bIns="0" rtlCol="0" anchor="ctr"/>
+          <a:lstStyle/>
+          <a:p>
+            <a:pPr indent="0" marL="0">
+              <a:buNone/>
+            </a:pPr>
+            <a:r>
+              <a:rPr lang="en-US" sz="1300" b="1" dirty="0">
+                <a:solidFill>
+                  <a:srgbClr val="6B4B00"/>
+                </a:solidFill>
+                <a:latin typeface="Calibri" pitchFamily="34" charset="0"/>
+                <a:ea typeface="Calibri" pitchFamily="34" charset="-122"/>
+                <a:cs typeface="Calibri" pitchFamily="34" charset="-120"/>
+              </a:rPr>
+              <a:t>⚠ 重要な交絡：練習時間が条件ブロックごとに大きく異なる</a:t>
+            </a:r>
+            <a:endParaRPr lang="en-US" sz="1300" dirty="0"/>
+          </a:p>
+        </p:txBody>
+      </p:sp>
+      <p:sp>
+        <p:nvSpPr>
+          <p:cNvPr id="6" name="Text 4"/>
+          <p:cNvSpPr txBox="1"/>
+          <p:nvPr/>
+        </p:nvSpPr>
+        <p:spPr>
+          <a:xfrm>
+            <a:off x="822960" y="2048256"/>
+            <a:ext cx="10543032" cy="914400"/>
+          </a:xfrm>
+          <a:prstGeom prst="rect">
+            <a:avLst/>
+          </a:prstGeom>
+          <a:noFill/>
+          <a:ln/>
+        </p:spPr>
+        <p:txBody>
+          <a:bodyPr wrap="square" lIns="0" tIns="0" rIns="0" bIns="0" rtlCol="0" anchor="ctr"/>
+          <a:lstStyle/>
+          <a:p>
+            <a:pPr indent="0" marL="0">
+              <a:buNone/>
+            </a:pPr>
+            <a:r>
+              <a:rPr lang="en-US" sz="1150" dirty="0">
+                <a:solidFill>
+                  <a:srgbClr val="6B4B00"/>
+                </a:solidFill>
+                <a:latin typeface="Calibri" pitchFamily="34" charset="0"/>
+                <a:ea typeface="Calibri" pitchFamily="34" charset="-122"/>
+                <a:cs typeface="Calibri" pitchFamily="34" charset="-120"/>
+              </a:rPr>
+              <a:t>固形の3日間は平均140分（180/120/120分）と突出して長く、スムージーの3日間は毎日60分で最短。RPE・爆発力・持久力・運動後疲労は運動量そのものにも左右されるため、固形のRPE・爆発力の高さは「食事」よりも「練習量が多かったこと」を反映している可能性がある。トレーニングはどの条件も11:00〜14:00の間に実施。</a:t>
+            </a:r>
+            <a:endParaRPr lang="en-US" sz="1150" dirty="0"/>
+          </a:p>
+        </p:txBody>
+      </p:sp>
+      <p:sp>
+        <p:nvSpPr>
+          <p:cNvPr id="7" name="Shape 5"/>
+          <p:cNvSpPr/>
+          <p:nvPr/>
+        </p:nvSpPr>
+        <p:spPr>
+          <a:xfrm>
+            <a:off x="548640" y="3200400"/>
+            <a:ext cx="5362956" cy="1828800"/>
+          </a:xfrm>
+          <a:prstGeom prst="roundRect">
+            <a:avLst>
+              <a:gd name="adj" fmla="val 5000"/>
+            </a:avLst>
+          </a:prstGeom>
+          <a:solidFill>
+            <a:srgbClr val="F4F7F9"/>
+          </a:solidFill>
+          <a:ln/>
+        </p:spPr>
+      </p:sp>
+      <p:sp>
+        <p:nvSpPr>
+          <p:cNvPr id="8" name="Shape 6"/>
+          <p:cNvSpPr/>
+          <p:nvPr/>
+        </p:nvSpPr>
+        <p:spPr>
+          <a:xfrm>
+            <a:off x="822960" y="3337560"/>
+            <a:ext cx="146304" cy="347472"/>
+          </a:xfrm>
+          <a:prstGeom prst="rect">
+            <a:avLst/>
+          </a:prstGeom>
+          <a:solidFill>
+            <a:srgbClr val="1BAF7A"/>
+          </a:solidFill>
+          <a:ln/>
+        </p:spPr>
+      </p:sp>
+      <p:sp>
+        <p:nvSpPr>
+          <p:cNvPr id="9" name="Text 7"/>
+          <p:cNvSpPr txBox="1"/>
+          <p:nvPr/>
+        </p:nvSpPr>
+        <p:spPr>
+          <a:xfrm>
+            <a:off x="1078992" y="3300984"/>
+            <a:ext cx="4539996" cy="420624"/>
+          </a:xfrm>
+          <a:prstGeom prst="rect">
+            <a:avLst/>
+          </a:prstGeom>
+          <a:noFill/>
+          <a:ln/>
+        </p:spPr>
+        <p:txBody>
+          <a:bodyPr wrap="square" lIns="0" tIns="0" rIns="0" bIns="0" rtlCol="0" anchor="ctr"/>
+          <a:lstStyle/>
+          <a:p>
+            <a:pPr indent="0" marL="0">
+              <a:buNone/>
+            </a:pPr>
+            <a:r>
+              <a:rPr lang="en-US" sz="1400" b="1" dirty="0">
+                <a:solidFill>
+                  <a:srgbClr val="21295C"/>
+                </a:solidFill>
+                <a:latin typeface="Calibri" pitchFamily="34" charset="0"/>
+                <a:ea typeface="Calibri" pitchFamily="34" charset="-122"/>
+                <a:cs typeface="Calibri" pitchFamily="34" charset="-120"/>
+              </a:rPr>
+              <a:t>おにぎり＋スムージー（糖質ノーマル）</a:t>
+            </a:r>
+            <a:endParaRPr lang="en-US" sz="1400" dirty="0"/>
+          </a:p>
+        </p:txBody>
+      </p:sp>
+      <p:sp>
+        <p:nvSpPr>
+          <p:cNvPr id="10" name="Text 8"/>
+          <p:cNvSpPr txBox="1"/>
+          <p:nvPr/>
+        </p:nvSpPr>
+        <p:spPr>
+          <a:xfrm>
+            <a:off x="822960" y="3794760"/>
+            <a:ext cx="4814316" cy="347472"/>
+          </a:xfrm>
+          <a:prstGeom prst="rect">
+            <a:avLst/>
+          </a:prstGeom>
+          <a:noFill/>
+          <a:ln/>
+        </p:spPr>
+        <p:txBody>
+          <a:bodyPr wrap="square" lIns="0" tIns="0" rIns="0" bIns="0" rtlCol="0" anchor="ctr"/>
+          <a:lstStyle/>
+          <a:p>
+            <a:pPr indent="0" marL="0">
+              <a:buNone/>
+            </a:pPr>
+            <a:r>
+              <a:rPr lang="en-US" sz="1100" dirty="0">
+                <a:solidFill>
+                  <a:srgbClr val="1A1A1A"/>
+                </a:solidFill>
+                <a:latin typeface="Calibri" pitchFamily="34" charset="0"/>
+                <a:ea typeface="Calibri" pitchFamily="34" charset="-122"/>
+                <a:cs typeface="Calibri" pitchFamily="34" charset="-120"/>
+              </a:rPr>
+              <a:t>•  血糖の乱高下（CV）が4条件中最小</a:t>
+            </a:r>
+            <a:endParaRPr lang="en-US" sz="1100" dirty="0"/>
+          </a:p>
+        </p:txBody>
+      </p:sp>
+      <p:sp>
+        <p:nvSpPr>
+          <p:cNvPr id="11" name="Text 9"/>
+          <p:cNvSpPr txBox="1"/>
+          <p:nvPr/>
+        </p:nvSpPr>
+        <p:spPr>
+          <a:xfrm>
+            <a:off x="822960" y="4178808"/>
+            <a:ext cx="4814316" cy="347472"/>
+          </a:xfrm>
+          <a:prstGeom prst="rect">
+            <a:avLst/>
+          </a:prstGeom>
+          <a:noFill/>
+          <a:ln/>
+        </p:spPr>
+        <p:txBody>
+          <a:bodyPr wrap="square" lIns="0" tIns="0" rIns="0" bIns="0" rtlCol="0" anchor="ctr"/>
+          <a:lstStyle/>
+          <a:p>
+            <a:pPr indent="0" marL="0">
+              <a:buNone/>
+            </a:pPr>
+            <a:r>
+              <a:rPr lang="en-US" sz="1100" dirty="0">
+                <a:solidFill>
+                  <a:srgbClr val="1A1A1A"/>
+                </a:solidFill>
+                <a:latin typeface="Calibri" pitchFamily="34" charset="0"/>
+                <a:ea typeface="Calibri" pitchFamily="34" charset="-122"/>
+                <a:cs typeface="Calibri" pitchFamily="34" charset="-120"/>
+              </a:rPr>
+              <a:t>•  持久力の自己評価が4条件中最高（3.83）</a:t>
+            </a:r>
+            <a:endParaRPr lang="en-US" sz="1100" dirty="0"/>
+          </a:p>
+        </p:txBody>
+      </p:sp>
+      <p:sp>
+        <p:nvSpPr>
+          <p:cNvPr id="12" name="Text 10"/>
+          <p:cNvSpPr txBox="1"/>
+          <p:nvPr/>
+        </p:nvSpPr>
+        <p:spPr>
+          <a:xfrm>
+            <a:off x="822960" y="4562856"/>
+            <a:ext cx="4814316" cy="347472"/>
+          </a:xfrm>
+          <a:prstGeom prst="rect">
+            <a:avLst/>
+          </a:prstGeom>
+          <a:noFill/>
+          <a:ln/>
+        </p:spPr>
+        <p:txBody>
+          <a:bodyPr wrap="square" lIns="0" tIns="0" rIns="0" bIns="0" rtlCol="0" anchor="ctr"/>
+          <a:lstStyle/>
+          <a:p>
+            <a:pPr indent="0" marL="0">
+              <a:buNone/>
+            </a:pPr>
+            <a:r>
+              <a:rPr lang="en-US" sz="1100" dirty="0">
+                <a:solidFill>
+                  <a:srgbClr val="1A1A1A"/>
+                </a:solidFill>
+                <a:latin typeface="Calibri" pitchFamily="34" charset="0"/>
+                <a:ea typeface="Calibri" pitchFamily="34" charset="-122"/>
+                <a:cs typeface="Calibri" pitchFamily="34" charset="-120"/>
+              </a:rPr>
+              <a:t>•  消化器症状も軽微</a:t>
+            </a:r>
+            <a:endParaRPr lang="en-US" sz="1100" dirty="0"/>
+          </a:p>
+        </p:txBody>
+      </p:sp>
+      <p:sp>
+        <p:nvSpPr>
+          <p:cNvPr id="13" name="Shape 11"/>
+          <p:cNvSpPr/>
+          <p:nvPr/>
+        </p:nvSpPr>
+        <p:spPr>
+          <a:xfrm>
+            <a:off x="6277356" y="3200400"/>
+            <a:ext cx="5362956" cy="1828800"/>
+          </a:xfrm>
+          <a:prstGeom prst="roundRect">
+            <a:avLst>
+              <a:gd name="adj" fmla="val 5000"/>
+            </a:avLst>
+          </a:prstGeom>
+          <a:solidFill>
+            <a:srgbClr val="F4F7F9"/>
+          </a:solidFill>
+          <a:ln/>
+        </p:spPr>
+      </p:sp>
+      <p:sp>
+        <p:nvSpPr>
+          <p:cNvPr id="14" name="Shape 12"/>
+          <p:cNvSpPr/>
+          <p:nvPr/>
+        </p:nvSpPr>
+        <p:spPr>
+          <a:xfrm>
+            <a:off x="6551676" y="3337560"/>
+            <a:ext cx="146304" cy="347472"/>
+          </a:xfrm>
+          <a:prstGeom prst="rect">
+            <a:avLst/>
+          </a:prstGeom>
+          <a:solidFill>
+            <a:srgbClr val="EDA100"/>
+          </a:solidFill>
+          <a:ln/>
+        </p:spPr>
+      </p:sp>
+      <p:sp>
+        <p:nvSpPr>
+          <p:cNvPr id="15" name="Text 13"/>
+          <p:cNvSpPr txBox="1"/>
+          <p:nvPr/>
+        </p:nvSpPr>
+        <p:spPr>
+          <a:xfrm>
+            <a:off x="6807708" y="3300984"/>
+            <a:ext cx="4539996" cy="420624"/>
+          </a:xfrm>
+          <a:prstGeom prst="rect">
+            <a:avLst/>
+          </a:prstGeom>
+          <a:noFill/>
+          <a:ln/>
+        </p:spPr>
+        <p:txBody>
+          <a:bodyPr wrap="square" lIns="0" tIns="0" rIns="0" bIns="0" rtlCol="0" anchor="ctr"/>
+          <a:lstStyle/>
+          <a:p>
+            <a:pPr indent="0" marL="0">
+              <a:buNone/>
+            </a:pPr>
+            <a:r>
+              <a:rPr lang="en-US" sz="1400" b="1" dirty="0">
+                <a:solidFill>
+                  <a:srgbClr val="21295C"/>
+                </a:solidFill>
+                <a:latin typeface="Calibri" pitchFamily="34" charset="0"/>
+                <a:ea typeface="Calibri" pitchFamily="34" charset="-122"/>
+                <a:cs typeface="Calibri" pitchFamily="34" charset="-120"/>
+              </a:rPr>
+              <a:t>おにぎり＋糖質減</a:t>
+            </a:r>
+            <a:endParaRPr lang="en-US" sz="1400" dirty="0"/>
+          </a:p>
+        </p:txBody>
+      </p:sp>
+      <p:sp>
+        <p:nvSpPr>
+          <p:cNvPr id="16" name="Text 14"/>
+          <p:cNvSpPr txBox="1"/>
+          <p:nvPr/>
+        </p:nvSpPr>
+        <p:spPr>
+          <a:xfrm>
+            <a:off x="6551676" y="3794760"/>
+            <a:ext cx="4814316" cy="347472"/>
+          </a:xfrm>
+          <a:prstGeom prst="rect">
+            <a:avLst/>
+          </a:prstGeom>
+          <a:noFill/>
+          <a:ln/>
+        </p:spPr>
+        <p:txBody>
+          <a:bodyPr wrap="square" lIns="0" tIns="0" rIns="0" bIns="0" rtlCol="0" anchor="ctr"/>
+          <a:lstStyle/>
+          <a:p>
+            <a:pPr indent="0" marL="0">
+              <a:buNone/>
+            </a:pPr>
+            <a:r>
+              <a:rPr lang="en-US" sz="1100" dirty="0">
+                <a:solidFill>
+                  <a:srgbClr val="1A1A1A"/>
+                </a:solidFill>
+                <a:latin typeface="Calibri" pitchFamily="34" charset="0"/>
+                <a:ea typeface="Calibri" pitchFamily="34" charset="-122"/>
+                <a:cs typeface="Calibri" pitchFamily="34" charset="-120"/>
+              </a:rPr>
+              <a:t>•  起床時コンディション・睡眠の質が4条件中最高</a:t>
+            </a:r>
+            <a:endParaRPr lang="en-US" sz="1100" dirty="0"/>
+          </a:p>
+        </p:txBody>
+      </p:sp>
+      <p:sp>
+        <p:nvSpPr>
+          <p:cNvPr id="17" name="Text 15"/>
+          <p:cNvSpPr txBox="1"/>
+          <p:nvPr/>
+        </p:nvSpPr>
+        <p:spPr>
+          <a:xfrm>
+            <a:off x="6551676" y="4178808"/>
+            <a:ext cx="4814316" cy="347472"/>
+          </a:xfrm>
+          <a:prstGeom prst="rect">
+            <a:avLst/>
+          </a:prstGeom>
+          <a:noFill/>
+          <a:ln/>
+        </p:spPr>
+        <p:txBody>
+          <a:bodyPr wrap="square" lIns="0" tIns="0" rIns="0" bIns="0" rtlCol="0" anchor="ctr"/>
+          <a:lstStyle/>
+          <a:p>
+            <a:pPr indent="0" marL="0">
+              <a:buNone/>
+            </a:pPr>
+            <a:r>
+              <a:rPr lang="en-US" sz="1100" dirty="0">
+                <a:solidFill>
+                  <a:srgbClr val="1A1A1A"/>
+                </a:solidFill>
+                <a:latin typeface="Calibri" pitchFamily="34" charset="0"/>
+                <a:ea typeface="Calibri" pitchFamily="34" charset="-122"/>
+                <a:cs typeface="Calibri" pitchFamily="34" charset="-120"/>
+              </a:rPr>
+              <a:t>•  iAUC 2hが約39%減少（血糖面で最良）</a:t>
+            </a:r>
+            <a:endParaRPr lang="en-US" sz="1100" dirty="0"/>
+          </a:p>
+        </p:txBody>
+      </p:sp>
+      <p:sp>
+        <p:nvSpPr>
+          <p:cNvPr id="18" name="Text 16"/>
+          <p:cNvSpPr txBox="1"/>
+          <p:nvPr/>
+        </p:nvSpPr>
+        <p:spPr>
+          <a:xfrm>
+            <a:off x="6551676" y="4562856"/>
+            <a:ext cx="4814316" cy="347472"/>
+          </a:xfrm>
+          <a:prstGeom prst="rect">
+            <a:avLst/>
+          </a:prstGeom>
+          <a:noFill/>
+          <a:ln/>
+        </p:spPr>
+        <p:txBody>
+          <a:bodyPr wrap="square" lIns="0" tIns="0" rIns="0" bIns="0" rtlCol="0" anchor="ctr"/>
+          <a:lstStyle/>
+          <a:p>
+            <a:pPr indent="0" marL="0">
+              <a:buNone/>
+            </a:pPr>
+            <a:r>
+              <a:rPr lang="en-US" sz="1100" dirty="0">
+                <a:solidFill>
+                  <a:srgbClr val="1A1A1A"/>
+                </a:solidFill>
+                <a:latin typeface="Calibri" pitchFamily="34" charset="0"/>
+                <a:ea typeface="Calibri" pitchFamily="34" charset="-122"/>
+                <a:cs typeface="Calibri" pitchFamily="34" charset="-120"/>
+              </a:rPr>
+              <a:t>•  持久力・爆発力の自己評価は4条件中最低</a:t>
+            </a:r>
+            <a:endParaRPr lang="en-US" sz="1100" dirty="0"/>
+          </a:p>
+        </p:txBody>
+      </p:sp>
+      <p:sp>
+        <p:nvSpPr>
+          <p:cNvPr id="19" name="Shape 17"/>
+          <p:cNvSpPr/>
+          <p:nvPr/>
+        </p:nvSpPr>
+        <p:spPr>
+          <a:xfrm>
+            <a:off x="548640" y="5212080"/>
+            <a:ext cx="11091672" cy="1188720"/>
+          </a:xfrm>
+          <a:prstGeom prst="roundRect">
+            <a:avLst>
+              <a:gd name="adj" fmla="val 7692"/>
+            </a:avLst>
+          </a:prstGeom>
+          <a:solidFill>
+            <a:srgbClr val="EAF7F0"/>
+          </a:solidFill>
+          <a:ln/>
+        </p:spPr>
+      </p:sp>
+      <p:sp>
+        <p:nvSpPr>
+          <p:cNvPr id="20" name="Text 18"/>
+          <p:cNvSpPr txBox="1"/>
+          <p:nvPr/>
+        </p:nvSpPr>
+        <p:spPr>
+          <a:xfrm>
+            <a:off x="822960" y="5394960"/>
+            <a:ext cx="10543032" cy="868680"/>
+          </a:xfrm>
+          <a:prstGeom prst="rect">
+            <a:avLst/>
+          </a:prstGeom>
+          <a:noFill/>
+          <a:ln/>
+        </p:spPr>
+        <p:txBody>
+          <a:bodyPr wrap="square" lIns="0" tIns="0" rIns="0" bIns="0" rtlCol="0" anchor="ctr"/>
+          <a:lstStyle/>
+          <a:p>
+            <a:pPr indent="0" marL="0">
+              <a:buNone/>
+            </a:pPr>
+            <a:r>
+              <a:rPr lang="en-US" sz="1250" b="1" dirty="0">
+                <a:solidFill>
+                  <a:srgbClr val="0F5C3D"/>
+                </a:solidFill>
+                <a:latin typeface="Calibri" pitchFamily="34" charset="0"/>
+                <a:ea typeface="Calibri" pitchFamily="34" charset="-122"/>
+                <a:cs typeface="Calibri" pitchFamily="34" charset="-120"/>
+              </a:rPr>
+              <a:t>✓ 総合評価：現時点のデータでは「おにぎり＋スムージー（糖質ノーマル）」が最もバランスの良い候補。「おにぎり＋糖質減」は血糖・睡眠面で優れるが、持久力・爆発力の低下が見られるため、強度の高い練習日には慎重な適用が望ましい。</a:t>
+            </a:r>
+            <a:endParaRPr lang="en-US" sz="1250" dirty="0"/>
+          </a:p>
+        </p:txBody>
+      </p:sp>
+    </p:spTree>
+  </p:cSld>
+  <p:clrMapOvr>
+    <a:masterClrMapping/>
+  </p:clrMapOvr>
+</p:sld>
+</file>
+
+<file path=ppt/slides/slide13.xml><?xml version="1.0" encoding="utf-8"?>
+<p:sld xmlns:a="http://schemas.openxmlformats.org/drawingml/2006/main" xmlns:r="http://schemas.openxmlformats.org/officeDocument/2006/relationships" xmlns:p="http://schemas.openxmlformats.org/presentationml/2006/main">
+  <p:cSld name="Slide 13">
+    <p:bg>
+      <p:bgPr>
+        <a:solidFill>
           <a:srgbClr val="21295C"/>
         </a:solidFill>
       </p:bgPr>
@@ -5725,7 +9736,7 @@
                 <a:ea typeface="Calibri" pitchFamily="34" charset="-122"/>
                 <a:cs typeface="Calibri" pitchFamily="34" charset="-120"/>
               </a:rPr>
-              <a:t>総糖質量の最適化（糖質減食）はiAUC 2hを約39%削減する明確な効果あり（③の結果）</a:t>
+              <a:t>総糖質量の最適化（糖質減食）は血糖面では明確に効果あり（iAUC 2h ▼39%）が、持久力・爆発力はトレードオフの兆候あり</a:t>
             </a:r>
             <a:endParaRPr lang="en-US" sz="1400" dirty="0"/>
           </a:p>
@@ -5823,7 +9834,7 @@
                 <a:ea typeface="Calibri" pitchFamily="34" charset="-122"/>
                 <a:cs typeface="Calibri" pitchFamily="34" charset="-120"/>
               </a:rPr>
-              <a:t>頭痛・吐き気は4条件とも軽微で差がなく、血糖動態の違いが消化器症状の悪化にはつながっていない</a:t>
+              <a:t>総合評価：現時点では「おにぎり＋スムージー（糖質ノーマル）」が最もバランスの良い候補</a:t>
             </a:r>
             <a:endParaRPr lang="en-US" sz="1400" dirty="0"/>
           </a:p>
@@ -5962,7 +9973,7 @@
                 <a:ea typeface="Calibri" pitchFamily="34" charset="-122"/>
                 <a:cs typeface="Calibri" pitchFamily="34" charset="-120"/>
               </a:rPr>
-              <a:t>•  満腹感・食欲の条件差は「おにぎり同時摂取による食事量の違い」であり、形態そのものの効果ではない点に留意</a:t>
+              <a:t>•  練習時間が条件ブロックごとに大きく異なる（60〜180分）ため、今後は練習内容・時間を揃えて再検証すると食事の純粋な効果を評価しやすくなる</a:t>
             </a:r>
             <a:endParaRPr lang="en-US" sz="1250" dirty="0"/>
           </a:p>
@@ -6001,7 +10012,7 @@
                 <a:ea typeface="Calibri" pitchFamily="34" charset="-122"/>
                 <a:cs typeface="Calibri" pitchFamily="34" charset="-120"/>
               </a:rPr>
-              <a:t>•  練習時の出力（パワー・タイム等）データとの突合による血糖動態との相関検証</a:t>
+              <a:t>•  満腹感・食欲の条件差は「おにぎり同時摂取による食事量の違い」であり、形態そのものの効果ではない点に留意</a:t>
             </a:r>
             <a:endParaRPr lang="en-US" sz="1250" dirty="0"/>
           </a:p>
@@ -6040,7 +10051,7 @@
                 <a:ea typeface="Calibri" pitchFamily="34" charset="-122"/>
                 <a:cs typeface="Calibri" pitchFamily="34" charset="-120"/>
               </a:rPr>
-              <a:t>データ出典：for_AI_.xlsx／0824スケジュール.xlsx</a:t>
+              <a:t>データ出典：for_AI_.xlsx／0824スケジュール.xlsx／condition_app_2026-08-25_2026-09-07.xlsx</a:t>
             </a:r>
             <a:endParaRPr lang="en-US" sz="1000" dirty="0"/>
           </a:p>
@@ -8354,7 +12365,7 @@
                 <a:ea typeface="Calibri" pitchFamily="34" charset="-122"/>
                 <a:cs typeface="Calibri" pitchFamily="34" charset="-120"/>
               </a:rPr>
-              <a:t>固形・スムージー条件は「副食のみを先に食べ、おにぎりは約2.5〜3時間後」、おにぎり＋スムージー・糖質減条件は「おにぎりと副食を同時摂取」という異なるプロトコル。4条件は形態とタイミングが同時に変わるため、純粋な形態比較ができるのは「固形 vs スムージー（副食のみ）」に限られる。</a:t>
+              <a:t>固形・スムージー条件は「副食のみを先に食べ、おにぎりは約2.5〜3時間後」、おにぎり＋スムージー・糖質減条件は「おにぎりと副食を同時摂取」という異なるプロトコル。4条件は形態とタイミングが同時に変わるため、純粋な形態比較ができるのは「固形 vs スムージー（副食のみ）」に限られる。トレーニングはどの条件も11:00〜14:00の間に実施（1日60〜180分、条件ブロックにより変動）。</a:t>
             </a:r>
             <a:endParaRPr lang="en-US" sz="1200" dirty="0"/>
           </a:p>
@@ -8464,7 +12475,7 @@
                 <a:ea typeface="Calibri" pitchFamily="34" charset="-122"/>
                 <a:cs typeface="Calibri" pitchFamily="34" charset="-120"/>
               </a:rPr>
-              <a:t>RESULTS</a:t>
+              <a:t>METHOD</a:t>
             </a:r>
             <a:endParaRPr lang="en-US" sz="1300" dirty="0"/>
           </a:p>
@@ -8503,54 +12514,38 @@
                 <a:ea typeface="Cambria" pitchFamily="34" charset="-122"/>
                 <a:cs typeface="Cambria" pitchFamily="34" charset="-120"/>
               </a:rPr>
-              <a:t>血糖値の推移（8:00〜14:00）</a:t>
+              <a:t>実験デザイン（1日のタイムライン）</a:t>
             </a:r>
             <a:endParaRPr lang="en-US" sz="2800" dirty="0"/>
           </a:p>
         </p:txBody>
       </p:sp>
-      <p:graphicFrame>
-        <p:nvGraphicFramePr>
-          <p:cNvPr id="4" name="Chart 0" descr=""/>
-          <p:cNvGraphicFramePr/>
-          <p:nvPr/>
-        </p:nvGraphicFramePr>
-        <p:xfrm>
-          <a:off x="548640" y="1600200"/>
-          <a:ext cx="11091672" cy="4160520"/>
-        </p:xfrm>
-        <a:graphic xmlns:a="http://schemas.openxmlformats.org/drawingml/2006/main">
-          <a:graphicData uri="http://schemas.openxmlformats.org/drawingml/2006/chart">
-            <c:chart xmlns:c="http://schemas.openxmlformats.org/drawingml/2006/chart" r:id="rId1"/>
-          </a:graphicData>
-        </a:graphic>
-      </p:graphicFrame>
-      <p:sp>
-        <p:nvSpPr>
-          <p:cNvPr id="5" name="Text 2"/>
-          <p:cNvSpPr/>
-          <p:nvPr/>
-        </p:nvSpPr>
-        <p:spPr>
-          <a:xfrm>
-            <a:off x="548640" y="6473952"/>
-            <a:ext cx="11091672" cy="274320"/>
-          </a:xfrm>
-          <a:prstGeom prst="rect">
-            <a:avLst/>
-          </a:prstGeom>
-          <a:noFill/>
-          <a:ln/>
-        </p:spPr>
-        <p:txBody>
-          <a:bodyPr wrap="square" rtlCol="0" anchor="ctr"/>
+      <p:sp>
+        <p:nvSpPr>
+          <p:cNvPr id="4" name="Text 2"/>
+          <p:cNvSpPr txBox="1"/>
+          <p:nvPr/>
+        </p:nvSpPr>
+        <p:spPr>
+          <a:xfrm>
+            <a:off x="2697480" y="1572768"/>
+            <a:ext cx="640080" cy="201168"/>
+          </a:xfrm>
+          <a:prstGeom prst="rect">
+            <a:avLst/>
+          </a:prstGeom>
+          <a:noFill/>
+          <a:ln/>
+        </p:spPr>
+        <p:txBody>
+          <a:bodyPr wrap="square" lIns="0" tIns="0" rIns="0" bIns="0" rtlCol="0" anchor="ctr"/>
           <a:lstStyle/>
           <a:p>
             <a:pPr algn="l" indent="0" marL="0">
               <a:buNone/>
             </a:pPr>
             <a:r>
-              <a:rPr lang="en-US" sz="1000" dirty="0">
+              <a:rPr lang="en-US" sz="900" dirty="0">
                 <a:solidFill>
                   <a:srgbClr val="5C6570"/>
                 </a:solidFill>
@@ -8558,7 +12553,1515 @@
                 <a:ea typeface="Calibri" pitchFamily="34" charset="-122"/>
                 <a:cs typeface="Calibri" pitchFamily="34" charset="-120"/>
               </a:rPr>
-              <a:t>15分間隔・条件ごとの平均血糖値（各条件3日間平均）。</a:t>
+              <a:t>8:00</a:t>
+            </a:r>
+            <a:endParaRPr lang="en-US" sz="900" dirty="0"/>
+          </a:p>
+        </p:txBody>
+      </p:sp>
+      <p:sp>
+        <p:nvSpPr>
+          <p:cNvPr id="5" name="Shape 3"/>
+          <p:cNvSpPr/>
+          <p:nvPr/>
+        </p:nvSpPr>
+        <p:spPr>
+          <a:xfrm>
+            <a:off x="2697480" y="1792224"/>
+            <a:ext cx="0" cy="4160520"/>
+          </a:xfrm>
+          <a:prstGeom prst="line">
+            <a:avLst/>
+          </a:prstGeom>
+          <a:noFill/>
+          <a:ln w="9525">
+            <a:solidFill>
+              <a:srgbClr val="EDEBE4"/>
+            </a:solidFill>
+            <a:prstDash val="solid"/>
+          </a:ln>
+        </p:spPr>
+      </p:sp>
+      <p:sp>
+        <p:nvSpPr>
+          <p:cNvPr id="6" name="Text 4"/>
+          <p:cNvSpPr txBox="1"/>
+          <p:nvPr/>
+        </p:nvSpPr>
+        <p:spPr>
+          <a:xfrm>
+            <a:off x="3852672" y="1572768"/>
+            <a:ext cx="640080" cy="201168"/>
+          </a:xfrm>
+          <a:prstGeom prst="rect">
+            <a:avLst/>
+          </a:prstGeom>
+          <a:noFill/>
+          <a:ln/>
+        </p:spPr>
+        <p:txBody>
+          <a:bodyPr wrap="square" lIns="0" tIns="0" rIns="0" bIns="0" rtlCol="0" anchor="ctr"/>
+          <a:lstStyle/>
+          <a:p>
+            <a:pPr algn="ctr" indent="0" marL="0">
+              <a:buNone/>
+            </a:pPr>
+            <a:r>
+              <a:rPr lang="en-US" sz="900" dirty="0">
+                <a:solidFill>
+                  <a:srgbClr val="5C6570"/>
+                </a:solidFill>
+                <a:latin typeface="Calibri" pitchFamily="34" charset="0"/>
+                <a:ea typeface="Calibri" pitchFamily="34" charset="-122"/>
+                <a:cs typeface="Calibri" pitchFamily="34" charset="-120"/>
+              </a:rPr>
+              <a:t>10:00</a:t>
+            </a:r>
+            <a:endParaRPr lang="en-US" sz="900" dirty="0"/>
+          </a:p>
+        </p:txBody>
+      </p:sp>
+      <p:sp>
+        <p:nvSpPr>
+          <p:cNvPr id="7" name="Shape 5"/>
+          <p:cNvSpPr/>
+          <p:nvPr/>
+        </p:nvSpPr>
+        <p:spPr>
+          <a:xfrm>
+            <a:off x="4172712" y="1792224"/>
+            <a:ext cx="0" cy="4160520"/>
+          </a:xfrm>
+          <a:prstGeom prst="line">
+            <a:avLst/>
+          </a:prstGeom>
+          <a:noFill/>
+          <a:ln w="9525">
+            <a:solidFill>
+              <a:srgbClr val="EDEBE4"/>
+            </a:solidFill>
+            <a:prstDash val="solid"/>
+          </a:ln>
+        </p:spPr>
+      </p:sp>
+      <p:sp>
+        <p:nvSpPr>
+          <p:cNvPr id="8" name="Text 6"/>
+          <p:cNvSpPr txBox="1"/>
+          <p:nvPr/>
+        </p:nvSpPr>
+        <p:spPr>
+          <a:xfrm>
+            <a:off x="5327904" y="1572768"/>
+            <a:ext cx="640080" cy="201168"/>
+          </a:xfrm>
+          <a:prstGeom prst="rect">
+            <a:avLst/>
+          </a:prstGeom>
+          <a:noFill/>
+          <a:ln/>
+        </p:spPr>
+        <p:txBody>
+          <a:bodyPr wrap="square" lIns="0" tIns="0" rIns="0" bIns="0" rtlCol="0" anchor="ctr"/>
+          <a:lstStyle/>
+          <a:p>
+            <a:pPr algn="ctr" indent="0" marL="0">
+              <a:buNone/>
+            </a:pPr>
+            <a:r>
+              <a:rPr lang="en-US" sz="900" dirty="0">
+                <a:solidFill>
+                  <a:srgbClr val="5C6570"/>
+                </a:solidFill>
+                <a:latin typeface="Calibri" pitchFamily="34" charset="0"/>
+                <a:ea typeface="Calibri" pitchFamily="34" charset="-122"/>
+                <a:cs typeface="Calibri" pitchFamily="34" charset="-120"/>
+              </a:rPr>
+              <a:t>12:00</a:t>
+            </a:r>
+            <a:endParaRPr lang="en-US" sz="900" dirty="0"/>
+          </a:p>
+        </p:txBody>
+      </p:sp>
+      <p:sp>
+        <p:nvSpPr>
+          <p:cNvPr id="9" name="Shape 7"/>
+          <p:cNvSpPr/>
+          <p:nvPr/>
+        </p:nvSpPr>
+        <p:spPr>
+          <a:xfrm>
+            <a:off x="5647944" y="1792224"/>
+            <a:ext cx="0" cy="4160520"/>
+          </a:xfrm>
+          <a:prstGeom prst="line">
+            <a:avLst/>
+          </a:prstGeom>
+          <a:noFill/>
+          <a:ln w="9525">
+            <a:solidFill>
+              <a:srgbClr val="EDEBE4"/>
+            </a:solidFill>
+            <a:prstDash val="solid"/>
+          </a:ln>
+        </p:spPr>
+      </p:sp>
+      <p:sp>
+        <p:nvSpPr>
+          <p:cNvPr id="10" name="Text 8"/>
+          <p:cNvSpPr txBox="1"/>
+          <p:nvPr/>
+        </p:nvSpPr>
+        <p:spPr>
+          <a:xfrm>
+            <a:off x="6803136" y="1572768"/>
+            <a:ext cx="640080" cy="201168"/>
+          </a:xfrm>
+          <a:prstGeom prst="rect">
+            <a:avLst/>
+          </a:prstGeom>
+          <a:noFill/>
+          <a:ln/>
+        </p:spPr>
+        <p:txBody>
+          <a:bodyPr wrap="square" lIns="0" tIns="0" rIns="0" bIns="0" rtlCol="0" anchor="ctr"/>
+          <a:lstStyle/>
+          <a:p>
+            <a:pPr algn="ctr" indent="0" marL="0">
+              <a:buNone/>
+            </a:pPr>
+            <a:r>
+              <a:rPr lang="en-US" sz="900" dirty="0">
+                <a:solidFill>
+                  <a:srgbClr val="5C6570"/>
+                </a:solidFill>
+                <a:latin typeface="Calibri" pitchFamily="34" charset="0"/>
+                <a:ea typeface="Calibri" pitchFamily="34" charset="-122"/>
+                <a:cs typeface="Calibri" pitchFamily="34" charset="-120"/>
+              </a:rPr>
+              <a:t>14:00</a:t>
+            </a:r>
+            <a:endParaRPr lang="en-US" sz="900" dirty="0"/>
+          </a:p>
+        </p:txBody>
+      </p:sp>
+      <p:sp>
+        <p:nvSpPr>
+          <p:cNvPr id="11" name="Shape 9"/>
+          <p:cNvSpPr/>
+          <p:nvPr/>
+        </p:nvSpPr>
+        <p:spPr>
+          <a:xfrm>
+            <a:off x="7123176" y="1792224"/>
+            <a:ext cx="0" cy="4160520"/>
+          </a:xfrm>
+          <a:prstGeom prst="line">
+            <a:avLst/>
+          </a:prstGeom>
+          <a:noFill/>
+          <a:ln w="9525">
+            <a:solidFill>
+              <a:srgbClr val="EDEBE4"/>
+            </a:solidFill>
+            <a:prstDash val="solid"/>
+          </a:ln>
+        </p:spPr>
+      </p:sp>
+      <p:sp>
+        <p:nvSpPr>
+          <p:cNvPr id="12" name="Text 10"/>
+          <p:cNvSpPr txBox="1"/>
+          <p:nvPr/>
+        </p:nvSpPr>
+        <p:spPr>
+          <a:xfrm>
+            <a:off x="8278368" y="1572768"/>
+            <a:ext cx="640080" cy="201168"/>
+          </a:xfrm>
+          <a:prstGeom prst="rect">
+            <a:avLst/>
+          </a:prstGeom>
+          <a:noFill/>
+          <a:ln/>
+        </p:spPr>
+        <p:txBody>
+          <a:bodyPr wrap="square" lIns="0" tIns="0" rIns="0" bIns="0" rtlCol="0" anchor="ctr"/>
+          <a:lstStyle/>
+          <a:p>
+            <a:pPr algn="ctr" indent="0" marL="0">
+              <a:buNone/>
+            </a:pPr>
+            <a:r>
+              <a:rPr lang="en-US" sz="900" dirty="0">
+                <a:solidFill>
+                  <a:srgbClr val="5C6570"/>
+                </a:solidFill>
+                <a:latin typeface="Calibri" pitchFamily="34" charset="0"/>
+                <a:ea typeface="Calibri" pitchFamily="34" charset="-122"/>
+                <a:cs typeface="Calibri" pitchFamily="34" charset="-120"/>
+              </a:rPr>
+              <a:t>16:00</a:t>
+            </a:r>
+            <a:endParaRPr lang="en-US" sz="900" dirty="0"/>
+          </a:p>
+        </p:txBody>
+      </p:sp>
+      <p:sp>
+        <p:nvSpPr>
+          <p:cNvPr id="13" name="Shape 11"/>
+          <p:cNvSpPr/>
+          <p:nvPr/>
+        </p:nvSpPr>
+        <p:spPr>
+          <a:xfrm>
+            <a:off x="8598408" y="1792224"/>
+            <a:ext cx="0" cy="4160520"/>
+          </a:xfrm>
+          <a:prstGeom prst="line">
+            <a:avLst/>
+          </a:prstGeom>
+          <a:noFill/>
+          <a:ln w="9525">
+            <a:solidFill>
+              <a:srgbClr val="EDEBE4"/>
+            </a:solidFill>
+            <a:prstDash val="solid"/>
+          </a:ln>
+        </p:spPr>
+      </p:sp>
+      <p:sp>
+        <p:nvSpPr>
+          <p:cNvPr id="14" name="Text 12"/>
+          <p:cNvSpPr txBox="1"/>
+          <p:nvPr/>
+        </p:nvSpPr>
+        <p:spPr>
+          <a:xfrm>
+            <a:off x="9753600" y="1572768"/>
+            <a:ext cx="640080" cy="201168"/>
+          </a:xfrm>
+          <a:prstGeom prst="rect">
+            <a:avLst/>
+          </a:prstGeom>
+          <a:noFill/>
+          <a:ln/>
+        </p:spPr>
+        <p:txBody>
+          <a:bodyPr wrap="square" lIns="0" tIns="0" rIns="0" bIns="0" rtlCol="0" anchor="ctr"/>
+          <a:lstStyle/>
+          <a:p>
+            <a:pPr algn="ctr" indent="0" marL="0">
+              <a:buNone/>
+            </a:pPr>
+            <a:r>
+              <a:rPr lang="en-US" sz="900" dirty="0">
+                <a:solidFill>
+                  <a:srgbClr val="5C6570"/>
+                </a:solidFill>
+                <a:latin typeface="Calibri" pitchFamily="34" charset="0"/>
+                <a:ea typeface="Calibri" pitchFamily="34" charset="-122"/>
+                <a:cs typeface="Calibri" pitchFamily="34" charset="-120"/>
+              </a:rPr>
+              <a:t>18:00</a:t>
+            </a:r>
+            <a:endParaRPr lang="en-US" sz="900" dirty="0"/>
+          </a:p>
+        </p:txBody>
+      </p:sp>
+      <p:sp>
+        <p:nvSpPr>
+          <p:cNvPr id="15" name="Shape 13"/>
+          <p:cNvSpPr/>
+          <p:nvPr/>
+        </p:nvSpPr>
+        <p:spPr>
+          <a:xfrm>
+            <a:off x="10073640" y="1792224"/>
+            <a:ext cx="0" cy="4160520"/>
+          </a:xfrm>
+          <a:prstGeom prst="line">
+            <a:avLst/>
+          </a:prstGeom>
+          <a:noFill/>
+          <a:ln w="9525">
+            <a:solidFill>
+              <a:srgbClr val="EDEBE4"/>
+            </a:solidFill>
+            <a:prstDash val="solid"/>
+          </a:ln>
+        </p:spPr>
+      </p:sp>
+      <p:sp>
+        <p:nvSpPr>
+          <p:cNvPr id="16" name="Text 14"/>
+          <p:cNvSpPr txBox="1"/>
+          <p:nvPr/>
+        </p:nvSpPr>
+        <p:spPr>
+          <a:xfrm>
+            <a:off x="10908792" y="1572768"/>
+            <a:ext cx="640080" cy="201168"/>
+          </a:xfrm>
+          <a:prstGeom prst="rect">
+            <a:avLst/>
+          </a:prstGeom>
+          <a:noFill/>
+          <a:ln/>
+        </p:spPr>
+        <p:txBody>
+          <a:bodyPr wrap="square" lIns="0" tIns="0" rIns="0" bIns="0" rtlCol="0" anchor="ctr"/>
+          <a:lstStyle/>
+          <a:p>
+            <a:pPr algn="r" indent="0" marL="0">
+              <a:buNone/>
+            </a:pPr>
+            <a:r>
+              <a:rPr lang="en-US" sz="900" dirty="0">
+                <a:solidFill>
+                  <a:srgbClr val="5C6570"/>
+                </a:solidFill>
+                <a:latin typeface="Calibri" pitchFamily="34" charset="0"/>
+                <a:ea typeface="Calibri" pitchFamily="34" charset="-122"/>
+                <a:cs typeface="Calibri" pitchFamily="34" charset="-120"/>
+              </a:rPr>
+              <a:t>20:00</a:t>
+            </a:r>
+            <a:endParaRPr lang="en-US" sz="900" dirty="0"/>
+          </a:p>
+        </p:txBody>
+      </p:sp>
+      <p:sp>
+        <p:nvSpPr>
+          <p:cNvPr id="17" name="Shape 15"/>
+          <p:cNvSpPr/>
+          <p:nvPr/>
+        </p:nvSpPr>
+        <p:spPr>
+          <a:xfrm>
+            <a:off x="11548872" y="1792224"/>
+            <a:ext cx="0" cy="4160520"/>
+          </a:xfrm>
+          <a:prstGeom prst="line">
+            <a:avLst/>
+          </a:prstGeom>
+          <a:noFill/>
+          <a:ln w="9525">
+            <a:solidFill>
+              <a:srgbClr val="EDEBE4"/>
+            </a:solidFill>
+            <a:prstDash val="solid"/>
+          </a:ln>
+        </p:spPr>
+      </p:sp>
+      <p:sp>
+        <p:nvSpPr>
+          <p:cNvPr id="18" name="Text 16"/>
+          <p:cNvSpPr txBox="1"/>
+          <p:nvPr/>
+        </p:nvSpPr>
+        <p:spPr>
+          <a:xfrm>
+            <a:off x="548640" y="1929384"/>
+            <a:ext cx="1874520" cy="292608"/>
+          </a:xfrm>
+          <a:prstGeom prst="rect">
+            <a:avLst/>
+          </a:prstGeom>
+          <a:noFill/>
+          <a:ln/>
+        </p:spPr>
+        <p:txBody>
+          <a:bodyPr wrap="square" lIns="0" tIns="0" rIns="0" bIns="0" rtlCol="0" anchor="ctr"/>
+          <a:lstStyle/>
+          <a:p>
+            <a:pPr indent="0" marL="0">
+              <a:buNone/>
+            </a:pPr>
+            <a:r>
+              <a:rPr lang="en-US" sz="1200" b="1" dirty="0">
+                <a:solidFill>
+                  <a:srgbClr val="21295C"/>
+                </a:solidFill>
+                <a:latin typeface="Calibri" pitchFamily="34" charset="0"/>
+                <a:ea typeface="Calibri" pitchFamily="34" charset="-122"/>
+                <a:cs typeface="Calibri" pitchFamily="34" charset="-120"/>
+              </a:rPr>
+              <a:t>固形摂取</a:t>
+            </a:r>
+            <a:endParaRPr lang="en-US" sz="1200" dirty="0"/>
+          </a:p>
+        </p:txBody>
+      </p:sp>
+      <p:sp>
+        <p:nvSpPr>
+          <p:cNvPr id="19" name="Text 17"/>
+          <p:cNvSpPr txBox="1"/>
+          <p:nvPr/>
+        </p:nvSpPr>
+        <p:spPr>
+          <a:xfrm>
+            <a:off x="548640" y="2203704"/>
+            <a:ext cx="1874520" cy="237744"/>
+          </a:xfrm>
+          <a:prstGeom prst="rect">
+            <a:avLst/>
+          </a:prstGeom>
+          <a:noFill/>
+          <a:ln/>
+        </p:spPr>
+        <p:txBody>
+          <a:bodyPr wrap="square" lIns="0" tIns="0" rIns="0" bIns="0" rtlCol="0" anchor="ctr"/>
+          <a:lstStyle/>
+          <a:p>
+            <a:pPr indent="0" marL="0">
+              <a:buNone/>
+            </a:pPr>
+            <a:r>
+              <a:rPr lang="en-US" sz="950" dirty="0">
+                <a:solidFill>
+                  <a:srgbClr val="5C6570"/>
+                </a:solidFill>
+                <a:latin typeface="Calibri" pitchFamily="34" charset="0"/>
+                <a:ea typeface="Calibri" pitchFamily="34" charset="-122"/>
+                <a:cs typeface="Calibri" pitchFamily="34" charset="-120"/>
+              </a:rPr>
+              <a:t>DAY1〜3</a:t>
+            </a:r>
+            <a:endParaRPr lang="en-US" sz="950" dirty="0"/>
+          </a:p>
+        </p:txBody>
+      </p:sp>
+      <p:sp>
+        <p:nvSpPr>
+          <p:cNvPr id="20" name="Shape 18"/>
+          <p:cNvSpPr/>
+          <p:nvPr/>
+        </p:nvSpPr>
+        <p:spPr>
+          <a:xfrm>
+            <a:off x="2697480" y="2322576"/>
+            <a:ext cx="8851392" cy="0"/>
+          </a:xfrm>
+          <a:prstGeom prst="line">
+            <a:avLst/>
+          </a:prstGeom>
+          <a:noFill/>
+          <a:ln w="12700">
+            <a:solidFill>
+              <a:srgbClr val="E3E1DB"/>
+            </a:solidFill>
+            <a:prstDash val="solid"/>
+          </a:ln>
+        </p:spPr>
+      </p:sp>
+      <p:sp>
+        <p:nvSpPr>
+          <p:cNvPr id="21" name="Shape 19"/>
+          <p:cNvSpPr/>
+          <p:nvPr/>
+        </p:nvSpPr>
+        <p:spPr>
+          <a:xfrm>
+            <a:off x="2697480" y="2167128"/>
+            <a:ext cx="502920" cy="310896"/>
+          </a:xfrm>
+          <a:prstGeom prst="roundRect">
+            <a:avLst>
+              <a:gd name="adj" fmla="val 14706"/>
+            </a:avLst>
+          </a:prstGeom>
+          <a:solidFill>
+            <a:srgbClr val="2A78D6"/>
+          </a:solidFill>
+          <a:ln/>
+        </p:spPr>
+      </p:sp>
+      <p:sp>
+        <p:nvSpPr>
+          <p:cNvPr id="22" name="Text 20"/>
+          <p:cNvSpPr txBox="1"/>
+          <p:nvPr/>
+        </p:nvSpPr>
+        <p:spPr>
+          <a:xfrm>
+            <a:off x="2606040" y="1911096"/>
+            <a:ext cx="3108960" cy="237744"/>
+          </a:xfrm>
+          <a:prstGeom prst="rect">
+            <a:avLst/>
+          </a:prstGeom>
+          <a:noFill/>
+          <a:ln/>
+        </p:spPr>
+        <p:txBody>
+          <a:bodyPr wrap="square" lIns="0" tIns="0" rIns="0" bIns="0" rtlCol="0" anchor="ctr"/>
+          <a:lstStyle/>
+          <a:p>
+            <a:pPr indent="0" marL="0">
+              <a:buNone/>
+            </a:pPr>
+            <a:r>
+              <a:rPr lang="en-US" sz="850" b="1" dirty="0">
+                <a:solidFill>
+                  <a:srgbClr val="2A78D6"/>
+                </a:solidFill>
+                <a:latin typeface="Calibri" pitchFamily="34" charset="0"/>
+                <a:ea typeface="Calibri" pitchFamily="34" charset="-122"/>
+                <a:cs typeface="Calibri" pitchFamily="34" charset="-120"/>
+              </a:rPr>
+              <a:t>果物ヨーグルト（固形）</a:t>
+            </a:r>
+            <a:endParaRPr lang="en-US" sz="850" dirty="0"/>
+          </a:p>
+        </p:txBody>
+      </p:sp>
+      <p:sp>
+        <p:nvSpPr>
+          <p:cNvPr id="23" name="Shape 21"/>
+          <p:cNvSpPr/>
+          <p:nvPr/>
+        </p:nvSpPr>
+        <p:spPr>
+          <a:xfrm>
+            <a:off x="4486656" y="2267712"/>
+            <a:ext cx="109728" cy="109728"/>
+          </a:xfrm>
+          <a:prstGeom prst="oval">
+            <a:avLst/>
+          </a:prstGeom>
+          <a:solidFill>
+            <a:srgbClr val="2A78D6"/>
+          </a:solidFill>
+          <a:ln w="12700">
+            <a:solidFill>
+              <a:srgbClr val="FFFFFF"/>
+            </a:solidFill>
+            <a:prstDash val="solid"/>
+          </a:ln>
+        </p:spPr>
+      </p:sp>
+      <p:sp>
+        <p:nvSpPr>
+          <p:cNvPr id="24" name="Text 22"/>
+          <p:cNvSpPr txBox="1"/>
+          <p:nvPr/>
+        </p:nvSpPr>
+        <p:spPr>
+          <a:xfrm>
+            <a:off x="4038600" y="2505456"/>
+            <a:ext cx="1188720" cy="201168"/>
+          </a:xfrm>
+          <a:prstGeom prst="rect">
+            <a:avLst/>
+          </a:prstGeom>
+          <a:noFill/>
+          <a:ln/>
+        </p:spPr>
+        <p:txBody>
+          <a:bodyPr wrap="square" lIns="0" tIns="0" rIns="0" bIns="0" rtlCol="0" anchor="ctr"/>
+          <a:lstStyle/>
+          <a:p>
+            <a:pPr algn="ctr" indent="0" marL="0">
+              <a:buNone/>
+            </a:pPr>
+            <a:r>
+              <a:rPr lang="en-US" sz="800" dirty="0">
+                <a:solidFill>
+                  <a:srgbClr val="2A78D6"/>
+                </a:solidFill>
+                <a:latin typeface="Calibri" pitchFamily="34" charset="0"/>
+                <a:ea typeface="Calibri" pitchFamily="34" charset="-122"/>
+                <a:cs typeface="Calibri" pitchFamily="34" charset="-120"/>
+              </a:rPr>
+              <a:t>おにぎり摂取</a:t>
+            </a:r>
+            <a:endParaRPr lang="en-US" sz="800" dirty="0"/>
+          </a:p>
+        </p:txBody>
+      </p:sp>
+      <p:sp>
+        <p:nvSpPr>
+          <p:cNvPr id="25" name="Shape 23"/>
+          <p:cNvSpPr/>
+          <p:nvPr/>
+        </p:nvSpPr>
+        <p:spPr>
+          <a:xfrm>
+            <a:off x="4910328" y="2167128"/>
+            <a:ext cx="2212848" cy="310896"/>
+          </a:xfrm>
+          <a:prstGeom prst="roundRect">
+            <a:avLst>
+              <a:gd name="adj" fmla="val 14706"/>
+            </a:avLst>
+          </a:prstGeom>
+          <a:solidFill>
+            <a:srgbClr val="21295C">
+              <a:alpha val="75000"/>
+            </a:srgbClr>
+          </a:solidFill>
+          <a:ln/>
+        </p:spPr>
+      </p:sp>
+      <p:sp>
+        <p:nvSpPr>
+          <p:cNvPr id="26" name="Shape 24"/>
+          <p:cNvSpPr/>
+          <p:nvPr/>
+        </p:nvSpPr>
+        <p:spPr>
+          <a:xfrm>
+            <a:off x="11498580" y="2272284"/>
+            <a:ext cx="100584" cy="100584"/>
+          </a:xfrm>
+          <a:prstGeom prst="oval">
+            <a:avLst/>
+          </a:prstGeom>
+          <a:solidFill>
+            <a:srgbClr val="5C6570"/>
+          </a:solidFill>
+          <a:ln/>
+        </p:spPr>
+      </p:sp>
+      <p:sp>
+        <p:nvSpPr>
+          <p:cNvPr id="27" name="Text 25"/>
+          <p:cNvSpPr txBox="1"/>
+          <p:nvPr/>
+        </p:nvSpPr>
+        <p:spPr>
+          <a:xfrm>
+            <a:off x="548640" y="2862072"/>
+            <a:ext cx="1874520" cy="292608"/>
+          </a:xfrm>
+          <a:prstGeom prst="rect">
+            <a:avLst/>
+          </a:prstGeom>
+          <a:noFill/>
+          <a:ln/>
+        </p:spPr>
+        <p:txBody>
+          <a:bodyPr wrap="square" lIns="0" tIns="0" rIns="0" bIns="0" rtlCol="0" anchor="ctr"/>
+          <a:lstStyle/>
+          <a:p>
+            <a:pPr indent="0" marL="0">
+              <a:buNone/>
+            </a:pPr>
+            <a:r>
+              <a:rPr lang="en-US" sz="1200" b="1" dirty="0">
+                <a:solidFill>
+                  <a:srgbClr val="21295C"/>
+                </a:solidFill>
+                <a:latin typeface="Calibri" pitchFamily="34" charset="0"/>
+                <a:ea typeface="Calibri" pitchFamily="34" charset="-122"/>
+                <a:cs typeface="Calibri" pitchFamily="34" charset="-120"/>
+              </a:rPr>
+              <a:t>スムージー摂取</a:t>
+            </a:r>
+            <a:endParaRPr lang="en-US" sz="1200" dirty="0"/>
+          </a:p>
+        </p:txBody>
+      </p:sp>
+      <p:sp>
+        <p:nvSpPr>
+          <p:cNvPr id="28" name="Text 26"/>
+          <p:cNvSpPr txBox="1"/>
+          <p:nvPr/>
+        </p:nvSpPr>
+        <p:spPr>
+          <a:xfrm>
+            <a:off x="548640" y="3136392"/>
+            <a:ext cx="1874520" cy="237744"/>
+          </a:xfrm>
+          <a:prstGeom prst="rect">
+            <a:avLst/>
+          </a:prstGeom>
+          <a:noFill/>
+          <a:ln/>
+        </p:spPr>
+        <p:txBody>
+          <a:bodyPr wrap="square" lIns="0" tIns="0" rIns="0" bIns="0" rtlCol="0" anchor="ctr"/>
+          <a:lstStyle/>
+          <a:p>
+            <a:pPr indent="0" marL="0">
+              <a:buNone/>
+            </a:pPr>
+            <a:r>
+              <a:rPr lang="en-US" sz="950" dirty="0">
+                <a:solidFill>
+                  <a:srgbClr val="5C6570"/>
+                </a:solidFill>
+                <a:latin typeface="Calibri" pitchFamily="34" charset="0"/>
+                <a:ea typeface="Calibri" pitchFamily="34" charset="-122"/>
+                <a:cs typeface="Calibri" pitchFamily="34" charset="-120"/>
+              </a:rPr>
+              <a:t>DAY4〜6</a:t>
+            </a:r>
+            <a:endParaRPr lang="en-US" sz="950" dirty="0"/>
+          </a:p>
+        </p:txBody>
+      </p:sp>
+      <p:sp>
+        <p:nvSpPr>
+          <p:cNvPr id="29" name="Shape 27"/>
+          <p:cNvSpPr/>
+          <p:nvPr/>
+        </p:nvSpPr>
+        <p:spPr>
+          <a:xfrm>
+            <a:off x="2697480" y="3255264"/>
+            <a:ext cx="8851392" cy="0"/>
+          </a:xfrm>
+          <a:prstGeom prst="line">
+            <a:avLst/>
+          </a:prstGeom>
+          <a:noFill/>
+          <a:ln w="12700">
+            <a:solidFill>
+              <a:srgbClr val="E3E1DB"/>
+            </a:solidFill>
+            <a:prstDash val="solid"/>
+          </a:ln>
+        </p:spPr>
+      </p:sp>
+      <p:sp>
+        <p:nvSpPr>
+          <p:cNvPr id="30" name="Shape 28"/>
+          <p:cNvSpPr/>
+          <p:nvPr/>
+        </p:nvSpPr>
+        <p:spPr>
+          <a:xfrm>
+            <a:off x="2697480" y="3099816"/>
+            <a:ext cx="502920" cy="310896"/>
+          </a:xfrm>
+          <a:prstGeom prst="roundRect">
+            <a:avLst>
+              <a:gd name="adj" fmla="val 14706"/>
+            </a:avLst>
+          </a:prstGeom>
+          <a:solidFill>
+            <a:srgbClr val="EB6834"/>
+          </a:solidFill>
+          <a:ln/>
+        </p:spPr>
+      </p:sp>
+      <p:sp>
+        <p:nvSpPr>
+          <p:cNvPr id="31" name="Text 29"/>
+          <p:cNvSpPr txBox="1"/>
+          <p:nvPr/>
+        </p:nvSpPr>
+        <p:spPr>
+          <a:xfrm>
+            <a:off x="2606040" y="2843784"/>
+            <a:ext cx="3108960" cy="237744"/>
+          </a:xfrm>
+          <a:prstGeom prst="rect">
+            <a:avLst/>
+          </a:prstGeom>
+          <a:noFill/>
+          <a:ln/>
+        </p:spPr>
+        <p:txBody>
+          <a:bodyPr wrap="square" lIns="0" tIns="0" rIns="0" bIns="0" rtlCol="0" anchor="ctr"/>
+          <a:lstStyle/>
+          <a:p>
+            <a:pPr indent="0" marL="0">
+              <a:buNone/>
+            </a:pPr>
+            <a:r>
+              <a:rPr lang="en-US" sz="850" b="1" dirty="0">
+                <a:solidFill>
+                  <a:srgbClr val="EB6834"/>
+                </a:solidFill>
+                <a:latin typeface="Calibri" pitchFamily="34" charset="0"/>
+                <a:ea typeface="Calibri" pitchFamily="34" charset="-122"/>
+                <a:cs typeface="Calibri" pitchFamily="34" charset="-120"/>
+              </a:rPr>
+              <a:t>果物ヨーグルト（スムージー）</a:t>
+            </a:r>
+            <a:endParaRPr lang="en-US" sz="850" dirty="0"/>
+          </a:p>
+        </p:txBody>
+      </p:sp>
+      <p:sp>
+        <p:nvSpPr>
+          <p:cNvPr id="32" name="Shape 30"/>
+          <p:cNvSpPr/>
+          <p:nvPr/>
+        </p:nvSpPr>
+        <p:spPr>
+          <a:xfrm>
+            <a:off x="4486656" y="3200400"/>
+            <a:ext cx="109728" cy="109728"/>
+          </a:xfrm>
+          <a:prstGeom prst="oval">
+            <a:avLst/>
+          </a:prstGeom>
+          <a:solidFill>
+            <a:srgbClr val="EB6834"/>
+          </a:solidFill>
+          <a:ln w="12700">
+            <a:solidFill>
+              <a:srgbClr val="FFFFFF"/>
+            </a:solidFill>
+            <a:prstDash val="solid"/>
+          </a:ln>
+        </p:spPr>
+      </p:sp>
+      <p:sp>
+        <p:nvSpPr>
+          <p:cNvPr id="33" name="Text 31"/>
+          <p:cNvSpPr txBox="1"/>
+          <p:nvPr/>
+        </p:nvSpPr>
+        <p:spPr>
+          <a:xfrm>
+            <a:off x="4038600" y="3438144"/>
+            <a:ext cx="1188720" cy="201168"/>
+          </a:xfrm>
+          <a:prstGeom prst="rect">
+            <a:avLst/>
+          </a:prstGeom>
+          <a:noFill/>
+          <a:ln/>
+        </p:spPr>
+        <p:txBody>
+          <a:bodyPr wrap="square" lIns="0" tIns="0" rIns="0" bIns="0" rtlCol="0" anchor="ctr"/>
+          <a:lstStyle/>
+          <a:p>
+            <a:pPr algn="ctr" indent="0" marL="0">
+              <a:buNone/>
+            </a:pPr>
+            <a:r>
+              <a:rPr lang="en-US" sz="800" dirty="0">
+                <a:solidFill>
+                  <a:srgbClr val="EB6834"/>
+                </a:solidFill>
+                <a:latin typeface="Calibri" pitchFamily="34" charset="0"/>
+                <a:ea typeface="Calibri" pitchFamily="34" charset="-122"/>
+                <a:cs typeface="Calibri" pitchFamily="34" charset="-120"/>
+              </a:rPr>
+              <a:t>おにぎり摂取</a:t>
+            </a:r>
+            <a:endParaRPr lang="en-US" sz="800" dirty="0"/>
+          </a:p>
+        </p:txBody>
+      </p:sp>
+      <p:sp>
+        <p:nvSpPr>
+          <p:cNvPr id="34" name="Shape 32"/>
+          <p:cNvSpPr/>
+          <p:nvPr/>
+        </p:nvSpPr>
+        <p:spPr>
+          <a:xfrm>
+            <a:off x="4910328" y="3099816"/>
+            <a:ext cx="2212848" cy="310896"/>
+          </a:xfrm>
+          <a:prstGeom prst="roundRect">
+            <a:avLst>
+              <a:gd name="adj" fmla="val 14706"/>
+            </a:avLst>
+          </a:prstGeom>
+          <a:solidFill>
+            <a:srgbClr val="21295C">
+              <a:alpha val="75000"/>
+            </a:srgbClr>
+          </a:solidFill>
+          <a:ln/>
+        </p:spPr>
+      </p:sp>
+      <p:sp>
+        <p:nvSpPr>
+          <p:cNvPr id="35" name="Shape 33"/>
+          <p:cNvSpPr/>
+          <p:nvPr/>
+        </p:nvSpPr>
+        <p:spPr>
+          <a:xfrm>
+            <a:off x="11498580" y="3204972"/>
+            <a:ext cx="100584" cy="100584"/>
+          </a:xfrm>
+          <a:prstGeom prst="oval">
+            <a:avLst/>
+          </a:prstGeom>
+          <a:solidFill>
+            <a:srgbClr val="5C6570"/>
+          </a:solidFill>
+          <a:ln/>
+        </p:spPr>
+      </p:sp>
+      <p:sp>
+        <p:nvSpPr>
+          <p:cNvPr id="36" name="Text 34"/>
+          <p:cNvSpPr txBox="1"/>
+          <p:nvPr/>
+        </p:nvSpPr>
+        <p:spPr>
+          <a:xfrm>
+            <a:off x="548640" y="3794760"/>
+            <a:ext cx="1874520" cy="292608"/>
+          </a:xfrm>
+          <a:prstGeom prst="rect">
+            <a:avLst/>
+          </a:prstGeom>
+          <a:noFill/>
+          <a:ln/>
+        </p:spPr>
+        <p:txBody>
+          <a:bodyPr wrap="square" lIns="0" tIns="0" rIns="0" bIns="0" rtlCol="0" anchor="ctr"/>
+          <a:lstStyle/>
+          <a:p>
+            <a:pPr indent="0" marL="0">
+              <a:buNone/>
+            </a:pPr>
+            <a:r>
+              <a:rPr lang="en-US" sz="1200" b="1" dirty="0">
+                <a:solidFill>
+                  <a:srgbClr val="21295C"/>
+                </a:solidFill>
+                <a:latin typeface="Calibri" pitchFamily="34" charset="0"/>
+                <a:ea typeface="Calibri" pitchFamily="34" charset="-122"/>
+                <a:cs typeface="Calibri" pitchFamily="34" charset="-120"/>
+              </a:rPr>
+              <a:t>おにぎり＋スムージー</a:t>
+            </a:r>
+            <a:endParaRPr lang="en-US" sz="1200" dirty="0"/>
+          </a:p>
+        </p:txBody>
+      </p:sp>
+      <p:sp>
+        <p:nvSpPr>
+          <p:cNvPr id="37" name="Text 35"/>
+          <p:cNvSpPr txBox="1"/>
+          <p:nvPr/>
+        </p:nvSpPr>
+        <p:spPr>
+          <a:xfrm>
+            <a:off x="548640" y="4069080"/>
+            <a:ext cx="1874520" cy="237744"/>
+          </a:xfrm>
+          <a:prstGeom prst="rect">
+            <a:avLst/>
+          </a:prstGeom>
+          <a:noFill/>
+          <a:ln/>
+        </p:spPr>
+        <p:txBody>
+          <a:bodyPr wrap="square" lIns="0" tIns="0" rIns="0" bIns="0" rtlCol="0" anchor="ctr"/>
+          <a:lstStyle/>
+          <a:p>
+            <a:pPr indent="0" marL="0">
+              <a:buNone/>
+            </a:pPr>
+            <a:r>
+              <a:rPr lang="en-US" sz="950" dirty="0">
+                <a:solidFill>
+                  <a:srgbClr val="5C6570"/>
+                </a:solidFill>
+                <a:latin typeface="Calibri" pitchFamily="34" charset="0"/>
+                <a:ea typeface="Calibri" pitchFamily="34" charset="-122"/>
+                <a:cs typeface="Calibri" pitchFamily="34" charset="-120"/>
+              </a:rPr>
+              <a:t>DAY8〜10</a:t>
+            </a:r>
+            <a:endParaRPr lang="en-US" sz="950" dirty="0"/>
+          </a:p>
+        </p:txBody>
+      </p:sp>
+      <p:sp>
+        <p:nvSpPr>
+          <p:cNvPr id="38" name="Shape 36"/>
+          <p:cNvSpPr/>
+          <p:nvPr/>
+        </p:nvSpPr>
+        <p:spPr>
+          <a:xfrm>
+            <a:off x="2697480" y="4187952"/>
+            <a:ext cx="8851392" cy="0"/>
+          </a:xfrm>
+          <a:prstGeom prst="line">
+            <a:avLst/>
+          </a:prstGeom>
+          <a:noFill/>
+          <a:ln w="12700">
+            <a:solidFill>
+              <a:srgbClr val="E3E1DB"/>
+            </a:solidFill>
+            <a:prstDash val="solid"/>
+          </a:ln>
+        </p:spPr>
+      </p:sp>
+      <p:sp>
+        <p:nvSpPr>
+          <p:cNvPr id="39" name="Shape 37"/>
+          <p:cNvSpPr/>
+          <p:nvPr/>
+        </p:nvSpPr>
+        <p:spPr>
+          <a:xfrm>
+            <a:off x="2697480" y="4032504"/>
+            <a:ext cx="502920" cy="310896"/>
+          </a:xfrm>
+          <a:prstGeom prst="roundRect">
+            <a:avLst>
+              <a:gd name="adj" fmla="val 14706"/>
+            </a:avLst>
+          </a:prstGeom>
+          <a:solidFill>
+            <a:srgbClr val="1BAF7A"/>
+          </a:solidFill>
+          <a:ln/>
+        </p:spPr>
+      </p:sp>
+      <p:sp>
+        <p:nvSpPr>
+          <p:cNvPr id="40" name="Text 38"/>
+          <p:cNvSpPr txBox="1"/>
+          <p:nvPr/>
+        </p:nvSpPr>
+        <p:spPr>
+          <a:xfrm>
+            <a:off x="2606040" y="3776472"/>
+            <a:ext cx="3108960" cy="237744"/>
+          </a:xfrm>
+          <a:prstGeom prst="rect">
+            <a:avLst/>
+          </a:prstGeom>
+          <a:noFill/>
+          <a:ln/>
+        </p:spPr>
+        <p:txBody>
+          <a:bodyPr wrap="square" lIns="0" tIns="0" rIns="0" bIns="0" rtlCol="0" anchor="ctr"/>
+          <a:lstStyle/>
+          <a:p>
+            <a:pPr indent="0" marL="0">
+              <a:buNone/>
+            </a:pPr>
+            <a:r>
+              <a:rPr lang="en-US" sz="850" b="1" dirty="0">
+                <a:solidFill>
+                  <a:srgbClr val="1BAF7A"/>
+                </a:solidFill>
+                <a:latin typeface="Calibri" pitchFamily="34" charset="0"/>
+                <a:ea typeface="Calibri" pitchFamily="34" charset="-122"/>
+                <a:cs typeface="Calibri" pitchFamily="34" charset="-120"/>
+              </a:rPr>
+              <a:t>おにぎり＋スムージー（同時）</a:t>
+            </a:r>
+            <a:endParaRPr lang="en-US" sz="850" dirty="0"/>
+          </a:p>
+        </p:txBody>
+      </p:sp>
+      <p:sp>
+        <p:nvSpPr>
+          <p:cNvPr id="41" name="Shape 39"/>
+          <p:cNvSpPr/>
+          <p:nvPr/>
+        </p:nvSpPr>
+        <p:spPr>
+          <a:xfrm>
+            <a:off x="4910328" y="4032504"/>
+            <a:ext cx="2212848" cy="310896"/>
+          </a:xfrm>
+          <a:prstGeom prst="roundRect">
+            <a:avLst>
+              <a:gd name="adj" fmla="val 14706"/>
+            </a:avLst>
+          </a:prstGeom>
+          <a:solidFill>
+            <a:srgbClr val="21295C">
+              <a:alpha val="75000"/>
+            </a:srgbClr>
+          </a:solidFill>
+          <a:ln/>
+        </p:spPr>
+      </p:sp>
+      <p:sp>
+        <p:nvSpPr>
+          <p:cNvPr id="42" name="Shape 40"/>
+          <p:cNvSpPr/>
+          <p:nvPr/>
+        </p:nvSpPr>
+        <p:spPr>
+          <a:xfrm>
+            <a:off x="11498580" y="4137660"/>
+            <a:ext cx="100584" cy="100584"/>
+          </a:xfrm>
+          <a:prstGeom prst="oval">
+            <a:avLst/>
+          </a:prstGeom>
+          <a:solidFill>
+            <a:srgbClr val="5C6570"/>
+          </a:solidFill>
+          <a:ln/>
+        </p:spPr>
+      </p:sp>
+      <p:sp>
+        <p:nvSpPr>
+          <p:cNvPr id="43" name="Text 41"/>
+          <p:cNvSpPr txBox="1"/>
+          <p:nvPr/>
+        </p:nvSpPr>
+        <p:spPr>
+          <a:xfrm>
+            <a:off x="548640" y="4727448"/>
+            <a:ext cx="1874520" cy="292608"/>
+          </a:xfrm>
+          <a:prstGeom prst="rect">
+            <a:avLst/>
+          </a:prstGeom>
+          <a:noFill/>
+          <a:ln/>
+        </p:spPr>
+        <p:txBody>
+          <a:bodyPr wrap="square" lIns="0" tIns="0" rIns="0" bIns="0" rtlCol="0" anchor="ctr"/>
+          <a:lstStyle/>
+          <a:p>
+            <a:pPr indent="0" marL="0">
+              <a:buNone/>
+            </a:pPr>
+            <a:r>
+              <a:rPr lang="en-US" sz="1200" b="1" dirty="0">
+                <a:solidFill>
+                  <a:srgbClr val="21295C"/>
+                </a:solidFill>
+                <a:latin typeface="Calibri" pitchFamily="34" charset="0"/>
+                <a:ea typeface="Calibri" pitchFamily="34" charset="-122"/>
+                <a:cs typeface="Calibri" pitchFamily="34" charset="-120"/>
+              </a:rPr>
+              <a:t>おにぎり＋糖質減</a:t>
+            </a:r>
+            <a:endParaRPr lang="en-US" sz="1200" dirty="0"/>
+          </a:p>
+        </p:txBody>
+      </p:sp>
+      <p:sp>
+        <p:nvSpPr>
+          <p:cNvPr id="44" name="Text 42"/>
+          <p:cNvSpPr txBox="1"/>
+          <p:nvPr/>
+        </p:nvSpPr>
+        <p:spPr>
+          <a:xfrm>
+            <a:off x="548640" y="5001768"/>
+            <a:ext cx="1874520" cy="237744"/>
+          </a:xfrm>
+          <a:prstGeom prst="rect">
+            <a:avLst/>
+          </a:prstGeom>
+          <a:noFill/>
+          <a:ln/>
+        </p:spPr>
+        <p:txBody>
+          <a:bodyPr wrap="square" lIns="0" tIns="0" rIns="0" bIns="0" rtlCol="0" anchor="ctr"/>
+          <a:lstStyle/>
+          <a:p>
+            <a:pPr indent="0" marL="0">
+              <a:buNone/>
+            </a:pPr>
+            <a:r>
+              <a:rPr lang="en-US" sz="950" dirty="0">
+                <a:solidFill>
+                  <a:srgbClr val="5C6570"/>
+                </a:solidFill>
+                <a:latin typeface="Calibri" pitchFamily="34" charset="0"/>
+                <a:ea typeface="Calibri" pitchFamily="34" charset="-122"/>
+                <a:cs typeface="Calibri" pitchFamily="34" charset="-120"/>
+              </a:rPr>
+              <a:t>DAY11〜13</a:t>
+            </a:r>
+            <a:endParaRPr lang="en-US" sz="950" dirty="0"/>
+          </a:p>
+        </p:txBody>
+      </p:sp>
+      <p:sp>
+        <p:nvSpPr>
+          <p:cNvPr id="45" name="Shape 43"/>
+          <p:cNvSpPr/>
+          <p:nvPr/>
+        </p:nvSpPr>
+        <p:spPr>
+          <a:xfrm>
+            <a:off x="2697480" y="5120640"/>
+            <a:ext cx="8851392" cy="0"/>
+          </a:xfrm>
+          <a:prstGeom prst="line">
+            <a:avLst/>
+          </a:prstGeom>
+          <a:noFill/>
+          <a:ln w="12700">
+            <a:solidFill>
+              <a:srgbClr val="E3E1DB"/>
+            </a:solidFill>
+            <a:prstDash val="solid"/>
+          </a:ln>
+        </p:spPr>
+      </p:sp>
+      <p:sp>
+        <p:nvSpPr>
+          <p:cNvPr id="46" name="Shape 44"/>
+          <p:cNvSpPr/>
+          <p:nvPr/>
+        </p:nvSpPr>
+        <p:spPr>
+          <a:xfrm>
+            <a:off x="2697480" y="4965192"/>
+            <a:ext cx="502920" cy="310896"/>
+          </a:xfrm>
+          <a:prstGeom prst="roundRect">
+            <a:avLst>
+              <a:gd name="adj" fmla="val 14706"/>
+            </a:avLst>
+          </a:prstGeom>
+          <a:solidFill>
+            <a:srgbClr val="EDA100"/>
+          </a:solidFill>
+          <a:ln/>
+        </p:spPr>
+      </p:sp>
+      <p:sp>
+        <p:nvSpPr>
+          <p:cNvPr id="47" name="Text 45"/>
+          <p:cNvSpPr txBox="1"/>
+          <p:nvPr/>
+        </p:nvSpPr>
+        <p:spPr>
+          <a:xfrm>
+            <a:off x="2606040" y="4709160"/>
+            <a:ext cx="3108960" cy="237744"/>
+          </a:xfrm>
+          <a:prstGeom prst="rect">
+            <a:avLst/>
+          </a:prstGeom>
+          <a:noFill/>
+          <a:ln/>
+        </p:spPr>
+        <p:txBody>
+          <a:bodyPr wrap="square" lIns="0" tIns="0" rIns="0" bIns="0" rtlCol="0" anchor="ctr"/>
+          <a:lstStyle/>
+          <a:p>
+            <a:pPr indent="0" marL="0">
+              <a:buNone/>
+            </a:pPr>
+            <a:r>
+              <a:rPr lang="en-US" sz="850" b="1" dirty="0">
+                <a:solidFill>
+                  <a:srgbClr val="EDA100"/>
+                </a:solidFill>
+                <a:latin typeface="Calibri" pitchFamily="34" charset="0"/>
+                <a:ea typeface="Calibri" pitchFamily="34" charset="-122"/>
+                <a:cs typeface="Calibri" pitchFamily="34" charset="-120"/>
+              </a:rPr>
+              <a:t>おにぎり＋スムージー糖質減（同時）</a:t>
+            </a:r>
+            <a:endParaRPr lang="en-US" sz="850" dirty="0"/>
+          </a:p>
+        </p:txBody>
+      </p:sp>
+      <p:sp>
+        <p:nvSpPr>
+          <p:cNvPr id="48" name="Shape 46"/>
+          <p:cNvSpPr/>
+          <p:nvPr/>
+        </p:nvSpPr>
+        <p:spPr>
+          <a:xfrm>
+            <a:off x="4910328" y="4965192"/>
+            <a:ext cx="2212848" cy="310896"/>
+          </a:xfrm>
+          <a:prstGeom prst="roundRect">
+            <a:avLst>
+              <a:gd name="adj" fmla="val 14706"/>
+            </a:avLst>
+          </a:prstGeom>
+          <a:solidFill>
+            <a:srgbClr val="21295C">
+              <a:alpha val="75000"/>
+            </a:srgbClr>
+          </a:solidFill>
+          <a:ln/>
+        </p:spPr>
+      </p:sp>
+      <p:sp>
+        <p:nvSpPr>
+          <p:cNvPr id="49" name="Shape 47"/>
+          <p:cNvSpPr/>
+          <p:nvPr/>
+        </p:nvSpPr>
+        <p:spPr>
+          <a:xfrm>
+            <a:off x="11498580" y="5070348"/>
+            <a:ext cx="100584" cy="100584"/>
+          </a:xfrm>
+          <a:prstGeom prst="oval">
+            <a:avLst/>
+          </a:prstGeom>
+          <a:solidFill>
+            <a:srgbClr val="5C6570"/>
+          </a:solidFill>
+          <a:ln/>
+        </p:spPr>
+      </p:sp>
+      <p:sp>
+        <p:nvSpPr>
+          <p:cNvPr id="50" name="Shape 48"/>
+          <p:cNvSpPr/>
+          <p:nvPr/>
+        </p:nvSpPr>
+        <p:spPr>
+          <a:xfrm>
+            <a:off x="548640" y="5742432"/>
+            <a:ext cx="274320" cy="146304"/>
+          </a:xfrm>
+          <a:prstGeom prst="roundRect">
+            <a:avLst>
+              <a:gd name="adj" fmla="val 25000"/>
+            </a:avLst>
+          </a:prstGeom>
+          <a:solidFill>
+            <a:srgbClr val="21295C">
+              <a:alpha val="75000"/>
+            </a:srgbClr>
+          </a:solidFill>
+          <a:ln/>
+        </p:spPr>
+      </p:sp>
+      <p:sp>
+        <p:nvSpPr>
+          <p:cNvPr id="51" name="Text 49"/>
+          <p:cNvSpPr txBox="1"/>
+          <p:nvPr/>
+        </p:nvSpPr>
+        <p:spPr>
+          <a:xfrm>
+            <a:off x="896112" y="5660136"/>
+            <a:ext cx="5029200" cy="292608"/>
+          </a:xfrm>
+          <a:prstGeom prst="rect">
+            <a:avLst/>
+          </a:prstGeom>
+          <a:noFill/>
+          <a:ln/>
+        </p:spPr>
+        <p:txBody>
+          <a:bodyPr wrap="square" lIns="0" tIns="0" rIns="0" bIns="0" rtlCol="0" anchor="ctr"/>
+          <a:lstStyle/>
+          <a:p>
+            <a:pPr indent="0" marL="0">
+              <a:buNone/>
+            </a:pPr>
+            <a:r>
+              <a:rPr lang="en-US" sz="1000" dirty="0">
+                <a:solidFill>
+                  <a:srgbClr val="1A1A1A"/>
+                </a:solidFill>
+                <a:latin typeface="Calibri" pitchFamily="34" charset="0"/>
+                <a:ea typeface="Calibri" pitchFamily="34" charset="-122"/>
+                <a:cs typeface="Calibri" pitchFamily="34" charset="-120"/>
+              </a:rPr>
+              <a:t>トレーニング（60〜180分、11:00〜14:00の間で実施）</a:t>
+            </a:r>
+            <a:endParaRPr lang="en-US" sz="1000" dirty="0"/>
+          </a:p>
+        </p:txBody>
+      </p:sp>
+      <p:sp>
+        <p:nvSpPr>
+          <p:cNvPr id="52" name="Shape 50"/>
+          <p:cNvSpPr/>
+          <p:nvPr/>
+        </p:nvSpPr>
+        <p:spPr>
+          <a:xfrm>
+            <a:off x="6309360" y="5769864"/>
+            <a:ext cx="100584" cy="100584"/>
+          </a:xfrm>
+          <a:prstGeom prst="oval">
+            <a:avLst/>
+          </a:prstGeom>
+          <a:solidFill>
+            <a:srgbClr val="5C6570"/>
+          </a:solidFill>
+          <a:ln/>
+        </p:spPr>
+      </p:sp>
+      <p:sp>
+        <p:nvSpPr>
+          <p:cNvPr id="53" name="Text 51"/>
+          <p:cNvSpPr txBox="1"/>
+          <p:nvPr/>
+        </p:nvSpPr>
+        <p:spPr>
+          <a:xfrm>
+            <a:off x="6537960" y="5660136"/>
+            <a:ext cx="5029200" cy="292608"/>
+          </a:xfrm>
+          <a:prstGeom prst="rect">
+            <a:avLst/>
+          </a:prstGeom>
+          <a:noFill/>
+          <a:ln/>
+        </p:spPr>
+        <p:txBody>
+          <a:bodyPr wrap="square" lIns="0" tIns="0" rIns="0" bIns="0" rtlCol="0" anchor="ctr"/>
+          <a:lstStyle/>
+          <a:p>
+            <a:pPr indent="0" marL="0">
+              <a:buNone/>
+            </a:pPr>
+            <a:r>
+              <a:rPr lang="en-US" sz="1000" dirty="0">
+                <a:solidFill>
+                  <a:srgbClr val="1A1A1A"/>
+                </a:solidFill>
+                <a:latin typeface="Calibri" pitchFamily="34" charset="0"/>
+                <a:ea typeface="Calibri" pitchFamily="34" charset="-122"/>
+                <a:cs typeface="Calibri" pitchFamily="34" charset="-120"/>
+              </a:rPr>
+              <a:t>20:00 夕食＋夜のコンディション記録（毎日共通）</a:t>
+            </a:r>
+            <a:endParaRPr lang="en-US" sz="1000" dirty="0"/>
+          </a:p>
+        </p:txBody>
+      </p:sp>
+      <p:sp>
+        <p:nvSpPr>
+          <p:cNvPr id="54" name="Text 52"/>
+          <p:cNvSpPr/>
+          <p:nvPr/>
+        </p:nvSpPr>
+        <p:spPr>
+          <a:xfrm>
+            <a:off x="548640" y="6473952"/>
+            <a:ext cx="11091672" cy="274320"/>
+          </a:xfrm>
+          <a:prstGeom prst="rect">
+            <a:avLst/>
+          </a:prstGeom>
+          <a:noFill/>
+          <a:ln/>
+        </p:spPr>
+        <p:txBody>
+          <a:bodyPr wrap="square" rtlCol="0" anchor="ctr"/>
+          <a:lstStyle/>
+          <a:p>
+            <a:pPr algn="l" indent="0" marL="0">
+              <a:buNone/>
+            </a:pPr>
+            <a:r>
+              <a:rPr lang="en-US" sz="1000" dirty="0">
+                <a:solidFill>
+                  <a:srgbClr val="5C6570"/>
+                </a:solidFill>
+                <a:latin typeface="Calibri" pitchFamily="34" charset="0"/>
+                <a:ea typeface="Calibri" pitchFamily="34" charset="-122"/>
+                <a:cs typeface="Calibri" pitchFamily="34" charset="-120"/>
+              </a:rPr>
+              <a:t>色付きブロック＝朝の被験食摂取（8:00）。固形・スムージー条件はおにぎりを約2.5時間後に別途摂取。灰色帯＝全条件共通のトレーニング時間帯。</a:t>
             </a:r>
             <a:endParaRPr lang="en-US" sz="1000" dirty="0"/>
           </a:p>
@@ -8668,99 +14171,21 @@
                 <a:ea typeface="Cambria" pitchFamily="34" charset="-122"/>
                 <a:cs typeface="Cambria" pitchFamily="34" charset="-120"/>
               </a:rPr>
-              <a:t>主要指標の比較</a:t>
+              <a:t>血糖値の推移（8:00〜14:00）</a:t>
             </a:r>
             <a:endParaRPr lang="en-US" sz="2800" dirty="0"/>
-          </a:p>
-        </p:txBody>
-      </p:sp>
-      <p:sp>
-        <p:nvSpPr>
-          <p:cNvPr id="4" name="Text 2"/>
-          <p:cNvSpPr txBox="1"/>
-          <p:nvPr/>
-        </p:nvSpPr>
-        <p:spPr>
-          <a:xfrm>
-            <a:off x="548640" y="1572768"/>
-            <a:ext cx="3429000" cy="274320"/>
-          </a:xfrm>
-          <a:prstGeom prst="rect">
-            <a:avLst/>
-          </a:prstGeom>
-          <a:noFill/>
-          <a:ln/>
-        </p:spPr>
-        <p:txBody>
-          <a:bodyPr wrap="square" lIns="0" tIns="0" rIns="0" bIns="0" rtlCol="0" anchor="ctr"/>
-          <a:lstStyle/>
-          <a:p>
-            <a:pPr indent="0" marL="0">
-              <a:buNone/>
-            </a:pPr>
-            <a:r>
-              <a:rPr lang="en-US" sz="1300" b="1" dirty="0">
-                <a:solidFill>
-                  <a:srgbClr val="21295C"/>
-                </a:solidFill>
-                <a:latin typeface="Calibri" pitchFamily="34" charset="0"/>
-                <a:ea typeface="Calibri" pitchFamily="34" charset="-122"/>
-                <a:cs typeface="Calibri" pitchFamily="34" charset="-120"/>
-              </a:rPr>
-              <a:t>Δピーク血糖値 (mg/dL)</a:t>
-            </a:r>
-            <a:endParaRPr lang="en-US" sz="1300" dirty="0"/>
-          </a:p>
-        </p:txBody>
-      </p:sp>
-      <p:sp>
-        <p:nvSpPr>
-          <p:cNvPr id="5" name="Text 3"/>
-          <p:cNvSpPr txBox="1"/>
-          <p:nvPr/>
-        </p:nvSpPr>
-        <p:spPr>
-          <a:xfrm>
-            <a:off x="548640" y="1828800"/>
-            <a:ext cx="3429000" cy="256032"/>
-          </a:xfrm>
-          <a:prstGeom prst="rect">
-            <a:avLst/>
-          </a:prstGeom>
-          <a:noFill/>
-          <a:ln/>
-        </p:spPr>
-        <p:txBody>
-          <a:bodyPr wrap="square" lIns="0" tIns="0" rIns="0" bIns="0" rtlCol="0" anchor="ctr"/>
-          <a:lstStyle/>
-          <a:p>
-            <a:pPr indent="0" marL="0">
-              <a:buNone/>
-            </a:pPr>
-            <a:r>
-              <a:rPr lang="en-US" sz="1050" dirty="0">
-                <a:solidFill>
-                  <a:srgbClr val="5C6570"/>
-                </a:solidFill>
-                <a:latin typeface="Calibri" pitchFamily="34" charset="0"/>
-                <a:ea typeface="Calibri" pitchFamily="34" charset="-122"/>
-                <a:cs typeface="Calibri" pitchFamily="34" charset="-120"/>
-              </a:rPr>
-              <a:t>最高値 − 摂取直前</a:t>
-            </a:r>
-            <a:endParaRPr lang="en-US" sz="1050" dirty="0"/>
           </a:p>
         </p:txBody>
       </p:sp>
       <p:graphicFrame>
         <p:nvGraphicFramePr>
-          <p:cNvPr id="6" name="Chart 0" descr=""/>
+          <p:cNvPr id="4" name="Chart 0" descr=""/>
           <p:cNvGraphicFramePr/>
           <p:nvPr/>
         </p:nvGraphicFramePr>
         <p:xfrm>
-          <a:off x="548640" y="2148840"/>
-          <a:ext cx="3429000" cy="3337560"/>
+          <a:off x="548640" y="1600200"/>
+          <a:ext cx="11091672" cy="4160520"/>
         </p:xfrm>
         <a:graphic xmlns:a="http://schemas.openxmlformats.org/drawingml/2006/main">
           <a:graphicData uri="http://schemas.openxmlformats.org/drawingml/2006/chart">
@@ -8770,226 +14195,38 @@
       </p:graphicFrame>
       <p:sp>
         <p:nvSpPr>
-          <p:cNvPr id="7" name="Text 4"/>
-          <p:cNvSpPr txBox="1"/>
-          <p:nvPr/>
-        </p:nvSpPr>
-        <p:spPr>
-          <a:xfrm>
-            <a:off x="4343400" y="1572768"/>
-            <a:ext cx="3429000" cy="274320"/>
-          </a:xfrm>
-          <a:prstGeom prst="rect">
-            <a:avLst/>
-          </a:prstGeom>
-          <a:noFill/>
-          <a:ln/>
-        </p:spPr>
-        <p:txBody>
-          <a:bodyPr wrap="square" lIns="0" tIns="0" rIns="0" bIns="0" rtlCol="0" anchor="ctr"/>
-          <a:lstStyle/>
-          <a:p>
-            <a:pPr indent="0" marL="0">
+          <p:cNvPr id="5" name="Text 2"/>
+          <p:cNvSpPr/>
+          <p:nvPr/>
+        </p:nvSpPr>
+        <p:spPr>
+          <a:xfrm>
+            <a:off x="548640" y="6473952"/>
+            <a:ext cx="11091672" cy="274320"/>
+          </a:xfrm>
+          <a:prstGeom prst="rect">
+            <a:avLst/>
+          </a:prstGeom>
+          <a:noFill/>
+          <a:ln/>
+        </p:spPr>
+        <p:txBody>
+          <a:bodyPr wrap="square" rtlCol="0" anchor="ctr"/>
+          <a:lstStyle/>
+          <a:p>
+            <a:pPr algn="l" indent="0" marL="0">
               <a:buNone/>
             </a:pPr>
             <a:r>
-              <a:rPr lang="en-US" sz="1300" b="1" dirty="0">
-                <a:solidFill>
-                  <a:srgbClr val="21295C"/>
+              <a:rPr lang="en-US" sz="1000" dirty="0">
+                <a:solidFill>
+                  <a:srgbClr val="5C6570"/>
                 </a:solidFill>
                 <a:latin typeface="Calibri" pitchFamily="34" charset="0"/>
                 <a:ea typeface="Calibri" pitchFamily="34" charset="-122"/>
                 <a:cs typeface="Calibri" pitchFamily="34" charset="-120"/>
               </a:rPr>
-              <a:t>iAUC 2時間 (mg/dL・分)</a:t>
-            </a:r>
-            <a:endParaRPr lang="en-US" sz="1300" dirty="0"/>
-          </a:p>
-        </p:txBody>
-      </p:sp>
-      <p:sp>
-        <p:nvSpPr>
-          <p:cNvPr id="8" name="Text 5"/>
-          <p:cNvSpPr txBox="1"/>
-          <p:nvPr/>
-        </p:nvSpPr>
-        <p:spPr>
-          <a:xfrm>
-            <a:off x="4343400" y="1828800"/>
-            <a:ext cx="3429000" cy="256032"/>
-          </a:xfrm>
-          <a:prstGeom prst="rect">
-            <a:avLst/>
-          </a:prstGeom>
-          <a:noFill/>
-          <a:ln/>
-        </p:spPr>
-        <p:txBody>
-          <a:bodyPr wrap="square" lIns="0" tIns="0" rIns="0" bIns="0" rtlCol="0" anchor="ctr"/>
-          <a:lstStyle/>
-          <a:p>
-            <a:pPr indent="0" marL="0">
-              <a:buNone/>
-            </a:pPr>
-            <a:r>
-              <a:rPr lang="en-US" sz="1050" dirty="0">
-                <a:solidFill>
-                  <a:srgbClr val="5C6570"/>
-                </a:solidFill>
-                <a:latin typeface="Calibri" pitchFamily="34" charset="0"/>
-                <a:ea typeface="Calibri" pitchFamily="34" charset="-122"/>
-                <a:cs typeface="Calibri" pitchFamily="34" charset="-120"/>
-              </a:rPr>
-              <a:t>ベースライン超過分の面積</a:t>
-            </a:r>
-            <a:endParaRPr lang="en-US" sz="1050" dirty="0"/>
-          </a:p>
-        </p:txBody>
-      </p:sp>
-      <p:graphicFrame>
-        <p:nvGraphicFramePr>
-          <p:cNvPr id="9" name="Chart 1" descr=""/>
-          <p:cNvGraphicFramePr/>
-          <p:nvPr/>
-        </p:nvGraphicFramePr>
-        <p:xfrm>
-          <a:off x="4343400" y="2148840"/>
-          <a:ext cx="3429000" cy="3337560"/>
-        </p:xfrm>
-        <a:graphic xmlns:a="http://schemas.openxmlformats.org/drawingml/2006/main">
-          <a:graphicData uri="http://schemas.openxmlformats.org/drawingml/2006/chart">
-            <c:chart xmlns:c="http://schemas.openxmlformats.org/drawingml/2006/chart" r:id="rId2"/>
-          </a:graphicData>
-        </a:graphic>
-      </p:graphicFrame>
-      <p:sp>
-        <p:nvSpPr>
-          <p:cNvPr id="10" name="Text 6"/>
-          <p:cNvSpPr txBox="1"/>
-          <p:nvPr/>
-        </p:nvSpPr>
-        <p:spPr>
-          <a:xfrm>
-            <a:off x="8138160" y="1572768"/>
-            <a:ext cx="3429000" cy="274320"/>
-          </a:xfrm>
-          <a:prstGeom prst="rect">
-            <a:avLst/>
-          </a:prstGeom>
-          <a:noFill/>
-          <a:ln/>
-        </p:spPr>
-        <p:txBody>
-          <a:bodyPr wrap="square" lIns="0" tIns="0" rIns="0" bIns="0" rtlCol="0" anchor="ctr"/>
-          <a:lstStyle/>
-          <a:p>
-            <a:pPr indent="0" marL="0">
-              <a:buNone/>
-            </a:pPr>
-            <a:r>
-              <a:rPr lang="en-US" sz="1300" b="1" dirty="0">
-                <a:solidFill>
-                  <a:srgbClr val="21295C"/>
-                </a:solidFill>
-                <a:latin typeface="Calibri" pitchFamily="34" charset="0"/>
-                <a:ea typeface="Calibri" pitchFamily="34" charset="-122"/>
-                <a:cs typeface="Calibri" pitchFamily="34" charset="-120"/>
-              </a:rPr>
-              <a:t>変動係数 CV (%)</a:t>
-            </a:r>
-            <a:endParaRPr lang="en-US" sz="1300" dirty="0"/>
-          </a:p>
-        </p:txBody>
-      </p:sp>
-      <p:sp>
-        <p:nvSpPr>
-          <p:cNvPr id="11" name="Text 7"/>
-          <p:cNvSpPr txBox="1"/>
-          <p:nvPr/>
-        </p:nvSpPr>
-        <p:spPr>
-          <a:xfrm>
-            <a:off x="8138160" y="1828800"/>
-            <a:ext cx="3429000" cy="256032"/>
-          </a:xfrm>
-          <a:prstGeom prst="rect">
-            <a:avLst/>
-          </a:prstGeom>
-          <a:noFill/>
-          <a:ln/>
-        </p:spPr>
-        <p:txBody>
-          <a:bodyPr wrap="square" lIns="0" tIns="0" rIns="0" bIns="0" rtlCol="0" anchor="ctr"/>
-          <a:lstStyle/>
-          <a:p>
-            <a:pPr indent="0" marL="0">
-              <a:buNone/>
-            </a:pPr>
-            <a:r>
-              <a:rPr lang="en-US" sz="1050" dirty="0">
-                <a:solidFill>
-                  <a:srgbClr val="5C6570"/>
-                </a:solidFill>
-                <a:latin typeface="Calibri" pitchFamily="34" charset="0"/>
-                <a:ea typeface="Calibri" pitchFamily="34" charset="-122"/>
-                <a:cs typeface="Calibri" pitchFamily="34" charset="-120"/>
-              </a:rPr>
-              <a:t>6時間の値の乱高下</a:t>
-            </a:r>
-            <a:endParaRPr lang="en-US" sz="1050" dirty="0"/>
-          </a:p>
-        </p:txBody>
-      </p:sp>
-      <p:graphicFrame>
-        <p:nvGraphicFramePr>
-          <p:cNvPr id="12" name="Chart 2" descr=""/>
-          <p:cNvGraphicFramePr/>
-          <p:nvPr/>
-        </p:nvGraphicFramePr>
-        <p:xfrm>
-          <a:off x="8138160" y="2148840"/>
-          <a:ext cx="3429000" cy="3337560"/>
-        </p:xfrm>
-        <a:graphic xmlns:a="http://schemas.openxmlformats.org/drawingml/2006/main">
-          <a:graphicData uri="http://schemas.openxmlformats.org/drawingml/2006/chart">
-            <c:chart xmlns:c="http://schemas.openxmlformats.org/drawingml/2006/chart" r:id="rId3"/>
-          </a:graphicData>
-        </a:graphic>
-      </p:graphicFrame>
-      <p:sp>
-        <p:nvSpPr>
-          <p:cNvPr id="13" name="Text 8"/>
-          <p:cNvSpPr/>
-          <p:nvPr/>
-        </p:nvSpPr>
-        <p:spPr>
-          <a:xfrm>
-            <a:off x="548640" y="6473952"/>
-            <a:ext cx="11091672" cy="274320"/>
-          </a:xfrm>
-          <a:prstGeom prst="rect">
-            <a:avLst/>
-          </a:prstGeom>
-          <a:noFill/>
-          <a:ln/>
-        </p:spPr>
-        <p:txBody>
-          <a:bodyPr wrap="square" rtlCol="0" anchor="ctr"/>
-          <a:lstStyle/>
-          <a:p>
-            <a:pPr algn="l" indent="0" marL="0">
-              <a:buNone/>
-            </a:pPr>
-            <a:r>
-              <a:rPr lang="en-US" sz="1000" dirty="0">
-                <a:solidFill>
-                  <a:srgbClr val="5C6570"/>
-                </a:solidFill>
-                <a:latin typeface="Calibri" pitchFamily="34" charset="0"/>
-                <a:ea typeface="Calibri" pitchFamily="34" charset="-122"/>
-                <a:cs typeface="Calibri" pitchFamily="34" charset="-120"/>
-              </a:rPr>
-              <a:t>iAUC = incremental AUC（ベースライン超過分のみを積算した正味の食後上昇量）。</a:t>
+              <a:t>15分間隔・条件ごとの平均血糖値（各条件3日間平均）。</a:t>
             </a:r>
             <a:endParaRPr lang="en-US" sz="1000" dirty="0"/>
           </a:p>
@@ -9060,7 +14297,7 @@
                 <a:ea typeface="Calibri" pitchFamily="34" charset="-122"/>
                 <a:cs typeface="Calibri" pitchFamily="34" charset="-120"/>
               </a:rPr>
-              <a:t>COMPARISON 1</a:t>
+              <a:t>RESULTS</a:t>
             </a:r>
             <a:endParaRPr lang="en-US" sz="1300" dirty="0"/>
           </a:p>
@@ -9099,7 +14336,7 @@
                 <a:ea typeface="Cambria" pitchFamily="34" charset="-122"/>
                 <a:cs typeface="Cambria" pitchFamily="34" charset="-120"/>
               </a:rPr>
-              <a:t>スムージー vs 固形（副食のみ・純粋比較）</a:t>
+              <a:t>主要指標の比較</a:t>
             </a:r>
             <a:endParaRPr lang="en-US" sz="2800" dirty="0"/>
           </a:p>
@@ -9107,56 +14344,14 @@
       </p:sp>
       <p:sp>
         <p:nvSpPr>
-          <p:cNvPr id="4" name="Shape 2"/>
-          <p:cNvSpPr/>
-          <p:nvPr/>
-        </p:nvSpPr>
-        <p:spPr>
-          <a:xfrm>
-            <a:off x="548640" y="1691640"/>
-            <a:ext cx="5362956" cy="2651760"/>
-          </a:xfrm>
-          <a:prstGeom prst="roundRect">
-            <a:avLst>
-              <a:gd name="adj" fmla="val 3448"/>
-            </a:avLst>
-          </a:prstGeom>
-          <a:solidFill>
-            <a:srgbClr val="F4F7F9"/>
-          </a:solidFill>
-          <a:ln/>
-        </p:spPr>
-      </p:sp>
-      <p:sp>
-        <p:nvSpPr>
-          <p:cNvPr id="5" name="Shape 3"/>
-          <p:cNvSpPr/>
-          <p:nvPr/>
-        </p:nvSpPr>
-        <p:spPr>
-          <a:xfrm>
-            <a:off x="868680" y="1920240"/>
-            <a:ext cx="146304" cy="457200"/>
-          </a:xfrm>
-          <a:prstGeom prst="rect">
-            <a:avLst/>
-          </a:prstGeom>
-          <a:solidFill>
-            <a:srgbClr val="2A78D6"/>
-          </a:solidFill>
-          <a:ln/>
-        </p:spPr>
-      </p:sp>
-      <p:sp>
-        <p:nvSpPr>
-          <p:cNvPr id="6" name="Text 4"/>
+          <p:cNvPr id="4" name="Text 2"/>
           <p:cNvSpPr txBox="1"/>
           <p:nvPr/>
         </p:nvSpPr>
         <p:spPr>
           <a:xfrm>
-            <a:off x="1143000" y="1874520"/>
-            <a:ext cx="4448556" cy="502920"/>
+            <a:off x="548640" y="1572768"/>
+            <a:ext cx="3429000" cy="274320"/>
           </a:xfrm>
           <a:prstGeom prst="rect">
             <a:avLst/>
@@ -9172,7 +14367,7 @@
               <a:buNone/>
             </a:pPr>
             <a:r>
-              <a:rPr lang="en-US" sz="1600" b="1" dirty="0">
+              <a:rPr lang="en-US" sz="1300" b="1" dirty="0">
                 <a:solidFill>
                   <a:srgbClr val="21295C"/>
                 </a:solidFill>
@@ -9180,22 +14375,22 @@
                 <a:ea typeface="Calibri" pitchFamily="34" charset="-122"/>
                 <a:cs typeface="Calibri" pitchFamily="34" charset="-120"/>
               </a:rPr>
-              <a:t>固形摂取</a:t>
-            </a:r>
-            <a:endParaRPr lang="en-US" sz="1600" dirty="0"/>
-          </a:p>
-        </p:txBody>
-      </p:sp>
-      <p:sp>
-        <p:nvSpPr>
-          <p:cNvPr id="7" name="Text 5"/>
+              <a:t>Δピーク血糖値 (mg/dL)</a:t>
+            </a:r>
+            <a:endParaRPr lang="en-US" sz="1300" dirty="0"/>
+          </a:p>
+        </p:txBody>
+      </p:sp>
+      <p:sp>
+        <p:nvSpPr>
+          <p:cNvPr id="5" name="Text 3"/>
           <p:cNvSpPr txBox="1"/>
           <p:nvPr/>
         </p:nvSpPr>
         <p:spPr>
           <a:xfrm>
-            <a:off x="868680" y="2560320"/>
-            <a:ext cx="4722876" cy="502920"/>
+            <a:off x="548640" y="1828800"/>
+            <a:ext cx="3429000" cy="256032"/>
           </a:xfrm>
           <a:prstGeom prst="rect">
             <a:avLst/>
@@ -9211,46 +14406,7 @@
               <a:buNone/>
             </a:pPr>
             <a:r>
-              <a:rPr lang="en-US" sz="2600" b="1" dirty="0">
-                <a:solidFill>
-                  <a:srgbClr val="2A78D6"/>
-                </a:solidFill>
-                <a:latin typeface="Cambria" pitchFamily="34" charset="0"/>
-                <a:ea typeface="Cambria" pitchFamily="34" charset="-122"/>
-                <a:cs typeface="Cambria" pitchFamily="34" charset="-120"/>
-              </a:rPr>
-              <a:t>53.7 mg/dL</a:t>
-            </a:r>
-            <a:endParaRPr lang="en-US" sz="2600" dirty="0"/>
-          </a:p>
-        </p:txBody>
-      </p:sp>
-      <p:sp>
-        <p:nvSpPr>
-          <p:cNvPr id="8" name="Text 6"/>
-          <p:cNvSpPr txBox="1"/>
-          <p:nvPr/>
-        </p:nvSpPr>
-        <p:spPr>
-          <a:xfrm>
-            <a:off x="868680" y="3017520"/>
-            <a:ext cx="4722876" cy="320040"/>
-          </a:xfrm>
-          <a:prstGeom prst="rect">
-            <a:avLst/>
-          </a:prstGeom>
-          <a:noFill/>
-          <a:ln/>
-        </p:spPr>
-        <p:txBody>
-          <a:bodyPr wrap="square" lIns="0" tIns="0" rIns="0" bIns="0" rtlCol="0" anchor="ctr"/>
-          <a:lstStyle/>
-          <a:p>
-            <a:pPr indent="0" marL="0">
-              <a:buNone/>
-            </a:pPr>
-            <a:r>
-              <a:rPr lang="en-US" sz="1100" dirty="0">
+              <a:rPr lang="en-US" sz="1050" dirty="0">
                 <a:solidFill>
                   <a:srgbClr val="5C6570"/>
                 </a:solidFill>
@@ -9258,22 +14414,38 @@
                 <a:ea typeface="Calibri" pitchFamily="34" charset="-122"/>
                 <a:cs typeface="Calibri" pitchFamily="34" charset="-120"/>
               </a:rPr>
-              <a:t>Δピーク血糖値</a:t>
-            </a:r>
-            <a:endParaRPr lang="en-US" sz="1100" dirty="0"/>
-          </a:p>
-        </p:txBody>
-      </p:sp>
-      <p:sp>
-        <p:nvSpPr>
-          <p:cNvPr id="9" name="Text 7"/>
+              <a:t>最高値 − 摂取直前</a:t>
+            </a:r>
+            <a:endParaRPr lang="en-US" sz="1050" dirty="0"/>
+          </a:p>
+        </p:txBody>
+      </p:sp>
+      <p:graphicFrame>
+        <p:nvGraphicFramePr>
+          <p:cNvPr id="6" name="Chart 0" descr=""/>
+          <p:cNvGraphicFramePr/>
+          <p:nvPr/>
+        </p:nvGraphicFramePr>
+        <p:xfrm>
+          <a:off x="548640" y="2148840"/>
+          <a:ext cx="3429000" cy="3337560"/>
+        </p:xfrm>
+        <a:graphic xmlns:a="http://schemas.openxmlformats.org/drawingml/2006/main">
+          <a:graphicData uri="http://schemas.openxmlformats.org/drawingml/2006/chart">
+            <c:chart xmlns:c="http://schemas.openxmlformats.org/drawingml/2006/chart" r:id="rId1"/>
+          </a:graphicData>
+        </a:graphic>
+      </p:graphicFrame>
+      <p:sp>
+        <p:nvSpPr>
+          <p:cNvPr id="7" name="Text 4"/>
           <p:cNvSpPr txBox="1"/>
           <p:nvPr/>
         </p:nvSpPr>
         <p:spPr>
           <a:xfrm>
-            <a:off x="868680" y="3355848"/>
-            <a:ext cx="4722876" cy="502920"/>
+            <a:off x="4343400" y="1572768"/>
+            <a:ext cx="3429000" cy="274320"/>
           </a:xfrm>
           <a:prstGeom prst="rect">
             <a:avLst/>
@@ -9289,111 +14461,30 @@
               <a:buNone/>
             </a:pPr>
             <a:r>
-              <a:rPr lang="en-US" sz="2600" b="1" dirty="0">
-                <a:solidFill>
-                  <a:srgbClr val="2A78D6"/>
-                </a:solidFill>
-                <a:latin typeface="Cambria" pitchFamily="34" charset="0"/>
-                <a:ea typeface="Cambria" pitchFamily="34" charset="-122"/>
-                <a:cs typeface="Cambria" pitchFamily="34" charset="-120"/>
-              </a:rPr>
-              <a:t>11.2%</a:t>
-            </a:r>
-            <a:endParaRPr lang="en-US" sz="2600" dirty="0"/>
-          </a:p>
-        </p:txBody>
-      </p:sp>
-      <p:sp>
-        <p:nvSpPr>
-          <p:cNvPr id="10" name="Text 8"/>
-          <p:cNvSpPr txBox="1"/>
-          <p:nvPr/>
-        </p:nvSpPr>
-        <p:spPr>
-          <a:xfrm>
-            <a:off x="868680" y="3813048"/>
-            <a:ext cx="4722876" cy="320040"/>
-          </a:xfrm>
-          <a:prstGeom prst="rect">
-            <a:avLst/>
-          </a:prstGeom>
-          <a:noFill/>
-          <a:ln/>
-        </p:spPr>
-        <p:txBody>
-          <a:bodyPr wrap="square" lIns="0" tIns="0" rIns="0" bIns="0" rtlCol="0" anchor="ctr"/>
-          <a:lstStyle/>
-          <a:p>
-            <a:pPr indent="0" marL="0">
-              <a:buNone/>
-            </a:pPr>
-            <a:r>
-              <a:rPr lang="en-US" sz="1100" dirty="0">
-                <a:solidFill>
-                  <a:srgbClr val="5C6570"/>
+              <a:rPr lang="en-US" sz="1300" b="1" dirty="0">
+                <a:solidFill>
+                  <a:srgbClr val="21295C"/>
                 </a:solidFill>
                 <a:latin typeface="Calibri" pitchFamily="34" charset="0"/>
                 <a:ea typeface="Calibri" pitchFamily="34" charset="-122"/>
                 <a:cs typeface="Calibri" pitchFamily="34" charset="-120"/>
               </a:rPr>
-              <a:t>変動係数 CV</a:t>
-            </a:r>
-            <a:endParaRPr lang="en-US" sz="1100" dirty="0"/>
-          </a:p>
-        </p:txBody>
-      </p:sp>
-      <p:sp>
-        <p:nvSpPr>
-          <p:cNvPr id="11" name="Shape 9"/>
-          <p:cNvSpPr/>
-          <p:nvPr/>
-        </p:nvSpPr>
-        <p:spPr>
-          <a:xfrm>
-            <a:off x="6277356" y="1691640"/>
-            <a:ext cx="5362956" cy="2651760"/>
-          </a:xfrm>
-          <a:prstGeom prst="roundRect">
-            <a:avLst>
-              <a:gd name="adj" fmla="val 3448"/>
-            </a:avLst>
-          </a:prstGeom>
-          <a:solidFill>
-            <a:srgbClr val="F4F7F9"/>
-          </a:solidFill>
-          <a:ln/>
-        </p:spPr>
-      </p:sp>
-      <p:sp>
-        <p:nvSpPr>
-          <p:cNvPr id="12" name="Shape 10"/>
-          <p:cNvSpPr/>
-          <p:nvPr/>
-        </p:nvSpPr>
-        <p:spPr>
-          <a:xfrm>
-            <a:off x="6597396" y="1920240"/>
-            <a:ext cx="146304" cy="457200"/>
-          </a:xfrm>
-          <a:prstGeom prst="rect">
-            <a:avLst/>
-          </a:prstGeom>
-          <a:solidFill>
-            <a:srgbClr val="EB6834"/>
-          </a:solidFill>
-          <a:ln/>
-        </p:spPr>
-      </p:sp>
-      <p:sp>
-        <p:nvSpPr>
-          <p:cNvPr id="13" name="Text 11"/>
+              <a:t>iAUC 2時間 (mg/dL・分)</a:t>
+            </a:r>
+            <a:endParaRPr lang="en-US" sz="1300" dirty="0"/>
+          </a:p>
+        </p:txBody>
+      </p:sp>
+      <p:sp>
+        <p:nvSpPr>
+          <p:cNvPr id="8" name="Text 5"/>
           <p:cNvSpPr txBox="1"/>
           <p:nvPr/>
         </p:nvSpPr>
         <p:spPr>
           <a:xfrm>
-            <a:off x="6871716" y="1874520"/>
-            <a:ext cx="4448556" cy="502920"/>
+            <a:off x="4343400" y="1828800"/>
+            <a:ext cx="3429000" cy="256032"/>
           </a:xfrm>
           <a:prstGeom prst="rect">
             <a:avLst/>
@@ -9409,30 +14500,46 @@
               <a:buNone/>
             </a:pPr>
             <a:r>
-              <a:rPr lang="en-US" sz="1600" b="1" dirty="0">
-                <a:solidFill>
-                  <a:srgbClr val="21295C"/>
+              <a:rPr lang="en-US" sz="1050" dirty="0">
+                <a:solidFill>
+                  <a:srgbClr val="5C6570"/>
                 </a:solidFill>
                 <a:latin typeface="Calibri" pitchFamily="34" charset="0"/>
                 <a:ea typeface="Calibri" pitchFamily="34" charset="-122"/>
                 <a:cs typeface="Calibri" pitchFamily="34" charset="-120"/>
               </a:rPr>
-              <a:t>スムージー摂取</a:t>
-            </a:r>
-            <a:endParaRPr lang="en-US" sz="1600" dirty="0"/>
-          </a:p>
-        </p:txBody>
-      </p:sp>
-      <p:sp>
-        <p:nvSpPr>
-          <p:cNvPr id="14" name="Text 12"/>
+              <a:t>ベースライン超過分の面積</a:t>
+            </a:r>
+            <a:endParaRPr lang="en-US" sz="1050" dirty="0"/>
+          </a:p>
+        </p:txBody>
+      </p:sp>
+      <p:graphicFrame>
+        <p:nvGraphicFramePr>
+          <p:cNvPr id="9" name="Chart 1" descr=""/>
+          <p:cNvGraphicFramePr/>
+          <p:nvPr/>
+        </p:nvGraphicFramePr>
+        <p:xfrm>
+          <a:off x="4343400" y="2148840"/>
+          <a:ext cx="3429000" cy="3337560"/>
+        </p:xfrm>
+        <a:graphic xmlns:a="http://schemas.openxmlformats.org/drawingml/2006/main">
+          <a:graphicData uri="http://schemas.openxmlformats.org/drawingml/2006/chart">
+            <c:chart xmlns:c="http://schemas.openxmlformats.org/drawingml/2006/chart" r:id="rId2"/>
+          </a:graphicData>
+        </a:graphic>
+      </p:graphicFrame>
+      <p:sp>
+        <p:nvSpPr>
+          <p:cNvPr id="10" name="Text 6"/>
           <p:cNvSpPr txBox="1"/>
           <p:nvPr/>
         </p:nvSpPr>
         <p:spPr>
           <a:xfrm>
-            <a:off x="6597396" y="2560320"/>
-            <a:ext cx="4722876" cy="502920"/>
+            <a:off x="8138160" y="1572768"/>
+            <a:ext cx="3429000" cy="274320"/>
           </a:xfrm>
           <a:prstGeom prst="rect">
             <a:avLst/>
@@ -9448,69 +14555,30 @@
               <a:buNone/>
             </a:pPr>
             <a:r>
-              <a:rPr lang="en-US" sz="2600" b="1" dirty="0">
-                <a:solidFill>
-                  <a:srgbClr val="EB6834"/>
-                </a:solidFill>
-                <a:latin typeface="Cambria" pitchFamily="34" charset="0"/>
-                <a:ea typeface="Cambria" pitchFamily="34" charset="-122"/>
-                <a:cs typeface="Cambria" pitchFamily="34" charset="-120"/>
-              </a:rPr>
-              <a:t>85.0 mg/dL</a:t>
-            </a:r>
-            <a:endParaRPr lang="en-US" sz="2600" dirty="0"/>
-          </a:p>
-        </p:txBody>
-      </p:sp>
-      <p:sp>
-        <p:nvSpPr>
-          <p:cNvPr id="15" name="Text 13"/>
-          <p:cNvSpPr txBox="1"/>
-          <p:nvPr/>
-        </p:nvSpPr>
-        <p:spPr>
-          <a:xfrm>
-            <a:off x="6597396" y="3017520"/>
-            <a:ext cx="4722876" cy="320040"/>
-          </a:xfrm>
-          <a:prstGeom prst="rect">
-            <a:avLst/>
-          </a:prstGeom>
-          <a:noFill/>
-          <a:ln/>
-        </p:spPr>
-        <p:txBody>
-          <a:bodyPr wrap="square" lIns="0" tIns="0" rIns="0" bIns="0" rtlCol="0" anchor="ctr"/>
-          <a:lstStyle/>
-          <a:p>
-            <a:pPr indent="0" marL="0">
-              <a:buNone/>
-            </a:pPr>
-            <a:r>
-              <a:rPr lang="en-US" sz="1100" dirty="0">
-                <a:solidFill>
-                  <a:srgbClr val="5C6570"/>
+              <a:rPr lang="en-US" sz="1300" b="1" dirty="0">
+                <a:solidFill>
+                  <a:srgbClr val="21295C"/>
                 </a:solidFill>
                 <a:latin typeface="Calibri" pitchFamily="34" charset="0"/>
                 <a:ea typeface="Calibri" pitchFamily="34" charset="-122"/>
                 <a:cs typeface="Calibri" pitchFamily="34" charset="-120"/>
               </a:rPr>
-              <a:t>Δピーク血糖値（1.6倍）</a:t>
-            </a:r>
-            <a:endParaRPr lang="en-US" sz="1100" dirty="0"/>
-          </a:p>
-        </p:txBody>
-      </p:sp>
-      <p:sp>
-        <p:nvSpPr>
-          <p:cNvPr id="16" name="Text 14"/>
+              <a:t>変動係数 CV (%)</a:t>
+            </a:r>
+            <a:endParaRPr lang="en-US" sz="1300" dirty="0"/>
+          </a:p>
+        </p:txBody>
+      </p:sp>
+      <p:sp>
+        <p:nvSpPr>
+          <p:cNvPr id="11" name="Text 7"/>
           <p:cNvSpPr txBox="1"/>
           <p:nvPr/>
         </p:nvSpPr>
         <p:spPr>
           <a:xfrm>
-            <a:off x="6597396" y="3355848"/>
-            <a:ext cx="4722876" cy="502920"/>
+            <a:off x="8138160" y="1828800"/>
+            <a:ext cx="3429000" cy="256032"/>
           </a:xfrm>
           <a:prstGeom prst="rect">
             <a:avLst/>
@@ -9526,46 +14594,7 @@
               <a:buNone/>
             </a:pPr>
             <a:r>
-              <a:rPr lang="en-US" sz="2600" b="1" dirty="0">
-                <a:solidFill>
-                  <a:srgbClr val="EB6834"/>
-                </a:solidFill>
-                <a:latin typeface="Cambria" pitchFamily="34" charset="0"/>
-                <a:ea typeface="Cambria" pitchFamily="34" charset="-122"/>
-                <a:cs typeface="Cambria" pitchFamily="34" charset="-120"/>
-              </a:rPr>
-              <a:t>14.7%</a:t>
-            </a:r>
-            <a:endParaRPr lang="en-US" sz="2600" dirty="0"/>
-          </a:p>
-        </p:txBody>
-      </p:sp>
-      <p:sp>
-        <p:nvSpPr>
-          <p:cNvPr id="17" name="Text 15"/>
-          <p:cNvSpPr txBox="1"/>
-          <p:nvPr/>
-        </p:nvSpPr>
-        <p:spPr>
-          <a:xfrm>
-            <a:off x="6597396" y="3813048"/>
-            <a:ext cx="4722876" cy="320040"/>
-          </a:xfrm>
-          <a:prstGeom prst="rect">
-            <a:avLst/>
-          </a:prstGeom>
-          <a:noFill/>
-          <a:ln/>
-        </p:spPr>
-        <p:txBody>
-          <a:bodyPr wrap="square" lIns="0" tIns="0" rIns="0" bIns="0" rtlCol="0" anchor="ctr"/>
-          <a:lstStyle/>
-          <a:p>
-            <a:pPr indent="0" marL="0">
-              <a:buNone/>
-            </a:pPr>
-            <a:r>
-              <a:rPr lang="en-US" sz="1100" dirty="0">
+              <a:rPr lang="en-US" sz="1050" dirty="0">
                 <a:solidFill>
                   <a:srgbClr val="5C6570"/>
                 </a:solidFill>
@@ -9573,109 +14602,64 @@
                 <a:ea typeface="Calibri" pitchFamily="34" charset="-122"/>
                 <a:cs typeface="Calibri" pitchFamily="34" charset="-120"/>
               </a:rPr>
-              <a:t>変動係数 CV</a:t>
-            </a:r>
-            <a:endParaRPr lang="en-US" sz="1100" dirty="0"/>
-          </a:p>
-        </p:txBody>
-      </p:sp>
-      <p:sp>
-        <p:nvSpPr>
-          <p:cNvPr id="18" name="Shape 16"/>
+              <a:t>6時間の値の乱高下</a:t>
+            </a:r>
+            <a:endParaRPr lang="en-US" sz="1050" dirty="0"/>
+          </a:p>
+        </p:txBody>
+      </p:sp>
+      <p:graphicFrame>
+        <p:nvGraphicFramePr>
+          <p:cNvPr id="12" name="Chart 2" descr=""/>
+          <p:cNvGraphicFramePr/>
+          <p:nvPr/>
+        </p:nvGraphicFramePr>
+        <p:xfrm>
+          <a:off x="8138160" y="2148840"/>
+          <a:ext cx="3429000" cy="3337560"/>
+        </p:xfrm>
+        <a:graphic xmlns:a="http://schemas.openxmlformats.org/drawingml/2006/main">
+          <a:graphicData uri="http://schemas.openxmlformats.org/drawingml/2006/chart">
+            <c:chart xmlns:c="http://schemas.openxmlformats.org/drawingml/2006/chart" r:id="rId3"/>
+          </a:graphicData>
+        </a:graphic>
+      </p:graphicFrame>
+      <p:sp>
+        <p:nvSpPr>
+          <p:cNvPr id="13" name="Text 8"/>
           <p:cNvSpPr/>
           <p:nvPr/>
         </p:nvSpPr>
         <p:spPr>
           <a:xfrm>
-            <a:off x="548640" y="4572000"/>
-            <a:ext cx="11091672" cy="1508760"/>
-          </a:xfrm>
-          <a:prstGeom prst="roundRect">
-            <a:avLst>
-              <a:gd name="adj" fmla="val 6061"/>
-            </a:avLst>
-          </a:prstGeom>
-          <a:solidFill>
-            <a:srgbClr val="EAF7F0"/>
-          </a:solidFill>
-          <a:ln/>
-        </p:spPr>
-      </p:sp>
-      <p:sp>
-        <p:nvSpPr>
-          <p:cNvPr id="19" name="Text 17"/>
-          <p:cNvSpPr txBox="1"/>
-          <p:nvPr/>
-        </p:nvSpPr>
-        <p:spPr>
-          <a:xfrm>
-            <a:off x="822960" y="4709160"/>
-            <a:ext cx="2743200" cy="274320"/>
-          </a:xfrm>
-          <a:prstGeom prst="rect">
-            <a:avLst/>
-          </a:prstGeom>
-          <a:noFill/>
-          <a:ln/>
-        </p:spPr>
-        <p:txBody>
-          <a:bodyPr wrap="square" lIns="0" tIns="0" rIns="0" bIns="0" rtlCol="0" anchor="ctr"/>
-          <a:lstStyle/>
-          <a:p>
-            <a:pPr indent="0" marL="0">
+            <a:off x="548640" y="6473952"/>
+            <a:ext cx="11091672" cy="274320"/>
+          </a:xfrm>
+          <a:prstGeom prst="rect">
+            <a:avLst/>
+          </a:prstGeom>
+          <a:noFill/>
+          <a:ln/>
+        </p:spPr>
+        <p:txBody>
+          <a:bodyPr wrap="square" rtlCol="0" anchor="ctr"/>
+          <a:lstStyle/>
+          <a:p>
+            <a:pPr algn="l" indent="0" marL="0">
               <a:buNone/>
             </a:pPr>
             <a:r>
-              <a:rPr lang="en-US" sz="1200" b="1" dirty="0">
-                <a:solidFill>
-                  <a:srgbClr val="0F5C3D"/>
+              <a:rPr lang="en-US" sz="1000" dirty="0">
+                <a:solidFill>
+                  <a:srgbClr val="5C6570"/>
                 </a:solidFill>
                 <a:latin typeface="Calibri" pitchFamily="34" charset="0"/>
                 <a:ea typeface="Calibri" pitchFamily="34" charset="-122"/>
                 <a:cs typeface="Calibri" pitchFamily="34" charset="-120"/>
               </a:rPr>
-              <a:t>考察</a:t>
-            </a:r>
-            <a:endParaRPr lang="en-US" sz="1200" dirty="0"/>
-          </a:p>
-        </p:txBody>
-      </p:sp>
-      <p:sp>
-        <p:nvSpPr>
-          <p:cNvPr id="20" name="Text 18"/>
-          <p:cNvSpPr txBox="1"/>
-          <p:nvPr/>
-        </p:nvSpPr>
-        <p:spPr>
-          <a:xfrm>
-            <a:off x="822960" y="5010912"/>
-            <a:ext cx="10543032" cy="960120"/>
-          </a:xfrm>
-          <a:prstGeom prst="rect">
-            <a:avLst/>
-          </a:prstGeom>
-          <a:noFill/>
-          <a:ln/>
-        </p:spPr>
-        <p:txBody>
-          <a:bodyPr wrap="square" lIns="0" tIns="0" rIns="0" bIns="0" rtlCol="0" anchor="ctr"/>
-          <a:lstStyle/>
-          <a:p>
-            <a:pPr indent="0" marL="0">
-              <a:buNone/>
-            </a:pPr>
-            <a:r>
-              <a:rPr lang="en-US" sz="1250" dirty="0">
-                <a:solidFill>
-                  <a:srgbClr val="1A1A1A"/>
-                </a:solidFill>
-                <a:latin typeface="Calibri" pitchFamily="34" charset="0"/>
-                <a:ea typeface="Calibri" pitchFamily="34" charset="-122"/>
-                <a:cs typeface="Calibri" pitchFamily="34" charset="-120"/>
-              </a:rPr>
-              <a:t>副食を液状化するだけで血糖の上昇幅・乱高下は明確に増大。液状化は消化の負担感を下げる一方、血糖の安定には必ずしも寄与しない可能性がある。選手の「出力向上」の体感は、血糖の安定ではなく消化器系の負担軽減（内臓への血流集中の緩和）による可能性が高い。</a:t>
-            </a:r>
-            <a:endParaRPr lang="en-US" sz="1250" dirty="0"/>
+              <a:t>iAUC = incremental AUC（ベースライン超過分のみを積算した正味の食後上昇量）。</a:t>
+            </a:r>
+            <a:endParaRPr lang="en-US" sz="1000" dirty="0"/>
           </a:p>
         </p:txBody>
       </p:sp>
@@ -9744,7 +14728,7 @@
                 <a:ea typeface="Calibri" pitchFamily="34" charset="-122"/>
                 <a:cs typeface="Calibri" pitchFamily="34" charset="-120"/>
               </a:rPr>
-              <a:t>COMPARISON 2</a:t>
+              <a:t>COMPARISON 1</a:t>
             </a:r>
             <a:endParaRPr lang="en-US" sz="1300" dirty="0"/>
           </a:p>
@@ -9783,7 +14767,7 @@
                 <a:ea typeface="Cambria" pitchFamily="34" charset="-122"/>
                 <a:cs typeface="Cambria" pitchFamily="34" charset="-120"/>
               </a:rPr>
-              <a:t>スムージー vs おにぎり＋スムージー</a:t>
+              <a:t>スムージー vs 固形（副食のみ・純粋比較）</a:t>
             </a:r>
             <a:endParaRPr lang="en-US" sz="2800" dirty="0"/>
           </a:p>
@@ -9826,6 +14810,243 @@
             <a:avLst/>
           </a:prstGeom>
           <a:solidFill>
+            <a:srgbClr val="2A78D6"/>
+          </a:solidFill>
+          <a:ln/>
+        </p:spPr>
+      </p:sp>
+      <p:sp>
+        <p:nvSpPr>
+          <p:cNvPr id="6" name="Text 4"/>
+          <p:cNvSpPr txBox="1"/>
+          <p:nvPr/>
+        </p:nvSpPr>
+        <p:spPr>
+          <a:xfrm>
+            <a:off x="1143000" y="1874520"/>
+            <a:ext cx="4448556" cy="502920"/>
+          </a:xfrm>
+          <a:prstGeom prst="rect">
+            <a:avLst/>
+          </a:prstGeom>
+          <a:noFill/>
+          <a:ln/>
+        </p:spPr>
+        <p:txBody>
+          <a:bodyPr wrap="square" lIns="0" tIns="0" rIns="0" bIns="0" rtlCol="0" anchor="ctr"/>
+          <a:lstStyle/>
+          <a:p>
+            <a:pPr indent="0" marL="0">
+              <a:buNone/>
+            </a:pPr>
+            <a:r>
+              <a:rPr lang="en-US" sz="1600" b="1" dirty="0">
+                <a:solidFill>
+                  <a:srgbClr val="21295C"/>
+                </a:solidFill>
+                <a:latin typeface="Calibri" pitchFamily="34" charset="0"/>
+                <a:ea typeface="Calibri" pitchFamily="34" charset="-122"/>
+                <a:cs typeface="Calibri" pitchFamily="34" charset="-120"/>
+              </a:rPr>
+              <a:t>固形摂取</a:t>
+            </a:r>
+            <a:endParaRPr lang="en-US" sz="1600" dirty="0"/>
+          </a:p>
+        </p:txBody>
+      </p:sp>
+      <p:sp>
+        <p:nvSpPr>
+          <p:cNvPr id="7" name="Text 5"/>
+          <p:cNvSpPr txBox="1"/>
+          <p:nvPr/>
+        </p:nvSpPr>
+        <p:spPr>
+          <a:xfrm>
+            <a:off x="868680" y="2560320"/>
+            <a:ext cx="4722876" cy="502920"/>
+          </a:xfrm>
+          <a:prstGeom prst="rect">
+            <a:avLst/>
+          </a:prstGeom>
+          <a:noFill/>
+          <a:ln/>
+        </p:spPr>
+        <p:txBody>
+          <a:bodyPr wrap="square" lIns="0" tIns="0" rIns="0" bIns="0" rtlCol="0" anchor="ctr"/>
+          <a:lstStyle/>
+          <a:p>
+            <a:pPr indent="0" marL="0">
+              <a:buNone/>
+            </a:pPr>
+            <a:r>
+              <a:rPr lang="en-US" sz="2600" b="1" dirty="0">
+                <a:solidFill>
+                  <a:srgbClr val="2A78D6"/>
+                </a:solidFill>
+                <a:latin typeface="Cambria" pitchFamily="34" charset="0"/>
+                <a:ea typeface="Cambria" pitchFamily="34" charset="-122"/>
+                <a:cs typeface="Cambria" pitchFamily="34" charset="-120"/>
+              </a:rPr>
+              <a:t>53.7 mg/dL</a:t>
+            </a:r>
+            <a:endParaRPr lang="en-US" sz="2600" dirty="0"/>
+          </a:p>
+        </p:txBody>
+      </p:sp>
+      <p:sp>
+        <p:nvSpPr>
+          <p:cNvPr id="8" name="Text 6"/>
+          <p:cNvSpPr txBox="1"/>
+          <p:nvPr/>
+        </p:nvSpPr>
+        <p:spPr>
+          <a:xfrm>
+            <a:off x="868680" y="3017520"/>
+            <a:ext cx="4722876" cy="320040"/>
+          </a:xfrm>
+          <a:prstGeom prst="rect">
+            <a:avLst/>
+          </a:prstGeom>
+          <a:noFill/>
+          <a:ln/>
+        </p:spPr>
+        <p:txBody>
+          <a:bodyPr wrap="square" lIns="0" tIns="0" rIns="0" bIns="0" rtlCol="0" anchor="ctr"/>
+          <a:lstStyle/>
+          <a:p>
+            <a:pPr indent="0" marL="0">
+              <a:buNone/>
+            </a:pPr>
+            <a:r>
+              <a:rPr lang="en-US" sz="1100" dirty="0">
+                <a:solidFill>
+                  <a:srgbClr val="5C6570"/>
+                </a:solidFill>
+                <a:latin typeface="Calibri" pitchFamily="34" charset="0"/>
+                <a:ea typeface="Calibri" pitchFamily="34" charset="-122"/>
+                <a:cs typeface="Calibri" pitchFamily="34" charset="-120"/>
+              </a:rPr>
+              <a:t>Δピーク血糖値</a:t>
+            </a:r>
+            <a:endParaRPr lang="en-US" sz="1100" dirty="0"/>
+          </a:p>
+        </p:txBody>
+      </p:sp>
+      <p:sp>
+        <p:nvSpPr>
+          <p:cNvPr id="9" name="Text 7"/>
+          <p:cNvSpPr txBox="1"/>
+          <p:nvPr/>
+        </p:nvSpPr>
+        <p:spPr>
+          <a:xfrm>
+            <a:off x="868680" y="3355848"/>
+            <a:ext cx="4722876" cy="502920"/>
+          </a:xfrm>
+          <a:prstGeom prst="rect">
+            <a:avLst/>
+          </a:prstGeom>
+          <a:noFill/>
+          <a:ln/>
+        </p:spPr>
+        <p:txBody>
+          <a:bodyPr wrap="square" lIns="0" tIns="0" rIns="0" bIns="0" rtlCol="0" anchor="ctr"/>
+          <a:lstStyle/>
+          <a:p>
+            <a:pPr indent="0" marL="0">
+              <a:buNone/>
+            </a:pPr>
+            <a:r>
+              <a:rPr lang="en-US" sz="2600" b="1" dirty="0">
+                <a:solidFill>
+                  <a:srgbClr val="2A78D6"/>
+                </a:solidFill>
+                <a:latin typeface="Cambria" pitchFamily="34" charset="0"/>
+                <a:ea typeface="Cambria" pitchFamily="34" charset="-122"/>
+                <a:cs typeface="Cambria" pitchFamily="34" charset="-120"/>
+              </a:rPr>
+              <a:t>11.2%</a:t>
+            </a:r>
+            <a:endParaRPr lang="en-US" sz="2600" dirty="0"/>
+          </a:p>
+        </p:txBody>
+      </p:sp>
+      <p:sp>
+        <p:nvSpPr>
+          <p:cNvPr id="10" name="Text 8"/>
+          <p:cNvSpPr txBox="1"/>
+          <p:nvPr/>
+        </p:nvSpPr>
+        <p:spPr>
+          <a:xfrm>
+            <a:off x="868680" y="3813048"/>
+            <a:ext cx="4722876" cy="320040"/>
+          </a:xfrm>
+          <a:prstGeom prst="rect">
+            <a:avLst/>
+          </a:prstGeom>
+          <a:noFill/>
+          <a:ln/>
+        </p:spPr>
+        <p:txBody>
+          <a:bodyPr wrap="square" lIns="0" tIns="0" rIns="0" bIns="0" rtlCol="0" anchor="ctr"/>
+          <a:lstStyle/>
+          <a:p>
+            <a:pPr indent="0" marL="0">
+              <a:buNone/>
+            </a:pPr>
+            <a:r>
+              <a:rPr lang="en-US" sz="1100" dirty="0">
+                <a:solidFill>
+                  <a:srgbClr val="5C6570"/>
+                </a:solidFill>
+                <a:latin typeface="Calibri" pitchFamily="34" charset="0"/>
+                <a:ea typeface="Calibri" pitchFamily="34" charset="-122"/>
+                <a:cs typeface="Calibri" pitchFamily="34" charset="-120"/>
+              </a:rPr>
+              <a:t>変動係数 CV</a:t>
+            </a:r>
+            <a:endParaRPr lang="en-US" sz="1100" dirty="0"/>
+          </a:p>
+        </p:txBody>
+      </p:sp>
+      <p:sp>
+        <p:nvSpPr>
+          <p:cNvPr id="11" name="Shape 9"/>
+          <p:cNvSpPr/>
+          <p:nvPr/>
+        </p:nvSpPr>
+        <p:spPr>
+          <a:xfrm>
+            <a:off x="6277356" y="1691640"/>
+            <a:ext cx="5362956" cy="2651760"/>
+          </a:xfrm>
+          <a:prstGeom prst="roundRect">
+            <a:avLst>
+              <a:gd name="adj" fmla="val 3448"/>
+            </a:avLst>
+          </a:prstGeom>
+          <a:solidFill>
+            <a:srgbClr val="F4F7F9"/>
+          </a:solidFill>
+          <a:ln/>
+        </p:spPr>
+      </p:sp>
+      <p:sp>
+        <p:nvSpPr>
+          <p:cNvPr id="12" name="Shape 10"/>
+          <p:cNvSpPr/>
+          <p:nvPr/>
+        </p:nvSpPr>
+        <p:spPr>
+          <a:xfrm>
+            <a:off x="6597396" y="1920240"/>
+            <a:ext cx="146304" cy="457200"/>
+          </a:xfrm>
+          <a:prstGeom prst="rect">
+            <a:avLst/>
+          </a:prstGeom>
+          <a:solidFill>
             <a:srgbClr val="EB6834"/>
           </a:solidFill>
           <a:ln/>
@@ -9833,13 +15054,13 @@
       </p:sp>
       <p:sp>
         <p:nvSpPr>
-          <p:cNvPr id="6" name="Text 4"/>
+          <p:cNvPr id="13" name="Text 11"/>
           <p:cNvSpPr txBox="1"/>
           <p:nvPr/>
         </p:nvSpPr>
         <p:spPr>
           <a:xfrm>
-            <a:off x="1143000" y="1874520"/>
+            <a:off x="6871716" y="1874520"/>
             <a:ext cx="4448556" cy="502920"/>
           </a:xfrm>
           <a:prstGeom prst="rect">
@@ -9872,13 +15093,13 @@
       </p:sp>
       <p:sp>
         <p:nvSpPr>
-          <p:cNvPr id="7" name="Text 5"/>
+          <p:cNvPr id="14" name="Text 12"/>
           <p:cNvSpPr txBox="1"/>
           <p:nvPr/>
         </p:nvSpPr>
         <p:spPr>
           <a:xfrm>
-            <a:off x="868680" y="2560320"/>
+            <a:off x="6597396" y="2560320"/>
             <a:ext cx="4722876" cy="502920"/>
           </a:xfrm>
           <a:prstGeom prst="rect">
@@ -9911,13 +15132,13 @@
       </p:sp>
       <p:sp>
         <p:nvSpPr>
-          <p:cNvPr id="8" name="Text 6"/>
+          <p:cNvPr id="15" name="Text 13"/>
           <p:cNvSpPr txBox="1"/>
           <p:nvPr/>
         </p:nvSpPr>
         <p:spPr>
           <a:xfrm>
-            <a:off x="868680" y="3017520"/>
+            <a:off x="6597396" y="3017520"/>
             <a:ext cx="4722876" cy="320040"/>
           </a:xfrm>
           <a:prstGeom prst="rect">
@@ -9942,7 +15163,7 @@
                 <a:ea typeface="Calibri" pitchFamily="34" charset="-122"/>
                 <a:cs typeface="Calibri" pitchFamily="34" charset="-120"/>
               </a:rPr>
-              <a:t>Δピーク血糖値</a:t>
+              <a:t>Δピーク血糖値（1.6倍）</a:t>
             </a:r>
             <a:endParaRPr lang="en-US" sz="1100" dirty="0"/>
           </a:p>
@@ -9950,13 +15171,13 @@
       </p:sp>
       <p:sp>
         <p:nvSpPr>
-          <p:cNvPr id="9" name="Text 7"/>
+          <p:cNvPr id="16" name="Text 14"/>
           <p:cNvSpPr txBox="1"/>
           <p:nvPr/>
         </p:nvSpPr>
         <p:spPr>
           <a:xfrm>
-            <a:off x="868680" y="3355848"/>
+            <a:off x="6597396" y="3355848"/>
             <a:ext cx="4722876" cy="502920"/>
           </a:xfrm>
           <a:prstGeom prst="rect">
@@ -9989,13 +15210,13 @@
       </p:sp>
       <p:sp>
         <p:nvSpPr>
-          <p:cNvPr id="10" name="Text 8"/>
+          <p:cNvPr id="17" name="Text 15"/>
           <p:cNvSpPr txBox="1"/>
           <p:nvPr/>
         </p:nvSpPr>
         <p:spPr>
           <a:xfrm>
-            <a:off x="868680" y="3813048"/>
+            <a:off x="6597396" y="3813048"/>
             <a:ext cx="4722876" cy="320040"/>
           </a:xfrm>
           <a:prstGeom prst="rect">
@@ -10028,243 +15249,6 @@
       </p:sp>
       <p:sp>
         <p:nvSpPr>
-          <p:cNvPr id="11" name="Shape 9"/>
-          <p:cNvSpPr/>
-          <p:nvPr/>
-        </p:nvSpPr>
-        <p:spPr>
-          <a:xfrm>
-            <a:off x="6277356" y="1691640"/>
-            <a:ext cx="5362956" cy="2651760"/>
-          </a:xfrm>
-          <a:prstGeom prst="roundRect">
-            <a:avLst>
-              <a:gd name="adj" fmla="val 3448"/>
-            </a:avLst>
-          </a:prstGeom>
-          <a:solidFill>
-            <a:srgbClr val="F4F7F9"/>
-          </a:solidFill>
-          <a:ln/>
-        </p:spPr>
-      </p:sp>
-      <p:sp>
-        <p:nvSpPr>
-          <p:cNvPr id="12" name="Shape 10"/>
-          <p:cNvSpPr/>
-          <p:nvPr/>
-        </p:nvSpPr>
-        <p:spPr>
-          <a:xfrm>
-            <a:off x="6597396" y="1920240"/>
-            <a:ext cx="146304" cy="457200"/>
-          </a:xfrm>
-          <a:prstGeom prst="rect">
-            <a:avLst/>
-          </a:prstGeom>
-          <a:solidFill>
-            <a:srgbClr val="1BAF7A"/>
-          </a:solidFill>
-          <a:ln/>
-        </p:spPr>
-      </p:sp>
-      <p:sp>
-        <p:nvSpPr>
-          <p:cNvPr id="13" name="Text 11"/>
-          <p:cNvSpPr txBox="1"/>
-          <p:nvPr/>
-        </p:nvSpPr>
-        <p:spPr>
-          <a:xfrm>
-            <a:off x="6871716" y="1874520"/>
-            <a:ext cx="4448556" cy="502920"/>
-          </a:xfrm>
-          <a:prstGeom prst="rect">
-            <a:avLst/>
-          </a:prstGeom>
-          <a:noFill/>
-          <a:ln/>
-        </p:spPr>
-        <p:txBody>
-          <a:bodyPr wrap="square" lIns="0" tIns="0" rIns="0" bIns="0" rtlCol="0" anchor="ctr"/>
-          <a:lstStyle/>
-          <a:p>
-            <a:pPr indent="0" marL="0">
-              <a:buNone/>
-            </a:pPr>
-            <a:r>
-              <a:rPr lang="en-US" sz="1600" b="1" dirty="0">
-                <a:solidFill>
-                  <a:srgbClr val="21295C"/>
-                </a:solidFill>
-                <a:latin typeface="Calibri" pitchFamily="34" charset="0"/>
-                <a:ea typeface="Calibri" pitchFamily="34" charset="-122"/>
-                <a:cs typeface="Calibri" pitchFamily="34" charset="-120"/>
-              </a:rPr>
-              <a:t>おにぎり＋スムージー</a:t>
-            </a:r>
-            <a:endParaRPr lang="en-US" sz="1600" dirty="0"/>
-          </a:p>
-        </p:txBody>
-      </p:sp>
-      <p:sp>
-        <p:nvSpPr>
-          <p:cNvPr id="14" name="Text 12"/>
-          <p:cNvSpPr txBox="1"/>
-          <p:nvPr/>
-        </p:nvSpPr>
-        <p:spPr>
-          <a:xfrm>
-            <a:off x="6597396" y="2560320"/>
-            <a:ext cx="4722876" cy="502920"/>
-          </a:xfrm>
-          <a:prstGeom prst="rect">
-            <a:avLst/>
-          </a:prstGeom>
-          <a:noFill/>
-          <a:ln/>
-        </p:spPr>
-        <p:txBody>
-          <a:bodyPr wrap="square" lIns="0" tIns="0" rIns="0" bIns="0" rtlCol="0" anchor="ctr"/>
-          <a:lstStyle/>
-          <a:p>
-            <a:pPr indent="0" marL="0">
-              <a:buNone/>
-            </a:pPr>
-            <a:r>
-              <a:rPr lang="en-US" sz="2600" b="1" dirty="0">
-                <a:solidFill>
-                  <a:srgbClr val="1BAF7A"/>
-                </a:solidFill>
-                <a:latin typeface="Cambria" pitchFamily="34" charset="0"/>
-                <a:ea typeface="Cambria" pitchFamily="34" charset="-122"/>
-                <a:cs typeface="Cambria" pitchFamily="34" charset="-120"/>
-              </a:rPr>
-              <a:t>78.0 mg/dL</a:t>
-            </a:r>
-            <a:endParaRPr lang="en-US" sz="2600" dirty="0"/>
-          </a:p>
-        </p:txBody>
-      </p:sp>
-      <p:sp>
-        <p:nvSpPr>
-          <p:cNvPr id="15" name="Text 13"/>
-          <p:cNvSpPr txBox="1"/>
-          <p:nvPr/>
-        </p:nvSpPr>
-        <p:spPr>
-          <a:xfrm>
-            <a:off x="6597396" y="3017520"/>
-            <a:ext cx="4722876" cy="320040"/>
-          </a:xfrm>
-          <a:prstGeom prst="rect">
-            <a:avLst/>
-          </a:prstGeom>
-          <a:noFill/>
-          <a:ln/>
-        </p:spPr>
-        <p:txBody>
-          <a:bodyPr wrap="square" lIns="0" tIns="0" rIns="0" bIns="0" rtlCol="0" anchor="ctr"/>
-          <a:lstStyle/>
-          <a:p>
-            <a:pPr indent="0" marL="0">
-              <a:buNone/>
-            </a:pPr>
-            <a:r>
-              <a:rPr lang="en-US" sz="1100" dirty="0">
-                <a:solidFill>
-                  <a:srgbClr val="5C6570"/>
-                </a:solidFill>
-                <a:latin typeface="Calibri" pitchFamily="34" charset="0"/>
-                <a:ea typeface="Calibri" pitchFamily="34" charset="-122"/>
-                <a:cs typeface="Calibri" pitchFamily="34" charset="-120"/>
-              </a:rPr>
-              <a:t>Δピーク血糖値</a:t>
-            </a:r>
-            <a:endParaRPr lang="en-US" sz="1100" dirty="0"/>
-          </a:p>
-        </p:txBody>
-      </p:sp>
-      <p:sp>
-        <p:nvSpPr>
-          <p:cNvPr id="16" name="Text 14"/>
-          <p:cNvSpPr txBox="1"/>
-          <p:nvPr/>
-        </p:nvSpPr>
-        <p:spPr>
-          <a:xfrm>
-            <a:off x="6597396" y="3355848"/>
-            <a:ext cx="4722876" cy="502920"/>
-          </a:xfrm>
-          <a:prstGeom prst="rect">
-            <a:avLst/>
-          </a:prstGeom>
-          <a:noFill/>
-          <a:ln/>
-        </p:spPr>
-        <p:txBody>
-          <a:bodyPr wrap="square" lIns="0" tIns="0" rIns="0" bIns="0" rtlCol="0" anchor="ctr"/>
-          <a:lstStyle/>
-          <a:p>
-            <a:pPr indent="0" marL="0">
-              <a:buNone/>
-            </a:pPr>
-            <a:r>
-              <a:rPr lang="en-US" sz="2600" b="1" dirty="0">
-                <a:solidFill>
-                  <a:srgbClr val="1BAF7A"/>
-                </a:solidFill>
-                <a:latin typeface="Cambria" pitchFamily="34" charset="0"/>
-                <a:ea typeface="Cambria" pitchFamily="34" charset="-122"/>
-                <a:cs typeface="Cambria" pitchFamily="34" charset="-120"/>
-              </a:rPr>
-              <a:t>10.1%</a:t>
-            </a:r>
-            <a:endParaRPr lang="en-US" sz="2600" dirty="0"/>
-          </a:p>
-        </p:txBody>
-      </p:sp>
-      <p:sp>
-        <p:nvSpPr>
-          <p:cNvPr id="17" name="Text 15"/>
-          <p:cNvSpPr txBox="1"/>
-          <p:nvPr/>
-        </p:nvSpPr>
-        <p:spPr>
-          <a:xfrm>
-            <a:off x="6597396" y="3813048"/>
-            <a:ext cx="4722876" cy="320040"/>
-          </a:xfrm>
-          <a:prstGeom prst="rect">
-            <a:avLst/>
-          </a:prstGeom>
-          <a:noFill/>
-          <a:ln/>
-        </p:spPr>
-        <p:txBody>
-          <a:bodyPr wrap="square" lIns="0" tIns="0" rIns="0" bIns="0" rtlCol="0" anchor="ctr"/>
-          <a:lstStyle/>
-          <a:p>
-            <a:pPr indent="0" marL="0">
-              <a:buNone/>
-            </a:pPr>
-            <a:r>
-              <a:rPr lang="en-US" sz="1100" dirty="0">
-                <a:solidFill>
-                  <a:srgbClr val="5C6570"/>
-                </a:solidFill>
-                <a:latin typeface="Calibri" pitchFamily="34" charset="0"/>
-                <a:ea typeface="Calibri" pitchFamily="34" charset="-122"/>
-                <a:cs typeface="Calibri" pitchFamily="34" charset="-120"/>
-              </a:rPr>
-              <a:t>変動係数 CV（最小）</a:t>
-            </a:r>
-            <a:endParaRPr lang="en-US" sz="1100" dirty="0"/>
-          </a:p>
-        </p:txBody>
-      </p:sp>
-      <p:sp>
-        <p:nvSpPr>
           <p:cNvPr id="18" name="Shape 16"/>
           <p:cNvSpPr/>
           <p:nvPr/>
@@ -10357,7 +15341,7 @@
                 <a:ea typeface="Calibri" pitchFamily="34" charset="-122"/>
                 <a:cs typeface="Calibri" pitchFamily="34" charset="-120"/>
               </a:rPr>
-              <a:t>おにぎりを同時摂取した方がΔピーク・CVともに小さい。おにぎり（固形デンプン）が副食の急激な糖吸収を緩衝し、波形がなだらかになっている可能性がある。総摂取糖質量は増えるが（iAUC絶対値は上昇）、研究背景の「総固形物量の調整による血糖・消化ストレス緩和」仮説を支持する結果。</a:t>
+              <a:t>副食を液状化するだけで血糖の上昇幅・乱高下は明確に増大。液状化は消化の負担感を下げる一方、血糖の安定には必ずしも寄与しない可能性がある。選手の「出力向上」の体感は、血糖の安定ではなく消化器系の負担軽減（内臓への血流集中の緩和）による可能性が高い。</a:t>
             </a:r>
             <a:endParaRPr lang="en-US" sz="1250" dirty="0"/>
           </a:p>
@@ -10428,7 +15412,7 @@
                 <a:ea typeface="Calibri" pitchFamily="34" charset="-122"/>
                 <a:cs typeface="Calibri" pitchFamily="34" charset="-120"/>
               </a:rPr>
-              <a:t>COMPARISON 3</a:t>
+              <a:t>COMPARISON 2</a:t>
             </a:r>
             <a:endParaRPr lang="en-US" sz="1300" dirty="0"/>
           </a:p>
@@ -10467,7 +15451,7 @@
                 <a:ea typeface="Cambria" pitchFamily="34" charset="-122"/>
                 <a:cs typeface="Cambria" pitchFamily="34" charset="-120"/>
               </a:rPr>
-              <a:t>おにぎり＋スムージー vs おにぎり＋糖質減</a:t>
+              <a:t>スムージー vs おにぎり＋スムージー</a:t>
             </a:r>
             <a:endParaRPr lang="en-US" sz="2800" dirty="0"/>
           </a:p>
@@ -10510,6 +15494,243 @@
             <a:avLst/>
           </a:prstGeom>
           <a:solidFill>
+            <a:srgbClr val="EB6834"/>
+          </a:solidFill>
+          <a:ln/>
+        </p:spPr>
+      </p:sp>
+      <p:sp>
+        <p:nvSpPr>
+          <p:cNvPr id="6" name="Text 4"/>
+          <p:cNvSpPr txBox="1"/>
+          <p:nvPr/>
+        </p:nvSpPr>
+        <p:spPr>
+          <a:xfrm>
+            <a:off x="1143000" y="1874520"/>
+            <a:ext cx="4448556" cy="502920"/>
+          </a:xfrm>
+          <a:prstGeom prst="rect">
+            <a:avLst/>
+          </a:prstGeom>
+          <a:noFill/>
+          <a:ln/>
+        </p:spPr>
+        <p:txBody>
+          <a:bodyPr wrap="square" lIns="0" tIns="0" rIns="0" bIns="0" rtlCol="0" anchor="ctr"/>
+          <a:lstStyle/>
+          <a:p>
+            <a:pPr indent="0" marL="0">
+              <a:buNone/>
+            </a:pPr>
+            <a:r>
+              <a:rPr lang="en-US" sz="1600" b="1" dirty="0">
+                <a:solidFill>
+                  <a:srgbClr val="21295C"/>
+                </a:solidFill>
+                <a:latin typeface="Calibri" pitchFamily="34" charset="0"/>
+                <a:ea typeface="Calibri" pitchFamily="34" charset="-122"/>
+                <a:cs typeface="Calibri" pitchFamily="34" charset="-120"/>
+              </a:rPr>
+              <a:t>スムージー摂取</a:t>
+            </a:r>
+            <a:endParaRPr lang="en-US" sz="1600" dirty="0"/>
+          </a:p>
+        </p:txBody>
+      </p:sp>
+      <p:sp>
+        <p:nvSpPr>
+          <p:cNvPr id="7" name="Text 5"/>
+          <p:cNvSpPr txBox="1"/>
+          <p:nvPr/>
+        </p:nvSpPr>
+        <p:spPr>
+          <a:xfrm>
+            <a:off x="868680" y="2560320"/>
+            <a:ext cx="4722876" cy="502920"/>
+          </a:xfrm>
+          <a:prstGeom prst="rect">
+            <a:avLst/>
+          </a:prstGeom>
+          <a:noFill/>
+          <a:ln/>
+        </p:spPr>
+        <p:txBody>
+          <a:bodyPr wrap="square" lIns="0" tIns="0" rIns="0" bIns="0" rtlCol="0" anchor="ctr"/>
+          <a:lstStyle/>
+          <a:p>
+            <a:pPr indent="0" marL="0">
+              <a:buNone/>
+            </a:pPr>
+            <a:r>
+              <a:rPr lang="en-US" sz="2600" b="1" dirty="0">
+                <a:solidFill>
+                  <a:srgbClr val="EB6834"/>
+                </a:solidFill>
+                <a:latin typeface="Cambria" pitchFamily="34" charset="0"/>
+                <a:ea typeface="Cambria" pitchFamily="34" charset="-122"/>
+                <a:cs typeface="Cambria" pitchFamily="34" charset="-120"/>
+              </a:rPr>
+              <a:t>85.0 mg/dL</a:t>
+            </a:r>
+            <a:endParaRPr lang="en-US" sz="2600" dirty="0"/>
+          </a:p>
+        </p:txBody>
+      </p:sp>
+      <p:sp>
+        <p:nvSpPr>
+          <p:cNvPr id="8" name="Text 6"/>
+          <p:cNvSpPr txBox="1"/>
+          <p:nvPr/>
+        </p:nvSpPr>
+        <p:spPr>
+          <a:xfrm>
+            <a:off x="868680" y="3017520"/>
+            <a:ext cx="4722876" cy="320040"/>
+          </a:xfrm>
+          <a:prstGeom prst="rect">
+            <a:avLst/>
+          </a:prstGeom>
+          <a:noFill/>
+          <a:ln/>
+        </p:spPr>
+        <p:txBody>
+          <a:bodyPr wrap="square" lIns="0" tIns="0" rIns="0" bIns="0" rtlCol="0" anchor="ctr"/>
+          <a:lstStyle/>
+          <a:p>
+            <a:pPr indent="0" marL="0">
+              <a:buNone/>
+            </a:pPr>
+            <a:r>
+              <a:rPr lang="en-US" sz="1100" dirty="0">
+                <a:solidFill>
+                  <a:srgbClr val="5C6570"/>
+                </a:solidFill>
+                <a:latin typeface="Calibri" pitchFamily="34" charset="0"/>
+                <a:ea typeface="Calibri" pitchFamily="34" charset="-122"/>
+                <a:cs typeface="Calibri" pitchFamily="34" charset="-120"/>
+              </a:rPr>
+              <a:t>Δピーク血糖値</a:t>
+            </a:r>
+            <a:endParaRPr lang="en-US" sz="1100" dirty="0"/>
+          </a:p>
+        </p:txBody>
+      </p:sp>
+      <p:sp>
+        <p:nvSpPr>
+          <p:cNvPr id="9" name="Text 7"/>
+          <p:cNvSpPr txBox="1"/>
+          <p:nvPr/>
+        </p:nvSpPr>
+        <p:spPr>
+          <a:xfrm>
+            <a:off x="868680" y="3355848"/>
+            <a:ext cx="4722876" cy="502920"/>
+          </a:xfrm>
+          <a:prstGeom prst="rect">
+            <a:avLst/>
+          </a:prstGeom>
+          <a:noFill/>
+          <a:ln/>
+        </p:spPr>
+        <p:txBody>
+          <a:bodyPr wrap="square" lIns="0" tIns="0" rIns="0" bIns="0" rtlCol="0" anchor="ctr"/>
+          <a:lstStyle/>
+          <a:p>
+            <a:pPr indent="0" marL="0">
+              <a:buNone/>
+            </a:pPr>
+            <a:r>
+              <a:rPr lang="en-US" sz="2600" b="1" dirty="0">
+                <a:solidFill>
+                  <a:srgbClr val="EB6834"/>
+                </a:solidFill>
+                <a:latin typeface="Cambria" pitchFamily="34" charset="0"/>
+                <a:ea typeface="Cambria" pitchFamily="34" charset="-122"/>
+                <a:cs typeface="Cambria" pitchFamily="34" charset="-120"/>
+              </a:rPr>
+              <a:t>14.7%</a:t>
+            </a:r>
+            <a:endParaRPr lang="en-US" sz="2600" dirty="0"/>
+          </a:p>
+        </p:txBody>
+      </p:sp>
+      <p:sp>
+        <p:nvSpPr>
+          <p:cNvPr id="10" name="Text 8"/>
+          <p:cNvSpPr txBox="1"/>
+          <p:nvPr/>
+        </p:nvSpPr>
+        <p:spPr>
+          <a:xfrm>
+            <a:off x="868680" y="3813048"/>
+            <a:ext cx="4722876" cy="320040"/>
+          </a:xfrm>
+          <a:prstGeom prst="rect">
+            <a:avLst/>
+          </a:prstGeom>
+          <a:noFill/>
+          <a:ln/>
+        </p:spPr>
+        <p:txBody>
+          <a:bodyPr wrap="square" lIns="0" tIns="0" rIns="0" bIns="0" rtlCol="0" anchor="ctr"/>
+          <a:lstStyle/>
+          <a:p>
+            <a:pPr indent="0" marL="0">
+              <a:buNone/>
+            </a:pPr>
+            <a:r>
+              <a:rPr lang="en-US" sz="1100" dirty="0">
+                <a:solidFill>
+                  <a:srgbClr val="5C6570"/>
+                </a:solidFill>
+                <a:latin typeface="Calibri" pitchFamily="34" charset="0"/>
+                <a:ea typeface="Calibri" pitchFamily="34" charset="-122"/>
+                <a:cs typeface="Calibri" pitchFamily="34" charset="-120"/>
+              </a:rPr>
+              <a:t>変動係数 CV</a:t>
+            </a:r>
+            <a:endParaRPr lang="en-US" sz="1100" dirty="0"/>
+          </a:p>
+        </p:txBody>
+      </p:sp>
+      <p:sp>
+        <p:nvSpPr>
+          <p:cNvPr id="11" name="Shape 9"/>
+          <p:cNvSpPr/>
+          <p:nvPr/>
+        </p:nvSpPr>
+        <p:spPr>
+          <a:xfrm>
+            <a:off x="6277356" y="1691640"/>
+            <a:ext cx="5362956" cy="2651760"/>
+          </a:xfrm>
+          <a:prstGeom prst="roundRect">
+            <a:avLst>
+              <a:gd name="adj" fmla="val 3448"/>
+            </a:avLst>
+          </a:prstGeom>
+          <a:solidFill>
+            <a:srgbClr val="F4F7F9"/>
+          </a:solidFill>
+          <a:ln/>
+        </p:spPr>
+      </p:sp>
+      <p:sp>
+        <p:nvSpPr>
+          <p:cNvPr id="12" name="Shape 10"/>
+          <p:cNvSpPr/>
+          <p:nvPr/>
+        </p:nvSpPr>
+        <p:spPr>
+          <a:xfrm>
+            <a:off x="6597396" y="1920240"/>
+            <a:ext cx="146304" cy="457200"/>
+          </a:xfrm>
+          <a:prstGeom prst="rect">
+            <a:avLst/>
+          </a:prstGeom>
+          <a:solidFill>
             <a:srgbClr val="1BAF7A"/>
           </a:solidFill>
           <a:ln/>
@@ -10517,13 +15738,13 @@
       </p:sp>
       <p:sp>
         <p:nvSpPr>
-          <p:cNvPr id="6" name="Text 4"/>
+          <p:cNvPr id="13" name="Text 11"/>
           <p:cNvSpPr txBox="1"/>
           <p:nvPr/>
         </p:nvSpPr>
         <p:spPr>
           <a:xfrm>
-            <a:off x="1143000" y="1874520"/>
+            <a:off x="6871716" y="1874520"/>
             <a:ext cx="4448556" cy="502920"/>
           </a:xfrm>
           <a:prstGeom prst="rect">
@@ -10556,13 +15777,13 @@
       </p:sp>
       <p:sp>
         <p:nvSpPr>
-          <p:cNvPr id="7" name="Text 5"/>
+          <p:cNvPr id="14" name="Text 12"/>
           <p:cNvSpPr txBox="1"/>
           <p:nvPr/>
         </p:nvSpPr>
         <p:spPr>
           <a:xfrm>
-            <a:off x="868680" y="2560320"/>
+            <a:off x="6597396" y="2560320"/>
             <a:ext cx="4722876" cy="502920"/>
           </a:xfrm>
           <a:prstGeom prst="rect">
@@ -10587,7 +15808,7 @@
                 <a:ea typeface="Cambria" pitchFamily="34" charset="-122"/>
                 <a:cs typeface="Cambria" pitchFamily="34" charset="-120"/>
               </a:rPr>
-              <a:t>5,230</a:t>
+              <a:t>78.0 mg/dL</a:t>
             </a:r>
             <a:endParaRPr lang="en-US" sz="2600" dirty="0"/>
           </a:p>
@@ -10595,13 +15816,13 @@
       </p:sp>
       <p:sp>
         <p:nvSpPr>
-          <p:cNvPr id="8" name="Text 6"/>
+          <p:cNvPr id="15" name="Text 13"/>
           <p:cNvSpPr txBox="1"/>
           <p:nvPr/>
         </p:nvSpPr>
         <p:spPr>
           <a:xfrm>
-            <a:off x="868680" y="3017520"/>
+            <a:off x="6597396" y="3017520"/>
             <a:ext cx="4722876" cy="320040"/>
           </a:xfrm>
           <a:prstGeom prst="rect">
@@ -10626,7 +15847,7 @@
                 <a:ea typeface="Calibri" pitchFamily="34" charset="-122"/>
                 <a:cs typeface="Calibri" pitchFamily="34" charset="-120"/>
               </a:rPr>
-              <a:t>iAUC 2h (mg/dL・分)</a:t>
+              <a:t>Δピーク血糖値</a:t>
             </a:r>
             <a:endParaRPr lang="en-US" sz="1100" dirty="0"/>
           </a:p>
@@ -10634,13 +15855,13 @@
       </p:sp>
       <p:sp>
         <p:nvSpPr>
-          <p:cNvPr id="9" name="Text 7"/>
+          <p:cNvPr id="16" name="Text 14"/>
           <p:cNvSpPr txBox="1"/>
           <p:nvPr/>
         </p:nvSpPr>
         <p:spPr>
           <a:xfrm>
-            <a:off x="868680" y="3355848"/>
+            <a:off x="6597396" y="3355848"/>
             <a:ext cx="4722876" cy="502920"/>
           </a:xfrm>
           <a:prstGeom prst="rect">
@@ -10665,7 +15886,7 @@
                 <a:ea typeface="Cambria" pitchFamily="34" charset="-122"/>
                 <a:cs typeface="Cambria" pitchFamily="34" charset="-120"/>
               </a:rPr>
-              <a:t>242.3 mg/dL</a:t>
+              <a:t>10.1%</a:t>
             </a:r>
             <a:endParaRPr lang="en-US" sz="2600" dirty="0"/>
           </a:p>
@@ -10673,13 +15894,13 @@
       </p:sp>
       <p:sp>
         <p:nvSpPr>
-          <p:cNvPr id="10" name="Text 8"/>
+          <p:cNvPr id="17" name="Text 15"/>
           <p:cNvSpPr txBox="1"/>
           <p:nvPr/>
         </p:nvSpPr>
         <p:spPr>
           <a:xfrm>
-            <a:off x="868680" y="3813048"/>
+            <a:off x="6597396" y="3813048"/>
             <a:ext cx="4722876" cy="320040"/>
           </a:xfrm>
           <a:prstGeom prst="rect">
@@ -10704,244 +15925,7 @@
                 <a:ea typeface="Calibri" pitchFamily="34" charset="-122"/>
                 <a:cs typeface="Calibri" pitchFamily="34" charset="-120"/>
               </a:rPr>
-              <a:t>ピーク血糖値</a:t>
-            </a:r>
-            <a:endParaRPr lang="en-US" sz="1100" dirty="0"/>
-          </a:p>
-        </p:txBody>
-      </p:sp>
-      <p:sp>
-        <p:nvSpPr>
-          <p:cNvPr id="11" name="Shape 9"/>
-          <p:cNvSpPr/>
-          <p:nvPr/>
-        </p:nvSpPr>
-        <p:spPr>
-          <a:xfrm>
-            <a:off x="6277356" y="1691640"/>
-            <a:ext cx="5362956" cy="2651760"/>
-          </a:xfrm>
-          <a:prstGeom prst="roundRect">
-            <a:avLst>
-              <a:gd name="adj" fmla="val 3448"/>
-            </a:avLst>
-          </a:prstGeom>
-          <a:solidFill>
-            <a:srgbClr val="F4F7F9"/>
-          </a:solidFill>
-          <a:ln/>
-        </p:spPr>
-      </p:sp>
-      <p:sp>
-        <p:nvSpPr>
-          <p:cNvPr id="12" name="Shape 10"/>
-          <p:cNvSpPr/>
-          <p:nvPr/>
-        </p:nvSpPr>
-        <p:spPr>
-          <a:xfrm>
-            <a:off x="6597396" y="1920240"/>
-            <a:ext cx="146304" cy="457200"/>
-          </a:xfrm>
-          <a:prstGeom prst="rect">
-            <a:avLst/>
-          </a:prstGeom>
-          <a:solidFill>
-            <a:srgbClr val="EDA100"/>
-          </a:solidFill>
-          <a:ln/>
-        </p:spPr>
-      </p:sp>
-      <p:sp>
-        <p:nvSpPr>
-          <p:cNvPr id="13" name="Text 11"/>
-          <p:cNvSpPr txBox="1"/>
-          <p:nvPr/>
-        </p:nvSpPr>
-        <p:spPr>
-          <a:xfrm>
-            <a:off x="6871716" y="1874520"/>
-            <a:ext cx="4448556" cy="502920"/>
-          </a:xfrm>
-          <a:prstGeom prst="rect">
-            <a:avLst/>
-          </a:prstGeom>
-          <a:noFill/>
-          <a:ln/>
-        </p:spPr>
-        <p:txBody>
-          <a:bodyPr wrap="square" lIns="0" tIns="0" rIns="0" bIns="0" rtlCol="0" anchor="ctr"/>
-          <a:lstStyle/>
-          <a:p>
-            <a:pPr indent="0" marL="0">
-              <a:buNone/>
-            </a:pPr>
-            <a:r>
-              <a:rPr lang="en-US" sz="1600" b="1" dirty="0">
-                <a:solidFill>
-                  <a:srgbClr val="21295C"/>
-                </a:solidFill>
-                <a:latin typeface="Calibri" pitchFamily="34" charset="0"/>
-                <a:ea typeface="Calibri" pitchFamily="34" charset="-122"/>
-                <a:cs typeface="Calibri" pitchFamily="34" charset="-120"/>
-              </a:rPr>
-              <a:t>おにぎり＋糖質減</a:t>
-            </a:r>
-            <a:endParaRPr lang="en-US" sz="1600" dirty="0"/>
-          </a:p>
-        </p:txBody>
-      </p:sp>
-      <p:sp>
-        <p:nvSpPr>
-          <p:cNvPr id="14" name="Text 12"/>
-          <p:cNvSpPr txBox="1"/>
-          <p:nvPr/>
-        </p:nvSpPr>
-        <p:spPr>
-          <a:xfrm>
-            <a:off x="6597396" y="2560320"/>
-            <a:ext cx="4722876" cy="502920"/>
-          </a:xfrm>
-          <a:prstGeom prst="rect">
-            <a:avLst/>
-          </a:prstGeom>
-          <a:noFill/>
-          <a:ln/>
-        </p:spPr>
-        <p:txBody>
-          <a:bodyPr wrap="square" lIns="0" tIns="0" rIns="0" bIns="0" rtlCol="0" anchor="ctr"/>
-          <a:lstStyle/>
-          <a:p>
-            <a:pPr indent="0" marL="0">
-              <a:buNone/>
-            </a:pPr>
-            <a:r>
-              <a:rPr lang="en-US" sz="2600" b="1" dirty="0">
-                <a:solidFill>
-                  <a:srgbClr val="EDA100"/>
-                </a:solidFill>
-                <a:latin typeface="Cambria" pitchFamily="34" charset="0"/>
-                <a:ea typeface="Cambria" pitchFamily="34" charset="-122"/>
-                <a:cs typeface="Cambria" pitchFamily="34" charset="-120"/>
-              </a:rPr>
-              <a:t>3,168 (▼39%)</a:t>
-            </a:r>
-            <a:endParaRPr lang="en-US" sz="2600" dirty="0"/>
-          </a:p>
-        </p:txBody>
-      </p:sp>
-      <p:sp>
-        <p:nvSpPr>
-          <p:cNvPr id="15" name="Text 13"/>
-          <p:cNvSpPr txBox="1"/>
-          <p:nvPr/>
-        </p:nvSpPr>
-        <p:spPr>
-          <a:xfrm>
-            <a:off x="6597396" y="3017520"/>
-            <a:ext cx="4722876" cy="320040"/>
-          </a:xfrm>
-          <a:prstGeom prst="rect">
-            <a:avLst/>
-          </a:prstGeom>
-          <a:noFill/>
-          <a:ln/>
-        </p:spPr>
-        <p:txBody>
-          <a:bodyPr wrap="square" lIns="0" tIns="0" rIns="0" bIns="0" rtlCol="0" anchor="ctr"/>
-          <a:lstStyle/>
-          <a:p>
-            <a:pPr indent="0" marL="0">
-              <a:buNone/>
-            </a:pPr>
-            <a:r>
-              <a:rPr lang="en-US" sz="1100" dirty="0">
-                <a:solidFill>
-                  <a:srgbClr val="5C6570"/>
-                </a:solidFill>
-                <a:latin typeface="Calibri" pitchFamily="34" charset="0"/>
-                <a:ea typeface="Calibri" pitchFamily="34" charset="-122"/>
-                <a:cs typeface="Calibri" pitchFamily="34" charset="-120"/>
-              </a:rPr>
-              <a:t>iAUC 2h (mg/dL・分)</a:t>
-            </a:r>
-            <a:endParaRPr lang="en-US" sz="1100" dirty="0"/>
-          </a:p>
-        </p:txBody>
-      </p:sp>
-      <p:sp>
-        <p:nvSpPr>
-          <p:cNvPr id="16" name="Text 14"/>
-          <p:cNvSpPr txBox="1"/>
-          <p:nvPr/>
-        </p:nvSpPr>
-        <p:spPr>
-          <a:xfrm>
-            <a:off x="6597396" y="3355848"/>
-            <a:ext cx="4722876" cy="502920"/>
-          </a:xfrm>
-          <a:prstGeom prst="rect">
-            <a:avLst/>
-          </a:prstGeom>
-          <a:noFill/>
-          <a:ln/>
-        </p:spPr>
-        <p:txBody>
-          <a:bodyPr wrap="square" lIns="0" tIns="0" rIns="0" bIns="0" rtlCol="0" anchor="ctr"/>
-          <a:lstStyle/>
-          <a:p>
-            <a:pPr indent="0" marL="0">
-              <a:buNone/>
-            </a:pPr>
-            <a:r>
-              <a:rPr lang="en-US" sz="2600" b="1" dirty="0">
-                <a:solidFill>
-                  <a:srgbClr val="EDA100"/>
-                </a:solidFill>
-                <a:latin typeface="Cambria" pitchFamily="34" charset="0"/>
-                <a:ea typeface="Cambria" pitchFamily="34" charset="-122"/>
-                <a:cs typeface="Cambria" pitchFamily="34" charset="-120"/>
-              </a:rPr>
-              <a:t>250.3 mg/dL</a:t>
-            </a:r>
-            <a:endParaRPr lang="en-US" sz="2600" dirty="0"/>
-          </a:p>
-        </p:txBody>
-      </p:sp>
-      <p:sp>
-        <p:nvSpPr>
-          <p:cNvPr id="17" name="Text 15"/>
-          <p:cNvSpPr txBox="1"/>
-          <p:nvPr/>
-        </p:nvSpPr>
-        <p:spPr>
-          <a:xfrm>
-            <a:off x="6597396" y="3813048"/>
-            <a:ext cx="4722876" cy="320040"/>
-          </a:xfrm>
-          <a:prstGeom prst="rect">
-            <a:avLst/>
-          </a:prstGeom>
-          <a:noFill/>
-          <a:ln/>
-        </p:spPr>
-        <p:txBody>
-          <a:bodyPr wrap="square" lIns="0" tIns="0" rIns="0" bIns="0" rtlCol="0" anchor="ctr"/>
-          <a:lstStyle/>
-          <a:p>
-            <a:pPr indent="0" marL="0">
-              <a:buNone/>
-            </a:pPr>
-            <a:r>
-              <a:rPr lang="en-US" sz="1100" dirty="0">
-                <a:solidFill>
-                  <a:srgbClr val="5C6570"/>
-                </a:solidFill>
-                <a:latin typeface="Calibri" pitchFamily="34" charset="0"/>
-                <a:ea typeface="Calibri" pitchFamily="34" charset="-122"/>
-                <a:cs typeface="Calibri" pitchFamily="34" charset="-120"/>
-              </a:rPr>
-              <a:t>ピーク血糖値（同水準）</a:t>
+              <a:t>変動係数 CV（最小）</a:t>
             </a:r>
             <a:endParaRPr lang="en-US" sz="1100" dirty="0"/>
           </a:p>
@@ -11041,7 +16025,7 @@
                 <a:ea typeface="Calibri" pitchFamily="34" charset="-122"/>
                 <a:cs typeface="Calibri" pitchFamily="34" charset="-120"/>
               </a:rPr>
-              <a:t>研究目的に最も近い比較。糖質を減らすことで食後2時間の正味の血糖上昇（iAUC）が約39%減少。ピーク自体の高さはほぼ同水準だが、上昇の「持続・面積」＝体への負荷は明確に小さい。おにぎりの満足感を保ちながら総糖質量を最適化する方針はデータ上も支持される。</a:t>
+              <a:t>おにぎりを同時摂取した方がΔピーク・CVともに小さい。おにぎり（固形デンプン）が副食の急激な糖吸収を緩衝し、波形がなだらかになっている可能性がある。総摂取糖質量は増えるが（iAUC絶対値は上昇）、研究背景の「総固形物量の調整による血糖・消化ストレス緩和」仮説を支持する結果。</a:t>
             </a:r>
             <a:endParaRPr lang="en-US" sz="1250" dirty="0"/>
           </a:p>
@@ -11112,7 +16096,7 @@
                 <a:ea typeface="Calibri" pitchFamily="34" charset="-122"/>
                 <a:cs typeface="Calibri" pitchFamily="34" charset="-120"/>
               </a:rPr>
-              <a:t>CONDITION</a:t>
+              <a:t>COMPARISON 3</a:t>
             </a:r>
             <a:endParaRPr lang="en-US" sz="1300" dirty="0"/>
           </a:p>
@@ -11151,7 +16135,7 @@
                 <a:ea typeface="Cambria" pitchFamily="34" charset="-122"/>
                 <a:cs typeface="Cambria" pitchFamily="34" charset="-120"/>
               </a:rPr>
-              <a:t>自覚コンディション（4条件比較）</a:t>
+              <a:t>おにぎり＋スムージー vs おにぎり＋糖質減</a:t>
             </a:r>
             <a:endParaRPr lang="en-US" sz="2800" dirty="0"/>
           </a:p>
@@ -11159,14 +16143,56 @@
       </p:sp>
       <p:sp>
         <p:nvSpPr>
-          <p:cNvPr id="4" name="Text 2"/>
+          <p:cNvPr id="4" name="Shape 2"/>
+          <p:cNvSpPr/>
+          <p:nvPr/>
+        </p:nvSpPr>
+        <p:spPr>
+          <a:xfrm>
+            <a:off x="548640" y="1691640"/>
+            <a:ext cx="5362956" cy="2651760"/>
+          </a:xfrm>
+          <a:prstGeom prst="roundRect">
+            <a:avLst>
+              <a:gd name="adj" fmla="val 3448"/>
+            </a:avLst>
+          </a:prstGeom>
+          <a:solidFill>
+            <a:srgbClr val="F4F7F9"/>
+          </a:solidFill>
+          <a:ln/>
+        </p:spPr>
+      </p:sp>
+      <p:sp>
+        <p:nvSpPr>
+          <p:cNvPr id="5" name="Shape 3"/>
+          <p:cNvSpPr/>
+          <p:nvPr/>
+        </p:nvSpPr>
+        <p:spPr>
+          <a:xfrm>
+            <a:off x="868680" y="1920240"/>
+            <a:ext cx="146304" cy="457200"/>
+          </a:xfrm>
+          <a:prstGeom prst="rect">
+            <a:avLst/>
+          </a:prstGeom>
+          <a:solidFill>
+            <a:srgbClr val="1BAF7A"/>
+          </a:solidFill>
+          <a:ln/>
+        </p:spPr>
+      </p:sp>
+      <p:sp>
+        <p:nvSpPr>
+          <p:cNvPr id="6" name="Text 4"/>
           <p:cNvSpPr txBox="1"/>
           <p:nvPr/>
         </p:nvSpPr>
         <p:spPr>
           <a:xfrm>
-            <a:off x="548640" y="1600200"/>
-            <a:ext cx="6309360" cy="256032"/>
+            <a:off x="1143000" y="1874520"/>
+            <a:ext cx="4448556" cy="502920"/>
           </a:xfrm>
           <a:prstGeom prst="rect">
             <a:avLst/>
@@ -11182,7 +16208,7 @@
               <a:buNone/>
             </a:pPr>
             <a:r>
-              <a:rPr lang="en-US" sz="1250" b="1" dirty="0">
+              <a:rPr lang="en-US" sz="1600" b="1" dirty="0">
                 <a:solidFill>
                   <a:srgbClr val="21295C"/>
                 </a:solidFill>
@@ -11190,38 +16216,22 @@
                 <a:ea typeface="Calibri" pitchFamily="34" charset="-122"/>
                 <a:cs typeface="Calibri" pitchFamily="34" charset="-120"/>
               </a:rPr>
-              <a:t>満腹感の推移 (0=空腹〜10=満腹)</a:t>
-            </a:r>
-            <a:endParaRPr lang="en-US" sz="1250" dirty="0"/>
-          </a:p>
-        </p:txBody>
-      </p:sp>
-      <p:graphicFrame>
-        <p:nvGraphicFramePr>
-          <p:cNvPr id="5" name="Chart 0" descr=""/>
-          <p:cNvGraphicFramePr/>
-          <p:nvPr/>
-        </p:nvGraphicFramePr>
-        <p:xfrm>
-          <a:off x="548640" y="1874520"/>
-          <a:ext cx="6309360" cy="1691640"/>
-        </p:xfrm>
-        <a:graphic xmlns:a="http://schemas.openxmlformats.org/drawingml/2006/main">
-          <a:graphicData uri="http://schemas.openxmlformats.org/drawingml/2006/chart">
-            <c:chart xmlns:c="http://schemas.openxmlformats.org/drawingml/2006/chart" r:id="rId1"/>
-          </a:graphicData>
-        </a:graphic>
-      </p:graphicFrame>
-      <p:sp>
-        <p:nvSpPr>
-          <p:cNvPr id="6" name="Text 3"/>
+              <a:t>おにぎり＋スムージー</a:t>
+            </a:r>
+            <a:endParaRPr lang="en-US" sz="1600" dirty="0"/>
+          </a:p>
+        </p:txBody>
+      </p:sp>
+      <p:sp>
+        <p:nvSpPr>
+          <p:cNvPr id="7" name="Text 5"/>
           <p:cNvSpPr txBox="1"/>
           <p:nvPr/>
         </p:nvSpPr>
         <p:spPr>
           <a:xfrm>
-            <a:off x="548640" y="3703320"/>
-            <a:ext cx="6309360" cy="256032"/>
+            <a:off x="868680" y="2560320"/>
+            <a:ext cx="4722876" cy="502920"/>
           </a:xfrm>
           <a:prstGeom prst="rect">
             <a:avLst/>
@@ -11237,66 +16247,69 @@
               <a:buNone/>
             </a:pPr>
             <a:r>
-              <a:rPr lang="en-US" sz="1250" b="1" dirty="0">
-                <a:solidFill>
-                  <a:srgbClr val="21295C"/>
+              <a:rPr lang="en-US" sz="2600" b="1" dirty="0">
+                <a:solidFill>
+                  <a:srgbClr val="1BAF7A"/>
+                </a:solidFill>
+                <a:latin typeface="Cambria" pitchFamily="34" charset="0"/>
+                <a:ea typeface="Cambria" pitchFamily="34" charset="-122"/>
+                <a:cs typeface="Cambria" pitchFamily="34" charset="-120"/>
+              </a:rPr>
+              <a:t>5,230</a:t>
+            </a:r>
+            <a:endParaRPr lang="en-US" sz="2600" dirty="0"/>
+          </a:p>
+        </p:txBody>
+      </p:sp>
+      <p:sp>
+        <p:nvSpPr>
+          <p:cNvPr id="8" name="Text 6"/>
+          <p:cNvSpPr txBox="1"/>
+          <p:nvPr/>
+        </p:nvSpPr>
+        <p:spPr>
+          <a:xfrm>
+            <a:off x="868680" y="3017520"/>
+            <a:ext cx="4722876" cy="320040"/>
+          </a:xfrm>
+          <a:prstGeom prst="rect">
+            <a:avLst/>
+          </a:prstGeom>
+          <a:noFill/>
+          <a:ln/>
+        </p:spPr>
+        <p:txBody>
+          <a:bodyPr wrap="square" lIns="0" tIns="0" rIns="0" bIns="0" rtlCol="0" anchor="ctr"/>
+          <a:lstStyle/>
+          <a:p>
+            <a:pPr indent="0" marL="0">
+              <a:buNone/>
+            </a:pPr>
+            <a:r>
+              <a:rPr lang="en-US" sz="1100" dirty="0">
+                <a:solidFill>
+                  <a:srgbClr val="5C6570"/>
                 </a:solidFill>
                 <a:latin typeface="Calibri" pitchFamily="34" charset="0"/>
                 <a:ea typeface="Calibri" pitchFamily="34" charset="-122"/>
                 <a:cs typeface="Calibri" pitchFamily="34" charset="-120"/>
               </a:rPr>
-              <a:t>食欲(摂食可能感)の推移 (0=食べられない〜10=まだ食べられる)</a:t>
-            </a:r>
-            <a:endParaRPr lang="en-US" sz="1250" dirty="0"/>
-          </a:p>
-        </p:txBody>
-      </p:sp>
-      <p:graphicFrame>
-        <p:nvGraphicFramePr>
-          <p:cNvPr id="7" name="Chart 1" descr=""/>
-          <p:cNvGraphicFramePr/>
-          <p:nvPr/>
-        </p:nvGraphicFramePr>
-        <p:xfrm>
-          <a:off x="548640" y="3977640"/>
-          <a:ext cx="6309360" cy="1691640"/>
-        </p:xfrm>
-        <a:graphic xmlns:a="http://schemas.openxmlformats.org/drawingml/2006/main">
-          <a:graphicData uri="http://schemas.openxmlformats.org/drawingml/2006/chart">
-            <c:chart xmlns:c="http://schemas.openxmlformats.org/drawingml/2006/chart" r:id="rId2"/>
-          </a:graphicData>
-        </a:graphic>
-      </p:graphicFrame>
-      <p:sp>
-        <p:nvSpPr>
-          <p:cNvPr id="8" name="Shape 4"/>
-          <p:cNvSpPr/>
-          <p:nvPr/>
-        </p:nvSpPr>
-        <p:spPr>
-          <a:xfrm>
-            <a:off x="548640" y="5870448"/>
-            <a:ext cx="146304" cy="118872"/>
-          </a:xfrm>
-          <a:prstGeom prst="rect">
-            <a:avLst/>
-          </a:prstGeom>
-          <a:solidFill>
-            <a:srgbClr val="2A78D6"/>
-          </a:solidFill>
-          <a:ln/>
-        </p:spPr>
-      </p:sp>
-      <p:sp>
-        <p:nvSpPr>
-          <p:cNvPr id="9" name="Text 5"/>
+              <a:t>iAUC 2h (mg/dL・分)</a:t>
+            </a:r>
+            <a:endParaRPr lang="en-US" sz="1100" dirty="0"/>
+          </a:p>
+        </p:txBody>
+      </p:sp>
+      <p:sp>
+        <p:nvSpPr>
+          <p:cNvPr id="9" name="Text 7"/>
           <p:cNvSpPr txBox="1"/>
           <p:nvPr/>
         </p:nvSpPr>
         <p:spPr>
           <a:xfrm>
-            <a:off x="749808" y="5760720"/>
-            <a:ext cx="1554480" cy="274320"/>
+            <a:off x="868680" y="3355848"/>
+            <a:ext cx="4722876" cy="502920"/>
           </a:xfrm>
           <a:prstGeom prst="rect">
             <a:avLst/>
@@ -11312,7 +16325,46 @@
               <a:buNone/>
             </a:pPr>
             <a:r>
-              <a:rPr lang="en-US" sz="950" dirty="0">
+              <a:rPr lang="en-US" sz="2600" b="1" dirty="0">
+                <a:solidFill>
+                  <a:srgbClr val="1BAF7A"/>
+                </a:solidFill>
+                <a:latin typeface="Cambria" pitchFamily="34" charset="0"/>
+                <a:ea typeface="Cambria" pitchFamily="34" charset="-122"/>
+                <a:cs typeface="Cambria" pitchFamily="34" charset="-120"/>
+              </a:rPr>
+              <a:t>242.3 mg/dL</a:t>
+            </a:r>
+            <a:endParaRPr lang="en-US" sz="2600" dirty="0"/>
+          </a:p>
+        </p:txBody>
+      </p:sp>
+      <p:sp>
+        <p:nvSpPr>
+          <p:cNvPr id="10" name="Text 8"/>
+          <p:cNvSpPr txBox="1"/>
+          <p:nvPr/>
+        </p:nvSpPr>
+        <p:spPr>
+          <a:xfrm>
+            <a:off x="868680" y="3813048"/>
+            <a:ext cx="4722876" cy="320040"/>
+          </a:xfrm>
+          <a:prstGeom prst="rect">
+            <a:avLst/>
+          </a:prstGeom>
+          <a:noFill/>
+          <a:ln/>
+        </p:spPr>
+        <p:txBody>
+          <a:bodyPr wrap="square" lIns="0" tIns="0" rIns="0" bIns="0" rtlCol="0" anchor="ctr"/>
+          <a:lstStyle/>
+          <a:p>
+            <a:pPr indent="0" marL="0">
+              <a:buNone/>
+            </a:pPr>
+            <a:r>
+              <a:rPr lang="en-US" sz="1100" dirty="0">
                 <a:solidFill>
                   <a:srgbClr val="5C6570"/>
                 </a:solidFill>
@@ -11320,42 +16372,64 @@
                 <a:ea typeface="Calibri" pitchFamily="34" charset="-122"/>
                 <a:cs typeface="Calibri" pitchFamily="34" charset="-120"/>
               </a:rPr>
-              <a:t>固形</a:t>
-            </a:r>
-            <a:endParaRPr lang="en-US" sz="950" dirty="0"/>
-          </a:p>
-        </p:txBody>
-      </p:sp>
-      <p:sp>
-        <p:nvSpPr>
-          <p:cNvPr id="10" name="Shape 6"/>
+              <a:t>ピーク血糖値</a:t>
+            </a:r>
+            <a:endParaRPr lang="en-US" sz="1100" dirty="0"/>
+          </a:p>
+        </p:txBody>
+      </p:sp>
+      <p:sp>
+        <p:nvSpPr>
+          <p:cNvPr id="11" name="Shape 9"/>
           <p:cNvSpPr/>
           <p:nvPr/>
         </p:nvSpPr>
         <p:spPr>
           <a:xfrm>
-            <a:off x="2176272" y="5870448"/>
-            <a:ext cx="146304" cy="118872"/>
-          </a:xfrm>
-          <a:prstGeom prst="rect">
-            <a:avLst/>
+            <a:off x="6277356" y="1691640"/>
+            <a:ext cx="5362956" cy="2651760"/>
+          </a:xfrm>
+          <a:prstGeom prst="roundRect">
+            <a:avLst>
+              <a:gd name="adj" fmla="val 3448"/>
+            </a:avLst>
           </a:prstGeom>
           <a:solidFill>
-            <a:srgbClr val="EB6834"/>
+            <a:srgbClr val="F4F7F9"/>
           </a:solidFill>
           <a:ln/>
         </p:spPr>
       </p:sp>
       <p:sp>
         <p:nvSpPr>
-          <p:cNvPr id="11" name="Text 7"/>
+          <p:cNvPr id="12" name="Shape 10"/>
+          <p:cNvSpPr/>
+          <p:nvPr/>
+        </p:nvSpPr>
+        <p:spPr>
+          <a:xfrm>
+            <a:off x="6597396" y="1920240"/>
+            <a:ext cx="146304" cy="457200"/>
+          </a:xfrm>
+          <a:prstGeom prst="rect">
+            <a:avLst/>
+          </a:prstGeom>
+          <a:solidFill>
+            <a:srgbClr val="EDA100"/>
+          </a:solidFill>
+          <a:ln/>
+        </p:spPr>
+      </p:sp>
+      <p:sp>
+        <p:nvSpPr>
+          <p:cNvPr id="13" name="Text 11"/>
           <p:cNvSpPr txBox="1"/>
           <p:nvPr/>
         </p:nvSpPr>
         <p:spPr>
           <a:xfrm>
-            <a:off x="2377440" y="5760720"/>
-            <a:ext cx="1554480" cy="274320"/>
+            <a:off x="6871716" y="1874520"/>
+            <a:ext cx="4448556" cy="502920"/>
           </a:xfrm>
           <a:prstGeom prst="rect">
             <a:avLst/>
@@ -11371,50 +16445,30 @@
               <a:buNone/>
             </a:pPr>
             <a:r>
-              <a:rPr lang="en-US" sz="950" dirty="0">
-                <a:solidFill>
-                  <a:srgbClr val="5C6570"/>
+              <a:rPr lang="en-US" sz="1600" b="1" dirty="0">
+                <a:solidFill>
+                  <a:srgbClr val="21295C"/>
                 </a:solidFill>
                 <a:latin typeface="Calibri" pitchFamily="34" charset="0"/>
                 <a:ea typeface="Calibri" pitchFamily="34" charset="-122"/>
                 <a:cs typeface="Calibri" pitchFamily="34" charset="-120"/>
               </a:rPr>
-              <a:t>スムージー</a:t>
-            </a:r>
-            <a:endParaRPr lang="en-US" sz="950" dirty="0"/>
-          </a:p>
-        </p:txBody>
-      </p:sp>
-      <p:sp>
-        <p:nvSpPr>
-          <p:cNvPr id="12" name="Shape 8"/>
-          <p:cNvSpPr/>
-          <p:nvPr/>
-        </p:nvSpPr>
-        <p:spPr>
-          <a:xfrm>
-            <a:off x="3803904" y="5870448"/>
-            <a:ext cx="146304" cy="118872"/>
-          </a:xfrm>
-          <a:prstGeom prst="rect">
-            <a:avLst/>
-          </a:prstGeom>
-          <a:solidFill>
-            <a:srgbClr val="1BAF7A"/>
-          </a:solidFill>
-          <a:ln/>
-        </p:spPr>
-      </p:sp>
-      <p:sp>
-        <p:nvSpPr>
-          <p:cNvPr id="13" name="Text 9"/>
+              <a:t>おにぎり＋糖質減</a:t>
+            </a:r>
+            <a:endParaRPr lang="en-US" sz="1600" dirty="0"/>
+          </a:p>
+        </p:txBody>
+      </p:sp>
+      <p:sp>
+        <p:nvSpPr>
+          <p:cNvPr id="14" name="Text 12"/>
           <p:cNvSpPr txBox="1"/>
           <p:nvPr/>
         </p:nvSpPr>
         <p:spPr>
           <a:xfrm>
-            <a:off x="4005072" y="5760720"/>
-            <a:ext cx="1554480" cy="274320"/>
+            <a:off x="6597396" y="2560320"/>
+            <a:ext cx="4722876" cy="502920"/>
           </a:xfrm>
           <a:prstGeom prst="rect">
             <a:avLst/>
@@ -11430,7 +16484,46 @@
               <a:buNone/>
             </a:pPr>
             <a:r>
-              <a:rPr lang="en-US" sz="950" dirty="0">
+              <a:rPr lang="en-US" sz="2600" b="1" dirty="0">
+                <a:solidFill>
+                  <a:srgbClr val="EDA100"/>
+                </a:solidFill>
+                <a:latin typeface="Cambria" pitchFamily="34" charset="0"/>
+                <a:ea typeface="Cambria" pitchFamily="34" charset="-122"/>
+                <a:cs typeface="Cambria" pitchFamily="34" charset="-120"/>
+              </a:rPr>
+              <a:t>3,168 (▼39%)</a:t>
+            </a:r>
+            <a:endParaRPr lang="en-US" sz="2600" dirty="0"/>
+          </a:p>
+        </p:txBody>
+      </p:sp>
+      <p:sp>
+        <p:nvSpPr>
+          <p:cNvPr id="15" name="Text 13"/>
+          <p:cNvSpPr txBox="1"/>
+          <p:nvPr/>
+        </p:nvSpPr>
+        <p:spPr>
+          <a:xfrm>
+            <a:off x="6597396" y="3017520"/>
+            <a:ext cx="4722876" cy="320040"/>
+          </a:xfrm>
+          <a:prstGeom prst="rect">
+            <a:avLst/>
+          </a:prstGeom>
+          <a:noFill/>
+          <a:ln/>
+        </p:spPr>
+        <p:txBody>
+          <a:bodyPr wrap="square" lIns="0" tIns="0" rIns="0" bIns="0" rtlCol="0" anchor="ctr"/>
+          <a:lstStyle/>
+          <a:p>
+            <a:pPr indent="0" marL="0">
+              <a:buNone/>
+            </a:pPr>
+            <a:r>
+              <a:rPr lang="en-US" sz="1100" dirty="0">
                 <a:solidFill>
                   <a:srgbClr val="5C6570"/>
                 </a:solidFill>
@@ -11438,42 +16531,22 @@
                 <a:ea typeface="Calibri" pitchFamily="34" charset="-122"/>
                 <a:cs typeface="Calibri" pitchFamily="34" charset="-120"/>
               </a:rPr>
-              <a:t>おにぎり+スムージー</a:t>
-            </a:r>
-            <a:endParaRPr lang="en-US" sz="950" dirty="0"/>
-          </a:p>
-        </p:txBody>
-      </p:sp>
-      <p:sp>
-        <p:nvSpPr>
-          <p:cNvPr id="14" name="Shape 10"/>
-          <p:cNvSpPr/>
-          <p:nvPr/>
-        </p:nvSpPr>
-        <p:spPr>
-          <a:xfrm>
-            <a:off x="5431536" y="5870448"/>
-            <a:ext cx="146304" cy="118872"/>
-          </a:xfrm>
-          <a:prstGeom prst="rect">
-            <a:avLst/>
-          </a:prstGeom>
-          <a:solidFill>
-            <a:srgbClr val="EDA100"/>
-          </a:solidFill>
-          <a:ln/>
-        </p:spPr>
-      </p:sp>
-      <p:sp>
-        <p:nvSpPr>
-          <p:cNvPr id="15" name="Text 11"/>
+              <a:t>iAUC 2h (mg/dL・分)</a:t>
+            </a:r>
+            <a:endParaRPr lang="en-US" sz="1100" dirty="0"/>
+          </a:p>
+        </p:txBody>
+      </p:sp>
+      <p:sp>
+        <p:nvSpPr>
+          <p:cNvPr id="16" name="Text 14"/>
           <p:cNvSpPr txBox="1"/>
           <p:nvPr/>
         </p:nvSpPr>
         <p:spPr>
           <a:xfrm>
-            <a:off x="5632704" y="5760720"/>
-            <a:ext cx="1554480" cy="274320"/>
+            <a:off x="6597396" y="3355848"/>
+            <a:ext cx="4722876" cy="502920"/>
           </a:xfrm>
           <a:prstGeom prst="rect">
             <a:avLst/>
@@ -11489,7 +16562,46 @@
               <a:buNone/>
             </a:pPr>
             <a:r>
-              <a:rPr lang="en-US" sz="950" dirty="0">
+              <a:rPr lang="en-US" sz="2600" b="1" dirty="0">
+                <a:solidFill>
+                  <a:srgbClr val="EDA100"/>
+                </a:solidFill>
+                <a:latin typeface="Cambria" pitchFamily="34" charset="0"/>
+                <a:ea typeface="Cambria" pitchFamily="34" charset="-122"/>
+                <a:cs typeface="Cambria" pitchFamily="34" charset="-120"/>
+              </a:rPr>
+              <a:t>250.3 mg/dL</a:t>
+            </a:r>
+            <a:endParaRPr lang="en-US" sz="2600" dirty="0"/>
+          </a:p>
+        </p:txBody>
+      </p:sp>
+      <p:sp>
+        <p:nvSpPr>
+          <p:cNvPr id="17" name="Text 15"/>
+          <p:cNvSpPr txBox="1"/>
+          <p:nvPr/>
+        </p:nvSpPr>
+        <p:spPr>
+          <a:xfrm>
+            <a:off x="6597396" y="3813048"/>
+            <a:ext cx="4722876" cy="320040"/>
+          </a:xfrm>
+          <a:prstGeom prst="rect">
+            <a:avLst/>
+          </a:prstGeom>
+          <a:noFill/>
+          <a:ln/>
+        </p:spPr>
+        <p:txBody>
+          <a:bodyPr wrap="square" lIns="0" tIns="0" rIns="0" bIns="0" rtlCol="0" anchor="ctr"/>
+          <a:lstStyle/>
+          <a:p>
+            <a:pPr indent="0" marL="0">
+              <a:buNone/>
+            </a:pPr>
+            <a:r>
+              <a:rPr lang="en-US" sz="1100" dirty="0">
                 <a:solidFill>
                   <a:srgbClr val="5C6570"/>
                 </a:solidFill>
@@ -11497,26 +16609,26 @@
                 <a:ea typeface="Calibri" pitchFamily="34" charset="-122"/>
                 <a:cs typeface="Calibri" pitchFamily="34" charset="-120"/>
               </a:rPr>
-              <a:t>おにぎり+糖質減</a:t>
-            </a:r>
-            <a:endParaRPr lang="en-US" sz="950" dirty="0"/>
-          </a:p>
-        </p:txBody>
-      </p:sp>
-      <p:sp>
-        <p:nvSpPr>
-          <p:cNvPr id="16" name="Shape 12"/>
+              <a:t>ピーク血糖値（同水準）</a:t>
+            </a:r>
+            <a:endParaRPr lang="en-US" sz="1100" dirty="0"/>
+          </a:p>
+        </p:txBody>
+      </p:sp>
+      <p:sp>
+        <p:nvSpPr>
+          <p:cNvPr id="18" name="Shape 16"/>
           <p:cNvSpPr/>
           <p:nvPr/>
         </p:nvSpPr>
         <p:spPr>
           <a:xfrm>
-            <a:off x="7635240" y="1600200"/>
-            <a:ext cx="4005072" cy="4434840"/>
+            <a:off x="548640" y="4572000"/>
+            <a:ext cx="11091672" cy="1508760"/>
           </a:xfrm>
           <a:prstGeom prst="roundRect">
             <a:avLst>
-              <a:gd name="adj" fmla="val 2283"/>
+              <a:gd name="adj" fmla="val 6061"/>
             </a:avLst>
           </a:prstGeom>
           <a:solidFill>
@@ -11527,14 +16639,14 @@
       </p:sp>
       <p:sp>
         <p:nvSpPr>
-          <p:cNvPr id="17" name="Text 13"/>
+          <p:cNvPr id="19" name="Text 17"/>
           <p:cNvSpPr txBox="1"/>
           <p:nvPr/>
         </p:nvSpPr>
         <p:spPr>
           <a:xfrm>
-            <a:off x="7909560" y="1828800"/>
-            <a:ext cx="3566160" cy="365760"/>
+            <a:off x="822960" y="4709160"/>
+            <a:ext cx="2743200" cy="274320"/>
           </a:xfrm>
           <a:prstGeom prst="rect">
             <a:avLst/>
@@ -11550,7 +16662,7 @@
               <a:buNone/>
             </a:pPr>
             <a:r>
-              <a:rPr lang="en-US" sz="1350" b="1" dirty="0">
+              <a:rPr lang="en-US" sz="1200" b="1" dirty="0">
                 <a:solidFill>
                   <a:srgbClr val="0F5C3D"/>
                 </a:solidFill>
@@ -11558,22 +16670,22 @@
                 <a:ea typeface="Calibri" pitchFamily="34" charset="-122"/>
                 <a:cs typeface="Calibri" pitchFamily="34" charset="-120"/>
               </a:rPr>
-              <a:t>✓ 消化器症状は4条件とも良好</a:t>
-            </a:r>
-            <a:endParaRPr lang="en-US" sz="1350" dirty="0"/>
-          </a:p>
-        </p:txBody>
-      </p:sp>
-      <p:sp>
-        <p:nvSpPr>
-          <p:cNvPr id="18" name="Text 14"/>
+              <a:t>考察</a:t>
+            </a:r>
+            <a:endParaRPr lang="en-US" sz="1200" dirty="0"/>
+          </a:p>
+        </p:txBody>
+      </p:sp>
+      <p:sp>
+        <p:nvSpPr>
+          <p:cNvPr id="20" name="Text 18"/>
           <p:cNvSpPr txBox="1"/>
           <p:nvPr/>
         </p:nvSpPr>
         <p:spPr>
           <a:xfrm>
-            <a:off x="7909560" y="2331720"/>
-            <a:ext cx="3520440" cy="868680"/>
+            <a:off x="822960" y="5010912"/>
+            <a:ext cx="10543032" cy="960120"/>
           </a:xfrm>
           <a:prstGeom prst="rect">
             <a:avLst/>
@@ -11589,7 +16701,7 @@
               <a:buNone/>
             </a:pPr>
             <a:r>
-              <a:rPr lang="en-US" sz="1100" dirty="0">
+              <a:rPr lang="en-US" sz="1250" dirty="0">
                 <a:solidFill>
                   <a:srgbClr val="1A1A1A"/>
                 </a:solidFill>
@@ -11597,126 +16709,9 @@
                 <a:ea typeface="Calibri" pitchFamily="34" charset="-122"/>
                 <a:cs typeface="Calibri" pitchFamily="34" charset="-120"/>
               </a:rPr>
-              <a:t>•  頭痛：4条件すべて全測定点で最小値(1)、変化なし</a:t>
-            </a:r>
-            <a:endParaRPr lang="en-US" sz="1100" dirty="0"/>
-          </a:p>
-        </p:txBody>
-      </p:sp>
-      <p:sp>
-        <p:nvSpPr>
-          <p:cNvPr id="19" name="Text 15"/>
-          <p:cNvSpPr txBox="1"/>
-          <p:nvPr/>
-        </p:nvSpPr>
-        <p:spPr>
-          <a:xfrm>
-            <a:off x="7909560" y="3264408"/>
-            <a:ext cx="3520440" cy="868680"/>
-          </a:xfrm>
-          <a:prstGeom prst="rect">
-            <a:avLst/>
-          </a:prstGeom>
-          <a:noFill/>
-          <a:ln/>
-        </p:spPr>
-        <p:txBody>
-          <a:bodyPr wrap="square" lIns="0" tIns="0" rIns="0" bIns="0" rtlCol="0" anchor="ctr"/>
-          <a:lstStyle/>
-          <a:p>
-            <a:pPr indent="0" marL="0">
-              <a:buNone/>
-            </a:pPr>
-            <a:r>
-              <a:rPr lang="en-US" sz="1100" dirty="0">
-                <a:solidFill>
-                  <a:srgbClr val="1A1A1A"/>
-                </a:solidFill>
-                <a:latin typeface="Calibri" pitchFamily="34" charset="0"/>
-                <a:ea typeface="Calibri" pitchFamily="34" charset="-122"/>
-                <a:cs typeface="Calibri" pitchFamily="34" charset="-120"/>
-              </a:rPr>
-              <a:t>•  吐き気：4条件すべてほぼ1（おにぎり+スムージーのDAY10 9:30のみ一時的に2）</a:t>
-            </a:r>
-            <a:endParaRPr lang="en-US" sz="1100" dirty="0"/>
-          </a:p>
-        </p:txBody>
-      </p:sp>
-      <p:sp>
-        <p:nvSpPr>
-          <p:cNvPr id="20" name="Text 16"/>
-          <p:cNvSpPr txBox="1"/>
-          <p:nvPr/>
-        </p:nvSpPr>
-        <p:spPr>
-          <a:xfrm>
-            <a:off x="7909560" y="4197096"/>
-            <a:ext cx="3520440" cy="868680"/>
-          </a:xfrm>
-          <a:prstGeom prst="rect">
-            <a:avLst/>
-          </a:prstGeom>
-          <a:noFill/>
-          <a:ln/>
-        </p:spPr>
-        <p:txBody>
-          <a:bodyPr wrap="square" lIns="0" tIns="0" rIns="0" bIns="0" rtlCol="0" anchor="ctr"/>
-          <a:lstStyle/>
-          <a:p>
-            <a:pPr indent="0" marL="0">
-              <a:buNone/>
-            </a:pPr>
-            <a:r>
-              <a:rPr lang="en-US" sz="1100" dirty="0">
-                <a:solidFill>
-                  <a:srgbClr val="1A1A1A"/>
-                </a:solidFill>
-                <a:latin typeface="Calibri" pitchFamily="34" charset="0"/>
-                <a:ea typeface="Calibri" pitchFamily="34" charset="-122"/>
-                <a:cs typeface="Calibri" pitchFamily="34" charset="-120"/>
-              </a:rPr>
-              <a:t>•  血糖値が高めに推移するおにぎり同時摂取条件でも、消化器症状は悪化していない</a:t>
-            </a:r>
-            <a:endParaRPr lang="en-US" sz="1100" dirty="0"/>
-          </a:p>
-        </p:txBody>
-      </p:sp>
-      <p:sp>
-        <p:nvSpPr>
-          <p:cNvPr id="21" name="Text 17"/>
-          <p:cNvSpPr txBox="1"/>
-          <p:nvPr/>
-        </p:nvSpPr>
-        <p:spPr>
-          <a:xfrm>
-            <a:off x="7909560" y="5129784"/>
-            <a:ext cx="3520440" cy="868680"/>
-          </a:xfrm>
-          <a:prstGeom prst="rect">
-            <a:avLst/>
-          </a:prstGeom>
-          <a:noFill/>
-          <a:ln/>
-        </p:spPr>
-        <p:txBody>
-          <a:bodyPr wrap="square" lIns="0" tIns="0" rIns="0" bIns="0" rtlCol="0" anchor="ctr"/>
-          <a:lstStyle/>
-          <a:p>
-            <a:pPr indent="0" marL="0">
-              <a:buNone/>
-            </a:pPr>
-            <a:r>
-              <a:rPr lang="en-US" sz="1100" dirty="0">
-                <a:solidFill>
-                  <a:srgbClr val="1A1A1A"/>
-                </a:solidFill>
-                <a:latin typeface="Calibri" pitchFamily="34" charset="0"/>
-                <a:ea typeface="Calibri" pitchFamily="34" charset="-122"/>
-                <a:cs typeface="Calibri" pitchFamily="34" charset="-120"/>
-              </a:rPr>
-              <a:t>•  満腹感・食欲の差は「おにぎりを同時に食べたか」による食事量の違いを反映しており、副食の形態（固形/液状）そのものの効果ではない</a:t>
-            </a:r>
-            <a:endParaRPr lang="en-US" sz="1100" dirty="0"/>
+              <a:t>研究目的に最も近い比較。糖質を減らすことで食後2時間の正味の血糖上昇（iAUC）が約39%減少。ピーク自体の高さはほぼ同水準だが、上昇の「持続・面積」＝体への負荷は明確に小さい。おにぎりの満足感を保ちながら総糖質量を最適化する方針はデータ上も支持される。</a:t>
+            </a:r>
+            <a:endParaRPr lang="en-US" sz="1250" dirty="0"/>
           </a:p>
         </p:txBody>
       </p:sp>

--- a/analysis/slides/血糖値比較分析.pptx
+++ b/analysis/slides/血糖値比較分析.pptx
@@ -18,9 +18,11 @@
     <p:sldId id="266" r:id="rId12"/>
     <p:sldId id="267" r:id="rId13"/>
     <p:sldId id="268" r:id="rId14"/>
+    <p:sldId id="269" r:id="rId15"/>
+    <p:sldId id="270" r:id="rId16"/>
   </p:sldIdLst>
   <p:notesMasterIdLst>
-    <p:notesMasterId r:id="rId15"/>
+    <p:notesMasterId r:id="rId17"/>
   </p:notesMasterIdLst>
   <p:sldSz cx="12192000" cy="6858000"/>
   <p:notesSz cx="6858000" cy="12192000"/>
@@ -1302,6 +1304,568 @@
               <c:strCache>
                 <c:ptCount val="1"/>
                 <c:pt idx="0">
+                  <c:v>睡眠の質</c:v>
+                </c:pt>
+              </c:strCache>
+            </c:strRef>
+          </c:tx>
+          <c:spPr>
+            <a:solidFill>
+              <a:srgbClr val="2A78D6">
+                <a:alpha val="100000"/>
+              </a:srgbClr>
+            </a:solidFill>
+            <a:effectLst/>
+          </c:spPr>
+          <c:invertIfNegative val="0"/>
+          <c:dLbls>
+            <c:numFmt formatCode="0.0" sourceLinked="0"/>
+            <c:txPr>
+              <a:bodyPr/>
+              <a:lstStyle/>
+              <a:p>
+                <a:pPr>
+                  <a:defRPr b="0" i="0" strike="noStrike" sz="950" u="none">
+                    <a:solidFill>
+                      <a:srgbClr val="1A1A1A"/>
+                    </a:solidFill>
+                    <a:latin typeface="Arial"/>
+                  </a:defRPr>
+                </a:pPr>
+              </a:p>
+            </c:txPr>
+            <c:showLegendKey val="0"/>
+            <c:showVal val="1"/>
+            <c:showCatName val="0"/>
+            <c:showSerName val="0"/>
+            <c:showPercent val="0"/>
+            <c:showBubbleSize val="0"/>
+            <c:showLeaderLines val="0"/>
+          </c:dLbls>
+          <c:dPt>
+            <c:idx val="0"/>
+            <c:invertIfNegative val="0"/>
+            <c:bubble3D val="0"/>
+            <c:spPr>
+              <a:solidFill>
+                <a:srgbClr val="2A78D6"/>
+              </a:solidFill>
+              <a:effectLst/>
+            </c:spPr>
+          </c:dPt>
+          <c:dPt>
+            <c:idx val="1"/>
+            <c:invertIfNegative val="0"/>
+            <c:bubble3D val="0"/>
+            <c:spPr>
+              <a:solidFill>
+                <a:srgbClr val="EB6834"/>
+              </a:solidFill>
+              <a:effectLst/>
+            </c:spPr>
+          </c:dPt>
+          <c:dPt>
+            <c:idx val="2"/>
+            <c:invertIfNegative val="0"/>
+            <c:bubble3D val="0"/>
+            <c:spPr>
+              <a:solidFill>
+                <a:srgbClr val="1BAF7A"/>
+              </a:solidFill>
+              <a:effectLst/>
+            </c:spPr>
+          </c:dPt>
+          <c:dPt>
+            <c:idx val="3"/>
+            <c:invertIfNegative val="0"/>
+            <c:bubble3D val="0"/>
+            <c:spPr>
+              <a:solidFill>
+                <a:srgbClr val="EDA100"/>
+              </a:solidFill>
+              <a:effectLst/>
+            </c:spPr>
+          </c:dPt>
+          <c:cat>
+            <c:multiLvlStrRef>
+              <c:f>Sheet1!$A$2:$A$5</c:f>
+              <c:multiLvlStrCache>
+                <c:ptCount val="4"/>
+                <c:lvl>
+                  <c:pt idx="0">
+                    <c:v>固形</c:v>
+                  </c:pt>
+                  <c:pt idx="1">
+                    <c:v>スムージー</c:v>
+                  </c:pt>
+                  <c:pt idx="2">
+                    <c:v>おにぎり+スムージー</c:v>
+                  </c:pt>
+                  <c:pt idx="3">
+                    <c:v>おにぎり+糖質減</c:v>
+                  </c:pt>
+                </c:lvl>
+              </c:multiLvlStrCache>
+            </c:multiLvlStrRef>
+          </c:cat>
+          <c:val>
+            <c:numRef>
+              <c:f>Sheet1!$B$2:$B$5</c:f>
+              <c:numCache>
+                <c:formatCode>General</c:formatCode>
+                <c:ptCount val="4"/>
+                <c:pt idx="0">
+                  <c:v>2</c:v>
+                </c:pt>
+                <c:pt idx="1">
+                  <c:v>2</c:v>
+                </c:pt>
+                <c:pt idx="2">
+                  <c:v>2</c:v>
+                </c:pt>
+                <c:pt idx="3">
+                  <c:v>2.67</c:v>
+                </c:pt>
+              </c:numCache>
+            </c:numRef>
+          </c:val>
+        </c:ser>
+        <c:dLbls>
+          <c:numFmt formatCode="0.0" sourceLinked="0"/>
+          <c:txPr>
+            <a:bodyPr/>
+            <a:lstStyle/>
+            <a:p>
+              <a:pPr>
+                <a:defRPr b="0" i="0" strike="noStrike" sz="950" u="none">
+                  <a:solidFill>
+                    <a:srgbClr val="1A1A1A"/>
+                  </a:solidFill>
+                  <a:latin typeface="Arial"/>
+                </a:defRPr>
+              </a:pPr>
+            </a:p>
+          </c:txPr>
+          <c:showLegendKey val="0"/>
+          <c:showVal val="1"/>
+          <c:showCatName val="0"/>
+          <c:showSerName val="0"/>
+          <c:showPercent val="0"/>
+          <c:showBubbleSize val="0"/>
+          <c:showLeaderLines val="0"/>
+        </c:dLbls>
+        <c:gapWidth val="35"/>
+        <c:overlap val="0"/>
+        <c:axId val="2094734554"/>
+        <c:axId val="2094734552"/>
+        <c:axId val="2094734556"/>
+      </c:barChart>
+      <c:catAx>
+        <c:axId val="2094734554"/>
+        <c:scaling>
+          <c:orientation val="minMax"/>
+        </c:scaling>
+        <c:delete val="0"/>
+        <c:axPos val="b"/>
+        <c:numFmt formatCode="General" sourceLinked="1"/>
+        <c:majorTickMark val="out"/>
+        <c:minorTickMark val="none"/>
+        <c:tickLblPos val="low"/>
+        <c:spPr>
+          <a:ln w="12700" cap="flat">
+            <a:solidFill>
+              <a:srgbClr val="E3E1DB"/>
+            </a:solidFill>
+            <a:prstDash val="solid"/>
+            <a:round/>
+          </a:ln>
+        </c:spPr>
+        <c:txPr>
+          <a:bodyPr rot="1200000"/>
+          <a:lstStyle/>
+          <a:p>
+            <a:pPr>
+              <a:defRPr sz="850" b="0" i="0" u="none" strike="noStrike">
+                <a:solidFill>
+                  <a:srgbClr val="5C6570"/>
+                </a:solidFill>
+                <a:latin typeface="Arial"/>
+              </a:defRPr>
+            </a:pPr>
+            <a:endParaRPr lang="en-US"/>
+          </a:p>
+        </c:txPr>
+        <c:crossAx val="2094734552"/>
+        <c:crosses val="autoZero"/>
+        <c:auto val="1"/>
+        <c:lblAlgn val="ctr"/>
+        <c:noMultiLvlLbl val="1"/>
+      </c:catAx>
+      <c:valAx>
+        <c:axId val="2094734552"/>
+        <c:scaling>
+          <c:orientation val="minMax"/>
+        </c:scaling>
+        <c:delete val="1"/>
+        <c:axPos val="l"/>
+        <c:numFmt formatCode="General" sourceLinked="0"/>
+        <c:majorTickMark val="out"/>
+        <c:minorTickMark val="none"/>
+        <c:tickLblPos val="nextTo"/>
+        <c:spPr>
+          <a:ln w="12700" cap="flat">
+            <a:solidFill>
+              <a:srgbClr val="E3E1DB"/>
+            </a:solidFill>
+            <a:prstDash val="solid"/>
+            <a:round/>
+          </a:ln>
+        </c:spPr>
+        <c:txPr>
+          <a:bodyPr/>
+          <a:lstStyle/>
+          <a:p>
+            <a:pPr>
+              <a:defRPr sz="1200" b="0" i="0" u="none" strike="noStrike">
+                <a:solidFill>
+                  <a:srgbClr val="000000"/>
+                </a:solidFill>
+                <a:latin typeface="Arial"/>
+              </a:defRPr>
+            </a:pPr>
+            <a:endParaRPr lang="en-US"/>
+          </a:p>
+        </c:txPr>
+        <c:crossAx val="2094734554"/>
+        <c:crosses val="autoZero"/>
+        <c:crossBetween val="between"/>
+      </c:valAx>
+      <c:spPr>
+        <a:noFill/>
+        <a:ln>
+          <a:noFill/>
+        </a:ln>
+        <a:effectLst/>
+      </c:spPr>
+    </c:plotArea>
+    <c:plotVisOnly val="1"/>
+    <c:dispBlanksAs val="span"/>
+  </c:chart>
+  <c:spPr>
+    <a:noFill/>
+    <a:ln>
+      <a:noFill/>
+    </a:ln>
+    <a:effectLst/>
+  </c:spPr>
+  <c:externalData r:id="rId1">
+    <c:autoUpdate val="0"/>
+  </c:externalData>
+</c:chartSpace>
+</file>
+
+<file path=ppt/charts/chart11.xml><?xml version="1.0" encoding="utf-8"?>
+<c:chartSpace xmlns:c="http://schemas.openxmlformats.org/drawingml/2006/chart" xmlns:a="http://schemas.openxmlformats.org/drawingml/2006/main" xmlns:r="http://schemas.openxmlformats.org/officeDocument/2006/relationships">
+  <c:date1904 val="0"/>
+  <c:roundedCorners val="1"/>
+  <c:chart>
+    <c:autoTitleDeleted val="1"/>
+    <c:plotArea>
+      <c:layout/>
+      <c:barChart>
+        <c:barDir val="col"/>
+        <c:grouping val="clustered"/>
+        <c:varyColors val="0"/>
+        <c:ser>
+          <c:idx val="0"/>
+          <c:order val="0"/>
+          <c:tx>
+            <c:strRef>
+              <c:f>Sheet1!$B$1</c:f>
+              <c:strCache>
+                <c:ptCount val="1"/>
+                <c:pt idx="0">
+                  <c:v>持久力（自己評価）</c:v>
+                </c:pt>
+              </c:strCache>
+            </c:strRef>
+          </c:tx>
+          <c:spPr>
+            <a:solidFill>
+              <a:srgbClr val="2A78D6">
+                <a:alpha val="100000"/>
+              </a:srgbClr>
+            </a:solidFill>
+            <a:effectLst/>
+          </c:spPr>
+          <c:invertIfNegative val="0"/>
+          <c:dLbls>
+            <c:numFmt formatCode="0.0" sourceLinked="0"/>
+            <c:txPr>
+              <a:bodyPr/>
+              <a:lstStyle/>
+              <a:p>
+                <a:pPr>
+                  <a:defRPr b="0" i="0" strike="noStrike" sz="950" u="none">
+                    <a:solidFill>
+                      <a:srgbClr val="1A1A1A"/>
+                    </a:solidFill>
+                    <a:latin typeface="Arial"/>
+                  </a:defRPr>
+                </a:pPr>
+              </a:p>
+            </c:txPr>
+            <c:showLegendKey val="0"/>
+            <c:showVal val="1"/>
+            <c:showCatName val="0"/>
+            <c:showSerName val="0"/>
+            <c:showPercent val="0"/>
+            <c:showBubbleSize val="0"/>
+            <c:showLeaderLines val="0"/>
+          </c:dLbls>
+          <c:dPt>
+            <c:idx val="0"/>
+            <c:invertIfNegative val="0"/>
+            <c:bubble3D val="0"/>
+            <c:spPr>
+              <a:solidFill>
+                <a:srgbClr val="2A78D6"/>
+              </a:solidFill>
+              <a:effectLst/>
+            </c:spPr>
+          </c:dPt>
+          <c:dPt>
+            <c:idx val="1"/>
+            <c:invertIfNegative val="0"/>
+            <c:bubble3D val="0"/>
+            <c:spPr>
+              <a:solidFill>
+                <a:srgbClr val="EB6834"/>
+              </a:solidFill>
+              <a:effectLst/>
+            </c:spPr>
+          </c:dPt>
+          <c:dPt>
+            <c:idx val="2"/>
+            <c:invertIfNegative val="0"/>
+            <c:bubble3D val="0"/>
+            <c:spPr>
+              <a:solidFill>
+                <a:srgbClr val="1BAF7A"/>
+              </a:solidFill>
+              <a:effectLst/>
+            </c:spPr>
+          </c:dPt>
+          <c:dPt>
+            <c:idx val="3"/>
+            <c:invertIfNegative val="0"/>
+            <c:bubble3D val="0"/>
+            <c:spPr>
+              <a:solidFill>
+                <a:srgbClr val="EDA100"/>
+              </a:solidFill>
+              <a:effectLst/>
+            </c:spPr>
+          </c:dPt>
+          <c:cat>
+            <c:multiLvlStrRef>
+              <c:f>Sheet1!$A$2:$A$5</c:f>
+              <c:multiLvlStrCache>
+                <c:ptCount val="4"/>
+                <c:lvl>
+                  <c:pt idx="0">
+                    <c:v>固形</c:v>
+                  </c:pt>
+                  <c:pt idx="1">
+                    <c:v>スムージー</c:v>
+                  </c:pt>
+                  <c:pt idx="2">
+                    <c:v>おにぎり+スムージー</c:v>
+                  </c:pt>
+                  <c:pt idx="3">
+                    <c:v>おにぎり+糖質減</c:v>
+                  </c:pt>
+                </c:lvl>
+              </c:multiLvlStrCache>
+            </c:multiLvlStrRef>
+          </c:cat>
+          <c:val>
+            <c:numRef>
+              <c:f>Sheet1!$B$2:$B$5</c:f>
+              <c:numCache>
+                <c:formatCode>General</c:formatCode>
+                <c:ptCount val="4"/>
+                <c:pt idx="0">
+                  <c:v>3</c:v>
+                </c:pt>
+                <c:pt idx="1">
+                  <c:v>3.67</c:v>
+                </c:pt>
+                <c:pt idx="2">
+                  <c:v>3.83</c:v>
+                </c:pt>
+                <c:pt idx="3">
+                  <c:v>2.33</c:v>
+                </c:pt>
+              </c:numCache>
+            </c:numRef>
+          </c:val>
+        </c:ser>
+        <c:dLbls>
+          <c:numFmt formatCode="0.0" sourceLinked="0"/>
+          <c:txPr>
+            <a:bodyPr/>
+            <a:lstStyle/>
+            <a:p>
+              <a:pPr>
+                <a:defRPr b="0" i="0" strike="noStrike" sz="950" u="none">
+                  <a:solidFill>
+                    <a:srgbClr val="1A1A1A"/>
+                  </a:solidFill>
+                  <a:latin typeface="Arial"/>
+                </a:defRPr>
+              </a:pPr>
+            </a:p>
+          </c:txPr>
+          <c:showLegendKey val="0"/>
+          <c:showVal val="1"/>
+          <c:showCatName val="0"/>
+          <c:showSerName val="0"/>
+          <c:showPercent val="0"/>
+          <c:showBubbleSize val="0"/>
+          <c:showLeaderLines val="0"/>
+        </c:dLbls>
+        <c:gapWidth val="35"/>
+        <c:overlap val="0"/>
+        <c:axId val="2094734554"/>
+        <c:axId val="2094734552"/>
+        <c:axId val="2094734556"/>
+      </c:barChart>
+      <c:catAx>
+        <c:axId val="2094734554"/>
+        <c:scaling>
+          <c:orientation val="minMax"/>
+        </c:scaling>
+        <c:delete val="0"/>
+        <c:axPos val="b"/>
+        <c:numFmt formatCode="General" sourceLinked="1"/>
+        <c:majorTickMark val="out"/>
+        <c:minorTickMark val="none"/>
+        <c:tickLblPos val="low"/>
+        <c:spPr>
+          <a:ln w="12700" cap="flat">
+            <a:solidFill>
+              <a:srgbClr val="E3E1DB"/>
+            </a:solidFill>
+            <a:prstDash val="solid"/>
+            <a:round/>
+          </a:ln>
+        </c:spPr>
+        <c:txPr>
+          <a:bodyPr rot="1200000"/>
+          <a:lstStyle/>
+          <a:p>
+            <a:pPr>
+              <a:defRPr sz="850" b="0" i="0" u="none" strike="noStrike">
+                <a:solidFill>
+                  <a:srgbClr val="5C6570"/>
+                </a:solidFill>
+                <a:latin typeface="Arial"/>
+              </a:defRPr>
+            </a:pPr>
+            <a:endParaRPr lang="en-US"/>
+          </a:p>
+        </c:txPr>
+        <c:crossAx val="2094734552"/>
+        <c:crosses val="autoZero"/>
+        <c:auto val="1"/>
+        <c:lblAlgn val="ctr"/>
+        <c:noMultiLvlLbl val="1"/>
+      </c:catAx>
+      <c:valAx>
+        <c:axId val="2094734552"/>
+        <c:scaling>
+          <c:orientation val="minMax"/>
+        </c:scaling>
+        <c:delete val="1"/>
+        <c:axPos val="l"/>
+        <c:numFmt formatCode="General" sourceLinked="0"/>
+        <c:majorTickMark val="out"/>
+        <c:minorTickMark val="none"/>
+        <c:tickLblPos val="nextTo"/>
+        <c:spPr>
+          <a:ln w="12700" cap="flat">
+            <a:solidFill>
+              <a:srgbClr val="E3E1DB"/>
+            </a:solidFill>
+            <a:prstDash val="solid"/>
+            <a:round/>
+          </a:ln>
+        </c:spPr>
+        <c:txPr>
+          <a:bodyPr/>
+          <a:lstStyle/>
+          <a:p>
+            <a:pPr>
+              <a:defRPr sz="1200" b="0" i="0" u="none" strike="noStrike">
+                <a:solidFill>
+                  <a:srgbClr val="000000"/>
+                </a:solidFill>
+                <a:latin typeface="Arial"/>
+              </a:defRPr>
+            </a:pPr>
+            <a:endParaRPr lang="en-US"/>
+          </a:p>
+        </c:txPr>
+        <c:crossAx val="2094734554"/>
+        <c:crosses val="autoZero"/>
+        <c:crossBetween val="between"/>
+      </c:valAx>
+      <c:spPr>
+        <a:noFill/>
+        <a:ln>
+          <a:noFill/>
+        </a:ln>
+        <a:effectLst/>
+      </c:spPr>
+    </c:plotArea>
+    <c:plotVisOnly val="1"/>
+    <c:dispBlanksAs val="span"/>
+  </c:chart>
+  <c:spPr>
+    <a:noFill/>
+    <a:ln>
+      <a:noFill/>
+    </a:ln>
+    <a:effectLst/>
+  </c:spPr>
+  <c:externalData r:id="rId1">
+    <c:autoUpdate val="0"/>
+  </c:externalData>
+</c:chartSpace>
+</file>
+
+<file path=ppt/charts/chart12.xml><?xml version="1.0" encoding="utf-8"?>
+<c:chartSpace xmlns:c="http://schemas.openxmlformats.org/drawingml/2006/chart" xmlns:a="http://schemas.openxmlformats.org/drawingml/2006/main" xmlns:r="http://schemas.openxmlformats.org/officeDocument/2006/relationships">
+  <c:date1904 val="0"/>
+  <c:roundedCorners val="1"/>
+  <c:chart>
+    <c:autoTitleDeleted val="1"/>
+    <c:plotArea>
+      <c:layout/>
+      <c:barChart>
+        <c:barDir val="col"/>
+        <c:grouping val="clustered"/>
+        <c:varyColors val="0"/>
+        <c:ser>
+          <c:idx val="0"/>
+          <c:order val="0"/>
+          <c:tx>
+            <c:strRef>
+              <c:f>Sheet1!$B$1</c:f>
+              <c:strCache>
+                <c:ptCount val="1"/>
+                <c:pt idx="0">
                   <c:v>爆発力（自己評価）</c:v>
                 </c:pt>
               </c:strCache>
@@ -1562,7 +2126,7 @@
 </c:chartSpace>
 </file>
 
-<file path=ppt/charts/chart11.xml><?xml version="1.0" encoding="utf-8"?>
+<file path=ppt/charts/chart13.xml><?xml version="1.0" encoding="utf-8"?>
 <c:chartSpace xmlns:c="http://schemas.openxmlformats.org/drawingml/2006/chart" xmlns:a="http://schemas.openxmlformats.org/drawingml/2006/main" xmlns:r="http://schemas.openxmlformats.org/officeDocument/2006/relationships">
   <c:date1904 val="0"/>
   <c:roundedCorners val="1"/>
@@ -1843,7 +2407,7 @@
 </c:chartSpace>
 </file>
 
-<file path=ppt/charts/chart12.xml><?xml version="1.0" encoding="utf-8"?>
+<file path=ppt/charts/chart14.xml><?xml version="1.0" encoding="utf-8"?>
 <c:chartSpace xmlns:c="http://schemas.openxmlformats.org/drawingml/2006/chart" xmlns:a="http://schemas.openxmlformats.org/drawingml/2006/main" xmlns:r="http://schemas.openxmlformats.org/officeDocument/2006/relationships">
   <c:date1904 val="0"/>
   <c:roundedCorners val="1"/>
@@ -2975,6 +3539,568 @@
     <c:autoTitleDeleted val="1"/>
     <c:plotArea>
       <c:layout/>
+      <c:barChart>
+        <c:barDir val="col"/>
+        <c:grouping val="clustered"/>
+        <c:varyColors val="0"/>
+        <c:ser>
+          <c:idx val="0"/>
+          <c:order val="0"/>
+          <c:tx>
+            <c:strRef>
+              <c:f>Sheet1!$B$1</c:f>
+              <c:strCache>
+                <c:ptCount val="1"/>
+                <c:pt idx="0">
+                  <c:v>トレーニング時間帯(11:00-14:00)の平均血糖</c:v>
+                </c:pt>
+              </c:strCache>
+            </c:strRef>
+          </c:tx>
+          <c:spPr>
+            <a:solidFill>
+              <a:srgbClr val="2A78D6">
+                <a:alpha val="100000"/>
+              </a:srgbClr>
+            </a:solidFill>
+            <a:effectLst/>
+          </c:spPr>
+          <c:invertIfNegative val="0"/>
+          <c:dLbls>
+            <c:numFmt formatCode="#,##0" sourceLinked="0"/>
+            <c:txPr>
+              <a:bodyPr/>
+              <a:lstStyle/>
+              <a:p>
+                <a:pPr>
+                  <a:defRPr b="0" i="0" strike="noStrike" sz="1050" u="none">
+                    <a:solidFill>
+                      <a:srgbClr val="1A1A1A"/>
+                    </a:solidFill>
+                    <a:latin typeface="Arial"/>
+                  </a:defRPr>
+                </a:pPr>
+              </a:p>
+            </c:txPr>
+            <c:showLegendKey val="0"/>
+            <c:showVal val="1"/>
+            <c:showCatName val="0"/>
+            <c:showSerName val="0"/>
+            <c:showPercent val="0"/>
+            <c:showBubbleSize val="0"/>
+            <c:showLeaderLines val="0"/>
+          </c:dLbls>
+          <c:dPt>
+            <c:idx val="0"/>
+            <c:invertIfNegative val="0"/>
+            <c:bubble3D val="0"/>
+            <c:spPr>
+              <a:solidFill>
+                <a:srgbClr val="2A78D6"/>
+              </a:solidFill>
+              <a:effectLst/>
+            </c:spPr>
+          </c:dPt>
+          <c:dPt>
+            <c:idx val="1"/>
+            <c:invertIfNegative val="0"/>
+            <c:bubble3D val="0"/>
+            <c:spPr>
+              <a:solidFill>
+                <a:srgbClr val="EB6834"/>
+              </a:solidFill>
+              <a:effectLst/>
+            </c:spPr>
+          </c:dPt>
+          <c:dPt>
+            <c:idx val="2"/>
+            <c:invertIfNegative val="0"/>
+            <c:bubble3D val="0"/>
+            <c:spPr>
+              <a:solidFill>
+                <a:srgbClr val="1BAF7A"/>
+              </a:solidFill>
+              <a:effectLst/>
+            </c:spPr>
+          </c:dPt>
+          <c:dPt>
+            <c:idx val="3"/>
+            <c:invertIfNegative val="0"/>
+            <c:bubble3D val="0"/>
+            <c:spPr>
+              <a:solidFill>
+                <a:srgbClr val="EDA100"/>
+              </a:solidFill>
+              <a:effectLst/>
+            </c:spPr>
+          </c:dPt>
+          <c:cat>
+            <c:multiLvlStrRef>
+              <c:f>Sheet1!$A$2:$A$5</c:f>
+              <c:multiLvlStrCache>
+                <c:ptCount val="4"/>
+                <c:lvl>
+                  <c:pt idx="0">
+                    <c:v>固形</c:v>
+                  </c:pt>
+                  <c:pt idx="1">
+                    <c:v>スムージー</c:v>
+                  </c:pt>
+                  <c:pt idx="2">
+                    <c:v>おにぎり+スムージー</c:v>
+                  </c:pt>
+                  <c:pt idx="3">
+                    <c:v>おにぎり+糖質減</c:v>
+                  </c:pt>
+                </c:lvl>
+              </c:multiLvlStrCache>
+            </c:multiLvlStrRef>
+          </c:cat>
+          <c:val>
+            <c:numRef>
+              <c:f>Sheet1!$B$2:$B$5</c:f>
+              <c:numCache>
+                <c:formatCode>General</c:formatCode>
+                <c:ptCount val="4"/>
+                <c:pt idx="0">
+                  <c:v>135.1</c:v>
+                </c:pt>
+                <c:pt idx="1">
+                  <c:v>222.1</c:v>
+                </c:pt>
+                <c:pt idx="2">
+                  <c:v>220.1</c:v>
+                </c:pt>
+                <c:pt idx="3">
+                  <c:v>229.4</c:v>
+                </c:pt>
+              </c:numCache>
+            </c:numRef>
+          </c:val>
+        </c:ser>
+        <c:dLbls>
+          <c:numFmt formatCode="#,##0" sourceLinked="0"/>
+          <c:txPr>
+            <a:bodyPr/>
+            <a:lstStyle/>
+            <a:p>
+              <a:pPr>
+                <a:defRPr b="0" i="0" strike="noStrike" sz="1050" u="none">
+                  <a:solidFill>
+                    <a:srgbClr val="1A1A1A"/>
+                  </a:solidFill>
+                  <a:latin typeface="Arial"/>
+                </a:defRPr>
+              </a:pPr>
+            </a:p>
+          </c:txPr>
+          <c:showLegendKey val="0"/>
+          <c:showVal val="1"/>
+          <c:showCatName val="0"/>
+          <c:showSerName val="0"/>
+          <c:showPercent val="0"/>
+          <c:showBubbleSize val="0"/>
+          <c:showLeaderLines val="0"/>
+        </c:dLbls>
+        <c:gapWidth val="35"/>
+        <c:overlap val="0"/>
+        <c:axId val="2094734554"/>
+        <c:axId val="2094734552"/>
+        <c:axId val="2094734556"/>
+      </c:barChart>
+      <c:catAx>
+        <c:axId val="2094734554"/>
+        <c:scaling>
+          <c:orientation val="minMax"/>
+        </c:scaling>
+        <c:delete val="0"/>
+        <c:axPos val="b"/>
+        <c:numFmt formatCode="General" sourceLinked="1"/>
+        <c:majorTickMark val="out"/>
+        <c:minorTickMark val="none"/>
+        <c:tickLblPos val="low"/>
+        <c:spPr>
+          <a:ln w="12700" cap="flat">
+            <a:solidFill>
+              <a:srgbClr val="E3E1DB"/>
+            </a:solidFill>
+            <a:prstDash val="solid"/>
+            <a:round/>
+          </a:ln>
+        </c:spPr>
+        <c:txPr>
+          <a:bodyPr rot="1200000"/>
+          <a:lstStyle/>
+          <a:p>
+            <a:pPr>
+              <a:defRPr sz="950" b="0" i="0" u="none" strike="noStrike">
+                <a:solidFill>
+                  <a:srgbClr val="5C6570"/>
+                </a:solidFill>
+                <a:latin typeface="Arial"/>
+              </a:defRPr>
+            </a:pPr>
+            <a:endParaRPr lang="en-US"/>
+          </a:p>
+        </c:txPr>
+        <c:crossAx val="2094734552"/>
+        <c:crosses val="autoZero"/>
+        <c:auto val="1"/>
+        <c:lblAlgn val="ctr"/>
+        <c:noMultiLvlLbl val="1"/>
+      </c:catAx>
+      <c:valAx>
+        <c:axId val="2094734552"/>
+        <c:scaling>
+          <c:orientation val="minMax"/>
+        </c:scaling>
+        <c:delete val="1"/>
+        <c:axPos val="l"/>
+        <c:numFmt formatCode="General" sourceLinked="0"/>
+        <c:majorTickMark val="out"/>
+        <c:minorTickMark val="none"/>
+        <c:tickLblPos val="nextTo"/>
+        <c:spPr>
+          <a:ln w="12700" cap="flat">
+            <a:solidFill>
+              <a:srgbClr val="E3E1DB"/>
+            </a:solidFill>
+            <a:prstDash val="solid"/>
+            <a:round/>
+          </a:ln>
+        </c:spPr>
+        <c:txPr>
+          <a:bodyPr/>
+          <a:lstStyle/>
+          <a:p>
+            <a:pPr>
+              <a:defRPr sz="1200" b="0" i="0" u="none" strike="noStrike">
+                <a:solidFill>
+                  <a:srgbClr val="000000"/>
+                </a:solidFill>
+                <a:latin typeface="Arial"/>
+              </a:defRPr>
+            </a:pPr>
+            <a:endParaRPr lang="en-US"/>
+          </a:p>
+        </c:txPr>
+        <c:crossAx val="2094734554"/>
+        <c:crosses val="autoZero"/>
+        <c:crossBetween val="between"/>
+      </c:valAx>
+      <c:spPr>
+        <a:noFill/>
+        <a:ln>
+          <a:noFill/>
+        </a:ln>
+        <a:effectLst/>
+      </c:spPr>
+    </c:plotArea>
+    <c:plotVisOnly val="1"/>
+    <c:dispBlanksAs val="span"/>
+  </c:chart>
+  <c:spPr>
+    <a:noFill/>
+    <a:ln>
+      <a:noFill/>
+    </a:ln>
+    <a:effectLst/>
+  </c:spPr>
+  <c:externalData r:id="rId1">
+    <c:autoUpdate val="0"/>
+  </c:externalData>
+</c:chartSpace>
+</file>
+
+<file path=ppt/charts/chart6.xml><?xml version="1.0" encoding="utf-8"?>
+<c:chartSpace xmlns:c="http://schemas.openxmlformats.org/drawingml/2006/chart" xmlns:a="http://schemas.openxmlformats.org/drawingml/2006/main" xmlns:r="http://schemas.openxmlformats.org/officeDocument/2006/relationships">
+  <c:date1904 val="0"/>
+  <c:roundedCorners val="1"/>
+  <c:chart>
+    <c:autoTitleDeleted val="1"/>
+    <c:plotArea>
+      <c:layout/>
+      <c:barChart>
+        <c:barDir val="col"/>
+        <c:grouping val="clustered"/>
+        <c:varyColors val="0"/>
+        <c:ser>
+          <c:idx val="0"/>
+          <c:order val="0"/>
+          <c:tx>
+            <c:strRef>
+              <c:f>Sheet1!$B$1</c:f>
+              <c:strCache>
+                <c:ptCount val="1"/>
+                <c:pt idx="0">
+                  <c:v>ピーク後の最小値−ベースライン</c:v>
+                </c:pt>
+              </c:strCache>
+            </c:strRef>
+          </c:tx>
+          <c:spPr>
+            <a:solidFill>
+              <a:srgbClr val="2A78D6">
+                <a:alpha val="100000"/>
+              </a:srgbClr>
+            </a:solidFill>
+            <a:effectLst/>
+          </c:spPr>
+          <c:invertIfNegative val="0"/>
+          <c:dLbls>
+            <c:numFmt formatCode="#,##0" sourceLinked="0"/>
+            <c:txPr>
+              <a:bodyPr/>
+              <a:lstStyle/>
+              <a:p>
+                <a:pPr>
+                  <a:defRPr b="0" i="0" strike="noStrike" sz="1050" u="none">
+                    <a:solidFill>
+                      <a:srgbClr val="1A1A1A"/>
+                    </a:solidFill>
+                    <a:latin typeface="Arial"/>
+                  </a:defRPr>
+                </a:pPr>
+              </a:p>
+            </c:txPr>
+            <c:showLegendKey val="0"/>
+            <c:showVal val="1"/>
+            <c:showCatName val="0"/>
+            <c:showSerName val="0"/>
+            <c:showPercent val="0"/>
+            <c:showBubbleSize val="0"/>
+            <c:showLeaderLines val="0"/>
+          </c:dLbls>
+          <c:dPt>
+            <c:idx val="0"/>
+            <c:invertIfNegative val="0"/>
+            <c:bubble3D val="0"/>
+            <c:spPr>
+              <a:solidFill>
+                <a:srgbClr val="2A78D6"/>
+              </a:solidFill>
+              <a:effectLst/>
+            </c:spPr>
+          </c:dPt>
+          <c:dPt>
+            <c:idx val="1"/>
+            <c:invertIfNegative val="0"/>
+            <c:bubble3D val="0"/>
+            <c:spPr>
+              <a:solidFill>
+                <a:srgbClr val="EB6834"/>
+              </a:solidFill>
+              <a:effectLst/>
+            </c:spPr>
+          </c:dPt>
+          <c:dPt>
+            <c:idx val="2"/>
+            <c:invertIfNegative val="0"/>
+            <c:bubble3D val="0"/>
+            <c:spPr>
+              <a:solidFill>
+                <a:srgbClr val="1BAF7A"/>
+              </a:solidFill>
+              <a:effectLst/>
+            </c:spPr>
+          </c:dPt>
+          <c:dPt>
+            <c:idx val="3"/>
+            <c:invertIfNegative val="0"/>
+            <c:bubble3D val="0"/>
+            <c:spPr>
+              <a:solidFill>
+                <a:srgbClr val="EDA100"/>
+              </a:solidFill>
+              <a:effectLst/>
+            </c:spPr>
+          </c:dPt>
+          <c:cat>
+            <c:multiLvlStrRef>
+              <c:f>Sheet1!$A$2:$A$5</c:f>
+              <c:multiLvlStrCache>
+                <c:ptCount val="4"/>
+                <c:lvl>
+                  <c:pt idx="0">
+                    <c:v>固形</c:v>
+                  </c:pt>
+                  <c:pt idx="1">
+                    <c:v>スムージー</c:v>
+                  </c:pt>
+                  <c:pt idx="2">
+                    <c:v>おにぎり+スムージー</c:v>
+                  </c:pt>
+                  <c:pt idx="3">
+                    <c:v>おにぎり+糖質減</c:v>
+                  </c:pt>
+                </c:lvl>
+              </c:multiLvlStrCache>
+            </c:multiLvlStrRef>
+          </c:cat>
+          <c:val>
+            <c:numRef>
+              <c:f>Sheet1!$B$2:$B$5</c:f>
+              <c:numCache>
+                <c:formatCode>General</c:formatCode>
+                <c:ptCount val="4"/>
+                <c:pt idx="0">
+                  <c:v>20</c:v>
+                </c:pt>
+                <c:pt idx="1">
+                  <c:v>47.7</c:v>
+                </c:pt>
+                <c:pt idx="2">
+                  <c:v>18.3</c:v>
+                </c:pt>
+                <c:pt idx="3">
+                  <c:v>47.7</c:v>
+                </c:pt>
+              </c:numCache>
+            </c:numRef>
+          </c:val>
+        </c:ser>
+        <c:dLbls>
+          <c:numFmt formatCode="#,##0" sourceLinked="0"/>
+          <c:txPr>
+            <a:bodyPr/>
+            <a:lstStyle/>
+            <a:p>
+              <a:pPr>
+                <a:defRPr b="0" i="0" strike="noStrike" sz="1050" u="none">
+                  <a:solidFill>
+                    <a:srgbClr val="1A1A1A"/>
+                  </a:solidFill>
+                  <a:latin typeface="Arial"/>
+                </a:defRPr>
+              </a:pPr>
+            </a:p>
+          </c:txPr>
+          <c:showLegendKey val="0"/>
+          <c:showVal val="1"/>
+          <c:showCatName val="0"/>
+          <c:showSerName val="0"/>
+          <c:showPercent val="0"/>
+          <c:showBubbleSize val="0"/>
+          <c:showLeaderLines val="0"/>
+        </c:dLbls>
+        <c:gapWidth val="35"/>
+        <c:overlap val="0"/>
+        <c:axId val="2094734554"/>
+        <c:axId val="2094734552"/>
+        <c:axId val="2094734556"/>
+      </c:barChart>
+      <c:catAx>
+        <c:axId val="2094734554"/>
+        <c:scaling>
+          <c:orientation val="minMax"/>
+        </c:scaling>
+        <c:delete val="0"/>
+        <c:axPos val="b"/>
+        <c:numFmt formatCode="General" sourceLinked="1"/>
+        <c:majorTickMark val="out"/>
+        <c:minorTickMark val="none"/>
+        <c:tickLblPos val="low"/>
+        <c:spPr>
+          <a:ln w="12700" cap="flat">
+            <a:solidFill>
+              <a:srgbClr val="E3E1DB"/>
+            </a:solidFill>
+            <a:prstDash val="solid"/>
+            <a:round/>
+          </a:ln>
+        </c:spPr>
+        <c:txPr>
+          <a:bodyPr rot="1200000"/>
+          <a:lstStyle/>
+          <a:p>
+            <a:pPr>
+              <a:defRPr sz="950" b="0" i="0" u="none" strike="noStrike">
+                <a:solidFill>
+                  <a:srgbClr val="5C6570"/>
+                </a:solidFill>
+                <a:latin typeface="Arial"/>
+              </a:defRPr>
+            </a:pPr>
+            <a:endParaRPr lang="en-US"/>
+          </a:p>
+        </c:txPr>
+        <c:crossAx val="2094734552"/>
+        <c:crosses val="autoZero"/>
+        <c:auto val="1"/>
+        <c:lblAlgn val="ctr"/>
+        <c:noMultiLvlLbl val="1"/>
+      </c:catAx>
+      <c:valAx>
+        <c:axId val="2094734552"/>
+        <c:scaling>
+          <c:orientation val="minMax"/>
+        </c:scaling>
+        <c:delete val="1"/>
+        <c:axPos val="l"/>
+        <c:numFmt formatCode="General" sourceLinked="0"/>
+        <c:majorTickMark val="out"/>
+        <c:minorTickMark val="none"/>
+        <c:tickLblPos val="nextTo"/>
+        <c:spPr>
+          <a:ln w="12700" cap="flat">
+            <a:solidFill>
+              <a:srgbClr val="E3E1DB"/>
+            </a:solidFill>
+            <a:prstDash val="solid"/>
+            <a:round/>
+          </a:ln>
+        </c:spPr>
+        <c:txPr>
+          <a:bodyPr/>
+          <a:lstStyle/>
+          <a:p>
+            <a:pPr>
+              <a:defRPr sz="1200" b="0" i="0" u="none" strike="noStrike">
+                <a:solidFill>
+                  <a:srgbClr val="000000"/>
+                </a:solidFill>
+                <a:latin typeface="Arial"/>
+              </a:defRPr>
+            </a:pPr>
+            <a:endParaRPr lang="en-US"/>
+          </a:p>
+        </c:txPr>
+        <c:crossAx val="2094734554"/>
+        <c:crosses val="autoZero"/>
+        <c:crossBetween val="between"/>
+      </c:valAx>
+      <c:spPr>
+        <a:noFill/>
+        <a:ln>
+          <a:noFill/>
+        </a:ln>
+        <a:effectLst/>
+      </c:spPr>
+    </c:plotArea>
+    <c:plotVisOnly val="1"/>
+    <c:dispBlanksAs val="span"/>
+  </c:chart>
+  <c:spPr>
+    <a:noFill/>
+    <a:ln>
+      <a:noFill/>
+    </a:ln>
+    <a:effectLst/>
+  </c:spPr>
+  <c:externalData r:id="rId1">
+    <c:autoUpdate val="0"/>
+  </c:externalData>
+</c:chartSpace>
+</file>
+
+<file path=ppt/charts/chart7.xml><?xml version="1.0" encoding="utf-8"?>
+<c:chartSpace xmlns:c="http://schemas.openxmlformats.org/drawingml/2006/chart" xmlns:a="http://schemas.openxmlformats.org/drawingml/2006/main" xmlns:r="http://schemas.openxmlformats.org/officeDocument/2006/relationships">
+  <c:date1904 val="0"/>
+  <c:roundedCorners val="1"/>
+  <c:chart>
+    <c:autoTitleDeleted val="1"/>
+    <c:plotArea>
+      <c:layout/>
       <c:lineChart>
         <c:varyColors val="0"/>
         <c:ser>
@@ -3603,7 +4729,7 @@
 </c:chartSpace>
 </file>
 
-<file path=ppt/charts/chart6.xml><?xml version="1.0" encoding="utf-8"?>
+<file path=ppt/charts/chart8.xml><?xml version="1.0" encoding="utf-8"?>
 <c:chartSpace xmlns:c="http://schemas.openxmlformats.org/drawingml/2006/chart" xmlns:a="http://schemas.openxmlformats.org/drawingml/2006/main" xmlns:r="http://schemas.openxmlformats.org/officeDocument/2006/relationships">
   <c:date1904 val="0"/>
   <c:roundedCorners val="1"/>
@@ -4239,7 +5365,7 @@
 </c:chartSpace>
 </file>
 
-<file path=ppt/charts/chart7.xml><?xml version="1.0" encoding="utf-8"?>
+<file path=ppt/charts/chart9.xml><?xml version="1.0" encoding="utf-8"?>
 <c:chartSpace xmlns:c="http://schemas.openxmlformats.org/drawingml/2006/chart" xmlns:a="http://schemas.openxmlformats.org/drawingml/2006/main" xmlns:r="http://schemas.openxmlformats.org/officeDocument/2006/relationships">
   <c:date1904 val="0"/>
   <c:roundedCorners val="1"/>
@@ -4381,568 +5507,6 @@
                 </c:pt>
                 <c:pt idx="3">
                   <c:v>2.67</c:v>
-                </c:pt>
-              </c:numCache>
-            </c:numRef>
-          </c:val>
-        </c:ser>
-        <c:dLbls>
-          <c:numFmt formatCode="0.0" sourceLinked="0"/>
-          <c:txPr>
-            <a:bodyPr/>
-            <a:lstStyle/>
-            <a:p>
-              <a:pPr>
-                <a:defRPr b="0" i="0" strike="noStrike" sz="950" u="none">
-                  <a:solidFill>
-                    <a:srgbClr val="1A1A1A"/>
-                  </a:solidFill>
-                  <a:latin typeface="Arial"/>
-                </a:defRPr>
-              </a:pPr>
-            </a:p>
-          </c:txPr>
-          <c:showLegendKey val="0"/>
-          <c:showVal val="1"/>
-          <c:showCatName val="0"/>
-          <c:showSerName val="0"/>
-          <c:showPercent val="0"/>
-          <c:showBubbleSize val="0"/>
-          <c:showLeaderLines val="0"/>
-        </c:dLbls>
-        <c:gapWidth val="35"/>
-        <c:overlap val="0"/>
-        <c:axId val="2094734554"/>
-        <c:axId val="2094734552"/>
-        <c:axId val="2094734556"/>
-      </c:barChart>
-      <c:catAx>
-        <c:axId val="2094734554"/>
-        <c:scaling>
-          <c:orientation val="minMax"/>
-        </c:scaling>
-        <c:delete val="0"/>
-        <c:axPos val="b"/>
-        <c:numFmt formatCode="General" sourceLinked="1"/>
-        <c:majorTickMark val="out"/>
-        <c:minorTickMark val="none"/>
-        <c:tickLblPos val="low"/>
-        <c:spPr>
-          <a:ln w="12700" cap="flat">
-            <a:solidFill>
-              <a:srgbClr val="E3E1DB"/>
-            </a:solidFill>
-            <a:prstDash val="solid"/>
-            <a:round/>
-          </a:ln>
-        </c:spPr>
-        <c:txPr>
-          <a:bodyPr rot="1200000"/>
-          <a:lstStyle/>
-          <a:p>
-            <a:pPr>
-              <a:defRPr sz="850" b="0" i="0" u="none" strike="noStrike">
-                <a:solidFill>
-                  <a:srgbClr val="5C6570"/>
-                </a:solidFill>
-                <a:latin typeface="Arial"/>
-              </a:defRPr>
-            </a:pPr>
-            <a:endParaRPr lang="en-US"/>
-          </a:p>
-        </c:txPr>
-        <c:crossAx val="2094734552"/>
-        <c:crosses val="autoZero"/>
-        <c:auto val="1"/>
-        <c:lblAlgn val="ctr"/>
-        <c:noMultiLvlLbl val="1"/>
-      </c:catAx>
-      <c:valAx>
-        <c:axId val="2094734552"/>
-        <c:scaling>
-          <c:orientation val="minMax"/>
-        </c:scaling>
-        <c:delete val="1"/>
-        <c:axPos val="l"/>
-        <c:numFmt formatCode="General" sourceLinked="0"/>
-        <c:majorTickMark val="out"/>
-        <c:minorTickMark val="none"/>
-        <c:tickLblPos val="nextTo"/>
-        <c:spPr>
-          <a:ln w="12700" cap="flat">
-            <a:solidFill>
-              <a:srgbClr val="E3E1DB"/>
-            </a:solidFill>
-            <a:prstDash val="solid"/>
-            <a:round/>
-          </a:ln>
-        </c:spPr>
-        <c:txPr>
-          <a:bodyPr/>
-          <a:lstStyle/>
-          <a:p>
-            <a:pPr>
-              <a:defRPr sz="1200" b="0" i="0" u="none" strike="noStrike">
-                <a:solidFill>
-                  <a:srgbClr val="000000"/>
-                </a:solidFill>
-                <a:latin typeface="Arial"/>
-              </a:defRPr>
-            </a:pPr>
-            <a:endParaRPr lang="en-US"/>
-          </a:p>
-        </c:txPr>
-        <c:crossAx val="2094734554"/>
-        <c:crosses val="autoZero"/>
-        <c:crossBetween val="between"/>
-      </c:valAx>
-      <c:spPr>
-        <a:noFill/>
-        <a:ln>
-          <a:noFill/>
-        </a:ln>
-        <a:effectLst/>
-      </c:spPr>
-    </c:plotArea>
-    <c:plotVisOnly val="1"/>
-    <c:dispBlanksAs val="span"/>
-  </c:chart>
-  <c:spPr>
-    <a:noFill/>
-    <a:ln>
-      <a:noFill/>
-    </a:ln>
-    <a:effectLst/>
-  </c:spPr>
-  <c:externalData r:id="rId1">
-    <c:autoUpdate val="0"/>
-  </c:externalData>
-</c:chartSpace>
-</file>
-
-<file path=ppt/charts/chart8.xml><?xml version="1.0" encoding="utf-8"?>
-<c:chartSpace xmlns:c="http://schemas.openxmlformats.org/drawingml/2006/chart" xmlns:a="http://schemas.openxmlformats.org/drawingml/2006/main" xmlns:r="http://schemas.openxmlformats.org/officeDocument/2006/relationships">
-  <c:date1904 val="0"/>
-  <c:roundedCorners val="1"/>
-  <c:chart>
-    <c:autoTitleDeleted val="1"/>
-    <c:plotArea>
-      <c:layout/>
-      <c:barChart>
-        <c:barDir val="col"/>
-        <c:grouping val="clustered"/>
-        <c:varyColors val="0"/>
-        <c:ser>
-          <c:idx val="0"/>
-          <c:order val="0"/>
-          <c:tx>
-            <c:strRef>
-              <c:f>Sheet1!$B$1</c:f>
-              <c:strCache>
-                <c:ptCount val="1"/>
-                <c:pt idx="0">
-                  <c:v>睡眠の質</c:v>
-                </c:pt>
-              </c:strCache>
-            </c:strRef>
-          </c:tx>
-          <c:spPr>
-            <a:solidFill>
-              <a:srgbClr val="2A78D6">
-                <a:alpha val="100000"/>
-              </a:srgbClr>
-            </a:solidFill>
-            <a:effectLst/>
-          </c:spPr>
-          <c:invertIfNegative val="0"/>
-          <c:dLbls>
-            <c:numFmt formatCode="0.0" sourceLinked="0"/>
-            <c:txPr>
-              <a:bodyPr/>
-              <a:lstStyle/>
-              <a:p>
-                <a:pPr>
-                  <a:defRPr b="0" i="0" strike="noStrike" sz="950" u="none">
-                    <a:solidFill>
-                      <a:srgbClr val="1A1A1A"/>
-                    </a:solidFill>
-                    <a:latin typeface="Arial"/>
-                  </a:defRPr>
-                </a:pPr>
-              </a:p>
-            </c:txPr>
-            <c:showLegendKey val="0"/>
-            <c:showVal val="1"/>
-            <c:showCatName val="0"/>
-            <c:showSerName val="0"/>
-            <c:showPercent val="0"/>
-            <c:showBubbleSize val="0"/>
-            <c:showLeaderLines val="0"/>
-          </c:dLbls>
-          <c:dPt>
-            <c:idx val="0"/>
-            <c:invertIfNegative val="0"/>
-            <c:bubble3D val="0"/>
-            <c:spPr>
-              <a:solidFill>
-                <a:srgbClr val="2A78D6"/>
-              </a:solidFill>
-              <a:effectLst/>
-            </c:spPr>
-          </c:dPt>
-          <c:dPt>
-            <c:idx val="1"/>
-            <c:invertIfNegative val="0"/>
-            <c:bubble3D val="0"/>
-            <c:spPr>
-              <a:solidFill>
-                <a:srgbClr val="EB6834"/>
-              </a:solidFill>
-              <a:effectLst/>
-            </c:spPr>
-          </c:dPt>
-          <c:dPt>
-            <c:idx val="2"/>
-            <c:invertIfNegative val="0"/>
-            <c:bubble3D val="0"/>
-            <c:spPr>
-              <a:solidFill>
-                <a:srgbClr val="1BAF7A"/>
-              </a:solidFill>
-              <a:effectLst/>
-            </c:spPr>
-          </c:dPt>
-          <c:dPt>
-            <c:idx val="3"/>
-            <c:invertIfNegative val="0"/>
-            <c:bubble3D val="0"/>
-            <c:spPr>
-              <a:solidFill>
-                <a:srgbClr val="EDA100"/>
-              </a:solidFill>
-              <a:effectLst/>
-            </c:spPr>
-          </c:dPt>
-          <c:cat>
-            <c:multiLvlStrRef>
-              <c:f>Sheet1!$A$2:$A$5</c:f>
-              <c:multiLvlStrCache>
-                <c:ptCount val="4"/>
-                <c:lvl>
-                  <c:pt idx="0">
-                    <c:v>固形</c:v>
-                  </c:pt>
-                  <c:pt idx="1">
-                    <c:v>スムージー</c:v>
-                  </c:pt>
-                  <c:pt idx="2">
-                    <c:v>おにぎり+スムージー</c:v>
-                  </c:pt>
-                  <c:pt idx="3">
-                    <c:v>おにぎり+糖質減</c:v>
-                  </c:pt>
-                </c:lvl>
-              </c:multiLvlStrCache>
-            </c:multiLvlStrRef>
-          </c:cat>
-          <c:val>
-            <c:numRef>
-              <c:f>Sheet1!$B$2:$B$5</c:f>
-              <c:numCache>
-                <c:formatCode>General</c:formatCode>
-                <c:ptCount val="4"/>
-                <c:pt idx="0">
-                  <c:v>2</c:v>
-                </c:pt>
-                <c:pt idx="1">
-                  <c:v>2</c:v>
-                </c:pt>
-                <c:pt idx="2">
-                  <c:v>2</c:v>
-                </c:pt>
-                <c:pt idx="3">
-                  <c:v>2.67</c:v>
-                </c:pt>
-              </c:numCache>
-            </c:numRef>
-          </c:val>
-        </c:ser>
-        <c:dLbls>
-          <c:numFmt formatCode="0.0" sourceLinked="0"/>
-          <c:txPr>
-            <a:bodyPr/>
-            <a:lstStyle/>
-            <a:p>
-              <a:pPr>
-                <a:defRPr b="0" i="0" strike="noStrike" sz="950" u="none">
-                  <a:solidFill>
-                    <a:srgbClr val="1A1A1A"/>
-                  </a:solidFill>
-                  <a:latin typeface="Arial"/>
-                </a:defRPr>
-              </a:pPr>
-            </a:p>
-          </c:txPr>
-          <c:showLegendKey val="0"/>
-          <c:showVal val="1"/>
-          <c:showCatName val="0"/>
-          <c:showSerName val="0"/>
-          <c:showPercent val="0"/>
-          <c:showBubbleSize val="0"/>
-          <c:showLeaderLines val="0"/>
-        </c:dLbls>
-        <c:gapWidth val="35"/>
-        <c:overlap val="0"/>
-        <c:axId val="2094734554"/>
-        <c:axId val="2094734552"/>
-        <c:axId val="2094734556"/>
-      </c:barChart>
-      <c:catAx>
-        <c:axId val="2094734554"/>
-        <c:scaling>
-          <c:orientation val="minMax"/>
-        </c:scaling>
-        <c:delete val="0"/>
-        <c:axPos val="b"/>
-        <c:numFmt formatCode="General" sourceLinked="1"/>
-        <c:majorTickMark val="out"/>
-        <c:minorTickMark val="none"/>
-        <c:tickLblPos val="low"/>
-        <c:spPr>
-          <a:ln w="12700" cap="flat">
-            <a:solidFill>
-              <a:srgbClr val="E3E1DB"/>
-            </a:solidFill>
-            <a:prstDash val="solid"/>
-            <a:round/>
-          </a:ln>
-        </c:spPr>
-        <c:txPr>
-          <a:bodyPr rot="1200000"/>
-          <a:lstStyle/>
-          <a:p>
-            <a:pPr>
-              <a:defRPr sz="850" b="0" i="0" u="none" strike="noStrike">
-                <a:solidFill>
-                  <a:srgbClr val="5C6570"/>
-                </a:solidFill>
-                <a:latin typeface="Arial"/>
-              </a:defRPr>
-            </a:pPr>
-            <a:endParaRPr lang="en-US"/>
-          </a:p>
-        </c:txPr>
-        <c:crossAx val="2094734552"/>
-        <c:crosses val="autoZero"/>
-        <c:auto val="1"/>
-        <c:lblAlgn val="ctr"/>
-        <c:noMultiLvlLbl val="1"/>
-      </c:catAx>
-      <c:valAx>
-        <c:axId val="2094734552"/>
-        <c:scaling>
-          <c:orientation val="minMax"/>
-        </c:scaling>
-        <c:delete val="1"/>
-        <c:axPos val="l"/>
-        <c:numFmt formatCode="General" sourceLinked="0"/>
-        <c:majorTickMark val="out"/>
-        <c:minorTickMark val="none"/>
-        <c:tickLblPos val="nextTo"/>
-        <c:spPr>
-          <a:ln w="12700" cap="flat">
-            <a:solidFill>
-              <a:srgbClr val="E3E1DB"/>
-            </a:solidFill>
-            <a:prstDash val="solid"/>
-            <a:round/>
-          </a:ln>
-        </c:spPr>
-        <c:txPr>
-          <a:bodyPr/>
-          <a:lstStyle/>
-          <a:p>
-            <a:pPr>
-              <a:defRPr sz="1200" b="0" i="0" u="none" strike="noStrike">
-                <a:solidFill>
-                  <a:srgbClr val="000000"/>
-                </a:solidFill>
-                <a:latin typeface="Arial"/>
-              </a:defRPr>
-            </a:pPr>
-            <a:endParaRPr lang="en-US"/>
-          </a:p>
-        </c:txPr>
-        <c:crossAx val="2094734554"/>
-        <c:crosses val="autoZero"/>
-        <c:crossBetween val="between"/>
-      </c:valAx>
-      <c:spPr>
-        <a:noFill/>
-        <a:ln>
-          <a:noFill/>
-        </a:ln>
-        <a:effectLst/>
-      </c:spPr>
-    </c:plotArea>
-    <c:plotVisOnly val="1"/>
-    <c:dispBlanksAs val="span"/>
-  </c:chart>
-  <c:spPr>
-    <a:noFill/>
-    <a:ln>
-      <a:noFill/>
-    </a:ln>
-    <a:effectLst/>
-  </c:spPr>
-  <c:externalData r:id="rId1">
-    <c:autoUpdate val="0"/>
-  </c:externalData>
-</c:chartSpace>
-</file>
-
-<file path=ppt/charts/chart9.xml><?xml version="1.0" encoding="utf-8"?>
-<c:chartSpace xmlns:c="http://schemas.openxmlformats.org/drawingml/2006/chart" xmlns:a="http://schemas.openxmlformats.org/drawingml/2006/main" xmlns:r="http://schemas.openxmlformats.org/officeDocument/2006/relationships">
-  <c:date1904 val="0"/>
-  <c:roundedCorners val="1"/>
-  <c:chart>
-    <c:autoTitleDeleted val="1"/>
-    <c:plotArea>
-      <c:layout/>
-      <c:barChart>
-        <c:barDir val="col"/>
-        <c:grouping val="clustered"/>
-        <c:varyColors val="0"/>
-        <c:ser>
-          <c:idx val="0"/>
-          <c:order val="0"/>
-          <c:tx>
-            <c:strRef>
-              <c:f>Sheet1!$B$1</c:f>
-              <c:strCache>
-                <c:ptCount val="1"/>
-                <c:pt idx="0">
-                  <c:v>持久力（自己評価）</c:v>
-                </c:pt>
-              </c:strCache>
-            </c:strRef>
-          </c:tx>
-          <c:spPr>
-            <a:solidFill>
-              <a:srgbClr val="2A78D6">
-                <a:alpha val="100000"/>
-              </a:srgbClr>
-            </a:solidFill>
-            <a:effectLst/>
-          </c:spPr>
-          <c:invertIfNegative val="0"/>
-          <c:dLbls>
-            <c:numFmt formatCode="0.0" sourceLinked="0"/>
-            <c:txPr>
-              <a:bodyPr/>
-              <a:lstStyle/>
-              <a:p>
-                <a:pPr>
-                  <a:defRPr b="0" i="0" strike="noStrike" sz="950" u="none">
-                    <a:solidFill>
-                      <a:srgbClr val="1A1A1A"/>
-                    </a:solidFill>
-                    <a:latin typeface="Arial"/>
-                  </a:defRPr>
-                </a:pPr>
-              </a:p>
-            </c:txPr>
-            <c:showLegendKey val="0"/>
-            <c:showVal val="1"/>
-            <c:showCatName val="0"/>
-            <c:showSerName val="0"/>
-            <c:showPercent val="0"/>
-            <c:showBubbleSize val="0"/>
-            <c:showLeaderLines val="0"/>
-          </c:dLbls>
-          <c:dPt>
-            <c:idx val="0"/>
-            <c:invertIfNegative val="0"/>
-            <c:bubble3D val="0"/>
-            <c:spPr>
-              <a:solidFill>
-                <a:srgbClr val="2A78D6"/>
-              </a:solidFill>
-              <a:effectLst/>
-            </c:spPr>
-          </c:dPt>
-          <c:dPt>
-            <c:idx val="1"/>
-            <c:invertIfNegative val="0"/>
-            <c:bubble3D val="0"/>
-            <c:spPr>
-              <a:solidFill>
-                <a:srgbClr val="EB6834"/>
-              </a:solidFill>
-              <a:effectLst/>
-            </c:spPr>
-          </c:dPt>
-          <c:dPt>
-            <c:idx val="2"/>
-            <c:invertIfNegative val="0"/>
-            <c:bubble3D val="0"/>
-            <c:spPr>
-              <a:solidFill>
-                <a:srgbClr val="1BAF7A"/>
-              </a:solidFill>
-              <a:effectLst/>
-            </c:spPr>
-          </c:dPt>
-          <c:dPt>
-            <c:idx val="3"/>
-            <c:invertIfNegative val="0"/>
-            <c:bubble3D val="0"/>
-            <c:spPr>
-              <a:solidFill>
-                <a:srgbClr val="EDA100"/>
-              </a:solidFill>
-              <a:effectLst/>
-            </c:spPr>
-          </c:dPt>
-          <c:cat>
-            <c:multiLvlStrRef>
-              <c:f>Sheet1!$A$2:$A$5</c:f>
-              <c:multiLvlStrCache>
-                <c:ptCount val="4"/>
-                <c:lvl>
-                  <c:pt idx="0">
-                    <c:v>固形</c:v>
-                  </c:pt>
-                  <c:pt idx="1">
-                    <c:v>スムージー</c:v>
-                  </c:pt>
-                  <c:pt idx="2">
-                    <c:v>おにぎり+スムージー</c:v>
-                  </c:pt>
-                  <c:pt idx="3">
-                    <c:v>おにぎり+糖質減</c:v>
-                  </c:pt>
-                </c:lvl>
-              </c:multiLvlStrCache>
-            </c:multiLvlStrRef>
-          </c:cat>
-          <c:val>
-            <c:numRef>
-              <c:f>Sheet1!$B$2:$B$5</c:f>
-              <c:numCache>
-                <c:formatCode>General</c:formatCode>
-                <c:ptCount val="4"/>
-                <c:pt idx="0">
-                  <c:v>3</c:v>
-                </c:pt>
-                <c:pt idx="1">
-                  <c:v>3.67</c:v>
-                </c:pt>
-                <c:pt idx="2">
-                  <c:v>3.83</c:v>
-                </c:pt>
-                <c:pt idx="3">
-                  <c:v>2.33</c:v>
                 </c:pt>
               </c:numCache>
             </c:numRef>
@@ -5853,6 +6417,182 @@
             <a:fld id="{F7021451-1387-4CA6-816F-3879F97B5CBC}" type="slidenum">
               <a:rPr lang="en-US"/>
               <a:t>13</a:t>
+            </a:fld>
+            <a:endParaRPr lang="en-US"/>
+          </a:p>
+        </p:txBody>
+      </p:sp>
+    </p:spTree>
+    <p:extLst>
+      <p:ext uri="{BB962C8B-B14F-4D97-AF65-F5344CB8AC3E}">
+        <p14:creationId xmlns:p14="http://schemas.microsoft.com/office/powerpoint/2010/main" val="1024086991"/>
+      </p:ext>
+    </p:extLst>
+  </p:cSld>
+  <p:clrMapOvr>
+    <a:masterClrMapping/>
+  </p:clrMapOvr>
+</p:notes>
+</file>
+
+<file path=ppt/notesSlides/notesSlide14.xml><?xml version="1.0" encoding="utf-8"?>
+<p:notes xmlns:a="http://schemas.openxmlformats.org/drawingml/2006/main" xmlns:r="http://schemas.openxmlformats.org/officeDocument/2006/relationships" xmlns:p="http://schemas.openxmlformats.org/presentationml/2006/main">
+  <p:cSld>
+    <p:spTree>
+      <p:nvGrpSpPr>
+        <p:cNvPr id="1" name=""/>
+        <p:cNvGrpSpPr/>
+        <p:nvPr/>
+      </p:nvGrpSpPr>
+      <p:grpSpPr>
+        <a:xfrm>
+          <a:off x="0" y="0"/>
+          <a:ext cx="0" cy="0"/>
+          <a:chOff x="0" y="0"/>
+          <a:chExt cx="0" cy="0"/>
+        </a:xfrm>
+      </p:grpSpPr>
+      <p:sp>
+        <p:nvSpPr>
+          <p:cNvPr id="2" name="Slide Image Placeholder 1"/>
+          <p:cNvSpPr>
+            <a:spLocks noGrp="1" noRot="1" noChangeAspect="1"/>
+          </p:cNvSpPr>
+          <p:nvPr>
+            <p:ph type="sldImg"/>
+          </p:nvPr>
+        </p:nvSpPr>
+        <p:spPr/>
+      </p:sp>
+      <p:sp>
+        <p:nvSpPr>
+          <p:cNvPr id="3" name="Notes Placeholder 2"/>
+          <p:cNvSpPr>
+            <a:spLocks noGrp="1"/>
+          </p:cNvSpPr>
+          <p:nvPr>
+            <p:ph type="body" idx="1"/>
+          </p:nvPr>
+        </p:nvSpPr>
+        <p:spPr/>
+        <p:txBody>
+          <a:bodyPr/>
+          <a:lstStyle/>
+          <a:p>
+            <a:r>
+              <a:rPr lang="en-US" dirty="0"/>
+              <a:t/>
+            </a:r>
+            <a:endParaRPr lang="en-US" dirty="0"/>
+          </a:p>
+        </p:txBody>
+      </p:sp>
+      <p:sp>
+        <p:nvSpPr>
+          <p:cNvPr id="4" name="Slide Number Placeholder 3"/>
+          <p:cNvSpPr>
+            <a:spLocks noGrp="1"/>
+          </p:cNvSpPr>
+          <p:nvPr>
+            <p:ph type="sldNum" sz="quarter" idx="10"/>
+          </p:nvPr>
+        </p:nvSpPr>
+        <p:spPr/>
+        <p:txBody>
+          <a:bodyPr/>
+          <a:lstStyle/>
+          <a:p>
+            <a:fld id="{F7021451-1387-4CA6-816F-3879F97B5CBC}" type="slidenum">
+              <a:rPr lang="en-US"/>
+              <a:t>14</a:t>
+            </a:fld>
+            <a:endParaRPr lang="en-US"/>
+          </a:p>
+        </p:txBody>
+      </p:sp>
+    </p:spTree>
+    <p:extLst>
+      <p:ext uri="{BB962C8B-B14F-4D97-AF65-F5344CB8AC3E}">
+        <p14:creationId xmlns:p14="http://schemas.microsoft.com/office/powerpoint/2010/main" val="1024086991"/>
+      </p:ext>
+    </p:extLst>
+  </p:cSld>
+  <p:clrMapOvr>
+    <a:masterClrMapping/>
+  </p:clrMapOvr>
+</p:notes>
+</file>
+
+<file path=ppt/notesSlides/notesSlide15.xml><?xml version="1.0" encoding="utf-8"?>
+<p:notes xmlns:a="http://schemas.openxmlformats.org/drawingml/2006/main" xmlns:r="http://schemas.openxmlformats.org/officeDocument/2006/relationships" xmlns:p="http://schemas.openxmlformats.org/presentationml/2006/main">
+  <p:cSld>
+    <p:spTree>
+      <p:nvGrpSpPr>
+        <p:cNvPr id="1" name=""/>
+        <p:cNvGrpSpPr/>
+        <p:nvPr/>
+      </p:nvGrpSpPr>
+      <p:grpSpPr>
+        <a:xfrm>
+          <a:off x="0" y="0"/>
+          <a:ext cx="0" cy="0"/>
+          <a:chOff x="0" y="0"/>
+          <a:chExt cx="0" cy="0"/>
+        </a:xfrm>
+      </p:grpSpPr>
+      <p:sp>
+        <p:nvSpPr>
+          <p:cNvPr id="2" name="Slide Image Placeholder 1"/>
+          <p:cNvSpPr>
+            <a:spLocks noGrp="1" noRot="1" noChangeAspect="1"/>
+          </p:cNvSpPr>
+          <p:nvPr>
+            <p:ph type="sldImg"/>
+          </p:nvPr>
+        </p:nvSpPr>
+        <p:spPr/>
+      </p:sp>
+      <p:sp>
+        <p:nvSpPr>
+          <p:cNvPr id="3" name="Notes Placeholder 2"/>
+          <p:cNvSpPr>
+            <a:spLocks noGrp="1"/>
+          </p:cNvSpPr>
+          <p:nvPr>
+            <p:ph type="body" idx="1"/>
+          </p:nvPr>
+        </p:nvSpPr>
+        <p:spPr/>
+        <p:txBody>
+          <a:bodyPr/>
+          <a:lstStyle/>
+          <a:p>
+            <a:r>
+              <a:rPr lang="en-US" dirty="0"/>
+              <a:t/>
+            </a:r>
+            <a:endParaRPr lang="en-US" dirty="0"/>
+          </a:p>
+        </p:txBody>
+      </p:sp>
+      <p:sp>
+        <p:nvSpPr>
+          <p:cNvPr id="4" name="Slide Number Placeholder 3"/>
+          <p:cNvSpPr>
+            <a:spLocks noGrp="1"/>
+          </p:cNvSpPr>
+          <p:nvPr>
+            <p:ph type="sldNum" sz="quarter" idx="10"/>
+          </p:nvPr>
+        </p:nvSpPr>
+        <p:spPr/>
+        <p:txBody>
+          <a:bodyPr/>
+          <a:lstStyle/>
+          <a:p>
+            <a:fld id="{F7021451-1387-4CA6-816F-3879F97B5CBC}" type="slidenum">
+              <a:rPr lang="en-US"/>
+              <a:t>15</a:t>
             </a:fld>
             <a:endParaRPr lang="en-US"/>
           </a:p>
@@ -7443,7 +8183,7 @@
                 <a:ea typeface="Calibri" pitchFamily="34" charset="-122"/>
                 <a:cs typeface="Calibri" pitchFamily="34" charset="-120"/>
               </a:rPr>
-              <a:t>CONDITION</a:t>
+              <a:t>COMPARISON 5</a:t>
             </a:r>
             <a:endParaRPr lang="en-US" sz="1300" dirty="0"/>
           </a:p>
@@ -7482,7 +8222,7 @@
                 <a:ea typeface="Cambria" pitchFamily="34" charset="-122"/>
                 <a:cs typeface="Cambria" pitchFamily="34" charset="-120"/>
               </a:rPr>
-              <a:t>自覚コンディション（4条件比較）</a:t>
+              <a:t>タイミングの効果：同時摂取 vs 分割摂取（同エネルギー条件下）</a:t>
             </a:r>
             <a:endParaRPr lang="en-US" sz="2800" dirty="0"/>
           </a:p>
@@ -7496,8 +8236,8 @@
         </p:nvSpPr>
         <p:spPr>
           <a:xfrm>
-            <a:off x="548640" y="1600200"/>
-            <a:ext cx="6309360" cy="256032"/>
+            <a:off x="548640" y="1463040"/>
+            <a:ext cx="11091672" cy="457200"/>
           </a:xfrm>
           <a:prstGeom prst="rect">
             <a:avLst/>
@@ -7513,15 +8253,15 @@
               <a:buNone/>
             </a:pPr>
             <a:r>
-              <a:rPr lang="en-US" sz="1250" b="1" dirty="0">
-                <a:solidFill>
-                  <a:srgbClr val="21295C"/>
+              <a:rPr lang="en-US" sz="1250" dirty="0">
+                <a:solidFill>
+                  <a:srgbClr val="5C6570"/>
                 </a:solidFill>
                 <a:latin typeface="Calibri" pitchFamily="34" charset="0"/>
                 <a:ea typeface="Calibri" pitchFamily="34" charset="-122"/>
                 <a:cs typeface="Calibri" pitchFamily="34" charset="-120"/>
               </a:rPr>
-              <a:t>満腹感の推移 (0=空腹〜10=満腹)</a:t>
+              <a:t>4条件とも14:00までの総エネルギーはほぼ同じ。「おにぎりを8:00に同時に食べるか、10:00〜11:00に分けて食べるか」の純粋な効果を、自由摂取前（8:00〜11:30）に絞って比較。</a:t>
             </a:r>
             <a:endParaRPr lang="en-US" sz="1250" dirty="0"/>
           </a:p>
@@ -7529,30 +8269,1438 @@
       </p:sp>
       <p:graphicFrame>
         <p:nvGraphicFramePr>
-          <p:cNvPr id="5" name="Chart 0" descr=""/>
-          <p:cNvGraphicFramePr/>
-          <p:nvPr/>
+          <p:cNvPr id="11" name="Table 0"/>
+          <p:cNvGraphicFramePr>
+            <a:graphicFrameLocks noGrp="1"/>
+          </p:cNvGraphicFramePr>
+          <p:nvPr>
+            <p:extLst>
+              <p:ext uri="{D42A27DB-BD31-4B8C-83A1-F6EECF244321}">
+                <p14:modId xmlns:p14="http://schemas.microsoft.com/office/powerpoint/2010/main" val="1579011935"/>
+              </p:ext>
+            </p:extLst>
+          </p:nvPr>
         </p:nvGraphicFramePr>
         <p:xfrm>
-          <a:off x="548640" y="1874520"/>
-          <a:ext cx="6309360" cy="1691640"/>
+          <a:off x="548640" y="2011680"/>
+          <a:ext cx="11091672" cy="1828800"/>
         </p:xfrm>
-        <a:graphic xmlns:a="http://schemas.openxmlformats.org/drawingml/2006/main">
-          <a:graphicData uri="http://schemas.openxmlformats.org/drawingml/2006/chart">
-            <c:chart xmlns:c="http://schemas.openxmlformats.org/drawingml/2006/chart" r:id="rId1"/>
+        <a:graphic>
+          <a:graphicData uri="http://schemas.openxmlformats.org/drawingml/2006/table">
+            <a:tbl>
+              <a:tblPr/>
+              <a:tblGrid>
+                <a:gridCol w="4023360"/>
+                <a:gridCol w="2743200"/>
+                <a:gridCol w="2194560"/>
+                <a:gridCol w="2130552"/>
+              </a:tblGrid>
+              <a:tr h="365760">
+                <a:tc>
+                  <a:txBody>
+                    <a:bodyPr/>
+                    <a:lstStyle/>
+                    <a:p>
+                      <a:pPr indent="0" marL="0">
+                        <a:buNone/>
+                      </a:pPr>
+                      <a:r>
+                        <a:rPr lang="en-US" sz="1300" b="1" dirty="0">
+                          <a:solidFill>
+                            <a:srgbClr val="FFFFFF"/>
+                          </a:solidFill>
+                          <a:latin typeface="Calibri" pitchFamily="34" charset="0"/>
+                          <a:ea typeface="Calibri" pitchFamily="34" charset="-122"/>
+                          <a:cs typeface="Calibri" pitchFamily="34" charset="-120"/>
+                        </a:rPr>
+                        <a:t>条件</a:t>
+                      </a:r>
+                      <a:endParaRPr lang="en-US" sz="1300" dirty="0">
+                        <a:latin typeface="Calibri" charset="0"/>
+                        <a:ea typeface="Calibri" charset="0"/>
+                        <a:cs typeface="Calibri" charset="0"/>
+                      </a:endParaRPr>
+                    </a:p>
+                  </a:txBody>
+                  <a:tcPr marL="91440" marR="91440" marT="45720" marB="45720" anchor="ctr">
+                    <a:lnL w="9525" cap="flat" cmpd="sng" algn="ctr">
+                      <a:solidFill>
+                        <a:srgbClr val="E3E1DB"/>
+                      </a:solidFill>
+                      <a:prstDash val="solid"/>
+                      <a:round/>
+                      <a:headEnd type="none" w="med" len="med"/>
+                      <a:tailEnd type="none" w="med" len="med"/>
+                    </a:lnL>
+                    <a:lnR w="9525" cap="flat" cmpd="sng" algn="ctr">
+                      <a:solidFill>
+                        <a:srgbClr val="E3E1DB"/>
+                      </a:solidFill>
+                      <a:prstDash val="solid"/>
+                      <a:round/>
+                      <a:headEnd type="none" w="med" len="med"/>
+                      <a:tailEnd type="none" w="med" len="med"/>
+                    </a:lnR>
+                    <a:lnT w="9525" cap="flat" cmpd="sng" algn="ctr">
+                      <a:solidFill>
+                        <a:srgbClr val="E3E1DB"/>
+                      </a:solidFill>
+                      <a:prstDash val="solid"/>
+                      <a:round/>
+                      <a:headEnd type="none" w="med" len="med"/>
+                      <a:tailEnd type="none" w="med" len="med"/>
+                    </a:lnT>
+                    <a:lnB w="9525" cap="flat" cmpd="sng" algn="ctr">
+                      <a:solidFill>
+                        <a:srgbClr val="E3E1DB"/>
+                      </a:solidFill>
+                      <a:prstDash val="solid"/>
+                      <a:round/>
+                      <a:headEnd type="none" w="med" len="med"/>
+                      <a:tailEnd type="none" w="med" len="med"/>
+                    </a:lnB>
+                    <a:solidFill>
+                      <a:srgbClr val="21295C"/>
+                    </a:solidFill>
+                  </a:tcPr>
+                </a:tc>
+                <a:tc>
+                  <a:txBody>
+                    <a:bodyPr/>
+                    <a:lstStyle/>
+                    <a:p>
+                      <a:pPr indent="0" marL="0">
+                        <a:buNone/>
+                      </a:pPr>
+                      <a:r>
+                        <a:rPr lang="en-US" sz="1300" b="1" dirty="0">
+                          <a:solidFill>
+                            <a:srgbClr val="FFFFFF"/>
+                          </a:solidFill>
+                          <a:latin typeface="Calibri" pitchFamily="34" charset="0"/>
+                          <a:ea typeface="Calibri" pitchFamily="34" charset="-122"/>
+                          <a:cs typeface="Calibri" pitchFamily="34" charset="-120"/>
+                        </a:rPr>
+                        <a:t>平均血糖(8:00-11:30)</a:t>
+                      </a:r>
+                      <a:endParaRPr lang="en-US" sz="1300" dirty="0">
+                        <a:latin typeface="Calibri" charset="0"/>
+                        <a:ea typeface="Calibri" charset="0"/>
+                        <a:cs typeface="Calibri" charset="0"/>
+                      </a:endParaRPr>
+                    </a:p>
+                  </a:txBody>
+                  <a:tcPr marL="91440" marR="91440" marT="45720" marB="45720" anchor="ctr">
+                    <a:lnL w="9525" cap="flat" cmpd="sng" algn="ctr">
+                      <a:solidFill>
+                        <a:srgbClr val="E3E1DB"/>
+                      </a:solidFill>
+                      <a:prstDash val="solid"/>
+                      <a:round/>
+                      <a:headEnd type="none" w="med" len="med"/>
+                      <a:tailEnd type="none" w="med" len="med"/>
+                    </a:lnL>
+                    <a:lnR w="9525" cap="flat" cmpd="sng" algn="ctr">
+                      <a:solidFill>
+                        <a:srgbClr val="E3E1DB"/>
+                      </a:solidFill>
+                      <a:prstDash val="solid"/>
+                      <a:round/>
+                      <a:headEnd type="none" w="med" len="med"/>
+                      <a:tailEnd type="none" w="med" len="med"/>
+                    </a:lnR>
+                    <a:lnT w="9525" cap="flat" cmpd="sng" algn="ctr">
+                      <a:solidFill>
+                        <a:srgbClr val="E3E1DB"/>
+                      </a:solidFill>
+                      <a:prstDash val="solid"/>
+                      <a:round/>
+                      <a:headEnd type="none" w="med" len="med"/>
+                      <a:tailEnd type="none" w="med" len="med"/>
+                    </a:lnT>
+                    <a:lnB w="9525" cap="flat" cmpd="sng" algn="ctr">
+                      <a:solidFill>
+                        <a:srgbClr val="E3E1DB"/>
+                      </a:solidFill>
+                      <a:prstDash val="solid"/>
+                      <a:round/>
+                      <a:headEnd type="none" w="med" len="med"/>
+                      <a:tailEnd type="none" w="med" len="med"/>
+                    </a:lnB>
+                    <a:solidFill>
+                      <a:srgbClr val="21295C"/>
+                    </a:solidFill>
+                  </a:tcPr>
+                </a:tc>
+                <a:tc>
+                  <a:txBody>
+                    <a:bodyPr/>
+                    <a:lstStyle/>
+                    <a:p>
+                      <a:pPr indent="0" marL="0">
+                        <a:buNone/>
+                      </a:pPr>
+                      <a:r>
+                        <a:rPr lang="en-US" sz="1300" b="1" dirty="0">
+                          <a:solidFill>
+                            <a:srgbClr val="FFFFFF"/>
+                          </a:solidFill>
+                          <a:latin typeface="Calibri" pitchFamily="34" charset="0"/>
+                          <a:ea typeface="Calibri" pitchFamily="34" charset="-122"/>
+                          <a:cs typeface="Calibri" pitchFamily="34" charset="-120"/>
+                        </a:rPr>
+                        <a:t>CV</a:t>
+                      </a:r>
+                      <a:endParaRPr lang="en-US" sz="1300" dirty="0">
+                        <a:latin typeface="Calibri" charset="0"/>
+                        <a:ea typeface="Calibri" charset="0"/>
+                        <a:cs typeface="Calibri" charset="0"/>
+                      </a:endParaRPr>
+                    </a:p>
+                  </a:txBody>
+                  <a:tcPr marL="91440" marR="91440" marT="45720" marB="45720" anchor="ctr">
+                    <a:lnL w="9525" cap="flat" cmpd="sng" algn="ctr">
+                      <a:solidFill>
+                        <a:srgbClr val="E3E1DB"/>
+                      </a:solidFill>
+                      <a:prstDash val="solid"/>
+                      <a:round/>
+                      <a:headEnd type="none" w="med" len="med"/>
+                      <a:tailEnd type="none" w="med" len="med"/>
+                    </a:lnL>
+                    <a:lnR w="9525" cap="flat" cmpd="sng" algn="ctr">
+                      <a:solidFill>
+                        <a:srgbClr val="E3E1DB"/>
+                      </a:solidFill>
+                      <a:prstDash val="solid"/>
+                      <a:round/>
+                      <a:headEnd type="none" w="med" len="med"/>
+                      <a:tailEnd type="none" w="med" len="med"/>
+                    </a:lnR>
+                    <a:lnT w="9525" cap="flat" cmpd="sng" algn="ctr">
+                      <a:solidFill>
+                        <a:srgbClr val="E3E1DB"/>
+                      </a:solidFill>
+                      <a:prstDash val="solid"/>
+                      <a:round/>
+                      <a:headEnd type="none" w="med" len="med"/>
+                      <a:tailEnd type="none" w="med" len="med"/>
+                    </a:lnT>
+                    <a:lnB w="9525" cap="flat" cmpd="sng" algn="ctr">
+                      <a:solidFill>
+                        <a:srgbClr val="E3E1DB"/>
+                      </a:solidFill>
+                      <a:prstDash val="solid"/>
+                      <a:round/>
+                      <a:headEnd type="none" w="med" len="med"/>
+                      <a:tailEnd type="none" w="med" len="med"/>
+                    </a:lnB>
+                    <a:solidFill>
+                      <a:srgbClr val="21295C"/>
+                    </a:solidFill>
+                  </a:tcPr>
+                </a:tc>
+                <a:tc>
+                  <a:txBody>
+                    <a:bodyPr/>
+                    <a:lstStyle/>
+                    <a:p>
+                      <a:pPr indent="0" marL="0">
+                        <a:buNone/>
+                      </a:pPr>
+                      <a:r>
+                        <a:rPr lang="en-US" sz="1300" b="1" dirty="0">
+                          <a:solidFill>
+                            <a:srgbClr val="FFFFFF"/>
+                          </a:solidFill>
+                          <a:latin typeface="Calibri" pitchFamily="34" charset="0"/>
+                          <a:ea typeface="Calibri" pitchFamily="34" charset="-122"/>
+                          <a:cs typeface="Calibri" pitchFamily="34" charset="-120"/>
+                        </a:rPr>
+                        <a:t>Δピーク</a:t>
+                      </a:r>
+                      <a:endParaRPr lang="en-US" sz="1300" dirty="0">
+                        <a:latin typeface="Calibri" charset="0"/>
+                        <a:ea typeface="Calibri" charset="0"/>
+                        <a:cs typeface="Calibri" charset="0"/>
+                      </a:endParaRPr>
+                    </a:p>
+                  </a:txBody>
+                  <a:tcPr marL="91440" marR="91440" marT="45720" marB="45720" anchor="ctr">
+                    <a:lnL w="9525" cap="flat" cmpd="sng" algn="ctr">
+                      <a:solidFill>
+                        <a:srgbClr val="E3E1DB"/>
+                      </a:solidFill>
+                      <a:prstDash val="solid"/>
+                      <a:round/>
+                      <a:headEnd type="none" w="med" len="med"/>
+                      <a:tailEnd type="none" w="med" len="med"/>
+                    </a:lnL>
+                    <a:lnR w="9525" cap="flat" cmpd="sng" algn="ctr">
+                      <a:solidFill>
+                        <a:srgbClr val="E3E1DB"/>
+                      </a:solidFill>
+                      <a:prstDash val="solid"/>
+                      <a:round/>
+                      <a:headEnd type="none" w="med" len="med"/>
+                      <a:tailEnd type="none" w="med" len="med"/>
+                    </a:lnR>
+                    <a:lnT w="9525" cap="flat" cmpd="sng" algn="ctr">
+                      <a:solidFill>
+                        <a:srgbClr val="E3E1DB"/>
+                      </a:solidFill>
+                      <a:prstDash val="solid"/>
+                      <a:round/>
+                      <a:headEnd type="none" w="med" len="med"/>
+                      <a:tailEnd type="none" w="med" len="med"/>
+                    </a:lnT>
+                    <a:lnB w="9525" cap="flat" cmpd="sng" algn="ctr">
+                      <a:solidFill>
+                        <a:srgbClr val="E3E1DB"/>
+                      </a:solidFill>
+                      <a:prstDash val="solid"/>
+                      <a:round/>
+                      <a:headEnd type="none" w="med" len="med"/>
+                      <a:tailEnd type="none" w="med" len="med"/>
+                    </a:lnB>
+                    <a:solidFill>
+                      <a:srgbClr val="21295C"/>
+                    </a:solidFill>
+                  </a:tcPr>
+                </a:tc>
+              </a:tr>
+              <a:tr h="365760">
+                <a:tc>
+                  <a:txBody>
+                    <a:bodyPr/>
+                    <a:lstStyle/>
+                    <a:p>
+                      <a:pPr indent="0" marL="0">
+                        <a:buNone/>
+                      </a:pPr>
+                      <a:r>
+                        <a:rPr lang="en-US" sz="1300" b="1" dirty="0">
+                          <a:solidFill>
+                            <a:srgbClr val="21295C"/>
+                          </a:solidFill>
+                          <a:latin typeface="Calibri" pitchFamily="34" charset="0"/>
+                          <a:ea typeface="Calibri" pitchFamily="34" charset="-122"/>
+                          <a:cs typeface="Calibri" pitchFamily="34" charset="-120"/>
+                        </a:rPr>
+                        <a:t>固形（分割・全て固形）</a:t>
+                      </a:r>
+                      <a:endParaRPr lang="en-US" sz="1300" dirty="0">
+                        <a:latin typeface="Calibri" charset="0"/>
+                        <a:ea typeface="Calibri" charset="0"/>
+                        <a:cs typeface="Calibri" charset="0"/>
+                      </a:endParaRPr>
+                    </a:p>
+                  </a:txBody>
+                  <a:tcPr marL="91440" marR="91440" marT="45720" marB="45720" anchor="ctr">
+                    <a:lnL w="9525" cap="flat" cmpd="sng" algn="ctr">
+                      <a:solidFill>
+                        <a:srgbClr val="E3E1DB"/>
+                      </a:solidFill>
+                      <a:prstDash val="solid"/>
+                      <a:round/>
+                      <a:headEnd type="none" w="med" len="med"/>
+                      <a:tailEnd type="none" w="med" len="med"/>
+                    </a:lnL>
+                    <a:lnR w="9525" cap="flat" cmpd="sng" algn="ctr">
+                      <a:solidFill>
+                        <a:srgbClr val="E3E1DB"/>
+                      </a:solidFill>
+                      <a:prstDash val="solid"/>
+                      <a:round/>
+                      <a:headEnd type="none" w="med" len="med"/>
+                      <a:tailEnd type="none" w="med" len="med"/>
+                    </a:lnR>
+                    <a:lnT w="9525" cap="flat" cmpd="sng" algn="ctr">
+                      <a:solidFill>
+                        <a:srgbClr val="E3E1DB"/>
+                      </a:solidFill>
+                      <a:prstDash val="solid"/>
+                      <a:round/>
+                      <a:headEnd type="none" w="med" len="med"/>
+                      <a:tailEnd type="none" w="med" len="med"/>
+                    </a:lnT>
+                    <a:lnB w="9525" cap="flat" cmpd="sng" algn="ctr">
+                      <a:solidFill>
+                        <a:srgbClr val="E3E1DB"/>
+                      </a:solidFill>
+                      <a:prstDash val="solid"/>
+                      <a:round/>
+                      <a:headEnd type="none" w="med" len="med"/>
+                      <a:tailEnd type="none" w="med" len="med"/>
+                    </a:lnB>
+                    <a:solidFill>
+                      <a:srgbClr val="FFFFFF"/>
+                    </a:solidFill>
+                  </a:tcPr>
+                </a:tc>
+                <a:tc>
+                  <a:txBody>
+                    <a:bodyPr/>
+                    <a:lstStyle/>
+                    <a:p>
+                      <a:pPr indent="0" marL="0">
+                        <a:buNone/>
+                      </a:pPr>
+                      <a:r>
+                        <a:rPr lang="en-US" sz="1300" dirty="0">
+                          <a:solidFill>
+                            <a:srgbClr val="1A1A1A"/>
+                          </a:solidFill>
+                          <a:latin typeface="Calibri" pitchFamily="34" charset="0"/>
+                          <a:ea typeface="Calibri" pitchFamily="34" charset="-122"/>
+                          <a:cs typeface="Calibri" pitchFamily="34" charset="-120"/>
+                        </a:rPr>
+                        <a:t>119.9</a:t>
+                      </a:r>
+                      <a:endParaRPr lang="en-US" sz="1300" dirty="0">
+                        <a:latin typeface="Calibri" charset="0"/>
+                        <a:ea typeface="Calibri" charset="0"/>
+                        <a:cs typeface="Calibri" charset="0"/>
+                      </a:endParaRPr>
+                    </a:p>
+                  </a:txBody>
+                  <a:tcPr marL="91440" marR="91440" marT="45720" marB="45720" anchor="ctr">
+                    <a:lnL w="9525" cap="flat" cmpd="sng" algn="ctr">
+                      <a:solidFill>
+                        <a:srgbClr val="E3E1DB"/>
+                      </a:solidFill>
+                      <a:prstDash val="solid"/>
+                      <a:round/>
+                      <a:headEnd type="none" w="med" len="med"/>
+                      <a:tailEnd type="none" w="med" len="med"/>
+                    </a:lnL>
+                    <a:lnR w="9525" cap="flat" cmpd="sng" algn="ctr">
+                      <a:solidFill>
+                        <a:srgbClr val="E3E1DB"/>
+                      </a:solidFill>
+                      <a:prstDash val="solid"/>
+                      <a:round/>
+                      <a:headEnd type="none" w="med" len="med"/>
+                      <a:tailEnd type="none" w="med" len="med"/>
+                    </a:lnR>
+                    <a:lnT w="9525" cap="flat" cmpd="sng" algn="ctr">
+                      <a:solidFill>
+                        <a:srgbClr val="E3E1DB"/>
+                      </a:solidFill>
+                      <a:prstDash val="solid"/>
+                      <a:round/>
+                      <a:headEnd type="none" w="med" len="med"/>
+                      <a:tailEnd type="none" w="med" len="med"/>
+                    </a:lnT>
+                    <a:lnB w="9525" cap="flat" cmpd="sng" algn="ctr">
+                      <a:solidFill>
+                        <a:srgbClr val="E3E1DB"/>
+                      </a:solidFill>
+                      <a:prstDash val="solid"/>
+                      <a:round/>
+                      <a:headEnd type="none" w="med" len="med"/>
+                      <a:tailEnd type="none" w="med" len="med"/>
+                    </a:lnB>
+                    <a:solidFill>
+                      <a:srgbClr val="FFFFFF"/>
+                    </a:solidFill>
+                  </a:tcPr>
+                </a:tc>
+                <a:tc>
+                  <a:txBody>
+                    <a:bodyPr/>
+                    <a:lstStyle/>
+                    <a:p>
+                      <a:pPr indent="0" marL="0">
+                        <a:buNone/>
+                      </a:pPr>
+                      <a:r>
+                        <a:rPr lang="en-US" sz="1300" dirty="0">
+                          <a:solidFill>
+                            <a:srgbClr val="1A1A1A"/>
+                          </a:solidFill>
+                          <a:latin typeface="Calibri" pitchFamily="34" charset="0"/>
+                          <a:ea typeface="Calibri" pitchFamily="34" charset="-122"/>
+                          <a:cs typeface="Calibri" pitchFamily="34" charset="-120"/>
+                        </a:rPr>
+                        <a:t>12.0%</a:t>
+                      </a:r>
+                      <a:endParaRPr lang="en-US" sz="1300" dirty="0">
+                        <a:latin typeface="Calibri" charset="0"/>
+                        <a:ea typeface="Calibri" charset="0"/>
+                        <a:cs typeface="Calibri" charset="0"/>
+                      </a:endParaRPr>
+                    </a:p>
+                  </a:txBody>
+                  <a:tcPr marL="91440" marR="91440" marT="45720" marB="45720" anchor="ctr">
+                    <a:lnL w="9525" cap="flat" cmpd="sng" algn="ctr">
+                      <a:solidFill>
+                        <a:srgbClr val="E3E1DB"/>
+                      </a:solidFill>
+                      <a:prstDash val="solid"/>
+                      <a:round/>
+                      <a:headEnd type="none" w="med" len="med"/>
+                      <a:tailEnd type="none" w="med" len="med"/>
+                    </a:lnL>
+                    <a:lnR w="9525" cap="flat" cmpd="sng" algn="ctr">
+                      <a:solidFill>
+                        <a:srgbClr val="E3E1DB"/>
+                      </a:solidFill>
+                      <a:prstDash val="solid"/>
+                      <a:round/>
+                      <a:headEnd type="none" w="med" len="med"/>
+                      <a:tailEnd type="none" w="med" len="med"/>
+                    </a:lnR>
+                    <a:lnT w="9525" cap="flat" cmpd="sng" algn="ctr">
+                      <a:solidFill>
+                        <a:srgbClr val="E3E1DB"/>
+                      </a:solidFill>
+                      <a:prstDash val="solid"/>
+                      <a:round/>
+                      <a:headEnd type="none" w="med" len="med"/>
+                      <a:tailEnd type="none" w="med" len="med"/>
+                    </a:lnT>
+                    <a:lnB w="9525" cap="flat" cmpd="sng" algn="ctr">
+                      <a:solidFill>
+                        <a:srgbClr val="E3E1DB"/>
+                      </a:solidFill>
+                      <a:prstDash val="solid"/>
+                      <a:round/>
+                      <a:headEnd type="none" w="med" len="med"/>
+                      <a:tailEnd type="none" w="med" len="med"/>
+                    </a:lnB>
+                    <a:solidFill>
+                      <a:srgbClr val="FFFFFF"/>
+                    </a:solidFill>
+                  </a:tcPr>
+                </a:tc>
+                <a:tc>
+                  <a:txBody>
+                    <a:bodyPr/>
+                    <a:lstStyle/>
+                    <a:p>
+                      <a:pPr indent="0" marL="0">
+                        <a:buNone/>
+                      </a:pPr>
+                      <a:r>
+                        <a:rPr lang="en-US" sz="1300" dirty="0">
+                          <a:solidFill>
+                            <a:srgbClr val="1A1A1A"/>
+                          </a:solidFill>
+                          <a:latin typeface="Calibri" pitchFamily="34" charset="0"/>
+                          <a:ea typeface="Calibri" pitchFamily="34" charset="-122"/>
+                          <a:cs typeface="Calibri" pitchFamily="34" charset="-120"/>
+                        </a:rPr>
+                        <a:t>53.7</a:t>
+                      </a:r>
+                      <a:endParaRPr lang="en-US" sz="1300" dirty="0">
+                        <a:latin typeface="Calibri" charset="0"/>
+                        <a:ea typeface="Calibri" charset="0"/>
+                        <a:cs typeface="Calibri" charset="0"/>
+                      </a:endParaRPr>
+                    </a:p>
+                  </a:txBody>
+                  <a:tcPr marL="91440" marR="91440" marT="45720" marB="45720" anchor="ctr">
+                    <a:lnL w="9525" cap="flat" cmpd="sng" algn="ctr">
+                      <a:solidFill>
+                        <a:srgbClr val="E3E1DB"/>
+                      </a:solidFill>
+                      <a:prstDash val="solid"/>
+                      <a:round/>
+                      <a:headEnd type="none" w="med" len="med"/>
+                      <a:tailEnd type="none" w="med" len="med"/>
+                    </a:lnL>
+                    <a:lnR w="9525" cap="flat" cmpd="sng" algn="ctr">
+                      <a:solidFill>
+                        <a:srgbClr val="E3E1DB"/>
+                      </a:solidFill>
+                      <a:prstDash val="solid"/>
+                      <a:round/>
+                      <a:headEnd type="none" w="med" len="med"/>
+                      <a:tailEnd type="none" w="med" len="med"/>
+                    </a:lnR>
+                    <a:lnT w="9525" cap="flat" cmpd="sng" algn="ctr">
+                      <a:solidFill>
+                        <a:srgbClr val="E3E1DB"/>
+                      </a:solidFill>
+                      <a:prstDash val="solid"/>
+                      <a:round/>
+                      <a:headEnd type="none" w="med" len="med"/>
+                      <a:tailEnd type="none" w="med" len="med"/>
+                    </a:lnT>
+                    <a:lnB w="9525" cap="flat" cmpd="sng" algn="ctr">
+                      <a:solidFill>
+                        <a:srgbClr val="E3E1DB"/>
+                      </a:solidFill>
+                      <a:prstDash val="solid"/>
+                      <a:round/>
+                      <a:headEnd type="none" w="med" len="med"/>
+                      <a:tailEnd type="none" w="med" len="med"/>
+                    </a:lnB>
+                    <a:solidFill>
+                      <a:srgbClr val="FFFFFF"/>
+                    </a:solidFill>
+                  </a:tcPr>
+                </a:tc>
+              </a:tr>
+              <a:tr h="365760">
+                <a:tc>
+                  <a:txBody>
+                    <a:bodyPr/>
+                    <a:lstStyle/>
+                    <a:p>
+                      <a:pPr indent="0" marL="0">
+                        <a:buNone/>
+                      </a:pPr>
+                      <a:r>
+                        <a:rPr lang="en-US" sz="1300" b="1" dirty="0">
+                          <a:solidFill>
+                            <a:srgbClr val="21295C"/>
+                          </a:solidFill>
+                          <a:latin typeface="Calibri" pitchFamily="34" charset="0"/>
+                          <a:ea typeface="Calibri" pitchFamily="34" charset="-122"/>
+                          <a:cs typeface="Calibri" pitchFamily="34" charset="-120"/>
+                        </a:rPr>
+                        <a:t>スムージー（分割）</a:t>
+                      </a:r>
+                      <a:endParaRPr lang="en-US" sz="1300" dirty="0">
+                        <a:latin typeface="Calibri" charset="0"/>
+                        <a:ea typeface="Calibri" charset="0"/>
+                        <a:cs typeface="Calibri" charset="0"/>
+                      </a:endParaRPr>
+                    </a:p>
+                  </a:txBody>
+                  <a:tcPr marL="91440" marR="91440" marT="45720" marB="45720" anchor="ctr">
+                    <a:lnL w="9525" cap="flat" cmpd="sng" algn="ctr">
+                      <a:solidFill>
+                        <a:srgbClr val="E3E1DB"/>
+                      </a:solidFill>
+                      <a:prstDash val="solid"/>
+                      <a:round/>
+                      <a:headEnd type="none" w="med" len="med"/>
+                      <a:tailEnd type="none" w="med" len="med"/>
+                    </a:lnL>
+                    <a:lnR w="9525" cap="flat" cmpd="sng" algn="ctr">
+                      <a:solidFill>
+                        <a:srgbClr val="E3E1DB"/>
+                      </a:solidFill>
+                      <a:prstDash val="solid"/>
+                      <a:round/>
+                      <a:headEnd type="none" w="med" len="med"/>
+                      <a:tailEnd type="none" w="med" len="med"/>
+                    </a:lnR>
+                    <a:lnT w="9525" cap="flat" cmpd="sng" algn="ctr">
+                      <a:solidFill>
+                        <a:srgbClr val="E3E1DB"/>
+                      </a:solidFill>
+                      <a:prstDash val="solid"/>
+                      <a:round/>
+                      <a:headEnd type="none" w="med" len="med"/>
+                      <a:tailEnd type="none" w="med" len="med"/>
+                    </a:lnT>
+                    <a:lnB w="9525" cap="flat" cmpd="sng" algn="ctr">
+                      <a:solidFill>
+                        <a:srgbClr val="E3E1DB"/>
+                      </a:solidFill>
+                      <a:prstDash val="solid"/>
+                      <a:round/>
+                      <a:headEnd type="none" w="med" len="med"/>
+                      <a:tailEnd type="none" w="med" len="med"/>
+                    </a:lnB>
+                    <a:solidFill>
+                      <a:srgbClr val="F4F7F9"/>
+                    </a:solidFill>
+                  </a:tcPr>
+                </a:tc>
+                <a:tc>
+                  <a:txBody>
+                    <a:bodyPr/>
+                    <a:lstStyle/>
+                    <a:p>
+                      <a:pPr indent="0" marL="0">
+                        <a:buNone/>
+                      </a:pPr>
+                      <a:r>
+                        <a:rPr lang="en-US" sz="1300" dirty="0">
+                          <a:solidFill>
+                            <a:srgbClr val="1A1A1A"/>
+                          </a:solidFill>
+                          <a:latin typeface="Calibri" pitchFamily="34" charset="0"/>
+                          <a:ea typeface="Calibri" pitchFamily="34" charset="-122"/>
+                          <a:cs typeface="Calibri" pitchFamily="34" charset="-120"/>
+                        </a:rPr>
+                        <a:t>187.0</a:t>
+                      </a:r>
+                      <a:endParaRPr lang="en-US" sz="1300" dirty="0">
+                        <a:latin typeface="Calibri" charset="0"/>
+                        <a:ea typeface="Calibri" charset="0"/>
+                        <a:cs typeface="Calibri" charset="0"/>
+                      </a:endParaRPr>
+                    </a:p>
+                  </a:txBody>
+                  <a:tcPr marL="91440" marR="91440" marT="45720" marB="45720" anchor="ctr">
+                    <a:lnL w="9525" cap="flat" cmpd="sng" algn="ctr">
+                      <a:solidFill>
+                        <a:srgbClr val="E3E1DB"/>
+                      </a:solidFill>
+                      <a:prstDash val="solid"/>
+                      <a:round/>
+                      <a:headEnd type="none" w="med" len="med"/>
+                      <a:tailEnd type="none" w="med" len="med"/>
+                    </a:lnL>
+                    <a:lnR w="9525" cap="flat" cmpd="sng" algn="ctr">
+                      <a:solidFill>
+                        <a:srgbClr val="E3E1DB"/>
+                      </a:solidFill>
+                      <a:prstDash val="solid"/>
+                      <a:round/>
+                      <a:headEnd type="none" w="med" len="med"/>
+                      <a:tailEnd type="none" w="med" len="med"/>
+                    </a:lnR>
+                    <a:lnT w="9525" cap="flat" cmpd="sng" algn="ctr">
+                      <a:solidFill>
+                        <a:srgbClr val="E3E1DB"/>
+                      </a:solidFill>
+                      <a:prstDash val="solid"/>
+                      <a:round/>
+                      <a:headEnd type="none" w="med" len="med"/>
+                      <a:tailEnd type="none" w="med" len="med"/>
+                    </a:lnT>
+                    <a:lnB w="9525" cap="flat" cmpd="sng" algn="ctr">
+                      <a:solidFill>
+                        <a:srgbClr val="E3E1DB"/>
+                      </a:solidFill>
+                      <a:prstDash val="solid"/>
+                      <a:round/>
+                      <a:headEnd type="none" w="med" len="med"/>
+                      <a:tailEnd type="none" w="med" len="med"/>
+                    </a:lnB>
+                    <a:solidFill>
+                      <a:srgbClr val="F4F7F9"/>
+                    </a:solidFill>
+                  </a:tcPr>
+                </a:tc>
+                <a:tc>
+                  <a:txBody>
+                    <a:bodyPr/>
+                    <a:lstStyle/>
+                    <a:p>
+                      <a:pPr indent="0" marL="0">
+                        <a:buNone/>
+                      </a:pPr>
+                      <a:r>
+                        <a:rPr lang="en-US" sz="1300" dirty="0">
+                          <a:solidFill>
+                            <a:srgbClr val="1A1A1A"/>
+                          </a:solidFill>
+                          <a:latin typeface="Calibri" pitchFamily="34" charset="0"/>
+                          <a:ea typeface="Calibri" pitchFamily="34" charset="-122"/>
+                          <a:cs typeface="Calibri" pitchFamily="34" charset="-120"/>
+                        </a:rPr>
+                        <a:t>16.5%</a:t>
+                      </a:r>
+                      <a:endParaRPr lang="en-US" sz="1300" dirty="0">
+                        <a:latin typeface="Calibri" charset="0"/>
+                        <a:ea typeface="Calibri" charset="0"/>
+                        <a:cs typeface="Calibri" charset="0"/>
+                      </a:endParaRPr>
+                    </a:p>
+                  </a:txBody>
+                  <a:tcPr marL="91440" marR="91440" marT="45720" marB="45720" anchor="ctr">
+                    <a:lnL w="9525" cap="flat" cmpd="sng" algn="ctr">
+                      <a:solidFill>
+                        <a:srgbClr val="E3E1DB"/>
+                      </a:solidFill>
+                      <a:prstDash val="solid"/>
+                      <a:round/>
+                      <a:headEnd type="none" w="med" len="med"/>
+                      <a:tailEnd type="none" w="med" len="med"/>
+                    </a:lnL>
+                    <a:lnR w="9525" cap="flat" cmpd="sng" algn="ctr">
+                      <a:solidFill>
+                        <a:srgbClr val="E3E1DB"/>
+                      </a:solidFill>
+                      <a:prstDash val="solid"/>
+                      <a:round/>
+                      <a:headEnd type="none" w="med" len="med"/>
+                      <a:tailEnd type="none" w="med" len="med"/>
+                    </a:lnR>
+                    <a:lnT w="9525" cap="flat" cmpd="sng" algn="ctr">
+                      <a:solidFill>
+                        <a:srgbClr val="E3E1DB"/>
+                      </a:solidFill>
+                      <a:prstDash val="solid"/>
+                      <a:round/>
+                      <a:headEnd type="none" w="med" len="med"/>
+                      <a:tailEnd type="none" w="med" len="med"/>
+                    </a:lnT>
+                    <a:lnB w="9525" cap="flat" cmpd="sng" algn="ctr">
+                      <a:solidFill>
+                        <a:srgbClr val="E3E1DB"/>
+                      </a:solidFill>
+                      <a:prstDash val="solid"/>
+                      <a:round/>
+                      <a:headEnd type="none" w="med" len="med"/>
+                      <a:tailEnd type="none" w="med" len="med"/>
+                    </a:lnB>
+                    <a:solidFill>
+                      <a:srgbClr val="F4F7F9"/>
+                    </a:solidFill>
+                  </a:tcPr>
+                </a:tc>
+                <a:tc>
+                  <a:txBody>
+                    <a:bodyPr/>
+                    <a:lstStyle/>
+                    <a:p>
+                      <a:pPr indent="0" marL="0">
+                        <a:buNone/>
+                      </a:pPr>
+                      <a:r>
+                        <a:rPr lang="en-US" sz="1300" dirty="0">
+                          <a:solidFill>
+                            <a:srgbClr val="1A1A1A"/>
+                          </a:solidFill>
+                          <a:latin typeface="Calibri" pitchFamily="34" charset="0"/>
+                          <a:ea typeface="Calibri" pitchFamily="34" charset="-122"/>
+                          <a:cs typeface="Calibri" pitchFamily="34" charset="-120"/>
+                        </a:rPr>
+                        <a:t>80.3</a:t>
+                      </a:r>
+                      <a:endParaRPr lang="en-US" sz="1300" dirty="0">
+                        <a:latin typeface="Calibri" charset="0"/>
+                        <a:ea typeface="Calibri" charset="0"/>
+                        <a:cs typeface="Calibri" charset="0"/>
+                      </a:endParaRPr>
+                    </a:p>
+                  </a:txBody>
+                  <a:tcPr marL="91440" marR="91440" marT="45720" marB="45720" anchor="ctr">
+                    <a:lnL w="9525" cap="flat" cmpd="sng" algn="ctr">
+                      <a:solidFill>
+                        <a:srgbClr val="E3E1DB"/>
+                      </a:solidFill>
+                      <a:prstDash val="solid"/>
+                      <a:round/>
+                      <a:headEnd type="none" w="med" len="med"/>
+                      <a:tailEnd type="none" w="med" len="med"/>
+                    </a:lnL>
+                    <a:lnR w="9525" cap="flat" cmpd="sng" algn="ctr">
+                      <a:solidFill>
+                        <a:srgbClr val="E3E1DB"/>
+                      </a:solidFill>
+                      <a:prstDash val="solid"/>
+                      <a:round/>
+                      <a:headEnd type="none" w="med" len="med"/>
+                      <a:tailEnd type="none" w="med" len="med"/>
+                    </a:lnR>
+                    <a:lnT w="9525" cap="flat" cmpd="sng" algn="ctr">
+                      <a:solidFill>
+                        <a:srgbClr val="E3E1DB"/>
+                      </a:solidFill>
+                      <a:prstDash val="solid"/>
+                      <a:round/>
+                      <a:headEnd type="none" w="med" len="med"/>
+                      <a:tailEnd type="none" w="med" len="med"/>
+                    </a:lnT>
+                    <a:lnB w="9525" cap="flat" cmpd="sng" algn="ctr">
+                      <a:solidFill>
+                        <a:srgbClr val="E3E1DB"/>
+                      </a:solidFill>
+                      <a:prstDash val="solid"/>
+                      <a:round/>
+                      <a:headEnd type="none" w="med" len="med"/>
+                      <a:tailEnd type="none" w="med" len="med"/>
+                    </a:lnB>
+                    <a:solidFill>
+                      <a:srgbClr val="F4F7F9"/>
+                    </a:solidFill>
+                  </a:tcPr>
+                </a:tc>
+              </a:tr>
+              <a:tr h="365760">
+                <a:tc>
+                  <a:txBody>
+                    <a:bodyPr/>
+                    <a:lstStyle/>
+                    <a:p>
+                      <a:pPr indent="0" marL="0">
+                        <a:buNone/>
+                      </a:pPr>
+                      <a:r>
+                        <a:rPr lang="en-US" sz="1300" b="1" dirty="0">
+                          <a:solidFill>
+                            <a:srgbClr val="21295C"/>
+                          </a:solidFill>
+                          <a:latin typeface="Calibri" pitchFamily="34" charset="0"/>
+                          <a:ea typeface="Calibri" pitchFamily="34" charset="-122"/>
+                          <a:cs typeface="Calibri" pitchFamily="34" charset="-120"/>
+                        </a:rPr>
+                        <a:t>おにぎり＋スムージー（同時）</a:t>
+                      </a:r>
+                      <a:endParaRPr lang="en-US" sz="1300" dirty="0">
+                        <a:latin typeface="Calibri" charset="0"/>
+                        <a:ea typeface="Calibri" charset="0"/>
+                        <a:cs typeface="Calibri" charset="0"/>
+                      </a:endParaRPr>
+                    </a:p>
+                  </a:txBody>
+                  <a:tcPr marL="91440" marR="91440" marT="45720" marB="45720" anchor="ctr">
+                    <a:lnL w="9525" cap="flat" cmpd="sng" algn="ctr">
+                      <a:solidFill>
+                        <a:srgbClr val="E3E1DB"/>
+                      </a:solidFill>
+                      <a:prstDash val="solid"/>
+                      <a:round/>
+                      <a:headEnd type="none" w="med" len="med"/>
+                      <a:tailEnd type="none" w="med" len="med"/>
+                    </a:lnL>
+                    <a:lnR w="9525" cap="flat" cmpd="sng" algn="ctr">
+                      <a:solidFill>
+                        <a:srgbClr val="E3E1DB"/>
+                      </a:solidFill>
+                      <a:prstDash val="solid"/>
+                      <a:round/>
+                      <a:headEnd type="none" w="med" len="med"/>
+                      <a:tailEnd type="none" w="med" len="med"/>
+                    </a:lnR>
+                    <a:lnT w="9525" cap="flat" cmpd="sng" algn="ctr">
+                      <a:solidFill>
+                        <a:srgbClr val="E3E1DB"/>
+                      </a:solidFill>
+                      <a:prstDash val="solid"/>
+                      <a:round/>
+                      <a:headEnd type="none" w="med" len="med"/>
+                      <a:tailEnd type="none" w="med" len="med"/>
+                    </a:lnT>
+                    <a:lnB w="9525" cap="flat" cmpd="sng" algn="ctr">
+                      <a:solidFill>
+                        <a:srgbClr val="E3E1DB"/>
+                      </a:solidFill>
+                      <a:prstDash val="solid"/>
+                      <a:round/>
+                      <a:headEnd type="none" w="med" len="med"/>
+                      <a:tailEnd type="none" w="med" len="med"/>
+                    </a:lnB>
+                    <a:solidFill>
+                      <a:srgbClr val="FFFFFF"/>
+                    </a:solidFill>
+                  </a:tcPr>
+                </a:tc>
+                <a:tc>
+                  <a:txBody>
+                    <a:bodyPr/>
+                    <a:lstStyle/>
+                    <a:p>
+                      <a:pPr indent="0" marL="0">
+                        <a:buNone/>
+                      </a:pPr>
+                      <a:r>
+                        <a:rPr lang="en-US" sz="1300" dirty="0">
+                          <a:solidFill>
+                            <a:srgbClr val="1A1A1A"/>
+                          </a:solidFill>
+                          <a:latin typeface="Calibri" pitchFamily="34" charset="0"/>
+                          <a:ea typeface="Calibri" pitchFamily="34" charset="-122"/>
+                          <a:cs typeface="Calibri" pitchFamily="34" charset="-120"/>
+                        </a:rPr>
+                        <a:t>199.8</a:t>
+                      </a:r>
+                      <a:endParaRPr lang="en-US" sz="1300" dirty="0">
+                        <a:latin typeface="Calibri" charset="0"/>
+                        <a:ea typeface="Calibri" charset="0"/>
+                        <a:cs typeface="Calibri" charset="0"/>
+                      </a:endParaRPr>
+                    </a:p>
+                  </a:txBody>
+                  <a:tcPr marL="91440" marR="91440" marT="45720" marB="45720" anchor="ctr">
+                    <a:lnL w="9525" cap="flat" cmpd="sng" algn="ctr">
+                      <a:solidFill>
+                        <a:srgbClr val="E3E1DB"/>
+                      </a:solidFill>
+                      <a:prstDash val="solid"/>
+                      <a:round/>
+                      <a:headEnd type="none" w="med" len="med"/>
+                      <a:tailEnd type="none" w="med" len="med"/>
+                    </a:lnL>
+                    <a:lnR w="9525" cap="flat" cmpd="sng" algn="ctr">
+                      <a:solidFill>
+                        <a:srgbClr val="E3E1DB"/>
+                      </a:solidFill>
+                      <a:prstDash val="solid"/>
+                      <a:round/>
+                      <a:headEnd type="none" w="med" len="med"/>
+                      <a:tailEnd type="none" w="med" len="med"/>
+                    </a:lnR>
+                    <a:lnT w="9525" cap="flat" cmpd="sng" algn="ctr">
+                      <a:solidFill>
+                        <a:srgbClr val="E3E1DB"/>
+                      </a:solidFill>
+                      <a:prstDash val="solid"/>
+                      <a:round/>
+                      <a:headEnd type="none" w="med" len="med"/>
+                      <a:tailEnd type="none" w="med" len="med"/>
+                    </a:lnT>
+                    <a:lnB w="9525" cap="flat" cmpd="sng" algn="ctr">
+                      <a:solidFill>
+                        <a:srgbClr val="E3E1DB"/>
+                      </a:solidFill>
+                      <a:prstDash val="solid"/>
+                      <a:round/>
+                      <a:headEnd type="none" w="med" len="med"/>
+                      <a:tailEnd type="none" w="med" len="med"/>
+                    </a:lnB>
+                    <a:solidFill>
+                      <a:srgbClr val="FFFFFF"/>
+                    </a:solidFill>
+                  </a:tcPr>
+                </a:tc>
+                <a:tc>
+                  <a:txBody>
+                    <a:bodyPr/>
+                    <a:lstStyle/>
+                    <a:p>
+                      <a:pPr indent="0" marL="0">
+                        <a:buNone/>
+                      </a:pPr>
+                      <a:r>
+                        <a:rPr lang="en-US" sz="1300" dirty="0">
+                          <a:solidFill>
+                            <a:srgbClr val="1A1A1A"/>
+                          </a:solidFill>
+                          <a:latin typeface="Calibri" pitchFamily="34" charset="0"/>
+                          <a:ea typeface="Calibri" pitchFamily="34" charset="-122"/>
+                          <a:cs typeface="Calibri" pitchFamily="34" charset="-120"/>
+                        </a:rPr>
+                        <a:t>10.1%</a:t>
+                      </a:r>
+                      <a:endParaRPr lang="en-US" sz="1300" dirty="0">
+                        <a:latin typeface="Calibri" charset="0"/>
+                        <a:ea typeface="Calibri" charset="0"/>
+                        <a:cs typeface="Calibri" charset="0"/>
+                      </a:endParaRPr>
+                    </a:p>
+                  </a:txBody>
+                  <a:tcPr marL="91440" marR="91440" marT="45720" marB="45720" anchor="ctr">
+                    <a:lnL w="9525" cap="flat" cmpd="sng" algn="ctr">
+                      <a:solidFill>
+                        <a:srgbClr val="E3E1DB"/>
+                      </a:solidFill>
+                      <a:prstDash val="solid"/>
+                      <a:round/>
+                      <a:headEnd type="none" w="med" len="med"/>
+                      <a:tailEnd type="none" w="med" len="med"/>
+                    </a:lnL>
+                    <a:lnR w="9525" cap="flat" cmpd="sng" algn="ctr">
+                      <a:solidFill>
+                        <a:srgbClr val="E3E1DB"/>
+                      </a:solidFill>
+                      <a:prstDash val="solid"/>
+                      <a:round/>
+                      <a:headEnd type="none" w="med" len="med"/>
+                      <a:tailEnd type="none" w="med" len="med"/>
+                    </a:lnR>
+                    <a:lnT w="9525" cap="flat" cmpd="sng" algn="ctr">
+                      <a:solidFill>
+                        <a:srgbClr val="E3E1DB"/>
+                      </a:solidFill>
+                      <a:prstDash val="solid"/>
+                      <a:round/>
+                      <a:headEnd type="none" w="med" len="med"/>
+                      <a:tailEnd type="none" w="med" len="med"/>
+                    </a:lnT>
+                    <a:lnB w="9525" cap="flat" cmpd="sng" algn="ctr">
+                      <a:solidFill>
+                        <a:srgbClr val="E3E1DB"/>
+                      </a:solidFill>
+                      <a:prstDash val="solid"/>
+                      <a:round/>
+                      <a:headEnd type="none" w="med" len="med"/>
+                      <a:tailEnd type="none" w="med" len="med"/>
+                    </a:lnB>
+                    <a:solidFill>
+                      <a:srgbClr val="FFFFFF"/>
+                    </a:solidFill>
+                  </a:tcPr>
+                </a:tc>
+                <a:tc>
+                  <a:txBody>
+                    <a:bodyPr/>
+                    <a:lstStyle/>
+                    <a:p>
+                      <a:pPr indent="0" marL="0">
+                        <a:buNone/>
+                      </a:pPr>
+                      <a:r>
+                        <a:rPr lang="en-US" sz="1300" dirty="0">
+                          <a:solidFill>
+                            <a:srgbClr val="1A1A1A"/>
+                          </a:solidFill>
+                          <a:latin typeface="Calibri" pitchFamily="34" charset="0"/>
+                          <a:ea typeface="Calibri" pitchFamily="34" charset="-122"/>
+                          <a:cs typeface="Calibri" pitchFamily="34" charset="-120"/>
+                        </a:rPr>
+                        <a:t>70.7</a:t>
+                      </a:r>
+                      <a:endParaRPr lang="en-US" sz="1300" dirty="0">
+                        <a:latin typeface="Calibri" charset="0"/>
+                        <a:ea typeface="Calibri" charset="0"/>
+                        <a:cs typeface="Calibri" charset="0"/>
+                      </a:endParaRPr>
+                    </a:p>
+                  </a:txBody>
+                  <a:tcPr marL="91440" marR="91440" marT="45720" marB="45720" anchor="ctr">
+                    <a:lnL w="9525" cap="flat" cmpd="sng" algn="ctr">
+                      <a:solidFill>
+                        <a:srgbClr val="E3E1DB"/>
+                      </a:solidFill>
+                      <a:prstDash val="solid"/>
+                      <a:round/>
+                      <a:headEnd type="none" w="med" len="med"/>
+                      <a:tailEnd type="none" w="med" len="med"/>
+                    </a:lnL>
+                    <a:lnR w="9525" cap="flat" cmpd="sng" algn="ctr">
+                      <a:solidFill>
+                        <a:srgbClr val="E3E1DB"/>
+                      </a:solidFill>
+                      <a:prstDash val="solid"/>
+                      <a:round/>
+                      <a:headEnd type="none" w="med" len="med"/>
+                      <a:tailEnd type="none" w="med" len="med"/>
+                    </a:lnR>
+                    <a:lnT w="9525" cap="flat" cmpd="sng" algn="ctr">
+                      <a:solidFill>
+                        <a:srgbClr val="E3E1DB"/>
+                      </a:solidFill>
+                      <a:prstDash val="solid"/>
+                      <a:round/>
+                      <a:headEnd type="none" w="med" len="med"/>
+                      <a:tailEnd type="none" w="med" len="med"/>
+                    </a:lnT>
+                    <a:lnB w="9525" cap="flat" cmpd="sng" algn="ctr">
+                      <a:solidFill>
+                        <a:srgbClr val="E3E1DB"/>
+                      </a:solidFill>
+                      <a:prstDash val="solid"/>
+                      <a:round/>
+                      <a:headEnd type="none" w="med" len="med"/>
+                      <a:tailEnd type="none" w="med" len="med"/>
+                    </a:lnB>
+                    <a:solidFill>
+                      <a:srgbClr val="FFFFFF"/>
+                    </a:solidFill>
+                  </a:tcPr>
+                </a:tc>
+              </a:tr>
+              <a:tr h="365760">
+                <a:tc>
+                  <a:txBody>
+                    <a:bodyPr/>
+                    <a:lstStyle/>
+                    <a:p>
+                      <a:pPr indent="0" marL="0">
+                        <a:buNone/>
+                      </a:pPr>
+                      <a:r>
+                        <a:rPr lang="en-US" sz="1300" b="1" dirty="0">
+                          <a:solidFill>
+                            <a:srgbClr val="21295C"/>
+                          </a:solidFill>
+                          <a:latin typeface="Calibri" pitchFamily="34" charset="0"/>
+                          <a:ea typeface="Calibri" pitchFamily="34" charset="-122"/>
+                          <a:cs typeface="Calibri" pitchFamily="34" charset="-120"/>
+                        </a:rPr>
+                        <a:t>おにぎり＋糖質減（同時）</a:t>
+                      </a:r>
+                      <a:endParaRPr lang="en-US" sz="1300" dirty="0">
+                        <a:latin typeface="Calibri" charset="0"/>
+                        <a:ea typeface="Calibri" charset="0"/>
+                        <a:cs typeface="Calibri" charset="0"/>
+                      </a:endParaRPr>
+                    </a:p>
+                  </a:txBody>
+                  <a:tcPr marL="91440" marR="91440" marT="45720" marB="45720" anchor="ctr">
+                    <a:lnL w="9525" cap="flat" cmpd="sng" algn="ctr">
+                      <a:solidFill>
+                        <a:srgbClr val="E3E1DB"/>
+                      </a:solidFill>
+                      <a:prstDash val="solid"/>
+                      <a:round/>
+                      <a:headEnd type="none" w="med" len="med"/>
+                      <a:tailEnd type="none" w="med" len="med"/>
+                    </a:lnL>
+                    <a:lnR w="9525" cap="flat" cmpd="sng" algn="ctr">
+                      <a:solidFill>
+                        <a:srgbClr val="E3E1DB"/>
+                      </a:solidFill>
+                      <a:prstDash val="solid"/>
+                      <a:round/>
+                      <a:headEnd type="none" w="med" len="med"/>
+                      <a:tailEnd type="none" w="med" len="med"/>
+                    </a:lnR>
+                    <a:lnT w="9525" cap="flat" cmpd="sng" algn="ctr">
+                      <a:solidFill>
+                        <a:srgbClr val="E3E1DB"/>
+                      </a:solidFill>
+                      <a:prstDash val="solid"/>
+                      <a:round/>
+                      <a:headEnd type="none" w="med" len="med"/>
+                      <a:tailEnd type="none" w="med" len="med"/>
+                    </a:lnT>
+                    <a:lnB w="9525" cap="flat" cmpd="sng" algn="ctr">
+                      <a:solidFill>
+                        <a:srgbClr val="E3E1DB"/>
+                      </a:solidFill>
+                      <a:prstDash val="solid"/>
+                      <a:round/>
+                      <a:headEnd type="none" w="med" len="med"/>
+                      <a:tailEnd type="none" w="med" len="med"/>
+                    </a:lnB>
+                    <a:solidFill>
+                      <a:srgbClr val="F4F7F9"/>
+                    </a:solidFill>
+                  </a:tcPr>
+                </a:tc>
+                <a:tc>
+                  <a:txBody>
+                    <a:bodyPr/>
+                    <a:lstStyle/>
+                    <a:p>
+                      <a:pPr indent="0" marL="0">
+                        <a:buNone/>
+                      </a:pPr>
+                      <a:r>
+                        <a:rPr lang="en-US" sz="1300" dirty="0">
+                          <a:solidFill>
+                            <a:srgbClr val="1A1A1A"/>
+                          </a:solidFill>
+                          <a:latin typeface="Calibri" pitchFamily="34" charset="0"/>
+                          <a:ea typeface="Calibri" pitchFamily="34" charset="-122"/>
+                          <a:cs typeface="Calibri" pitchFamily="34" charset="-120"/>
+                        </a:rPr>
+                        <a:t>194.9</a:t>
+                      </a:r>
+                      <a:endParaRPr lang="en-US" sz="1300" dirty="0">
+                        <a:latin typeface="Calibri" charset="0"/>
+                        <a:ea typeface="Calibri" charset="0"/>
+                        <a:cs typeface="Calibri" charset="0"/>
+                      </a:endParaRPr>
+                    </a:p>
+                  </a:txBody>
+                  <a:tcPr marL="91440" marR="91440" marT="45720" marB="45720" anchor="ctr">
+                    <a:lnL w="9525" cap="flat" cmpd="sng" algn="ctr">
+                      <a:solidFill>
+                        <a:srgbClr val="E3E1DB"/>
+                      </a:solidFill>
+                      <a:prstDash val="solid"/>
+                      <a:round/>
+                      <a:headEnd type="none" w="med" len="med"/>
+                      <a:tailEnd type="none" w="med" len="med"/>
+                    </a:lnL>
+                    <a:lnR w="9525" cap="flat" cmpd="sng" algn="ctr">
+                      <a:solidFill>
+                        <a:srgbClr val="E3E1DB"/>
+                      </a:solidFill>
+                      <a:prstDash val="solid"/>
+                      <a:round/>
+                      <a:headEnd type="none" w="med" len="med"/>
+                      <a:tailEnd type="none" w="med" len="med"/>
+                    </a:lnR>
+                    <a:lnT w="9525" cap="flat" cmpd="sng" algn="ctr">
+                      <a:solidFill>
+                        <a:srgbClr val="E3E1DB"/>
+                      </a:solidFill>
+                      <a:prstDash val="solid"/>
+                      <a:round/>
+                      <a:headEnd type="none" w="med" len="med"/>
+                      <a:tailEnd type="none" w="med" len="med"/>
+                    </a:lnT>
+                    <a:lnB w="9525" cap="flat" cmpd="sng" algn="ctr">
+                      <a:solidFill>
+                        <a:srgbClr val="E3E1DB"/>
+                      </a:solidFill>
+                      <a:prstDash val="solid"/>
+                      <a:round/>
+                      <a:headEnd type="none" w="med" len="med"/>
+                      <a:tailEnd type="none" w="med" len="med"/>
+                    </a:lnB>
+                    <a:solidFill>
+                      <a:srgbClr val="F4F7F9"/>
+                    </a:solidFill>
+                  </a:tcPr>
+                </a:tc>
+                <a:tc>
+                  <a:txBody>
+                    <a:bodyPr/>
+                    <a:lstStyle/>
+                    <a:p>
+                      <a:pPr indent="0" marL="0">
+                        <a:buNone/>
+                      </a:pPr>
+                      <a:r>
+                        <a:rPr lang="en-US" sz="1300" dirty="0">
+                          <a:solidFill>
+                            <a:srgbClr val="1A1A1A"/>
+                          </a:solidFill>
+                          <a:latin typeface="Calibri" pitchFamily="34" charset="0"/>
+                          <a:ea typeface="Calibri" pitchFamily="34" charset="-122"/>
+                          <a:cs typeface="Calibri" pitchFamily="34" charset="-120"/>
+                        </a:rPr>
+                        <a:t>8.5%</a:t>
+                      </a:r>
+                      <a:endParaRPr lang="en-US" sz="1300" dirty="0">
+                        <a:latin typeface="Calibri" charset="0"/>
+                        <a:ea typeface="Calibri" charset="0"/>
+                        <a:cs typeface="Calibri" charset="0"/>
+                      </a:endParaRPr>
+                    </a:p>
+                  </a:txBody>
+                  <a:tcPr marL="91440" marR="91440" marT="45720" marB="45720" anchor="ctr">
+                    <a:lnL w="9525" cap="flat" cmpd="sng" algn="ctr">
+                      <a:solidFill>
+                        <a:srgbClr val="E3E1DB"/>
+                      </a:solidFill>
+                      <a:prstDash val="solid"/>
+                      <a:round/>
+                      <a:headEnd type="none" w="med" len="med"/>
+                      <a:tailEnd type="none" w="med" len="med"/>
+                    </a:lnL>
+                    <a:lnR w="9525" cap="flat" cmpd="sng" algn="ctr">
+                      <a:solidFill>
+                        <a:srgbClr val="E3E1DB"/>
+                      </a:solidFill>
+                      <a:prstDash val="solid"/>
+                      <a:round/>
+                      <a:headEnd type="none" w="med" len="med"/>
+                      <a:tailEnd type="none" w="med" len="med"/>
+                    </a:lnR>
+                    <a:lnT w="9525" cap="flat" cmpd="sng" algn="ctr">
+                      <a:solidFill>
+                        <a:srgbClr val="E3E1DB"/>
+                      </a:solidFill>
+                      <a:prstDash val="solid"/>
+                      <a:round/>
+                      <a:headEnd type="none" w="med" len="med"/>
+                      <a:tailEnd type="none" w="med" len="med"/>
+                    </a:lnT>
+                    <a:lnB w="9525" cap="flat" cmpd="sng" algn="ctr">
+                      <a:solidFill>
+                        <a:srgbClr val="E3E1DB"/>
+                      </a:solidFill>
+                      <a:prstDash val="solid"/>
+                      <a:round/>
+                      <a:headEnd type="none" w="med" len="med"/>
+                      <a:tailEnd type="none" w="med" len="med"/>
+                    </a:lnB>
+                    <a:solidFill>
+                      <a:srgbClr val="F4F7F9"/>
+                    </a:solidFill>
+                  </a:tcPr>
+                </a:tc>
+                <a:tc>
+                  <a:txBody>
+                    <a:bodyPr/>
+                    <a:lstStyle/>
+                    <a:p>
+                      <a:pPr indent="0" marL="0">
+                        <a:buNone/>
+                      </a:pPr>
+                      <a:r>
+                        <a:rPr lang="en-US" sz="1300" dirty="0">
+                          <a:solidFill>
+                            <a:srgbClr val="1A1A1A"/>
+                          </a:solidFill>
+                          <a:latin typeface="Calibri" pitchFamily="34" charset="0"/>
+                          <a:ea typeface="Calibri" pitchFamily="34" charset="-122"/>
+                          <a:cs typeface="Calibri" pitchFamily="34" charset="-120"/>
+                        </a:rPr>
+                        <a:t>52.3</a:t>
+                      </a:r>
+                      <a:endParaRPr lang="en-US" sz="1300" dirty="0">
+                        <a:latin typeface="Calibri" charset="0"/>
+                        <a:ea typeface="Calibri" charset="0"/>
+                        <a:cs typeface="Calibri" charset="0"/>
+                      </a:endParaRPr>
+                    </a:p>
+                  </a:txBody>
+                  <a:tcPr marL="91440" marR="91440" marT="45720" marB="45720" anchor="ctr">
+                    <a:lnL w="9525" cap="flat" cmpd="sng" algn="ctr">
+                      <a:solidFill>
+                        <a:srgbClr val="E3E1DB"/>
+                      </a:solidFill>
+                      <a:prstDash val="solid"/>
+                      <a:round/>
+                      <a:headEnd type="none" w="med" len="med"/>
+                      <a:tailEnd type="none" w="med" len="med"/>
+                    </a:lnL>
+                    <a:lnR w="9525" cap="flat" cmpd="sng" algn="ctr">
+                      <a:solidFill>
+                        <a:srgbClr val="E3E1DB"/>
+                      </a:solidFill>
+                      <a:prstDash val="solid"/>
+                      <a:round/>
+                      <a:headEnd type="none" w="med" len="med"/>
+                      <a:tailEnd type="none" w="med" len="med"/>
+                    </a:lnR>
+                    <a:lnT w="9525" cap="flat" cmpd="sng" algn="ctr">
+                      <a:solidFill>
+                        <a:srgbClr val="E3E1DB"/>
+                      </a:solidFill>
+                      <a:prstDash val="solid"/>
+                      <a:round/>
+                      <a:headEnd type="none" w="med" len="med"/>
+                      <a:tailEnd type="none" w="med" len="med"/>
+                    </a:lnT>
+                    <a:lnB w="9525" cap="flat" cmpd="sng" algn="ctr">
+                      <a:solidFill>
+                        <a:srgbClr val="E3E1DB"/>
+                      </a:solidFill>
+                      <a:prstDash val="solid"/>
+                      <a:round/>
+                      <a:headEnd type="none" w="med" len="med"/>
+                      <a:tailEnd type="none" w="med" len="med"/>
+                    </a:lnB>
+                    <a:solidFill>
+                      <a:srgbClr val="F4F7F9"/>
+                    </a:solidFill>
+                  </a:tcPr>
+                </a:tc>
+              </a:tr>
+            </a:tbl>
           </a:graphicData>
         </a:graphic>
       </p:graphicFrame>
       <p:sp>
         <p:nvSpPr>
-          <p:cNvPr id="6" name="Text 3"/>
+          <p:cNvPr id="6" name="Shape 3"/>
+          <p:cNvSpPr/>
+          <p:nvPr/>
+        </p:nvSpPr>
+        <p:spPr>
+          <a:xfrm>
+            <a:off x="548640" y="4114800"/>
+            <a:ext cx="11091672" cy="2103120"/>
+          </a:xfrm>
+          <a:prstGeom prst="roundRect">
+            <a:avLst>
+              <a:gd name="adj" fmla="val 4348"/>
+            </a:avLst>
+          </a:prstGeom>
+          <a:solidFill>
+            <a:srgbClr val="EAF7F0"/>
+          </a:solidFill>
+          <a:ln/>
+        </p:spPr>
+      </p:sp>
+      <p:sp>
+        <p:nvSpPr>
+          <p:cNvPr id="7" name="Text 4"/>
           <p:cNvSpPr txBox="1"/>
           <p:nvPr/>
         </p:nvSpPr>
         <p:spPr>
           <a:xfrm>
-            <a:off x="548640" y="3703320"/>
-            <a:ext cx="6309360" cy="256032"/>
+            <a:off x="822960" y="4279392"/>
+            <a:ext cx="10543032" cy="320040"/>
           </a:xfrm>
           <a:prstGeom prst="rect">
             <a:avLst/>
@@ -7568,66 +9716,30 @@
               <a:buNone/>
             </a:pPr>
             <a:r>
-              <a:rPr lang="en-US" sz="1250" b="1" dirty="0">
-                <a:solidFill>
-                  <a:srgbClr val="21295C"/>
+              <a:rPr lang="en-US" sz="1350" b="1" dirty="0">
+                <a:solidFill>
+                  <a:srgbClr val="0F5C3D"/>
                 </a:solidFill>
                 <a:latin typeface="Calibri" pitchFamily="34" charset="0"/>
                 <a:ea typeface="Calibri" pitchFamily="34" charset="-122"/>
                 <a:cs typeface="Calibri" pitchFamily="34" charset="-120"/>
               </a:rPr>
-              <a:t>食欲(摂食可能感)の推移 (0=食べられない〜10=まだ食べられる)</a:t>
+              <a:t>✓ 同時摂取にすると平均血糖は少し上がるが、乱高下は明確に小さくなる</a:t>
             </a:r>
-            <a:endParaRPr lang="en-US" sz="1250" dirty="0"/>
-          </a:p>
-        </p:txBody>
-      </p:sp>
-      <p:graphicFrame>
-        <p:nvGraphicFramePr>
-          <p:cNvPr id="7" name="Chart 1" descr=""/>
-          <p:cNvGraphicFramePr/>
-          <p:nvPr/>
-        </p:nvGraphicFramePr>
-        <p:xfrm>
-          <a:off x="548640" y="3977640"/>
-          <a:ext cx="6309360" cy="1691640"/>
-        </p:xfrm>
-        <a:graphic xmlns:a="http://schemas.openxmlformats.org/drawingml/2006/main">
-          <a:graphicData uri="http://schemas.openxmlformats.org/drawingml/2006/chart">
-            <c:chart xmlns:c="http://schemas.openxmlformats.org/drawingml/2006/chart" r:id="rId2"/>
-          </a:graphicData>
-        </a:graphic>
-      </p:graphicFrame>
-      <p:sp>
-        <p:nvSpPr>
-          <p:cNvPr id="8" name="Shape 4"/>
-          <p:cNvSpPr/>
-          <p:nvPr/>
-        </p:nvSpPr>
-        <p:spPr>
-          <a:xfrm>
-            <a:off x="548640" y="5870448"/>
-            <a:ext cx="146304" cy="118872"/>
-          </a:xfrm>
-          <a:prstGeom prst="rect">
-            <a:avLst/>
-          </a:prstGeom>
-          <a:solidFill>
-            <a:srgbClr val="2A78D6"/>
-          </a:solidFill>
-          <a:ln/>
-        </p:spPr>
-      </p:sp>
-      <p:sp>
-        <p:nvSpPr>
-          <p:cNvPr id="9" name="Text 5"/>
+            <a:endParaRPr lang="en-US" sz="1350" dirty="0"/>
+          </a:p>
+        </p:txBody>
+      </p:sp>
+      <p:sp>
+        <p:nvSpPr>
+          <p:cNvPr id="8" name="Text 5"/>
           <p:cNvSpPr txBox="1"/>
           <p:nvPr/>
         </p:nvSpPr>
         <p:spPr>
           <a:xfrm>
-            <a:off x="749808" y="5760720"/>
-            <a:ext cx="1554480" cy="274320"/>
+            <a:off x="822960" y="4645152"/>
+            <a:ext cx="10543032" cy="1463040"/>
           </a:xfrm>
           <a:prstGeom prst="rect">
             <a:avLst/>
@@ -7643,411 +9755,17 @@
               <a:buNone/>
             </a:pPr>
             <a:r>
-              <a:rPr lang="en-US" sz="950" dirty="0">
-                <a:solidFill>
-                  <a:srgbClr val="5C6570"/>
+              <a:rPr lang="en-US" sz="1200" dirty="0">
+                <a:solidFill>
+                  <a:srgbClr val="0F5C3D"/>
                 </a:solidFill>
                 <a:latin typeface="Calibri" pitchFamily="34" charset="0"/>
                 <a:ea typeface="Calibri" pitchFamily="34" charset="-122"/>
                 <a:cs typeface="Calibri" pitchFamily="34" charset="-120"/>
               </a:rPr>
-              <a:t>固形</a:t>
+              <a:t>副食とおにぎりを2.5〜3時間ずらして食べると、それぞれが独立した急峻な山を作るのに対し、同時に食べるとおにぎり（ゆっくり吸収されるデンプン）が副食の急な糖吸収を緩衝し、1つのなだらかな波にまとまると解釈できる。糖質減はこの「なだらかさ」に加えてΔピークも固形並み（52.3 vs 53.7）まで抑えられている。絶対値が最も低いのは固形で、これは「同時摂取か否か」ではなく「副食が固形かスムージーか」という形態の効果。</a:t>
             </a:r>
-            <a:endParaRPr lang="en-US" sz="950" dirty="0"/>
-          </a:p>
-        </p:txBody>
-      </p:sp>
-      <p:sp>
-        <p:nvSpPr>
-          <p:cNvPr id="10" name="Shape 6"/>
-          <p:cNvSpPr/>
-          <p:nvPr/>
-        </p:nvSpPr>
-        <p:spPr>
-          <a:xfrm>
-            <a:off x="2176272" y="5870448"/>
-            <a:ext cx="146304" cy="118872"/>
-          </a:xfrm>
-          <a:prstGeom prst="rect">
-            <a:avLst/>
-          </a:prstGeom>
-          <a:solidFill>
-            <a:srgbClr val="EB6834"/>
-          </a:solidFill>
-          <a:ln/>
-        </p:spPr>
-      </p:sp>
-      <p:sp>
-        <p:nvSpPr>
-          <p:cNvPr id="11" name="Text 7"/>
-          <p:cNvSpPr txBox="1"/>
-          <p:nvPr/>
-        </p:nvSpPr>
-        <p:spPr>
-          <a:xfrm>
-            <a:off x="2377440" y="5760720"/>
-            <a:ext cx="1554480" cy="274320"/>
-          </a:xfrm>
-          <a:prstGeom prst="rect">
-            <a:avLst/>
-          </a:prstGeom>
-          <a:noFill/>
-          <a:ln/>
-        </p:spPr>
-        <p:txBody>
-          <a:bodyPr wrap="square" lIns="0" tIns="0" rIns="0" bIns="0" rtlCol="0" anchor="ctr"/>
-          <a:lstStyle/>
-          <a:p>
-            <a:pPr indent="0" marL="0">
-              <a:buNone/>
-            </a:pPr>
-            <a:r>
-              <a:rPr lang="en-US" sz="950" dirty="0">
-                <a:solidFill>
-                  <a:srgbClr val="5C6570"/>
-                </a:solidFill>
-                <a:latin typeface="Calibri" pitchFamily="34" charset="0"/>
-                <a:ea typeface="Calibri" pitchFamily="34" charset="-122"/>
-                <a:cs typeface="Calibri" pitchFamily="34" charset="-120"/>
-              </a:rPr>
-              <a:t>スムージー</a:t>
-            </a:r>
-            <a:endParaRPr lang="en-US" sz="950" dirty="0"/>
-          </a:p>
-        </p:txBody>
-      </p:sp>
-      <p:sp>
-        <p:nvSpPr>
-          <p:cNvPr id="12" name="Shape 8"/>
-          <p:cNvSpPr/>
-          <p:nvPr/>
-        </p:nvSpPr>
-        <p:spPr>
-          <a:xfrm>
-            <a:off x="3803904" y="5870448"/>
-            <a:ext cx="146304" cy="118872"/>
-          </a:xfrm>
-          <a:prstGeom prst="rect">
-            <a:avLst/>
-          </a:prstGeom>
-          <a:solidFill>
-            <a:srgbClr val="1BAF7A"/>
-          </a:solidFill>
-          <a:ln/>
-        </p:spPr>
-      </p:sp>
-      <p:sp>
-        <p:nvSpPr>
-          <p:cNvPr id="13" name="Text 9"/>
-          <p:cNvSpPr txBox="1"/>
-          <p:nvPr/>
-        </p:nvSpPr>
-        <p:spPr>
-          <a:xfrm>
-            <a:off x="4005072" y="5760720"/>
-            <a:ext cx="1554480" cy="274320"/>
-          </a:xfrm>
-          <a:prstGeom prst="rect">
-            <a:avLst/>
-          </a:prstGeom>
-          <a:noFill/>
-          <a:ln/>
-        </p:spPr>
-        <p:txBody>
-          <a:bodyPr wrap="square" lIns="0" tIns="0" rIns="0" bIns="0" rtlCol="0" anchor="ctr"/>
-          <a:lstStyle/>
-          <a:p>
-            <a:pPr indent="0" marL="0">
-              <a:buNone/>
-            </a:pPr>
-            <a:r>
-              <a:rPr lang="en-US" sz="950" dirty="0">
-                <a:solidFill>
-                  <a:srgbClr val="5C6570"/>
-                </a:solidFill>
-                <a:latin typeface="Calibri" pitchFamily="34" charset="0"/>
-                <a:ea typeface="Calibri" pitchFamily="34" charset="-122"/>
-                <a:cs typeface="Calibri" pitchFamily="34" charset="-120"/>
-              </a:rPr>
-              <a:t>おにぎり+スムージー</a:t>
-            </a:r>
-            <a:endParaRPr lang="en-US" sz="950" dirty="0"/>
-          </a:p>
-        </p:txBody>
-      </p:sp>
-      <p:sp>
-        <p:nvSpPr>
-          <p:cNvPr id="14" name="Shape 10"/>
-          <p:cNvSpPr/>
-          <p:nvPr/>
-        </p:nvSpPr>
-        <p:spPr>
-          <a:xfrm>
-            <a:off x="5431536" y="5870448"/>
-            <a:ext cx="146304" cy="118872"/>
-          </a:xfrm>
-          <a:prstGeom prst="rect">
-            <a:avLst/>
-          </a:prstGeom>
-          <a:solidFill>
-            <a:srgbClr val="EDA100"/>
-          </a:solidFill>
-          <a:ln/>
-        </p:spPr>
-      </p:sp>
-      <p:sp>
-        <p:nvSpPr>
-          <p:cNvPr id="15" name="Text 11"/>
-          <p:cNvSpPr txBox="1"/>
-          <p:nvPr/>
-        </p:nvSpPr>
-        <p:spPr>
-          <a:xfrm>
-            <a:off x="5632704" y="5760720"/>
-            <a:ext cx="1554480" cy="274320"/>
-          </a:xfrm>
-          <a:prstGeom prst="rect">
-            <a:avLst/>
-          </a:prstGeom>
-          <a:noFill/>
-          <a:ln/>
-        </p:spPr>
-        <p:txBody>
-          <a:bodyPr wrap="square" lIns="0" tIns="0" rIns="0" bIns="0" rtlCol="0" anchor="ctr"/>
-          <a:lstStyle/>
-          <a:p>
-            <a:pPr indent="0" marL="0">
-              <a:buNone/>
-            </a:pPr>
-            <a:r>
-              <a:rPr lang="en-US" sz="950" dirty="0">
-                <a:solidFill>
-                  <a:srgbClr val="5C6570"/>
-                </a:solidFill>
-                <a:latin typeface="Calibri" pitchFamily="34" charset="0"/>
-                <a:ea typeface="Calibri" pitchFamily="34" charset="-122"/>
-                <a:cs typeface="Calibri" pitchFamily="34" charset="-120"/>
-              </a:rPr>
-              <a:t>おにぎり+糖質減</a:t>
-            </a:r>
-            <a:endParaRPr lang="en-US" sz="950" dirty="0"/>
-          </a:p>
-        </p:txBody>
-      </p:sp>
-      <p:sp>
-        <p:nvSpPr>
-          <p:cNvPr id="16" name="Shape 12"/>
-          <p:cNvSpPr/>
-          <p:nvPr/>
-        </p:nvSpPr>
-        <p:spPr>
-          <a:xfrm>
-            <a:off x="7635240" y="1600200"/>
-            <a:ext cx="4005072" cy="4434840"/>
-          </a:xfrm>
-          <a:prstGeom prst="roundRect">
-            <a:avLst>
-              <a:gd name="adj" fmla="val 2283"/>
-            </a:avLst>
-          </a:prstGeom>
-          <a:solidFill>
-            <a:srgbClr val="EAF7F0"/>
-          </a:solidFill>
-          <a:ln/>
-        </p:spPr>
-      </p:sp>
-      <p:sp>
-        <p:nvSpPr>
-          <p:cNvPr id="17" name="Text 13"/>
-          <p:cNvSpPr txBox="1"/>
-          <p:nvPr/>
-        </p:nvSpPr>
-        <p:spPr>
-          <a:xfrm>
-            <a:off x="7909560" y="1828800"/>
-            <a:ext cx="3566160" cy="365760"/>
-          </a:xfrm>
-          <a:prstGeom prst="rect">
-            <a:avLst/>
-          </a:prstGeom>
-          <a:noFill/>
-          <a:ln/>
-        </p:spPr>
-        <p:txBody>
-          <a:bodyPr wrap="square" lIns="0" tIns="0" rIns="0" bIns="0" rtlCol="0" anchor="ctr"/>
-          <a:lstStyle/>
-          <a:p>
-            <a:pPr indent="0" marL="0">
-              <a:buNone/>
-            </a:pPr>
-            <a:r>
-              <a:rPr lang="en-US" sz="1350" b="1" dirty="0">
-                <a:solidFill>
-                  <a:srgbClr val="0F5C3D"/>
-                </a:solidFill>
-                <a:latin typeface="Calibri" pitchFamily="34" charset="0"/>
-                <a:ea typeface="Calibri" pitchFamily="34" charset="-122"/>
-                <a:cs typeface="Calibri" pitchFamily="34" charset="-120"/>
-              </a:rPr>
-              <a:t>✓ 消化器症状は4条件とも良好</a:t>
-            </a:r>
-            <a:endParaRPr lang="en-US" sz="1350" dirty="0"/>
-          </a:p>
-        </p:txBody>
-      </p:sp>
-      <p:sp>
-        <p:nvSpPr>
-          <p:cNvPr id="18" name="Text 14"/>
-          <p:cNvSpPr txBox="1"/>
-          <p:nvPr/>
-        </p:nvSpPr>
-        <p:spPr>
-          <a:xfrm>
-            <a:off x="7909560" y="2331720"/>
-            <a:ext cx="3520440" cy="868680"/>
-          </a:xfrm>
-          <a:prstGeom prst="rect">
-            <a:avLst/>
-          </a:prstGeom>
-          <a:noFill/>
-          <a:ln/>
-        </p:spPr>
-        <p:txBody>
-          <a:bodyPr wrap="square" lIns="0" tIns="0" rIns="0" bIns="0" rtlCol="0" anchor="ctr"/>
-          <a:lstStyle/>
-          <a:p>
-            <a:pPr indent="0" marL="0">
-              <a:buNone/>
-            </a:pPr>
-            <a:r>
-              <a:rPr lang="en-US" sz="1100" dirty="0">
-                <a:solidFill>
-                  <a:srgbClr val="1A1A1A"/>
-                </a:solidFill>
-                <a:latin typeface="Calibri" pitchFamily="34" charset="0"/>
-                <a:ea typeface="Calibri" pitchFamily="34" charset="-122"/>
-                <a:cs typeface="Calibri" pitchFamily="34" charset="-120"/>
-              </a:rPr>
-              <a:t>•  頭痛：4条件すべて全測定点で最小値(1)、変化なし</a:t>
-            </a:r>
-            <a:endParaRPr lang="en-US" sz="1100" dirty="0"/>
-          </a:p>
-        </p:txBody>
-      </p:sp>
-      <p:sp>
-        <p:nvSpPr>
-          <p:cNvPr id="19" name="Text 15"/>
-          <p:cNvSpPr txBox="1"/>
-          <p:nvPr/>
-        </p:nvSpPr>
-        <p:spPr>
-          <a:xfrm>
-            <a:off x="7909560" y="3264408"/>
-            <a:ext cx="3520440" cy="868680"/>
-          </a:xfrm>
-          <a:prstGeom prst="rect">
-            <a:avLst/>
-          </a:prstGeom>
-          <a:noFill/>
-          <a:ln/>
-        </p:spPr>
-        <p:txBody>
-          <a:bodyPr wrap="square" lIns="0" tIns="0" rIns="0" bIns="0" rtlCol="0" anchor="ctr"/>
-          <a:lstStyle/>
-          <a:p>
-            <a:pPr indent="0" marL="0">
-              <a:buNone/>
-            </a:pPr>
-            <a:r>
-              <a:rPr lang="en-US" sz="1100" dirty="0">
-                <a:solidFill>
-                  <a:srgbClr val="1A1A1A"/>
-                </a:solidFill>
-                <a:latin typeface="Calibri" pitchFamily="34" charset="0"/>
-                <a:ea typeface="Calibri" pitchFamily="34" charset="-122"/>
-                <a:cs typeface="Calibri" pitchFamily="34" charset="-120"/>
-              </a:rPr>
-              <a:t>•  吐き気：4条件すべてほぼ1（おにぎり+スムージーのDAY10 9:30のみ一時的に2）</a:t>
-            </a:r>
-            <a:endParaRPr lang="en-US" sz="1100" dirty="0"/>
-          </a:p>
-        </p:txBody>
-      </p:sp>
-      <p:sp>
-        <p:nvSpPr>
-          <p:cNvPr id="20" name="Text 16"/>
-          <p:cNvSpPr txBox="1"/>
-          <p:nvPr/>
-        </p:nvSpPr>
-        <p:spPr>
-          <a:xfrm>
-            <a:off x="7909560" y="4197096"/>
-            <a:ext cx="3520440" cy="868680"/>
-          </a:xfrm>
-          <a:prstGeom prst="rect">
-            <a:avLst/>
-          </a:prstGeom>
-          <a:noFill/>
-          <a:ln/>
-        </p:spPr>
-        <p:txBody>
-          <a:bodyPr wrap="square" lIns="0" tIns="0" rIns="0" bIns="0" rtlCol="0" anchor="ctr"/>
-          <a:lstStyle/>
-          <a:p>
-            <a:pPr indent="0" marL="0">
-              <a:buNone/>
-            </a:pPr>
-            <a:r>
-              <a:rPr lang="en-US" sz="1100" dirty="0">
-                <a:solidFill>
-                  <a:srgbClr val="1A1A1A"/>
-                </a:solidFill>
-                <a:latin typeface="Calibri" pitchFamily="34" charset="0"/>
-                <a:ea typeface="Calibri" pitchFamily="34" charset="-122"/>
-                <a:cs typeface="Calibri" pitchFamily="34" charset="-120"/>
-              </a:rPr>
-              <a:t>•  血糖値が高めに推移するおにぎり同時摂取条件でも、消化器症状は悪化していない</a:t>
-            </a:r>
-            <a:endParaRPr lang="en-US" sz="1100" dirty="0"/>
-          </a:p>
-        </p:txBody>
-      </p:sp>
-      <p:sp>
-        <p:nvSpPr>
-          <p:cNvPr id="21" name="Text 17"/>
-          <p:cNvSpPr txBox="1"/>
-          <p:nvPr/>
-        </p:nvSpPr>
-        <p:spPr>
-          <a:xfrm>
-            <a:off x="7909560" y="5129784"/>
-            <a:ext cx="3520440" cy="868680"/>
-          </a:xfrm>
-          <a:prstGeom prst="rect">
-            <a:avLst/>
-          </a:prstGeom>
-          <a:noFill/>
-          <a:ln/>
-        </p:spPr>
-        <p:txBody>
-          <a:bodyPr wrap="square" lIns="0" tIns="0" rIns="0" bIns="0" rtlCol="0" anchor="ctr"/>
-          <a:lstStyle/>
-          <a:p>
-            <a:pPr indent="0" marL="0">
-              <a:buNone/>
-            </a:pPr>
-            <a:r>
-              <a:rPr lang="en-US" sz="1100" dirty="0">
-                <a:solidFill>
-                  <a:srgbClr val="1A1A1A"/>
-                </a:solidFill>
-                <a:latin typeface="Calibri" pitchFamily="34" charset="0"/>
-                <a:ea typeface="Calibri" pitchFamily="34" charset="-122"/>
-                <a:cs typeface="Calibri" pitchFamily="34" charset="-120"/>
-              </a:rPr>
-              <a:t>•  満腹感・食欲の差は「おにぎりを同時に食べたか」による食事量の違いを反映しており、副食の形態（固形/液状）そのものの効果ではない</a:t>
-            </a:r>
-            <a:endParaRPr lang="en-US" sz="1100" dirty="0"/>
+            <a:endParaRPr lang="en-US" sz="1200" dirty="0"/>
           </a:p>
         </p:txBody>
       </p:sp>
@@ -8116,7 +9834,7 @@
                 <a:ea typeface="Calibri" pitchFamily="34" charset="-122"/>
                 <a:cs typeface="Calibri" pitchFamily="34" charset="-120"/>
               </a:rPr>
-              <a:t>PERFORMANCE</a:t>
+              <a:t>PERSPECTIVE</a:t>
             </a:r>
             <a:endParaRPr lang="en-US" sz="1300" dirty="0"/>
           </a:p>
@@ -8155,7 +9873,7 @@
                 <a:ea typeface="Cambria" pitchFamily="34" charset="-122"/>
                 <a:cs typeface="Cambria" pitchFamily="34" charset="-120"/>
               </a:rPr>
-              <a:t>毎晩のコンディション・トレーニング指標（4条件比較）</a:t>
+              <a:t>アスリート視点：血糖値は「リスク」か「燃料」か</a:t>
             </a:r>
             <a:endParaRPr lang="en-US" sz="2800" dirty="0"/>
           </a:p>
@@ -8169,8 +9887,8 @@
         </p:nvSpPr>
         <p:spPr>
           <a:xfrm>
-            <a:off x="548640" y="1572768"/>
-            <a:ext cx="3429000" cy="256032"/>
+            <a:off x="548640" y="1463040"/>
+            <a:ext cx="11091672" cy="457200"/>
           </a:xfrm>
           <a:prstGeom prst="rect">
             <a:avLst/>
@@ -8186,15 +9904,15 @@
               <a:buNone/>
             </a:pPr>
             <a:r>
-              <a:rPr lang="en-US" sz="1200" b="1" dirty="0">
-                <a:solidFill>
-                  <a:srgbClr val="21295C"/>
+              <a:rPr lang="en-US" sz="1200" dirty="0">
+                <a:solidFill>
+                  <a:srgbClr val="5C6570"/>
                 </a:solidFill>
                 <a:latin typeface="Calibri" pitchFamily="34" charset="0"/>
                 <a:ea typeface="Calibri" pitchFamily="34" charset="-122"/>
                 <a:cs typeface="Calibri" pitchFamily="34" charset="-120"/>
               </a:rPr>
-              <a:t>起床時コンディション</a:t>
+              <a:t>問題は「血糖が高いこと」自体ではなく①食後低血圧②血糖スパイク＋反応性低血糖という急激な変化。乱高下なく高い水準を維持できるなら、それは燃料が豊富な望ましい状態とも言える。</a:t>
             </a:r>
             <a:endParaRPr lang="en-US" sz="1200" dirty="0"/>
           </a:p>
@@ -8208,8 +9926,8 @@
         </p:nvSpPr>
         <p:spPr>
           <a:xfrm>
-            <a:off x="548640" y="1819656"/>
-            <a:ext cx="3429000" cy="219456"/>
+            <a:off x="548640" y="1965960"/>
+            <a:ext cx="5303520" cy="256032"/>
           </a:xfrm>
           <a:prstGeom prst="rect">
             <a:avLst/>
@@ -8225,29 +9943,68 @@
               <a:buNone/>
             </a:pPr>
             <a:r>
-              <a:rPr lang="en-US" sz="950" dirty="0">
-                <a:solidFill>
-                  <a:srgbClr val="5C6570"/>
+              <a:rPr lang="en-US" sz="1250" b="1" dirty="0">
+                <a:solidFill>
+                  <a:srgbClr val="21295C"/>
                 </a:solidFill>
                 <a:latin typeface="Calibri" pitchFamily="34" charset="0"/>
                 <a:ea typeface="Calibri" pitchFamily="34" charset="-122"/>
                 <a:cs typeface="Calibri" pitchFamily="34" charset="-120"/>
               </a:rPr>
-              <a:t>高いほど良好</a:t>
+              <a:t>トレーニング時間帯(11:00-14:00)の平均血糖</a:t>
             </a:r>
-            <a:endParaRPr lang="en-US" sz="950" dirty="0"/>
+            <a:endParaRPr lang="en-US" sz="1250" dirty="0"/>
+          </a:p>
+        </p:txBody>
+      </p:sp>
+      <p:sp>
+        <p:nvSpPr>
+          <p:cNvPr id="6" name="Text 4"/>
+          <p:cNvSpPr txBox="1"/>
+          <p:nvPr/>
+        </p:nvSpPr>
+        <p:spPr>
+          <a:xfrm>
+            <a:off x="548640" y="2221992"/>
+            <a:ext cx="5303520" cy="219456"/>
+          </a:xfrm>
+          <a:prstGeom prst="rect">
+            <a:avLst/>
+          </a:prstGeom>
+          <a:noFill/>
+          <a:ln/>
+        </p:spPr>
+        <p:txBody>
+          <a:bodyPr wrap="square" lIns="0" tIns="0" rIns="0" bIns="0" rtlCol="0" anchor="ctr"/>
+          <a:lstStyle/>
+          <a:p>
+            <a:pPr indent="0" marL="0">
+              <a:buNone/>
+            </a:pPr>
+            <a:r>
+              <a:rPr lang="en-US" sz="1000" dirty="0">
+                <a:solidFill>
+                  <a:srgbClr val="5C6570"/>
+                </a:solidFill>
+                <a:latin typeface="Calibri" pitchFamily="34" charset="0"/>
+                <a:ea typeface="Calibri" pitchFamily="34" charset="-122"/>
+                <a:cs typeface="Calibri" pitchFamily="34" charset="-120"/>
+              </a:rPr>
+              <a:t>＝燃料供給 (mg/dL)</a:t>
+            </a:r>
+            <a:endParaRPr lang="en-US" sz="1000" dirty="0"/>
           </a:p>
         </p:txBody>
       </p:sp>
       <p:graphicFrame>
         <p:nvGraphicFramePr>
-          <p:cNvPr id="6" name="Chart 0" descr=""/>
+          <p:cNvPr id="7" name="Chart 0" descr=""/>
           <p:cNvGraphicFramePr/>
           <p:nvPr/>
         </p:nvGraphicFramePr>
         <p:xfrm>
-          <a:off x="548640" y="2103120"/>
-          <a:ext cx="3429000" cy="1691640"/>
+          <a:off x="548640" y="2487168"/>
+          <a:ext cx="5303520" cy="1965960"/>
         </p:xfrm>
         <a:graphic xmlns:a="http://schemas.openxmlformats.org/drawingml/2006/main">
           <a:graphicData uri="http://schemas.openxmlformats.org/drawingml/2006/chart">
@@ -8257,14 +10014,14 @@
       </p:graphicFrame>
       <p:sp>
         <p:nvSpPr>
-          <p:cNvPr id="7" name="Text 4"/>
+          <p:cNvPr id="8" name="Text 5"/>
           <p:cNvSpPr txBox="1"/>
           <p:nvPr/>
         </p:nvSpPr>
         <p:spPr>
           <a:xfrm>
-            <a:off x="4343400" y="1572768"/>
-            <a:ext cx="3429000" cy="256032"/>
+            <a:off x="6336792" y="1965960"/>
+            <a:ext cx="5303520" cy="256032"/>
           </a:xfrm>
           <a:prstGeom prst="rect">
             <a:avLst/>
@@ -8280,7 +10037,7 @@
               <a:buNone/>
             </a:pPr>
             <a:r>
-              <a:rPr lang="en-US" sz="1200" b="1" dirty="0">
+              <a:rPr lang="en-US" sz="1250" b="1" dirty="0">
                 <a:solidFill>
                   <a:srgbClr val="21295C"/>
                 </a:solidFill>
@@ -8288,22 +10045,22 @@
                 <a:ea typeface="Calibri" pitchFamily="34" charset="-122"/>
                 <a:cs typeface="Calibri" pitchFamily="34" charset="-120"/>
               </a:rPr>
-              <a:t>睡眠の質</a:t>
+              <a:t>ピーク後の最小値−ベースライン</a:t>
             </a:r>
-            <a:endParaRPr lang="en-US" sz="1200" dirty="0"/>
-          </a:p>
-        </p:txBody>
-      </p:sp>
-      <p:sp>
-        <p:nvSpPr>
-          <p:cNvPr id="8" name="Text 5"/>
+            <a:endParaRPr lang="en-US" sz="1250" dirty="0"/>
+          </a:p>
+        </p:txBody>
+      </p:sp>
+      <p:sp>
+        <p:nvSpPr>
+          <p:cNvPr id="9" name="Text 6"/>
           <p:cNvSpPr txBox="1"/>
           <p:nvPr/>
         </p:nvSpPr>
         <p:spPr>
           <a:xfrm>
-            <a:off x="4343400" y="1819656"/>
-            <a:ext cx="3429000" cy="219456"/>
+            <a:off x="6336792" y="2221992"/>
+            <a:ext cx="5303520" cy="219456"/>
           </a:xfrm>
           <a:prstGeom prst="rect">
             <a:avLst/>
@@ -8319,7 +10076,7 @@
               <a:buNone/>
             </a:pPr>
             <a:r>
-              <a:rPr lang="en-US" sz="950" dirty="0">
+              <a:rPr lang="en-US" sz="1000" dirty="0">
                 <a:solidFill>
                   <a:srgbClr val="5C6570"/>
                 </a:solidFill>
@@ -8327,21 +10084,21 @@
                 <a:ea typeface="Calibri" pitchFamily="34" charset="-122"/>
                 <a:cs typeface="Calibri" pitchFamily="34" charset="-120"/>
               </a:rPr>
-              <a:t>高いほど良好</a:t>
+              <a:t>クラッシュ（反応性低血糖）の有無 (mg/dL)</a:t>
             </a:r>
-            <a:endParaRPr lang="en-US" sz="950" dirty="0"/>
+            <a:endParaRPr lang="en-US" sz="1000" dirty="0"/>
           </a:p>
         </p:txBody>
       </p:sp>
       <p:graphicFrame>
         <p:nvGraphicFramePr>
-          <p:cNvPr id="9" name="Chart 1" descr=""/>
+          <p:cNvPr id="10" name="Chart 1" descr=""/>
           <p:cNvGraphicFramePr/>
           <p:nvPr/>
         </p:nvGraphicFramePr>
         <p:xfrm>
-          <a:off x="4343400" y="2103120"/>
-          <a:ext cx="3429000" cy="1691640"/>
+          <a:off x="6336792" y="2487168"/>
+          <a:ext cx="5303520" cy="1965960"/>
         </p:xfrm>
         <a:graphic xmlns:a="http://schemas.openxmlformats.org/drawingml/2006/main">
           <a:graphicData uri="http://schemas.openxmlformats.org/drawingml/2006/chart">
@@ -8351,14 +10108,36 @@
       </p:graphicFrame>
       <p:sp>
         <p:nvSpPr>
-          <p:cNvPr id="10" name="Text 6"/>
+          <p:cNvPr id="11" name="Shape 7"/>
+          <p:cNvSpPr/>
+          <p:nvPr/>
+        </p:nvSpPr>
+        <p:spPr>
+          <a:xfrm>
+            <a:off x="548640" y="4709160"/>
+            <a:ext cx="11091672" cy="1508760"/>
+          </a:xfrm>
+          <a:prstGeom prst="roundRect">
+            <a:avLst>
+              <a:gd name="adj" fmla="val 6061"/>
+            </a:avLst>
+          </a:prstGeom>
+          <a:solidFill>
+            <a:srgbClr val="EAF7F0"/>
+          </a:solidFill>
+          <a:ln/>
+        </p:spPr>
+      </p:sp>
+      <p:sp>
+        <p:nvSpPr>
+          <p:cNvPr id="12" name="Text 8"/>
           <p:cNvSpPr txBox="1"/>
           <p:nvPr/>
         </p:nvSpPr>
         <p:spPr>
           <a:xfrm>
-            <a:off x="8138160" y="1572768"/>
-            <a:ext cx="3429000" cy="256032"/>
+            <a:off x="822960" y="4864608"/>
+            <a:ext cx="10543032" cy="411480"/>
           </a:xfrm>
           <a:prstGeom prst="rect">
             <a:avLst/>
@@ -8374,15 +10153,15 @@
               <a:buNone/>
             </a:pPr>
             <a:r>
-              <a:rPr lang="en-US" sz="1200" b="1" dirty="0">
-                <a:solidFill>
-                  <a:srgbClr val="21295C"/>
+              <a:rPr lang="en-US" sz="1200" dirty="0">
+                <a:solidFill>
+                  <a:srgbClr val="0F5C3D"/>
                 </a:solidFill>
                 <a:latin typeface="Calibri" pitchFamily="34" charset="0"/>
                 <a:ea typeface="Calibri" pitchFamily="34" charset="-122"/>
                 <a:cs typeface="Calibri" pitchFamily="34" charset="-120"/>
               </a:rPr>
-              <a:t>持久力（自己評価）</a:t>
+              <a:t>•  クラッシュ（反応性低血糖）は4条件とも起きていない：ピーク後の最小値はベースラインを+18〜48上回る</a:t>
             </a:r>
             <a:endParaRPr lang="en-US" sz="1200" dirty="0"/>
           </a:p>
@@ -8390,14 +10169,14 @@
       </p:sp>
       <p:sp>
         <p:nvSpPr>
-          <p:cNvPr id="11" name="Text 7"/>
+          <p:cNvPr id="13" name="Text 9"/>
           <p:cNvSpPr txBox="1"/>
           <p:nvPr/>
         </p:nvSpPr>
         <p:spPr>
           <a:xfrm>
-            <a:off x="8138160" y="1819656"/>
-            <a:ext cx="3429000" cy="219456"/>
+            <a:off x="822960" y="5303520"/>
+            <a:ext cx="10543032" cy="411480"/>
           </a:xfrm>
           <a:prstGeom prst="rect">
             <a:avLst/>
@@ -8413,46 +10192,30 @@
               <a:buNone/>
             </a:pPr>
             <a:r>
-              <a:rPr lang="en-US" sz="950" dirty="0">
-                <a:solidFill>
-                  <a:srgbClr val="5C6570"/>
+              <a:rPr lang="en-US" sz="1200" dirty="0">
+                <a:solidFill>
+                  <a:srgbClr val="0F5C3D"/>
                 </a:solidFill>
                 <a:latin typeface="Calibri" pitchFamily="34" charset="0"/>
                 <a:ea typeface="Calibri" pitchFamily="34" charset="-122"/>
                 <a:cs typeface="Calibri" pitchFamily="34" charset="-120"/>
               </a:rPr>
-              <a:t>高いほど良好</a:t>
+              <a:t>•  固形は候補から外れる：練習中の血糖が他条件の約6割（135 vs 220〜229）＝燃料不足の可能性</a:t>
             </a:r>
-            <a:endParaRPr lang="en-US" sz="950" dirty="0"/>
-          </a:p>
-        </p:txBody>
-      </p:sp>
-      <p:graphicFrame>
-        <p:nvGraphicFramePr>
-          <p:cNvPr id="12" name="Chart 2" descr=""/>
-          <p:cNvGraphicFramePr/>
-          <p:nvPr/>
-        </p:nvGraphicFramePr>
-        <p:xfrm>
-          <a:off x="8138160" y="2103120"/>
-          <a:ext cx="3429000" cy="1691640"/>
-        </p:xfrm>
-        <a:graphic xmlns:a="http://schemas.openxmlformats.org/drawingml/2006/main">
-          <a:graphicData uri="http://schemas.openxmlformats.org/drawingml/2006/chart">
-            <c:chart xmlns:c="http://schemas.openxmlformats.org/drawingml/2006/chart" r:id="rId3"/>
-          </a:graphicData>
-        </a:graphic>
-      </p:graphicFrame>
-      <p:sp>
-        <p:nvSpPr>
-          <p:cNvPr id="13" name="Text 8"/>
+            <a:endParaRPr lang="en-US" sz="1200" dirty="0"/>
+          </a:p>
+        </p:txBody>
+      </p:sp>
+      <p:sp>
+        <p:nvSpPr>
+          <p:cNvPr id="14" name="Text 10"/>
           <p:cNvSpPr txBox="1"/>
           <p:nvPr/>
         </p:nvSpPr>
         <p:spPr>
           <a:xfrm>
-            <a:off x="548640" y="3904488"/>
-            <a:ext cx="3429000" cy="256032"/>
+            <a:off x="822960" y="5742432"/>
+            <a:ext cx="10543032" cy="411480"/>
           </a:xfrm>
           <a:prstGeom prst="rect">
             <a:avLst/>
@@ -8468,299 +10231,17 @@
               <a:buNone/>
             </a:pPr>
             <a:r>
-              <a:rPr lang="en-US" sz="1200" b="1" dirty="0">
-                <a:solidFill>
-                  <a:srgbClr val="21295C"/>
+              <a:rPr lang="en-US" sz="1200" dirty="0">
+                <a:solidFill>
+                  <a:srgbClr val="0F5C3D"/>
                 </a:solidFill>
                 <a:latin typeface="Calibri" pitchFamily="34" charset="0"/>
                 <a:ea typeface="Calibri" pitchFamily="34" charset="-122"/>
                 <a:cs typeface="Calibri" pitchFamily="34" charset="-120"/>
               </a:rPr>
-              <a:t>爆発力（自己評価）</a:t>
+              <a:t>•  糖質減は練習中の血糖がむしろ4条件中最高。ただし持久力・爆発力の自己評価は最低という矛盾があり要検証</a:t>
             </a:r>
             <a:endParaRPr lang="en-US" sz="1200" dirty="0"/>
-          </a:p>
-        </p:txBody>
-      </p:sp>
-      <p:sp>
-        <p:nvSpPr>
-          <p:cNvPr id="14" name="Text 9"/>
-          <p:cNvSpPr txBox="1"/>
-          <p:nvPr/>
-        </p:nvSpPr>
-        <p:spPr>
-          <a:xfrm>
-            <a:off x="548640" y="4151376"/>
-            <a:ext cx="3429000" cy="219456"/>
-          </a:xfrm>
-          <a:prstGeom prst="rect">
-            <a:avLst/>
-          </a:prstGeom>
-          <a:noFill/>
-          <a:ln/>
-        </p:spPr>
-        <p:txBody>
-          <a:bodyPr wrap="square" lIns="0" tIns="0" rIns="0" bIns="0" rtlCol="0" anchor="ctr"/>
-          <a:lstStyle/>
-          <a:p>
-            <a:pPr indent="0" marL="0">
-              <a:buNone/>
-            </a:pPr>
-            <a:r>
-              <a:rPr lang="en-US" sz="950" dirty="0">
-                <a:solidFill>
-                  <a:srgbClr val="5C6570"/>
-                </a:solidFill>
-                <a:latin typeface="Calibri" pitchFamily="34" charset="0"/>
-                <a:ea typeface="Calibri" pitchFamily="34" charset="-122"/>
-                <a:cs typeface="Calibri" pitchFamily="34" charset="-120"/>
-              </a:rPr>
-              <a:t>高いほど良好</a:t>
-            </a:r>
-            <a:endParaRPr lang="en-US" sz="950" dirty="0"/>
-          </a:p>
-        </p:txBody>
-      </p:sp>
-      <p:graphicFrame>
-        <p:nvGraphicFramePr>
-          <p:cNvPr id="15" name="Chart 3" descr=""/>
-          <p:cNvGraphicFramePr/>
-          <p:nvPr/>
-        </p:nvGraphicFramePr>
-        <p:xfrm>
-          <a:off x="548640" y="4434840"/>
-          <a:ext cx="3429000" cy="1691640"/>
-        </p:xfrm>
-        <a:graphic xmlns:a="http://schemas.openxmlformats.org/drawingml/2006/main">
-          <a:graphicData uri="http://schemas.openxmlformats.org/drawingml/2006/chart">
-            <c:chart xmlns:c="http://schemas.openxmlformats.org/drawingml/2006/chart" r:id="rId4"/>
-          </a:graphicData>
-        </a:graphic>
-      </p:graphicFrame>
-      <p:sp>
-        <p:nvSpPr>
-          <p:cNvPr id="16" name="Text 10"/>
-          <p:cNvSpPr txBox="1"/>
-          <p:nvPr/>
-        </p:nvSpPr>
-        <p:spPr>
-          <a:xfrm>
-            <a:off x="4343400" y="3904488"/>
-            <a:ext cx="3429000" cy="256032"/>
-          </a:xfrm>
-          <a:prstGeom prst="rect">
-            <a:avLst/>
-          </a:prstGeom>
-          <a:noFill/>
-          <a:ln/>
-        </p:spPr>
-        <p:txBody>
-          <a:bodyPr wrap="square" lIns="0" tIns="0" rIns="0" bIns="0" rtlCol="0" anchor="ctr"/>
-          <a:lstStyle/>
-          <a:p>
-            <a:pPr indent="0" marL="0">
-              <a:buNone/>
-            </a:pPr>
-            <a:r>
-              <a:rPr lang="en-US" sz="1200" b="1" dirty="0">
-                <a:solidFill>
-                  <a:srgbClr val="21295C"/>
-                </a:solidFill>
-                <a:latin typeface="Calibri" pitchFamily="34" charset="0"/>
-                <a:ea typeface="Calibri" pitchFamily="34" charset="-122"/>
-                <a:cs typeface="Calibri" pitchFamily="34" charset="-120"/>
-              </a:rPr>
-              <a:t>RPE（主観的運動強度）</a:t>
-            </a:r>
-            <a:endParaRPr lang="en-US" sz="1200" dirty="0"/>
-          </a:p>
-        </p:txBody>
-      </p:sp>
-      <p:sp>
-        <p:nvSpPr>
-          <p:cNvPr id="17" name="Text 11"/>
-          <p:cNvSpPr txBox="1"/>
-          <p:nvPr/>
-        </p:nvSpPr>
-        <p:spPr>
-          <a:xfrm>
-            <a:off x="4343400" y="4151376"/>
-            <a:ext cx="3429000" cy="219456"/>
-          </a:xfrm>
-          <a:prstGeom prst="rect">
-            <a:avLst/>
-          </a:prstGeom>
-          <a:noFill/>
-          <a:ln/>
-        </p:spPr>
-        <p:txBody>
-          <a:bodyPr wrap="square" lIns="0" tIns="0" rIns="0" bIns="0" rtlCol="0" anchor="ctr"/>
-          <a:lstStyle/>
-          <a:p>
-            <a:pPr indent="0" marL="0">
-              <a:buNone/>
-            </a:pPr>
-            <a:r>
-              <a:rPr lang="en-US" sz="950" dirty="0">
-                <a:solidFill>
-                  <a:srgbClr val="5C6570"/>
-                </a:solidFill>
-                <a:latin typeface="Calibri" pitchFamily="34" charset="0"/>
-                <a:ea typeface="Calibri" pitchFamily="34" charset="-122"/>
-                <a:cs typeface="Calibri" pitchFamily="34" charset="-120"/>
-              </a:rPr>
-              <a:t>高いほどきつい</a:t>
-            </a:r>
-            <a:endParaRPr lang="en-US" sz="950" dirty="0"/>
-          </a:p>
-        </p:txBody>
-      </p:sp>
-      <p:graphicFrame>
-        <p:nvGraphicFramePr>
-          <p:cNvPr id="18" name="Chart 4" descr=""/>
-          <p:cNvGraphicFramePr/>
-          <p:nvPr/>
-        </p:nvGraphicFramePr>
-        <p:xfrm>
-          <a:off x="4343400" y="4434840"/>
-          <a:ext cx="3429000" cy="1691640"/>
-        </p:xfrm>
-        <a:graphic xmlns:a="http://schemas.openxmlformats.org/drawingml/2006/main">
-          <a:graphicData uri="http://schemas.openxmlformats.org/drawingml/2006/chart">
-            <c:chart xmlns:c="http://schemas.openxmlformats.org/drawingml/2006/chart" r:id="rId5"/>
-          </a:graphicData>
-        </a:graphic>
-      </p:graphicFrame>
-      <p:sp>
-        <p:nvSpPr>
-          <p:cNvPr id="19" name="Text 12"/>
-          <p:cNvSpPr txBox="1"/>
-          <p:nvPr/>
-        </p:nvSpPr>
-        <p:spPr>
-          <a:xfrm>
-            <a:off x="8138160" y="3904488"/>
-            <a:ext cx="3429000" cy="256032"/>
-          </a:xfrm>
-          <a:prstGeom prst="rect">
-            <a:avLst/>
-          </a:prstGeom>
-          <a:noFill/>
-          <a:ln/>
-        </p:spPr>
-        <p:txBody>
-          <a:bodyPr wrap="square" lIns="0" tIns="0" rIns="0" bIns="0" rtlCol="0" anchor="ctr"/>
-          <a:lstStyle/>
-          <a:p>
-            <a:pPr indent="0" marL="0">
-              <a:buNone/>
-            </a:pPr>
-            <a:r>
-              <a:rPr lang="en-US" sz="1200" b="1" dirty="0">
-                <a:solidFill>
-                  <a:srgbClr val="21295C"/>
-                </a:solidFill>
-                <a:latin typeface="Calibri" pitchFamily="34" charset="0"/>
-                <a:ea typeface="Calibri" pitchFamily="34" charset="-122"/>
-                <a:cs typeface="Calibri" pitchFamily="34" charset="-120"/>
-              </a:rPr>
-              <a:t>練習時間 (分/日)</a:t>
-            </a:r>
-            <a:endParaRPr lang="en-US" sz="1200" dirty="0"/>
-          </a:p>
-        </p:txBody>
-      </p:sp>
-      <p:sp>
-        <p:nvSpPr>
-          <p:cNvPr id="20" name="Text 13"/>
-          <p:cNvSpPr txBox="1"/>
-          <p:nvPr/>
-        </p:nvSpPr>
-        <p:spPr>
-          <a:xfrm>
-            <a:off x="8138160" y="4151376"/>
-            <a:ext cx="3429000" cy="219456"/>
-          </a:xfrm>
-          <a:prstGeom prst="rect">
-            <a:avLst/>
-          </a:prstGeom>
-          <a:noFill/>
-          <a:ln/>
-        </p:spPr>
-        <p:txBody>
-          <a:bodyPr wrap="square" lIns="0" tIns="0" rIns="0" bIns="0" rtlCol="0" anchor="ctr"/>
-          <a:lstStyle/>
-          <a:p>
-            <a:pPr indent="0" marL="0">
-              <a:buNone/>
-            </a:pPr>
-            <a:r>
-              <a:rPr lang="en-US" sz="950" dirty="0">
-                <a:solidFill>
-                  <a:srgbClr val="5C6570"/>
-                </a:solidFill>
-                <a:latin typeface="Calibri" pitchFamily="34" charset="0"/>
-                <a:ea typeface="Calibri" pitchFamily="34" charset="-122"/>
-                <a:cs typeface="Calibri" pitchFamily="34" charset="-120"/>
-              </a:rPr>
-              <a:t>条件ブロックにより変動</a:t>
-            </a:r>
-            <a:endParaRPr lang="en-US" sz="950" dirty="0"/>
-          </a:p>
-        </p:txBody>
-      </p:sp>
-      <p:graphicFrame>
-        <p:nvGraphicFramePr>
-          <p:cNvPr id="21" name="Chart 5" descr=""/>
-          <p:cNvGraphicFramePr/>
-          <p:nvPr/>
-        </p:nvGraphicFramePr>
-        <p:xfrm>
-          <a:off x="8138160" y="4434840"/>
-          <a:ext cx="3429000" cy="1691640"/>
-        </p:xfrm>
-        <a:graphic xmlns:a="http://schemas.openxmlformats.org/drawingml/2006/main">
-          <a:graphicData uri="http://schemas.openxmlformats.org/drawingml/2006/chart">
-            <c:chart xmlns:c="http://schemas.openxmlformats.org/drawingml/2006/chart" r:id="rId6"/>
-          </a:graphicData>
-        </a:graphic>
-      </p:graphicFrame>
-      <p:sp>
-        <p:nvSpPr>
-          <p:cNvPr id="22" name="Text 14"/>
-          <p:cNvSpPr/>
-          <p:nvPr/>
-        </p:nvSpPr>
-        <p:spPr>
-          <a:xfrm>
-            <a:off x="548640" y="6473952"/>
-            <a:ext cx="11091672" cy="274320"/>
-          </a:xfrm>
-          <a:prstGeom prst="rect">
-            <a:avLst/>
-          </a:prstGeom>
-          <a:noFill/>
-          <a:ln/>
-        </p:spPr>
-        <p:txBody>
-          <a:bodyPr wrap="square" rtlCol="0" anchor="ctr"/>
-          <a:lstStyle/>
-          <a:p>
-            <a:pPr algn="l" indent="0" marL="0">
-              <a:buNone/>
-            </a:pPr>
-            <a:r>
-              <a:rPr lang="en-US" sz="1000" dirty="0">
-                <a:solidFill>
-                  <a:srgbClr val="5C6570"/>
-                </a:solidFill>
-                <a:latin typeface="Calibri" pitchFamily="34" charset="0"/>
-                <a:ea typeface="Calibri" pitchFamily="34" charset="-122"/>
-                <a:cs typeface="Calibri" pitchFamily="34" charset="-120"/>
-              </a:rPr>
-              <a:t>各条件3日間平均。起床時コンディション・睡眠の質・持久力・爆発力は高いほど良好、運動後疲労・RPEは高いほど負荷が大きいと仮定（原データに尺度定義なし）。</a:t>
-            </a:r>
-            <a:endParaRPr lang="en-US" sz="1000" dirty="0"/>
           </a:p>
         </p:txBody>
       </p:sp>
@@ -8829,7 +10310,7 @@
                 <a:ea typeface="Calibri" pitchFamily="34" charset="-122"/>
                 <a:cs typeface="Calibri" pitchFamily="34" charset="-120"/>
               </a:rPr>
-              <a:t>SYNTHESIS</a:t>
+              <a:t>CONDITION</a:t>
             </a:r>
             <a:endParaRPr lang="en-US" sz="1300" dirty="0"/>
           </a:p>
@@ -8868,7 +10349,7 @@
                 <a:ea typeface="Cambria" pitchFamily="34" charset="-122"/>
                 <a:cs typeface="Cambria" pitchFamily="34" charset="-120"/>
               </a:rPr>
-              <a:t>総合考察：食事 × トレーニング × 血糖</a:t>
+              <a:t>自覚コンディション（4条件比較）</a:t>
             </a:r>
             <a:endParaRPr lang="en-US" sz="2800" dirty="0"/>
           </a:p>
@@ -8876,41 +10357,14 @@
       </p:sp>
       <p:sp>
         <p:nvSpPr>
-          <p:cNvPr id="4" name="Shape 2"/>
-          <p:cNvSpPr/>
+          <p:cNvPr id="4" name="Text 2"/>
+          <p:cNvSpPr txBox="1"/>
           <p:nvPr/>
         </p:nvSpPr>
         <p:spPr>
           <a:xfrm>
             <a:off x="548640" y="1600200"/>
-            <a:ext cx="11091672" cy="1417320"/>
-          </a:xfrm>
-          <a:prstGeom prst="roundRect">
-            <a:avLst>
-              <a:gd name="adj" fmla="val 7742"/>
-            </a:avLst>
-          </a:prstGeom>
-          <a:solidFill>
-            <a:srgbClr val="FDF3E2"/>
-          </a:solidFill>
-          <a:ln w="12700">
-            <a:solidFill>
-              <a:srgbClr val="EDA100"/>
-            </a:solidFill>
-            <a:prstDash val="solid"/>
-          </a:ln>
-        </p:spPr>
-      </p:sp>
-      <p:sp>
-        <p:nvSpPr>
-          <p:cNvPr id="5" name="Text 3"/>
-          <p:cNvSpPr txBox="1"/>
-          <p:nvPr/>
-        </p:nvSpPr>
-        <p:spPr>
-          <a:xfrm>
-            <a:off x="822960" y="1737360"/>
-            <a:ext cx="10543032" cy="274320"/>
+            <a:ext cx="6309360" cy="256032"/>
           </a:xfrm>
           <a:prstGeom prst="rect">
             <a:avLst/>
@@ -8926,30 +10380,46 @@
               <a:buNone/>
             </a:pPr>
             <a:r>
-              <a:rPr lang="en-US" sz="1300" b="1" dirty="0">
-                <a:solidFill>
-                  <a:srgbClr val="6B4B00"/>
+              <a:rPr lang="en-US" sz="1250" b="1" dirty="0">
+                <a:solidFill>
+                  <a:srgbClr val="21295C"/>
                 </a:solidFill>
                 <a:latin typeface="Calibri" pitchFamily="34" charset="0"/>
                 <a:ea typeface="Calibri" pitchFamily="34" charset="-122"/>
                 <a:cs typeface="Calibri" pitchFamily="34" charset="-120"/>
               </a:rPr>
-              <a:t>⚠ 重要な交絡：練習時間が条件ブロックごとに大きく異なる</a:t>
+              <a:t>満腹感の推移 (0=空腹〜10=満腹)</a:t>
             </a:r>
-            <a:endParaRPr lang="en-US" sz="1300" dirty="0"/>
-          </a:p>
-        </p:txBody>
-      </p:sp>
-      <p:sp>
-        <p:nvSpPr>
-          <p:cNvPr id="6" name="Text 4"/>
+            <a:endParaRPr lang="en-US" sz="1250" dirty="0"/>
+          </a:p>
+        </p:txBody>
+      </p:sp>
+      <p:graphicFrame>
+        <p:nvGraphicFramePr>
+          <p:cNvPr id="5" name="Chart 0" descr=""/>
+          <p:cNvGraphicFramePr/>
+          <p:nvPr/>
+        </p:nvGraphicFramePr>
+        <p:xfrm>
+          <a:off x="548640" y="1874520"/>
+          <a:ext cx="6309360" cy="1691640"/>
+        </p:xfrm>
+        <a:graphic xmlns:a="http://schemas.openxmlformats.org/drawingml/2006/main">
+          <a:graphicData uri="http://schemas.openxmlformats.org/drawingml/2006/chart">
+            <c:chart xmlns:c="http://schemas.openxmlformats.org/drawingml/2006/chart" r:id="rId1"/>
+          </a:graphicData>
+        </a:graphic>
+      </p:graphicFrame>
+      <p:sp>
+        <p:nvSpPr>
+          <p:cNvPr id="6" name="Text 3"/>
           <p:cNvSpPr txBox="1"/>
           <p:nvPr/>
         </p:nvSpPr>
         <p:spPr>
           <a:xfrm>
-            <a:off x="822960" y="2048256"/>
-            <a:ext cx="10543032" cy="914400"/>
+            <a:off x="548640" y="3703320"/>
+            <a:ext cx="6309360" cy="256032"/>
           </a:xfrm>
           <a:prstGeom prst="rect">
             <a:avLst/>
@@ -8965,72 +10435,66 @@
               <a:buNone/>
             </a:pPr>
             <a:r>
-              <a:rPr lang="en-US" sz="1150" dirty="0">
-                <a:solidFill>
-                  <a:srgbClr val="6B4B00"/>
+              <a:rPr lang="en-US" sz="1250" b="1" dirty="0">
+                <a:solidFill>
+                  <a:srgbClr val="21295C"/>
                 </a:solidFill>
                 <a:latin typeface="Calibri" pitchFamily="34" charset="0"/>
                 <a:ea typeface="Calibri" pitchFamily="34" charset="-122"/>
                 <a:cs typeface="Calibri" pitchFamily="34" charset="-120"/>
               </a:rPr>
-              <a:t>固形の3日間は平均140分（180/120/120分）と突出して長く、スムージーの3日間は毎日60分で最短。RPE・爆発力・持久力・運動後疲労は運動量そのものにも左右されるため、固形のRPE・爆発力の高さは「食事」よりも「練習量が多かったこと」を反映している可能性がある。トレーニングはどの条件も11:00〜14:00の間に実施。</a:t>
+              <a:t>食欲(摂食可能感)の推移 (0=食べられない〜10=まだ食べられる)</a:t>
             </a:r>
-            <a:endParaRPr lang="en-US" sz="1150" dirty="0"/>
-          </a:p>
-        </p:txBody>
-      </p:sp>
-      <p:sp>
-        <p:nvSpPr>
-          <p:cNvPr id="7" name="Shape 5"/>
+            <a:endParaRPr lang="en-US" sz="1250" dirty="0"/>
+          </a:p>
+        </p:txBody>
+      </p:sp>
+      <p:graphicFrame>
+        <p:nvGraphicFramePr>
+          <p:cNvPr id="7" name="Chart 1" descr=""/>
+          <p:cNvGraphicFramePr/>
+          <p:nvPr/>
+        </p:nvGraphicFramePr>
+        <p:xfrm>
+          <a:off x="548640" y="3977640"/>
+          <a:ext cx="6309360" cy="1691640"/>
+        </p:xfrm>
+        <a:graphic xmlns:a="http://schemas.openxmlformats.org/drawingml/2006/main">
+          <a:graphicData uri="http://schemas.openxmlformats.org/drawingml/2006/chart">
+            <c:chart xmlns:c="http://schemas.openxmlformats.org/drawingml/2006/chart" r:id="rId2"/>
+          </a:graphicData>
+        </a:graphic>
+      </p:graphicFrame>
+      <p:sp>
+        <p:nvSpPr>
+          <p:cNvPr id="8" name="Shape 4"/>
           <p:cNvSpPr/>
           <p:nvPr/>
         </p:nvSpPr>
         <p:spPr>
           <a:xfrm>
-            <a:off x="548640" y="3200400"/>
-            <a:ext cx="5362956" cy="1828800"/>
-          </a:xfrm>
-          <a:prstGeom prst="roundRect">
-            <a:avLst>
-              <a:gd name="adj" fmla="val 5000"/>
-            </a:avLst>
+            <a:off x="548640" y="5870448"/>
+            <a:ext cx="146304" cy="118872"/>
+          </a:xfrm>
+          <a:prstGeom prst="rect">
+            <a:avLst/>
           </a:prstGeom>
           <a:solidFill>
-            <a:srgbClr val="F4F7F9"/>
+            <a:srgbClr val="2A78D6"/>
           </a:solidFill>
           <a:ln/>
         </p:spPr>
       </p:sp>
       <p:sp>
         <p:nvSpPr>
-          <p:cNvPr id="8" name="Shape 6"/>
-          <p:cNvSpPr/>
-          <p:nvPr/>
-        </p:nvSpPr>
-        <p:spPr>
-          <a:xfrm>
-            <a:off x="822960" y="3337560"/>
-            <a:ext cx="146304" cy="347472"/>
-          </a:xfrm>
-          <a:prstGeom prst="rect">
-            <a:avLst/>
-          </a:prstGeom>
-          <a:solidFill>
-            <a:srgbClr val="1BAF7A"/>
-          </a:solidFill>
-          <a:ln/>
-        </p:spPr>
-      </p:sp>
-      <p:sp>
-        <p:nvSpPr>
-          <p:cNvPr id="9" name="Text 7"/>
+          <p:cNvPr id="9" name="Text 5"/>
           <p:cNvSpPr txBox="1"/>
           <p:nvPr/>
         </p:nvSpPr>
         <p:spPr>
           <a:xfrm>
-            <a:off x="1078992" y="3300984"/>
-            <a:ext cx="4539996" cy="420624"/>
+            <a:off x="749808" y="5760720"/>
+            <a:ext cx="1554480" cy="274320"/>
           </a:xfrm>
           <a:prstGeom prst="rect">
             <a:avLst/>
@@ -9046,30 +10510,50 @@
               <a:buNone/>
             </a:pPr>
             <a:r>
-              <a:rPr lang="en-US" sz="1400" b="1" dirty="0">
-                <a:solidFill>
-                  <a:srgbClr val="21295C"/>
+              <a:rPr lang="en-US" sz="950" dirty="0">
+                <a:solidFill>
+                  <a:srgbClr val="5C6570"/>
                 </a:solidFill>
                 <a:latin typeface="Calibri" pitchFamily="34" charset="0"/>
                 <a:ea typeface="Calibri" pitchFamily="34" charset="-122"/>
                 <a:cs typeface="Calibri" pitchFamily="34" charset="-120"/>
               </a:rPr>
-              <a:t>おにぎり＋スムージー（糖質ノーマル）</a:t>
+              <a:t>固形</a:t>
             </a:r>
-            <a:endParaRPr lang="en-US" sz="1400" dirty="0"/>
-          </a:p>
-        </p:txBody>
-      </p:sp>
-      <p:sp>
-        <p:nvSpPr>
-          <p:cNvPr id="10" name="Text 8"/>
+            <a:endParaRPr lang="en-US" sz="950" dirty="0"/>
+          </a:p>
+        </p:txBody>
+      </p:sp>
+      <p:sp>
+        <p:nvSpPr>
+          <p:cNvPr id="10" name="Shape 6"/>
+          <p:cNvSpPr/>
+          <p:nvPr/>
+        </p:nvSpPr>
+        <p:spPr>
+          <a:xfrm>
+            <a:off x="2176272" y="5870448"/>
+            <a:ext cx="146304" cy="118872"/>
+          </a:xfrm>
+          <a:prstGeom prst="rect">
+            <a:avLst/>
+          </a:prstGeom>
+          <a:solidFill>
+            <a:srgbClr val="EB6834"/>
+          </a:solidFill>
+          <a:ln/>
+        </p:spPr>
+      </p:sp>
+      <p:sp>
+        <p:nvSpPr>
+          <p:cNvPr id="11" name="Text 7"/>
           <p:cNvSpPr txBox="1"/>
           <p:nvPr/>
         </p:nvSpPr>
         <p:spPr>
           <a:xfrm>
-            <a:off x="822960" y="3794760"/>
-            <a:ext cx="4814316" cy="347472"/>
+            <a:off x="2377440" y="5760720"/>
+            <a:ext cx="1554480" cy="274320"/>
           </a:xfrm>
           <a:prstGeom prst="rect">
             <a:avLst/>
@@ -9085,30 +10569,50 @@
               <a:buNone/>
             </a:pPr>
             <a:r>
-              <a:rPr lang="en-US" sz="1100" dirty="0">
-                <a:solidFill>
-                  <a:srgbClr val="1A1A1A"/>
+              <a:rPr lang="en-US" sz="950" dirty="0">
+                <a:solidFill>
+                  <a:srgbClr val="5C6570"/>
                 </a:solidFill>
                 <a:latin typeface="Calibri" pitchFamily="34" charset="0"/>
                 <a:ea typeface="Calibri" pitchFamily="34" charset="-122"/>
                 <a:cs typeface="Calibri" pitchFamily="34" charset="-120"/>
               </a:rPr>
-              <a:t>•  血糖の乱高下（CV）が4条件中最小</a:t>
+              <a:t>スムージー</a:t>
             </a:r>
-            <a:endParaRPr lang="en-US" sz="1100" dirty="0"/>
-          </a:p>
-        </p:txBody>
-      </p:sp>
-      <p:sp>
-        <p:nvSpPr>
-          <p:cNvPr id="11" name="Text 9"/>
+            <a:endParaRPr lang="en-US" sz="950" dirty="0"/>
+          </a:p>
+        </p:txBody>
+      </p:sp>
+      <p:sp>
+        <p:nvSpPr>
+          <p:cNvPr id="12" name="Shape 8"/>
+          <p:cNvSpPr/>
+          <p:nvPr/>
+        </p:nvSpPr>
+        <p:spPr>
+          <a:xfrm>
+            <a:off x="3803904" y="5870448"/>
+            <a:ext cx="146304" cy="118872"/>
+          </a:xfrm>
+          <a:prstGeom prst="rect">
+            <a:avLst/>
+          </a:prstGeom>
+          <a:solidFill>
+            <a:srgbClr val="1BAF7A"/>
+          </a:solidFill>
+          <a:ln/>
+        </p:spPr>
+      </p:sp>
+      <p:sp>
+        <p:nvSpPr>
+          <p:cNvPr id="13" name="Text 9"/>
           <p:cNvSpPr txBox="1"/>
           <p:nvPr/>
         </p:nvSpPr>
         <p:spPr>
           <a:xfrm>
-            <a:off x="822960" y="4178808"/>
-            <a:ext cx="4814316" cy="347472"/>
+            <a:off x="4005072" y="5760720"/>
+            <a:ext cx="1554480" cy="274320"/>
           </a:xfrm>
           <a:prstGeom prst="rect">
             <a:avLst/>
@@ -9124,30 +10628,50 @@
               <a:buNone/>
             </a:pPr>
             <a:r>
-              <a:rPr lang="en-US" sz="1100" dirty="0">
-                <a:solidFill>
-                  <a:srgbClr val="1A1A1A"/>
+              <a:rPr lang="en-US" sz="950" dirty="0">
+                <a:solidFill>
+                  <a:srgbClr val="5C6570"/>
                 </a:solidFill>
                 <a:latin typeface="Calibri" pitchFamily="34" charset="0"/>
                 <a:ea typeface="Calibri" pitchFamily="34" charset="-122"/>
                 <a:cs typeface="Calibri" pitchFamily="34" charset="-120"/>
               </a:rPr>
-              <a:t>•  持久力の自己評価が4条件中最高（3.83）</a:t>
+              <a:t>おにぎり+スムージー</a:t>
             </a:r>
-            <a:endParaRPr lang="en-US" sz="1100" dirty="0"/>
-          </a:p>
-        </p:txBody>
-      </p:sp>
-      <p:sp>
-        <p:nvSpPr>
-          <p:cNvPr id="12" name="Text 10"/>
+            <a:endParaRPr lang="en-US" sz="950" dirty="0"/>
+          </a:p>
+        </p:txBody>
+      </p:sp>
+      <p:sp>
+        <p:nvSpPr>
+          <p:cNvPr id="14" name="Shape 10"/>
+          <p:cNvSpPr/>
+          <p:nvPr/>
+        </p:nvSpPr>
+        <p:spPr>
+          <a:xfrm>
+            <a:off x="5431536" y="5870448"/>
+            <a:ext cx="146304" cy="118872"/>
+          </a:xfrm>
+          <a:prstGeom prst="rect">
+            <a:avLst/>
+          </a:prstGeom>
+          <a:solidFill>
+            <a:srgbClr val="EDA100"/>
+          </a:solidFill>
+          <a:ln/>
+        </p:spPr>
+      </p:sp>
+      <p:sp>
+        <p:nvSpPr>
+          <p:cNvPr id="15" name="Text 11"/>
           <p:cNvSpPr txBox="1"/>
           <p:nvPr/>
         </p:nvSpPr>
         <p:spPr>
           <a:xfrm>
-            <a:off x="822960" y="4562856"/>
-            <a:ext cx="4814316" cy="347472"/>
+            <a:off x="5632704" y="5760720"/>
+            <a:ext cx="1554480" cy="274320"/>
           </a:xfrm>
           <a:prstGeom prst="rect">
             <a:avLst/>
@@ -9163,72 +10687,52 @@
               <a:buNone/>
             </a:pPr>
             <a:r>
-              <a:rPr lang="en-US" sz="1100" dirty="0">
-                <a:solidFill>
-                  <a:srgbClr val="1A1A1A"/>
+              <a:rPr lang="en-US" sz="950" dirty="0">
+                <a:solidFill>
+                  <a:srgbClr val="5C6570"/>
                 </a:solidFill>
                 <a:latin typeface="Calibri" pitchFamily="34" charset="0"/>
                 <a:ea typeface="Calibri" pitchFamily="34" charset="-122"/>
                 <a:cs typeface="Calibri" pitchFamily="34" charset="-120"/>
               </a:rPr>
-              <a:t>•  消化器症状も軽微</a:t>
+              <a:t>おにぎり+糖質減</a:t>
             </a:r>
-            <a:endParaRPr lang="en-US" sz="1100" dirty="0"/>
-          </a:p>
-        </p:txBody>
-      </p:sp>
-      <p:sp>
-        <p:nvSpPr>
-          <p:cNvPr id="13" name="Shape 11"/>
+            <a:endParaRPr lang="en-US" sz="950" dirty="0"/>
+          </a:p>
+        </p:txBody>
+      </p:sp>
+      <p:sp>
+        <p:nvSpPr>
+          <p:cNvPr id="16" name="Shape 12"/>
           <p:cNvSpPr/>
           <p:nvPr/>
         </p:nvSpPr>
         <p:spPr>
           <a:xfrm>
-            <a:off x="6277356" y="3200400"/>
-            <a:ext cx="5362956" cy="1828800"/>
+            <a:off x="7635240" y="1600200"/>
+            <a:ext cx="4005072" cy="4434840"/>
           </a:xfrm>
           <a:prstGeom prst="roundRect">
             <a:avLst>
-              <a:gd name="adj" fmla="val 5000"/>
+              <a:gd name="adj" fmla="val 2283"/>
             </a:avLst>
           </a:prstGeom>
           <a:solidFill>
-            <a:srgbClr val="F4F7F9"/>
+            <a:srgbClr val="EAF7F0"/>
           </a:solidFill>
           <a:ln/>
         </p:spPr>
       </p:sp>
       <p:sp>
         <p:nvSpPr>
-          <p:cNvPr id="14" name="Shape 12"/>
-          <p:cNvSpPr/>
-          <p:nvPr/>
-        </p:nvSpPr>
-        <p:spPr>
-          <a:xfrm>
-            <a:off x="6551676" y="3337560"/>
-            <a:ext cx="146304" cy="347472"/>
-          </a:xfrm>
-          <a:prstGeom prst="rect">
-            <a:avLst/>
-          </a:prstGeom>
-          <a:solidFill>
-            <a:srgbClr val="EDA100"/>
-          </a:solidFill>
-          <a:ln/>
-        </p:spPr>
-      </p:sp>
-      <p:sp>
-        <p:nvSpPr>
-          <p:cNvPr id="15" name="Text 13"/>
+          <p:cNvPr id="17" name="Text 13"/>
           <p:cNvSpPr txBox="1"/>
           <p:nvPr/>
         </p:nvSpPr>
         <p:spPr>
           <a:xfrm>
-            <a:off x="6807708" y="3300984"/>
-            <a:ext cx="4539996" cy="420624"/>
+            <a:off x="7909560" y="1828800"/>
+            <a:ext cx="3566160" cy="365760"/>
           </a:xfrm>
           <a:prstGeom prst="rect">
             <a:avLst/>
@@ -9244,30 +10748,30 @@
               <a:buNone/>
             </a:pPr>
             <a:r>
-              <a:rPr lang="en-US" sz="1400" b="1" dirty="0">
-                <a:solidFill>
-                  <a:srgbClr val="21295C"/>
+              <a:rPr lang="en-US" sz="1350" b="1" dirty="0">
+                <a:solidFill>
+                  <a:srgbClr val="0F5C3D"/>
                 </a:solidFill>
                 <a:latin typeface="Calibri" pitchFamily="34" charset="0"/>
                 <a:ea typeface="Calibri" pitchFamily="34" charset="-122"/>
                 <a:cs typeface="Calibri" pitchFamily="34" charset="-120"/>
               </a:rPr>
-              <a:t>おにぎり＋糖質減</a:t>
+              <a:t>✓ 消化器症状は4条件とも良好</a:t>
             </a:r>
-            <a:endParaRPr lang="en-US" sz="1400" dirty="0"/>
-          </a:p>
-        </p:txBody>
-      </p:sp>
-      <p:sp>
-        <p:nvSpPr>
-          <p:cNvPr id="16" name="Text 14"/>
+            <a:endParaRPr lang="en-US" sz="1350" dirty="0"/>
+          </a:p>
+        </p:txBody>
+      </p:sp>
+      <p:sp>
+        <p:nvSpPr>
+          <p:cNvPr id="18" name="Text 14"/>
           <p:cNvSpPr txBox="1"/>
           <p:nvPr/>
         </p:nvSpPr>
         <p:spPr>
           <a:xfrm>
-            <a:off x="6551676" y="3794760"/>
-            <a:ext cx="4814316" cy="347472"/>
+            <a:off x="7909560" y="2331720"/>
+            <a:ext cx="3520440" cy="868680"/>
           </a:xfrm>
           <a:prstGeom prst="rect">
             <a:avLst/>
@@ -9291,7 +10795,7 @@
                 <a:ea typeface="Calibri" pitchFamily="34" charset="-122"/>
                 <a:cs typeface="Calibri" pitchFamily="34" charset="-120"/>
               </a:rPr>
-              <a:t>•  起床時コンディション・睡眠の質が4条件中最高</a:t>
+              <a:t>•  頭痛：4条件すべて全測定点で最小値(1)、変化なし</a:t>
             </a:r>
             <a:endParaRPr lang="en-US" sz="1100" dirty="0"/>
           </a:p>
@@ -9299,14 +10803,14 @@
       </p:sp>
       <p:sp>
         <p:nvSpPr>
-          <p:cNvPr id="17" name="Text 15"/>
+          <p:cNvPr id="19" name="Text 15"/>
           <p:cNvSpPr txBox="1"/>
           <p:nvPr/>
         </p:nvSpPr>
         <p:spPr>
           <a:xfrm>
-            <a:off x="6551676" y="4178808"/>
-            <a:ext cx="4814316" cy="347472"/>
+            <a:off x="7909560" y="3264408"/>
+            <a:ext cx="3520440" cy="868680"/>
           </a:xfrm>
           <a:prstGeom prst="rect">
             <a:avLst/>
@@ -9330,7 +10834,7 @@
                 <a:ea typeface="Calibri" pitchFamily="34" charset="-122"/>
                 <a:cs typeface="Calibri" pitchFamily="34" charset="-120"/>
               </a:rPr>
-              <a:t>•  iAUC 2hが約39%減少（血糖面で最良）</a:t>
+              <a:t>•  吐き気：4条件すべてほぼ1（おにぎり+スムージーのDAY10 9:30のみ一時的に2）</a:t>
             </a:r>
             <a:endParaRPr lang="en-US" sz="1100" dirty="0"/>
           </a:p>
@@ -9338,14 +10842,14 @@
       </p:sp>
       <p:sp>
         <p:nvSpPr>
-          <p:cNvPr id="18" name="Text 16"/>
+          <p:cNvPr id="20" name="Text 16"/>
           <p:cNvSpPr txBox="1"/>
           <p:nvPr/>
         </p:nvSpPr>
         <p:spPr>
           <a:xfrm>
-            <a:off x="6551676" y="4562856"/>
-            <a:ext cx="4814316" cy="347472"/>
+            <a:off x="7909560" y="4197096"/>
+            <a:ext cx="3520440" cy="868680"/>
           </a:xfrm>
           <a:prstGeom prst="rect">
             <a:avLst/>
@@ -9369,7 +10873,7 @@
                 <a:ea typeface="Calibri" pitchFamily="34" charset="-122"/>
                 <a:cs typeface="Calibri" pitchFamily="34" charset="-120"/>
               </a:rPr>
-              <a:t>•  持久力・爆発力の自己評価は4条件中最低</a:t>
+              <a:t>•  血糖値が高めに推移するおにぎり同時摂取条件でも、消化器症状は悪化していない</a:t>
             </a:r>
             <a:endParaRPr lang="en-US" sz="1100" dirty="0"/>
           </a:p>
@@ -9377,36 +10881,14 @@
       </p:sp>
       <p:sp>
         <p:nvSpPr>
-          <p:cNvPr id="19" name="Shape 17"/>
-          <p:cNvSpPr/>
-          <p:nvPr/>
-        </p:nvSpPr>
-        <p:spPr>
-          <a:xfrm>
-            <a:off x="548640" y="5212080"/>
-            <a:ext cx="11091672" cy="1188720"/>
-          </a:xfrm>
-          <a:prstGeom prst="roundRect">
-            <a:avLst>
-              <a:gd name="adj" fmla="val 7692"/>
-            </a:avLst>
-          </a:prstGeom>
-          <a:solidFill>
-            <a:srgbClr val="EAF7F0"/>
-          </a:solidFill>
-          <a:ln/>
-        </p:spPr>
-      </p:sp>
-      <p:sp>
-        <p:nvSpPr>
-          <p:cNvPr id="20" name="Text 18"/>
+          <p:cNvPr id="21" name="Text 17"/>
           <p:cNvSpPr txBox="1"/>
           <p:nvPr/>
         </p:nvSpPr>
         <p:spPr>
           <a:xfrm>
-            <a:off x="822960" y="5394960"/>
-            <a:ext cx="10543032" cy="868680"/>
+            <a:off x="7909560" y="5129784"/>
+            <a:ext cx="3520440" cy="868680"/>
           </a:xfrm>
           <a:prstGeom prst="rect">
             <a:avLst/>
@@ -9422,17 +10904,17 @@
               <a:buNone/>
             </a:pPr>
             <a:r>
-              <a:rPr lang="en-US" sz="1250" b="1" dirty="0">
-                <a:solidFill>
-                  <a:srgbClr val="0F5C3D"/>
+              <a:rPr lang="en-US" sz="1100" dirty="0">
+                <a:solidFill>
+                  <a:srgbClr val="1A1A1A"/>
                 </a:solidFill>
                 <a:latin typeface="Calibri" pitchFamily="34" charset="0"/>
                 <a:ea typeface="Calibri" pitchFamily="34" charset="-122"/>
                 <a:cs typeface="Calibri" pitchFamily="34" charset="-120"/>
               </a:rPr>
-              <a:t>✓ 総合評価：現時点のデータでは「おにぎり＋スムージー（糖質ノーマル）」が最もバランスの良い候補。「おにぎり＋糖質減」は血糖・睡眠面で優れるが、持久力・爆発力の低下が見られるため、強度の高い練習日には慎重な適用が望ましい。</a:t>
+              <a:t>•  満腹感・食欲の差は「おにぎりを同時に食べたか」による食事量の違いを反映しており、副食の形態（固形/液状）そのものの効果ではない</a:t>
             </a:r>
-            <a:endParaRPr lang="en-US" sz="1250" dirty="0"/>
+            <a:endParaRPr lang="en-US" sz="1100" dirty="0"/>
           </a:p>
         </p:txBody>
       </p:sp>
@@ -9447,6 +10929,1391 @@
 <file path=ppt/slides/slide13.xml><?xml version="1.0" encoding="utf-8"?>
 <p:sld xmlns:a="http://schemas.openxmlformats.org/drawingml/2006/main" xmlns:r="http://schemas.openxmlformats.org/officeDocument/2006/relationships" xmlns:p="http://schemas.openxmlformats.org/presentationml/2006/main">
   <p:cSld name="Slide 13">
+    <p:bg>
+      <p:bgPr>
+        <a:solidFill>
+          <a:srgbClr val="FFFFFF"/>
+        </a:solidFill>
+      </p:bgPr>
+    </p:bg>
+    <p:spTree>
+      <p:nvGrpSpPr>
+        <p:cNvPr id="1" name=""/>
+        <p:cNvGrpSpPr/>
+        <p:nvPr/>
+      </p:nvGrpSpPr>
+      <p:grpSpPr>
+        <a:xfrm>
+          <a:off x="0" y="0"/>
+          <a:ext cx="0" cy="0"/>
+          <a:chOff x="0" y="0"/>
+          <a:chExt cx="0" cy="0"/>
+        </a:xfrm>
+      </p:grpSpPr>
+      <p:sp>
+        <p:nvSpPr>
+          <p:cNvPr id="2" name="Text 0"/>
+          <p:cNvSpPr txBox="1"/>
+          <p:nvPr/>
+        </p:nvSpPr>
+        <p:spPr>
+          <a:xfrm>
+            <a:off x="548640" y="457200"/>
+            <a:ext cx="11091672" cy="365760"/>
+          </a:xfrm>
+          <a:prstGeom prst="rect">
+            <a:avLst/>
+          </a:prstGeom>
+          <a:noFill/>
+          <a:ln/>
+        </p:spPr>
+        <p:txBody>
+          <a:bodyPr wrap="square" rtlCol="0" anchor="ctr"/>
+          <a:lstStyle/>
+          <a:p>
+            <a:pPr indent="0" marL="0">
+              <a:buNone/>
+            </a:pPr>
+            <a:r>
+              <a:rPr lang="en-US" sz="1300" b="1" spc="100" kern="0" dirty="0">
+                <a:solidFill>
+                  <a:srgbClr val="1C7293"/>
+                </a:solidFill>
+                <a:latin typeface="Calibri" pitchFamily="34" charset="0"/>
+                <a:ea typeface="Calibri" pitchFamily="34" charset="-122"/>
+                <a:cs typeface="Calibri" pitchFamily="34" charset="-120"/>
+              </a:rPr>
+              <a:t>PERFORMANCE</a:t>
+            </a:r>
+            <a:endParaRPr lang="en-US" sz="1300" dirty="0"/>
+          </a:p>
+        </p:txBody>
+      </p:sp>
+      <p:sp>
+        <p:nvSpPr>
+          <p:cNvPr id="3" name="Text 1"/>
+          <p:cNvSpPr txBox="1"/>
+          <p:nvPr/>
+        </p:nvSpPr>
+        <p:spPr>
+          <a:xfrm>
+            <a:off x="548640" y="786384"/>
+            <a:ext cx="11091672" cy="640080"/>
+          </a:xfrm>
+          <a:prstGeom prst="rect">
+            <a:avLst/>
+          </a:prstGeom>
+          <a:noFill/>
+          <a:ln/>
+        </p:spPr>
+        <p:txBody>
+          <a:bodyPr wrap="square" rtlCol="0" anchor="ctr"/>
+          <a:lstStyle/>
+          <a:p>
+            <a:pPr indent="0" marL="0">
+              <a:buNone/>
+            </a:pPr>
+            <a:r>
+              <a:rPr lang="en-US" sz="2800" b="1" dirty="0">
+                <a:solidFill>
+                  <a:srgbClr val="21295C"/>
+                </a:solidFill>
+                <a:latin typeface="Cambria" pitchFamily="34" charset="0"/>
+                <a:ea typeface="Cambria" pitchFamily="34" charset="-122"/>
+                <a:cs typeface="Cambria" pitchFamily="34" charset="-120"/>
+              </a:rPr>
+              <a:t>毎晩のコンディション・トレーニング指標（4条件比較）</a:t>
+            </a:r>
+            <a:endParaRPr lang="en-US" sz="2800" dirty="0"/>
+          </a:p>
+        </p:txBody>
+      </p:sp>
+      <p:sp>
+        <p:nvSpPr>
+          <p:cNvPr id="4" name="Text 2"/>
+          <p:cNvSpPr txBox="1"/>
+          <p:nvPr/>
+        </p:nvSpPr>
+        <p:spPr>
+          <a:xfrm>
+            <a:off x="548640" y="1572768"/>
+            <a:ext cx="3429000" cy="256032"/>
+          </a:xfrm>
+          <a:prstGeom prst="rect">
+            <a:avLst/>
+          </a:prstGeom>
+          <a:noFill/>
+          <a:ln/>
+        </p:spPr>
+        <p:txBody>
+          <a:bodyPr wrap="square" lIns="0" tIns="0" rIns="0" bIns="0" rtlCol="0" anchor="ctr"/>
+          <a:lstStyle/>
+          <a:p>
+            <a:pPr indent="0" marL="0">
+              <a:buNone/>
+            </a:pPr>
+            <a:r>
+              <a:rPr lang="en-US" sz="1200" b="1" dirty="0">
+                <a:solidFill>
+                  <a:srgbClr val="21295C"/>
+                </a:solidFill>
+                <a:latin typeface="Calibri" pitchFamily="34" charset="0"/>
+                <a:ea typeface="Calibri" pitchFamily="34" charset="-122"/>
+                <a:cs typeface="Calibri" pitchFamily="34" charset="-120"/>
+              </a:rPr>
+              <a:t>起床時コンディション</a:t>
+            </a:r>
+            <a:endParaRPr lang="en-US" sz="1200" dirty="0"/>
+          </a:p>
+        </p:txBody>
+      </p:sp>
+      <p:sp>
+        <p:nvSpPr>
+          <p:cNvPr id="5" name="Text 3"/>
+          <p:cNvSpPr txBox="1"/>
+          <p:nvPr/>
+        </p:nvSpPr>
+        <p:spPr>
+          <a:xfrm>
+            <a:off x="548640" y="1819656"/>
+            <a:ext cx="3429000" cy="219456"/>
+          </a:xfrm>
+          <a:prstGeom prst="rect">
+            <a:avLst/>
+          </a:prstGeom>
+          <a:noFill/>
+          <a:ln/>
+        </p:spPr>
+        <p:txBody>
+          <a:bodyPr wrap="square" lIns="0" tIns="0" rIns="0" bIns="0" rtlCol="0" anchor="ctr"/>
+          <a:lstStyle/>
+          <a:p>
+            <a:pPr indent="0" marL="0">
+              <a:buNone/>
+            </a:pPr>
+            <a:r>
+              <a:rPr lang="en-US" sz="950" dirty="0">
+                <a:solidFill>
+                  <a:srgbClr val="5C6570"/>
+                </a:solidFill>
+                <a:latin typeface="Calibri" pitchFamily="34" charset="0"/>
+                <a:ea typeface="Calibri" pitchFamily="34" charset="-122"/>
+                <a:cs typeface="Calibri" pitchFamily="34" charset="-120"/>
+              </a:rPr>
+              <a:t>高いほど良好</a:t>
+            </a:r>
+            <a:endParaRPr lang="en-US" sz="950" dirty="0"/>
+          </a:p>
+        </p:txBody>
+      </p:sp>
+      <p:graphicFrame>
+        <p:nvGraphicFramePr>
+          <p:cNvPr id="6" name="Chart 0" descr=""/>
+          <p:cNvGraphicFramePr/>
+          <p:nvPr/>
+        </p:nvGraphicFramePr>
+        <p:xfrm>
+          <a:off x="548640" y="2103120"/>
+          <a:ext cx="3429000" cy="1691640"/>
+        </p:xfrm>
+        <a:graphic xmlns:a="http://schemas.openxmlformats.org/drawingml/2006/main">
+          <a:graphicData uri="http://schemas.openxmlformats.org/drawingml/2006/chart">
+            <c:chart xmlns:c="http://schemas.openxmlformats.org/drawingml/2006/chart" r:id="rId1"/>
+          </a:graphicData>
+        </a:graphic>
+      </p:graphicFrame>
+      <p:sp>
+        <p:nvSpPr>
+          <p:cNvPr id="7" name="Text 4"/>
+          <p:cNvSpPr txBox="1"/>
+          <p:nvPr/>
+        </p:nvSpPr>
+        <p:spPr>
+          <a:xfrm>
+            <a:off x="4343400" y="1572768"/>
+            <a:ext cx="3429000" cy="256032"/>
+          </a:xfrm>
+          <a:prstGeom prst="rect">
+            <a:avLst/>
+          </a:prstGeom>
+          <a:noFill/>
+          <a:ln/>
+        </p:spPr>
+        <p:txBody>
+          <a:bodyPr wrap="square" lIns="0" tIns="0" rIns="0" bIns="0" rtlCol="0" anchor="ctr"/>
+          <a:lstStyle/>
+          <a:p>
+            <a:pPr indent="0" marL="0">
+              <a:buNone/>
+            </a:pPr>
+            <a:r>
+              <a:rPr lang="en-US" sz="1200" b="1" dirty="0">
+                <a:solidFill>
+                  <a:srgbClr val="21295C"/>
+                </a:solidFill>
+                <a:latin typeface="Calibri" pitchFamily="34" charset="0"/>
+                <a:ea typeface="Calibri" pitchFamily="34" charset="-122"/>
+                <a:cs typeface="Calibri" pitchFamily="34" charset="-120"/>
+              </a:rPr>
+              <a:t>睡眠の質</a:t>
+            </a:r>
+            <a:endParaRPr lang="en-US" sz="1200" dirty="0"/>
+          </a:p>
+        </p:txBody>
+      </p:sp>
+      <p:sp>
+        <p:nvSpPr>
+          <p:cNvPr id="8" name="Text 5"/>
+          <p:cNvSpPr txBox="1"/>
+          <p:nvPr/>
+        </p:nvSpPr>
+        <p:spPr>
+          <a:xfrm>
+            <a:off x="4343400" y="1819656"/>
+            <a:ext cx="3429000" cy="219456"/>
+          </a:xfrm>
+          <a:prstGeom prst="rect">
+            <a:avLst/>
+          </a:prstGeom>
+          <a:noFill/>
+          <a:ln/>
+        </p:spPr>
+        <p:txBody>
+          <a:bodyPr wrap="square" lIns="0" tIns="0" rIns="0" bIns="0" rtlCol="0" anchor="ctr"/>
+          <a:lstStyle/>
+          <a:p>
+            <a:pPr indent="0" marL="0">
+              <a:buNone/>
+            </a:pPr>
+            <a:r>
+              <a:rPr lang="en-US" sz="950" dirty="0">
+                <a:solidFill>
+                  <a:srgbClr val="5C6570"/>
+                </a:solidFill>
+                <a:latin typeface="Calibri" pitchFamily="34" charset="0"/>
+                <a:ea typeface="Calibri" pitchFamily="34" charset="-122"/>
+                <a:cs typeface="Calibri" pitchFamily="34" charset="-120"/>
+              </a:rPr>
+              <a:t>高いほど良好</a:t>
+            </a:r>
+            <a:endParaRPr lang="en-US" sz="950" dirty="0"/>
+          </a:p>
+        </p:txBody>
+      </p:sp>
+      <p:graphicFrame>
+        <p:nvGraphicFramePr>
+          <p:cNvPr id="9" name="Chart 1" descr=""/>
+          <p:cNvGraphicFramePr/>
+          <p:nvPr/>
+        </p:nvGraphicFramePr>
+        <p:xfrm>
+          <a:off x="4343400" y="2103120"/>
+          <a:ext cx="3429000" cy="1691640"/>
+        </p:xfrm>
+        <a:graphic xmlns:a="http://schemas.openxmlformats.org/drawingml/2006/main">
+          <a:graphicData uri="http://schemas.openxmlformats.org/drawingml/2006/chart">
+            <c:chart xmlns:c="http://schemas.openxmlformats.org/drawingml/2006/chart" r:id="rId2"/>
+          </a:graphicData>
+        </a:graphic>
+      </p:graphicFrame>
+      <p:sp>
+        <p:nvSpPr>
+          <p:cNvPr id="10" name="Text 6"/>
+          <p:cNvSpPr txBox="1"/>
+          <p:nvPr/>
+        </p:nvSpPr>
+        <p:spPr>
+          <a:xfrm>
+            <a:off x="8138160" y="1572768"/>
+            <a:ext cx="3429000" cy="256032"/>
+          </a:xfrm>
+          <a:prstGeom prst="rect">
+            <a:avLst/>
+          </a:prstGeom>
+          <a:noFill/>
+          <a:ln/>
+        </p:spPr>
+        <p:txBody>
+          <a:bodyPr wrap="square" lIns="0" tIns="0" rIns="0" bIns="0" rtlCol="0" anchor="ctr"/>
+          <a:lstStyle/>
+          <a:p>
+            <a:pPr indent="0" marL="0">
+              <a:buNone/>
+            </a:pPr>
+            <a:r>
+              <a:rPr lang="en-US" sz="1200" b="1" dirty="0">
+                <a:solidFill>
+                  <a:srgbClr val="21295C"/>
+                </a:solidFill>
+                <a:latin typeface="Calibri" pitchFamily="34" charset="0"/>
+                <a:ea typeface="Calibri" pitchFamily="34" charset="-122"/>
+                <a:cs typeface="Calibri" pitchFamily="34" charset="-120"/>
+              </a:rPr>
+              <a:t>持久力（自己評価）</a:t>
+            </a:r>
+            <a:endParaRPr lang="en-US" sz="1200" dirty="0"/>
+          </a:p>
+        </p:txBody>
+      </p:sp>
+      <p:sp>
+        <p:nvSpPr>
+          <p:cNvPr id="11" name="Text 7"/>
+          <p:cNvSpPr txBox="1"/>
+          <p:nvPr/>
+        </p:nvSpPr>
+        <p:spPr>
+          <a:xfrm>
+            <a:off x="8138160" y="1819656"/>
+            <a:ext cx="3429000" cy="219456"/>
+          </a:xfrm>
+          <a:prstGeom prst="rect">
+            <a:avLst/>
+          </a:prstGeom>
+          <a:noFill/>
+          <a:ln/>
+        </p:spPr>
+        <p:txBody>
+          <a:bodyPr wrap="square" lIns="0" tIns="0" rIns="0" bIns="0" rtlCol="0" anchor="ctr"/>
+          <a:lstStyle/>
+          <a:p>
+            <a:pPr indent="0" marL="0">
+              <a:buNone/>
+            </a:pPr>
+            <a:r>
+              <a:rPr lang="en-US" sz="950" dirty="0">
+                <a:solidFill>
+                  <a:srgbClr val="5C6570"/>
+                </a:solidFill>
+                <a:latin typeface="Calibri" pitchFamily="34" charset="0"/>
+                <a:ea typeface="Calibri" pitchFamily="34" charset="-122"/>
+                <a:cs typeface="Calibri" pitchFamily="34" charset="-120"/>
+              </a:rPr>
+              <a:t>高いほど良好</a:t>
+            </a:r>
+            <a:endParaRPr lang="en-US" sz="950" dirty="0"/>
+          </a:p>
+        </p:txBody>
+      </p:sp>
+      <p:graphicFrame>
+        <p:nvGraphicFramePr>
+          <p:cNvPr id="12" name="Chart 2" descr=""/>
+          <p:cNvGraphicFramePr/>
+          <p:nvPr/>
+        </p:nvGraphicFramePr>
+        <p:xfrm>
+          <a:off x="8138160" y="2103120"/>
+          <a:ext cx="3429000" cy="1691640"/>
+        </p:xfrm>
+        <a:graphic xmlns:a="http://schemas.openxmlformats.org/drawingml/2006/main">
+          <a:graphicData uri="http://schemas.openxmlformats.org/drawingml/2006/chart">
+            <c:chart xmlns:c="http://schemas.openxmlformats.org/drawingml/2006/chart" r:id="rId3"/>
+          </a:graphicData>
+        </a:graphic>
+      </p:graphicFrame>
+      <p:sp>
+        <p:nvSpPr>
+          <p:cNvPr id="13" name="Text 8"/>
+          <p:cNvSpPr txBox="1"/>
+          <p:nvPr/>
+        </p:nvSpPr>
+        <p:spPr>
+          <a:xfrm>
+            <a:off x="548640" y="3904488"/>
+            <a:ext cx="3429000" cy="256032"/>
+          </a:xfrm>
+          <a:prstGeom prst="rect">
+            <a:avLst/>
+          </a:prstGeom>
+          <a:noFill/>
+          <a:ln/>
+        </p:spPr>
+        <p:txBody>
+          <a:bodyPr wrap="square" lIns="0" tIns="0" rIns="0" bIns="0" rtlCol="0" anchor="ctr"/>
+          <a:lstStyle/>
+          <a:p>
+            <a:pPr indent="0" marL="0">
+              <a:buNone/>
+            </a:pPr>
+            <a:r>
+              <a:rPr lang="en-US" sz="1200" b="1" dirty="0">
+                <a:solidFill>
+                  <a:srgbClr val="21295C"/>
+                </a:solidFill>
+                <a:latin typeface="Calibri" pitchFamily="34" charset="0"/>
+                <a:ea typeface="Calibri" pitchFamily="34" charset="-122"/>
+                <a:cs typeface="Calibri" pitchFamily="34" charset="-120"/>
+              </a:rPr>
+              <a:t>爆発力（自己評価）</a:t>
+            </a:r>
+            <a:endParaRPr lang="en-US" sz="1200" dirty="0"/>
+          </a:p>
+        </p:txBody>
+      </p:sp>
+      <p:sp>
+        <p:nvSpPr>
+          <p:cNvPr id="14" name="Text 9"/>
+          <p:cNvSpPr txBox="1"/>
+          <p:nvPr/>
+        </p:nvSpPr>
+        <p:spPr>
+          <a:xfrm>
+            <a:off x="548640" y="4151376"/>
+            <a:ext cx="3429000" cy="219456"/>
+          </a:xfrm>
+          <a:prstGeom prst="rect">
+            <a:avLst/>
+          </a:prstGeom>
+          <a:noFill/>
+          <a:ln/>
+        </p:spPr>
+        <p:txBody>
+          <a:bodyPr wrap="square" lIns="0" tIns="0" rIns="0" bIns="0" rtlCol="0" anchor="ctr"/>
+          <a:lstStyle/>
+          <a:p>
+            <a:pPr indent="0" marL="0">
+              <a:buNone/>
+            </a:pPr>
+            <a:r>
+              <a:rPr lang="en-US" sz="950" dirty="0">
+                <a:solidFill>
+                  <a:srgbClr val="5C6570"/>
+                </a:solidFill>
+                <a:latin typeface="Calibri" pitchFamily="34" charset="0"/>
+                <a:ea typeface="Calibri" pitchFamily="34" charset="-122"/>
+                <a:cs typeface="Calibri" pitchFamily="34" charset="-120"/>
+              </a:rPr>
+              <a:t>高いほど良好</a:t>
+            </a:r>
+            <a:endParaRPr lang="en-US" sz="950" dirty="0"/>
+          </a:p>
+        </p:txBody>
+      </p:sp>
+      <p:graphicFrame>
+        <p:nvGraphicFramePr>
+          <p:cNvPr id="15" name="Chart 3" descr=""/>
+          <p:cNvGraphicFramePr/>
+          <p:nvPr/>
+        </p:nvGraphicFramePr>
+        <p:xfrm>
+          <a:off x="548640" y="4434840"/>
+          <a:ext cx="3429000" cy="1691640"/>
+        </p:xfrm>
+        <a:graphic xmlns:a="http://schemas.openxmlformats.org/drawingml/2006/main">
+          <a:graphicData uri="http://schemas.openxmlformats.org/drawingml/2006/chart">
+            <c:chart xmlns:c="http://schemas.openxmlformats.org/drawingml/2006/chart" r:id="rId4"/>
+          </a:graphicData>
+        </a:graphic>
+      </p:graphicFrame>
+      <p:sp>
+        <p:nvSpPr>
+          <p:cNvPr id="16" name="Text 10"/>
+          <p:cNvSpPr txBox="1"/>
+          <p:nvPr/>
+        </p:nvSpPr>
+        <p:spPr>
+          <a:xfrm>
+            <a:off x="4343400" y="3904488"/>
+            <a:ext cx="3429000" cy="256032"/>
+          </a:xfrm>
+          <a:prstGeom prst="rect">
+            <a:avLst/>
+          </a:prstGeom>
+          <a:noFill/>
+          <a:ln/>
+        </p:spPr>
+        <p:txBody>
+          <a:bodyPr wrap="square" lIns="0" tIns="0" rIns="0" bIns="0" rtlCol="0" anchor="ctr"/>
+          <a:lstStyle/>
+          <a:p>
+            <a:pPr indent="0" marL="0">
+              <a:buNone/>
+            </a:pPr>
+            <a:r>
+              <a:rPr lang="en-US" sz="1200" b="1" dirty="0">
+                <a:solidFill>
+                  <a:srgbClr val="21295C"/>
+                </a:solidFill>
+                <a:latin typeface="Calibri" pitchFamily="34" charset="0"/>
+                <a:ea typeface="Calibri" pitchFamily="34" charset="-122"/>
+                <a:cs typeface="Calibri" pitchFamily="34" charset="-120"/>
+              </a:rPr>
+              <a:t>RPE（主観的運動強度）</a:t>
+            </a:r>
+            <a:endParaRPr lang="en-US" sz="1200" dirty="0"/>
+          </a:p>
+        </p:txBody>
+      </p:sp>
+      <p:sp>
+        <p:nvSpPr>
+          <p:cNvPr id="17" name="Text 11"/>
+          <p:cNvSpPr txBox="1"/>
+          <p:nvPr/>
+        </p:nvSpPr>
+        <p:spPr>
+          <a:xfrm>
+            <a:off x="4343400" y="4151376"/>
+            <a:ext cx="3429000" cy="219456"/>
+          </a:xfrm>
+          <a:prstGeom prst="rect">
+            <a:avLst/>
+          </a:prstGeom>
+          <a:noFill/>
+          <a:ln/>
+        </p:spPr>
+        <p:txBody>
+          <a:bodyPr wrap="square" lIns="0" tIns="0" rIns="0" bIns="0" rtlCol="0" anchor="ctr"/>
+          <a:lstStyle/>
+          <a:p>
+            <a:pPr indent="0" marL="0">
+              <a:buNone/>
+            </a:pPr>
+            <a:r>
+              <a:rPr lang="en-US" sz="950" dirty="0">
+                <a:solidFill>
+                  <a:srgbClr val="5C6570"/>
+                </a:solidFill>
+                <a:latin typeface="Calibri" pitchFamily="34" charset="0"/>
+                <a:ea typeface="Calibri" pitchFamily="34" charset="-122"/>
+                <a:cs typeface="Calibri" pitchFamily="34" charset="-120"/>
+              </a:rPr>
+              <a:t>高いほどきつい</a:t>
+            </a:r>
+            <a:endParaRPr lang="en-US" sz="950" dirty="0"/>
+          </a:p>
+        </p:txBody>
+      </p:sp>
+      <p:graphicFrame>
+        <p:nvGraphicFramePr>
+          <p:cNvPr id="18" name="Chart 4" descr=""/>
+          <p:cNvGraphicFramePr/>
+          <p:nvPr/>
+        </p:nvGraphicFramePr>
+        <p:xfrm>
+          <a:off x="4343400" y="4434840"/>
+          <a:ext cx="3429000" cy="1691640"/>
+        </p:xfrm>
+        <a:graphic xmlns:a="http://schemas.openxmlformats.org/drawingml/2006/main">
+          <a:graphicData uri="http://schemas.openxmlformats.org/drawingml/2006/chart">
+            <c:chart xmlns:c="http://schemas.openxmlformats.org/drawingml/2006/chart" r:id="rId5"/>
+          </a:graphicData>
+        </a:graphic>
+      </p:graphicFrame>
+      <p:sp>
+        <p:nvSpPr>
+          <p:cNvPr id="19" name="Text 12"/>
+          <p:cNvSpPr txBox="1"/>
+          <p:nvPr/>
+        </p:nvSpPr>
+        <p:spPr>
+          <a:xfrm>
+            <a:off x="8138160" y="3904488"/>
+            <a:ext cx="3429000" cy="256032"/>
+          </a:xfrm>
+          <a:prstGeom prst="rect">
+            <a:avLst/>
+          </a:prstGeom>
+          <a:noFill/>
+          <a:ln/>
+        </p:spPr>
+        <p:txBody>
+          <a:bodyPr wrap="square" lIns="0" tIns="0" rIns="0" bIns="0" rtlCol="0" anchor="ctr"/>
+          <a:lstStyle/>
+          <a:p>
+            <a:pPr indent="0" marL="0">
+              <a:buNone/>
+            </a:pPr>
+            <a:r>
+              <a:rPr lang="en-US" sz="1200" b="1" dirty="0">
+                <a:solidFill>
+                  <a:srgbClr val="21295C"/>
+                </a:solidFill>
+                <a:latin typeface="Calibri" pitchFamily="34" charset="0"/>
+                <a:ea typeface="Calibri" pitchFamily="34" charset="-122"/>
+                <a:cs typeface="Calibri" pitchFamily="34" charset="-120"/>
+              </a:rPr>
+              <a:t>練習時間 (分/日)</a:t>
+            </a:r>
+            <a:endParaRPr lang="en-US" sz="1200" dirty="0"/>
+          </a:p>
+        </p:txBody>
+      </p:sp>
+      <p:sp>
+        <p:nvSpPr>
+          <p:cNvPr id="20" name="Text 13"/>
+          <p:cNvSpPr txBox="1"/>
+          <p:nvPr/>
+        </p:nvSpPr>
+        <p:spPr>
+          <a:xfrm>
+            <a:off x="8138160" y="4151376"/>
+            <a:ext cx="3429000" cy="219456"/>
+          </a:xfrm>
+          <a:prstGeom prst="rect">
+            <a:avLst/>
+          </a:prstGeom>
+          <a:noFill/>
+          <a:ln/>
+        </p:spPr>
+        <p:txBody>
+          <a:bodyPr wrap="square" lIns="0" tIns="0" rIns="0" bIns="0" rtlCol="0" anchor="ctr"/>
+          <a:lstStyle/>
+          <a:p>
+            <a:pPr indent="0" marL="0">
+              <a:buNone/>
+            </a:pPr>
+            <a:r>
+              <a:rPr lang="en-US" sz="950" dirty="0">
+                <a:solidFill>
+                  <a:srgbClr val="5C6570"/>
+                </a:solidFill>
+                <a:latin typeface="Calibri" pitchFamily="34" charset="0"/>
+                <a:ea typeface="Calibri" pitchFamily="34" charset="-122"/>
+                <a:cs typeface="Calibri" pitchFamily="34" charset="-120"/>
+              </a:rPr>
+              <a:t>条件ブロックにより変動</a:t>
+            </a:r>
+            <a:endParaRPr lang="en-US" sz="950" dirty="0"/>
+          </a:p>
+        </p:txBody>
+      </p:sp>
+      <p:graphicFrame>
+        <p:nvGraphicFramePr>
+          <p:cNvPr id="21" name="Chart 5" descr=""/>
+          <p:cNvGraphicFramePr/>
+          <p:nvPr/>
+        </p:nvGraphicFramePr>
+        <p:xfrm>
+          <a:off x="8138160" y="4434840"/>
+          <a:ext cx="3429000" cy="1691640"/>
+        </p:xfrm>
+        <a:graphic xmlns:a="http://schemas.openxmlformats.org/drawingml/2006/main">
+          <a:graphicData uri="http://schemas.openxmlformats.org/drawingml/2006/chart">
+            <c:chart xmlns:c="http://schemas.openxmlformats.org/drawingml/2006/chart" r:id="rId6"/>
+          </a:graphicData>
+        </a:graphic>
+      </p:graphicFrame>
+      <p:sp>
+        <p:nvSpPr>
+          <p:cNvPr id="22" name="Text 14"/>
+          <p:cNvSpPr/>
+          <p:nvPr/>
+        </p:nvSpPr>
+        <p:spPr>
+          <a:xfrm>
+            <a:off x="548640" y="6473952"/>
+            <a:ext cx="11091672" cy="274320"/>
+          </a:xfrm>
+          <a:prstGeom prst="rect">
+            <a:avLst/>
+          </a:prstGeom>
+          <a:noFill/>
+          <a:ln/>
+        </p:spPr>
+        <p:txBody>
+          <a:bodyPr wrap="square" rtlCol="0" anchor="ctr"/>
+          <a:lstStyle/>
+          <a:p>
+            <a:pPr algn="l" indent="0" marL="0">
+              <a:buNone/>
+            </a:pPr>
+            <a:r>
+              <a:rPr lang="en-US" sz="1000" dirty="0">
+                <a:solidFill>
+                  <a:srgbClr val="5C6570"/>
+                </a:solidFill>
+                <a:latin typeface="Calibri" pitchFamily="34" charset="0"/>
+                <a:ea typeface="Calibri" pitchFamily="34" charset="-122"/>
+                <a:cs typeface="Calibri" pitchFamily="34" charset="-120"/>
+              </a:rPr>
+              <a:t>各条件3日間平均。起床時コンディション・睡眠の質・持久力・爆発力は高いほど良好、運動後疲労・RPEは高いほど負荷が大きいと仮定（原データに尺度定義なし）。</a:t>
+            </a:r>
+            <a:endParaRPr lang="en-US" sz="1000" dirty="0"/>
+          </a:p>
+        </p:txBody>
+      </p:sp>
+    </p:spTree>
+  </p:cSld>
+  <p:clrMapOvr>
+    <a:masterClrMapping/>
+  </p:clrMapOvr>
+</p:sld>
+</file>
+
+<file path=ppt/slides/slide14.xml><?xml version="1.0" encoding="utf-8"?>
+<p:sld xmlns:a="http://schemas.openxmlformats.org/drawingml/2006/main" xmlns:r="http://schemas.openxmlformats.org/officeDocument/2006/relationships" xmlns:p="http://schemas.openxmlformats.org/presentationml/2006/main">
+  <p:cSld name="Slide 14">
+    <p:bg>
+      <p:bgPr>
+        <a:solidFill>
+          <a:srgbClr val="FFFFFF"/>
+        </a:solidFill>
+      </p:bgPr>
+    </p:bg>
+    <p:spTree>
+      <p:nvGrpSpPr>
+        <p:cNvPr id="1" name=""/>
+        <p:cNvGrpSpPr/>
+        <p:nvPr/>
+      </p:nvGrpSpPr>
+      <p:grpSpPr>
+        <a:xfrm>
+          <a:off x="0" y="0"/>
+          <a:ext cx="0" cy="0"/>
+          <a:chOff x="0" y="0"/>
+          <a:chExt cx="0" cy="0"/>
+        </a:xfrm>
+      </p:grpSpPr>
+      <p:sp>
+        <p:nvSpPr>
+          <p:cNvPr id="2" name="Text 0"/>
+          <p:cNvSpPr txBox="1"/>
+          <p:nvPr/>
+        </p:nvSpPr>
+        <p:spPr>
+          <a:xfrm>
+            <a:off x="548640" y="457200"/>
+            <a:ext cx="11091672" cy="365760"/>
+          </a:xfrm>
+          <a:prstGeom prst="rect">
+            <a:avLst/>
+          </a:prstGeom>
+          <a:noFill/>
+          <a:ln/>
+        </p:spPr>
+        <p:txBody>
+          <a:bodyPr wrap="square" rtlCol="0" anchor="ctr"/>
+          <a:lstStyle/>
+          <a:p>
+            <a:pPr indent="0" marL="0">
+              <a:buNone/>
+            </a:pPr>
+            <a:r>
+              <a:rPr lang="en-US" sz="1300" b="1" spc="100" kern="0" dirty="0">
+                <a:solidFill>
+                  <a:srgbClr val="1C7293"/>
+                </a:solidFill>
+                <a:latin typeface="Calibri" pitchFamily="34" charset="0"/>
+                <a:ea typeface="Calibri" pitchFamily="34" charset="-122"/>
+                <a:cs typeface="Calibri" pitchFamily="34" charset="-120"/>
+              </a:rPr>
+              <a:t>SYNTHESIS</a:t>
+            </a:r>
+            <a:endParaRPr lang="en-US" sz="1300" dirty="0"/>
+          </a:p>
+        </p:txBody>
+      </p:sp>
+      <p:sp>
+        <p:nvSpPr>
+          <p:cNvPr id="3" name="Text 1"/>
+          <p:cNvSpPr txBox="1"/>
+          <p:nvPr/>
+        </p:nvSpPr>
+        <p:spPr>
+          <a:xfrm>
+            <a:off x="548640" y="786384"/>
+            <a:ext cx="11091672" cy="640080"/>
+          </a:xfrm>
+          <a:prstGeom prst="rect">
+            <a:avLst/>
+          </a:prstGeom>
+          <a:noFill/>
+          <a:ln/>
+        </p:spPr>
+        <p:txBody>
+          <a:bodyPr wrap="square" rtlCol="0" anchor="ctr"/>
+          <a:lstStyle/>
+          <a:p>
+            <a:pPr indent="0" marL="0">
+              <a:buNone/>
+            </a:pPr>
+            <a:r>
+              <a:rPr lang="en-US" sz="2800" b="1" dirty="0">
+                <a:solidFill>
+                  <a:srgbClr val="21295C"/>
+                </a:solidFill>
+                <a:latin typeface="Cambria" pitchFamily="34" charset="0"/>
+                <a:ea typeface="Cambria" pitchFamily="34" charset="-122"/>
+                <a:cs typeface="Cambria" pitchFamily="34" charset="-120"/>
+              </a:rPr>
+              <a:t>総合考察：食事 × トレーニング × 血糖</a:t>
+            </a:r>
+            <a:endParaRPr lang="en-US" sz="2800" dirty="0"/>
+          </a:p>
+        </p:txBody>
+      </p:sp>
+      <p:sp>
+        <p:nvSpPr>
+          <p:cNvPr id="4" name="Shape 2"/>
+          <p:cNvSpPr/>
+          <p:nvPr/>
+        </p:nvSpPr>
+        <p:spPr>
+          <a:xfrm>
+            <a:off x="548640" y="1600200"/>
+            <a:ext cx="11091672" cy="1417320"/>
+          </a:xfrm>
+          <a:prstGeom prst="roundRect">
+            <a:avLst>
+              <a:gd name="adj" fmla="val 7742"/>
+            </a:avLst>
+          </a:prstGeom>
+          <a:solidFill>
+            <a:srgbClr val="FDF3E2"/>
+          </a:solidFill>
+          <a:ln w="12700">
+            <a:solidFill>
+              <a:srgbClr val="EDA100"/>
+            </a:solidFill>
+            <a:prstDash val="solid"/>
+          </a:ln>
+        </p:spPr>
+      </p:sp>
+      <p:sp>
+        <p:nvSpPr>
+          <p:cNvPr id="5" name="Text 3"/>
+          <p:cNvSpPr txBox="1"/>
+          <p:nvPr/>
+        </p:nvSpPr>
+        <p:spPr>
+          <a:xfrm>
+            <a:off x="822960" y="1737360"/>
+            <a:ext cx="10543032" cy="274320"/>
+          </a:xfrm>
+          <a:prstGeom prst="rect">
+            <a:avLst/>
+          </a:prstGeom>
+          <a:noFill/>
+          <a:ln/>
+        </p:spPr>
+        <p:txBody>
+          <a:bodyPr wrap="square" lIns="0" tIns="0" rIns="0" bIns="0" rtlCol="0" anchor="ctr"/>
+          <a:lstStyle/>
+          <a:p>
+            <a:pPr indent="0" marL="0">
+              <a:buNone/>
+            </a:pPr>
+            <a:r>
+              <a:rPr lang="en-US" sz="1300" b="1" dirty="0">
+                <a:solidFill>
+                  <a:srgbClr val="6B4B00"/>
+                </a:solidFill>
+                <a:latin typeface="Calibri" pitchFamily="34" charset="0"/>
+                <a:ea typeface="Calibri" pitchFamily="34" charset="-122"/>
+                <a:cs typeface="Calibri" pitchFamily="34" charset="-120"/>
+              </a:rPr>
+              <a:t>⚠ 重要な交絡：練習時間が条件ブロックごとに大きく異なる</a:t>
+            </a:r>
+            <a:endParaRPr lang="en-US" sz="1300" dirty="0"/>
+          </a:p>
+        </p:txBody>
+      </p:sp>
+      <p:sp>
+        <p:nvSpPr>
+          <p:cNvPr id="6" name="Text 4"/>
+          <p:cNvSpPr txBox="1"/>
+          <p:nvPr/>
+        </p:nvSpPr>
+        <p:spPr>
+          <a:xfrm>
+            <a:off x="822960" y="2048256"/>
+            <a:ext cx="10543032" cy="914400"/>
+          </a:xfrm>
+          <a:prstGeom prst="rect">
+            <a:avLst/>
+          </a:prstGeom>
+          <a:noFill/>
+          <a:ln/>
+        </p:spPr>
+        <p:txBody>
+          <a:bodyPr wrap="square" lIns="0" tIns="0" rIns="0" bIns="0" rtlCol="0" anchor="ctr"/>
+          <a:lstStyle/>
+          <a:p>
+            <a:pPr indent="0" marL="0">
+              <a:buNone/>
+            </a:pPr>
+            <a:r>
+              <a:rPr lang="en-US" sz="1150" dirty="0">
+                <a:solidFill>
+                  <a:srgbClr val="6B4B00"/>
+                </a:solidFill>
+                <a:latin typeface="Calibri" pitchFamily="34" charset="0"/>
+                <a:ea typeface="Calibri" pitchFamily="34" charset="-122"/>
+                <a:cs typeface="Calibri" pitchFamily="34" charset="-120"/>
+              </a:rPr>
+              <a:t>固形の3日間は平均140分（180/120/120分）と突出して長く、スムージーの3日間は毎日60分で最短。RPE・爆発力・持久力・運動後疲労は運動量そのものにも左右されるため、固形のRPE・爆発力の高さは「食事」よりも「練習量が多かったこと」を反映している可能性がある。トレーニングはどの条件も11:00〜14:00の間に実施。</a:t>
+            </a:r>
+            <a:endParaRPr lang="en-US" sz="1150" dirty="0"/>
+          </a:p>
+        </p:txBody>
+      </p:sp>
+      <p:sp>
+        <p:nvSpPr>
+          <p:cNvPr id="7" name="Shape 5"/>
+          <p:cNvSpPr/>
+          <p:nvPr/>
+        </p:nvSpPr>
+        <p:spPr>
+          <a:xfrm>
+            <a:off x="548640" y="3200400"/>
+            <a:ext cx="5362956" cy="1828800"/>
+          </a:xfrm>
+          <a:prstGeom prst="roundRect">
+            <a:avLst>
+              <a:gd name="adj" fmla="val 5000"/>
+            </a:avLst>
+          </a:prstGeom>
+          <a:solidFill>
+            <a:srgbClr val="F4F7F9"/>
+          </a:solidFill>
+          <a:ln/>
+        </p:spPr>
+      </p:sp>
+      <p:sp>
+        <p:nvSpPr>
+          <p:cNvPr id="8" name="Shape 6"/>
+          <p:cNvSpPr/>
+          <p:nvPr/>
+        </p:nvSpPr>
+        <p:spPr>
+          <a:xfrm>
+            <a:off x="822960" y="3337560"/>
+            <a:ext cx="146304" cy="347472"/>
+          </a:xfrm>
+          <a:prstGeom prst="rect">
+            <a:avLst/>
+          </a:prstGeom>
+          <a:solidFill>
+            <a:srgbClr val="1BAF7A"/>
+          </a:solidFill>
+          <a:ln/>
+        </p:spPr>
+      </p:sp>
+      <p:sp>
+        <p:nvSpPr>
+          <p:cNvPr id="9" name="Text 7"/>
+          <p:cNvSpPr txBox="1"/>
+          <p:nvPr/>
+        </p:nvSpPr>
+        <p:spPr>
+          <a:xfrm>
+            <a:off x="1078992" y="3300984"/>
+            <a:ext cx="4539996" cy="420624"/>
+          </a:xfrm>
+          <a:prstGeom prst="rect">
+            <a:avLst/>
+          </a:prstGeom>
+          <a:noFill/>
+          <a:ln/>
+        </p:spPr>
+        <p:txBody>
+          <a:bodyPr wrap="square" lIns="0" tIns="0" rIns="0" bIns="0" rtlCol="0" anchor="ctr"/>
+          <a:lstStyle/>
+          <a:p>
+            <a:pPr indent="0" marL="0">
+              <a:buNone/>
+            </a:pPr>
+            <a:r>
+              <a:rPr lang="en-US" sz="1400" b="1" dirty="0">
+                <a:solidFill>
+                  <a:srgbClr val="21295C"/>
+                </a:solidFill>
+                <a:latin typeface="Calibri" pitchFamily="34" charset="0"/>
+                <a:ea typeface="Calibri" pitchFamily="34" charset="-122"/>
+                <a:cs typeface="Calibri" pitchFamily="34" charset="-120"/>
+              </a:rPr>
+              <a:t>おにぎり＋スムージー（糖質ノーマル）</a:t>
+            </a:r>
+            <a:endParaRPr lang="en-US" sz="1400" dirty="0"/>
+          </a:p>
+        </p:txBody>
+      </p:sp>
+      <p:sp>
+        <p:nvSpPr>
+          <p:cNvPr id="10" name="Text 8"/>
+          <p:cNvSpPr txBox="1"/>
+          <p:nvPr/>
+        </p:nvSpPr>
+        <p:spPr>
+          <a:xfrm>
+            <a:off x="822960" y="3794760"/>
+            <a:ext cx="4814316" cy="347472"/>
+          </a:xfrm>
+          <a:prstGeom prst="rect">
+            <a:avLst/>
+          </a:prstGeom>
+          <a:noFill/>
+          <a:ln/>
+        </p:spPr>
+        <p:txBody>
+          <a:bodyPr wrap="square" lIns="0" tIns="0" rIns="0" bIns="0" rtlCol="0" anchor="ctr"/>
+          <a:lstStyle/>
+          <a:p>
+            <a:pPr indent="0" marL="0">
+              <a:buNone/>
+            </a:pPr>
+            <a:r>
+              <a:rPr lang="en-US" sz="1100" dirty="0">
+                <a:solidFill>
+                  <a:srgbClr val="1A1A1A"/>
+                </a:solidFill>
+                <a:latin typeface="Calibri" pitchFamily="34" charset="0"/>
+                <a:ea typeface="Calibri" pitchFamily="34" charset="-122"/>
+                <a:cs typeface="Calibri" pitchFamily="34" charset="-120"/>
+              </a:rPr>
+              <a:t>•  血糖の乱高下（CV）が4条件中最小、練習中の燃料供給も十分（220）</a:t>
+            </a:r>
+            <a:endParaRPr lang="en-US" sz="1100" dirty="0"/>
+          </a:p>
+        </p:txBody>
+      </p:sp>
+      <p:sp>
+        <p:nvSpPr>
+          <p:cNvPr id="11" name="Text 9"/>
+          <p:cNvSpPr txBox="1"/>
+          <p:nvPr/>
+        </p:nvSpPr>
+        <p:spPr>
+          <a:xfrm>
+            <a:off x="822960" y="4178808"/>
+            <a:ext cx="4814316" cy="347472"/>
+          </a:xfrm>
+          <a:prstGeom prst="rect">
+            <a:avLst/>
+          </a:prstGeom>
+          <a:noFill/>
+          <a:ln/>
+        </p:spPr>
+        <p:txBody>
+          <a:bodyPr wrap="square" lIns="0" tIns="0" rIns="0" bIns="0" rtlCol="0" anchor="ctr"/>
+          <a:lstStyle/>
+          <a:p>
+            <a:pPr indent="0" marL="0">
+              <a:buNone/>
+            </a:pPr>
+            <a:r>
+              <a:rPr lang="en-US" sz="1100" dirty="0">
+                <a:solidFill>
+                  <a:srgbClr val="1A1A1A"/>
+                </a:solidFill>
+                <a:latin typeface="Calibri" pitchFamily="34" charset="0"/>
+                <a:ea typeface="Calibri" pitchFamily="34" charset="-122"/>
+                <a:cs typeface="Calibri" pitchFamily="34" charset="-120"/>
+              </a:rPr>
+              <a:t>•  持久力の自己評価が4条件中最高（3.83）</a:t>
+            </a:r>
+            <a:endParaRPr lang="en-US" sz="1100" dirty="0"/>
+          </a:p>
+        </p:txBody>
+      </p:sp>
+      <p:sp>
+        <p:nvSpPr>
+          <p:cNvPr id="12" name="Text 10"/>
+          <p:cNvSpPr txBox="1"/>
+          <p:nvPr/>
+        </p:nvSpPr>
+        <p:spPr>
+          <a:xfrm>
+            <a:off x="822960" y="4562856"/>
+            <a:ext cx="4814316" cy="347472"/>
+          </a:xfrm>
+          <a:prstGeom prst="rect">
+            <a:avLst/>
+          </a:prstGeom>
+          <a:noFill/>
+          <a:ln/>
+        </p:spPr>
+        <p:txBody>
+          <a:bodyPr wrap="square" lIns="0" tIns="0" rIns="0" bIns="0" rtlCol="0" anchor="ctr"/>
+          <a:lstStyle/>
+          <a:p>
+            <a:pPr indent="0" marL="0">
+              <a:buNone/>
+            </a:pPr>
+            <a:r>
+              <a:rPr lang="en-US" sz="1100" dirty="0">
+                <a:solidFill>
+                  <a:srgbClr val="1A1A1A"/>
+                </a:solidFill>
+                <a:latin typeface="Calibri" pitchFamily="34" charset="0"/>
+                <a:ea typeface="Calibri" pitchFamily="34" charset="-122"/>
+                <a:cs typeface="Calibri" pitchFamily="34" charset="-120"/>
+              </a:rPr>
+              <a:t>•  消化器症状も軽微</a:t>
+            </a:r>
+            <a:endParaRPr lang="en-US" sz="1100" dirty="0"/>
+          </a:p>
+        </p:txBody>
+      </p:sp>
+      <p:sp>
+        <p:nvSpPr>
+          <p:cNvPr id="13" name="Shape 11"/>
+          <p:cNvSpPr/>
+          <p:nvPr/>
+        </p:nvSpPr>
+        <p:spPr>
+          <a:xfrm>
+            <a:off x="6277356" y="3200400"/>
+            <a:ext cx="5362956" cy="1828800"/>
+          </a:xfrm>
+          <a:prstGeom prst="roundRect">
+            <a:avLst>
+              <a:gd name="adj" fmla="val 5000"/>
+            </a:avLst>
+          </a:prstGeom>
+          <a:solidFill>
+            <a:srgbClr val="F4F7F9"/>
+          </a:solidFill>
+          <a:ln/>
+        </p:spPr>
+      </p:sp>
+      <p:sp>
+        <p:nvSpPr>
+          <p:cNvPr id="14" name="Shape 12"/>
+          <p:cNvSpPr/>
+          <p:nvPr/>
+        </p:nvSpPr>
+        <p:spPr>
+          <a:xfrm>
+            <a:off x="6551676" y="3337560"/>
+            <a:ext cx="146304" cy="347472"/>
+          </a:xfrm>
+          <a:prstGeom prst="rect">
+            <a:avLst/>
+          </a:prstGeom>
+          <a:solidFill>
+            <a:srgbClr val="EDA100"/>
+          </a:solidFill>
+          <a:ln/>
+        </p:spPr>
+      </p:sp>
+      <p:sp>
+        <p:nvSpPr>
+          <p:cNvPr id="15" name="Text 13"/>
+          <p:cNvSpPr txBox="1"/>
+          <p:nvPr/>
+        </p:nvSpPr>
+        <p:spPr>
+          <a:xfrm>
+            <a:off x="6807708" y="3300984"/>
+            <a:ext cx="4539996" cy="420624"/>
+          </a:xfrm>
+          <a:prstGeom prst="rect">
+            <a:avLst/>
+          </a:prstGeom>
+          <a:noFill/>
+          <a:ln/>
+        </p:spPr>
+        <p:txBody>
+          <a:bodyPr wrap="square" lIns="0" tIns="0" rIns="0" bIns="0" rtlCol="0" anchor="ctr"/>
+          <a:lstStyle/>
+          <a:p>
+            <a:pPr indent="0" marL="0">
+              <a:buNone/>
+            </a:pPr>
+            <a:r>
+              <a:rPr lang="en-US" sz="1400" b="1" dirty="0">
+                <a:solidFill>
+                  <a:srgbClr val="21295C"/>
+                </a:solidFill>
+                <a:latin typeface="Calibri" pitchFamily="34" charset="0"/>
+                <a:ea typeface="Calibri" pitchFamily="34" charset="-122"/>
+                <a:cs typeface="Calibri" pitchFamily="34" charset="-120"/>
+              </a:rPr>
+              <a:t>おにぎり＋糖質減</a:t>
+            </a:r>
+            <a:endParaRPr lang="en-US" sz="1400" dirty="0"/>
+          </a:p>
+        </p:txBody>
+      </p:sp>
+      <p:sp>
+        <p:nvSpPr>
+          <p:cNvPr id="16" name="Text 14"/>
+          <p:cNvSpPr txBox="1"/>
+          <p:nvPr/>
+        </p:nvSpPr>
+        <p:spPr>
+          <a:xfrm>
+            <a:off x="6551676" y="3794760"/>
+            <a:ext cx="4814316" cy="347472"/>
+          </a:xfrm>
+          <a:prstGeom prst="rect">
+            <a:avLst/>
+          </a:prstGeom>
+          <a:noFill/>
+          <a:ln/>
+        </p:spPr>
+        <p:txBody>
+          <a:bodyPr wrap="square" lIns="0" tIns="0" rIns="0" bIns="0" rtlCol="0" anchor="ctr"/>
+          <a:lstStyle/>
+          <a:p>
+            <a:pPr indent="0" marL="0">
+              <a:buNone/>
+            </a:pPr>
+            <a:r>
+              <a:rPr lang="en-US" sz="1100" dirty="0">
+                <a:solidFill>
+                  <a:srgbClr val="1A1A1A"/>
+                </a:solidFill>
+                <a:latin typeface="Calibri" pitchFamily="34" charset="0"/>
+                <a:ea typeface="Calibri" pitchFamily="34" charset="-122"/>
+                <a:cs typeface="Calibri" pitchFamily="34" charset="-120"/>
+              </a:rPr>
+              <a:t>•  波形が最もなだらか、練習中の燃料供給はむしろ4条件中最高（229）</a:t>
+            </a:r>
+            <a:endParaRPr lang="en-US" sz="1100" dirty="0"/>
+          </a:p>
+        </p:txBody>
+      </p:sp>
+      <p:sp>
+        <p:nvSpPr>
+          <p:cNvPr id="17" name="Text 15"/>
+          <p:cNvSpPr txBox="1"/>
+          <p:nvPr/>
+        </p:nvSpPr>
+        <p:spPr>
+          <a:xfrm>
+            <a:off x="6551676" y="4178808"/>
+            <a:ext cx="4814316" cy="347472"/>
+          </a:xfrm>
+          <a:prstGeom prst="rect">
+            <a:avLst/>
+          </a:prstGeom>
+          <a:noFill/>
+          <a:ln/>
+        </p:spPr>
+        <p:txBody>
+          <a:bodyPr wrap="square" lIns="0" tIns="0" rIns="0" bIns="0" rtlCol="0" anchor="ctr"/>
+          <a:lstStyle/>
+          <a:p>
+            <a:pPr indent="0" marL="0">
+              <a:buNone/>
+            </a:pPr>
+            <a:r>
+              <a:rPr lang="en-US" sz="1100" dirty="0">
+                <a:solidFill>
+                  <a:srgbClr val="1A1A1A"/>
+                </a:solidFill>
+                <a:latin typeface="Calibri" pitchFamily="34" charset="0"/>
+                <a:ea typeface="Calibri" pitchFamily="34" charset="-122"/>
+                <a:cs typeface="Calibri" pitchFamily="34" charset="-120"/>
+              </a:rPr>
+              <a:t>•  起床時コンディション・睡眠の質が4条件中最高</a:t>
+            </a:r>
+            <a:endParaRPr lang="en-US" sz="1100" dirty="0"/>
+          </a:p>
+        </p:txBody>
+      </p:sp>
+      <p:sp>
+        <p:nvSpPr>
+          <p:cNvPr id="18" name="Text 16"/>
+          <p:cNvSpPr txBox="1"/>
+          <p:nvPr/>
+        </p:nvSpPr>
+        <p:spPr>
+          <a:xfrm>
+            <a:off x="6551676" y="4562856"/>
+            <a:ext cx="4814316" cy="347472"/>
+          </a:xfrm>
+          <a:prstGeom prst="rect">
+            <a:avLst/>
+          </a:prstGeom>
+          <a:noFill/>
+          <a:ln/>
+        </p:spPr>
+        <p:txBody>
+          <a:bodyPr wrap="square" lIns="0" tIns="0" rIns="0" bIns="0" rtlCol="0" anchor="ctr"/>
+          <a:lstStyle/>
+          <a:p>
+            <a:pPr indent="0" marL="0">
+              <a:buNone/>
+            </a:pPr>
+            <a:r>
+              <a:rPr lang="en-US" sz="1100" dirty="0">
+                <a:solidFill>
+                  <a:srgbClr val="1A1A1A"/>
+                </a:solidFill>
+                <a:latin typeface="Calibri" pitchFamily="34" charset="0"/>
+                <a:ea typeface="Calibri" pitchFamily="34" charset="-122"/>
+                <a:cs typeface="Calibri" pitchFamily="34" charset="-120"/>
+              </a:rPr>
+              <a:t>•  一方で持久力・爆発力の自己評価は4条件中最低（要検証の矛盾）</a:t>
+            </a:r>
+            <a:endParaRPr lang="en-US" sz="1100" dirty="0"/>
+          </a:p>
+        </p:txBody>
+      </p:sp>
+      <p:sp>
+        <p:nvSpPr>
+          <p:cNvPr id="19" name="Shape 17"/>
+          <p:cNvSpPr/>
+          <p:nvPr/>
+        </p:nvSpPr>
+        <p:spPr>
+          <a:xfrm>
+            <a:off x="548640" y="5212080"/>
+            <a:ext cx="11091672" cy="1188720"/>
+          </a:xfrm>
+          <a:prstGeom prst="roundRect">
+            <a:avLst>
+              <a:gd name="adj" fmla="val 7692"/>
+            </a:avLst>
+          </a:prstGeom>
+          <a:solidFill>
+            <a:srgbClr val="EAF7F0"/>
+          </a:solidFill>
+          <a:ln/>
+        </p:spPr>
+      </p:sp>
+      <p:sp>
+        <p:nvSpPr>
+          <p:cNvPr id="20" name="Text 18"/>
+          <p:cNvSpPr txBox="1"/>
+          <p:nvPr/>
+        </p:nvSpPr>
+        <p:spPr>
+          <a:xfrm>
+            <a:off x="822960" y="5394960"/>
+            <a:ext cx="10543032" cy="868680"/>
+          </a:xfrm>
+          <a:prstGeom prst="rect">
+            <a:avLst/>
+          </a:prstGeom>
+          <a:noFill/>
+          <a:ln/>
+        </p:spPr>
+        <p:txBody>
+          <a:bodyPr wrap="square" lIns="0" tIns="0" rIns="0" bIns="0" rtlCol="0" anchor="ctr"/>
+          <a:lstStyle/>
+          <a:p>
+            <a:pPr indent="0" marL="0">
+              <a:buNone/>
+            </a:pPr>
+            <a:r>
+              <a:rPr lang="en-US" sz="1250" b="1" dirty="0">
+                <a:solidFill>
+                  <a:srgbClr val="0F5C3D"/>
+                </a:solidFill>
+                <a:latin typeface="Calibri" pitchFamily="34" charset="0"/>
+                <a:ea typeface="Calibri" pitchFamily="34" charset="-122"/>
+                <a:cs typeface="Calibri" pitchFamily="34" charset="-120"/>
+              </a:rPr>
+              <a:t>✓ 総合評価：現時点のデータでは「おにぎり＋スムージー（糖質ノーマル、同時摂取）」が最もバランスの良い候補。「おにぎり＋糖質減」は血糖面（なだらかさ・燃料供給とも）ではむしろ優れており、体感（持久力低下）との矛盾を解消できれば第一候補に上がる可能性もある。</a:t>
+            </a:r>
+            <a:endParaRPr lang="en-US" sz="1250" dirty="0"/>
+          </a:p>
+        </p:txBody>
+      </p:sp>
+    </p:spTree>
+  </p:cSld>
+  <p:clrMapOvr>
+    <a:masterClrMapping/>
+  </p:clrMapOvr>
+</p:sld>
+</file>
+
+<file path=ppt/slides/slide15.xml><?xml version="1.0" encoding="utf-8"?>
+<p:sld xmlns:a="http://schemas.openxmlformats.org/drawingml/2006/main" xmlns:r="http://schemas.openxmlformats.org/officeDocument/2006/relationships" xmlns:p="http://schemas.openxmlformats.org/presentationml/2006/main">
+  <p:cSld name="Slide 15">
     <p:bg>
       <p:bgPr>
         <a:solidFill>
@@ -9638,7 +12505,7 @@
                 <a:ea typeface="Calibri" pitchFamily="34" charset="-122"/>
                 <a:cs typeface="Calibri" pitchFamily="34" charset="-120"/>
               </a:rPr>
-              <a:t>おにぎりを崩さず副食のみ液状化する方針は、血糖の観点からも妥当（②の結果）</a:t>
+              <a:t>おにぎりを崩さず副食と同時に食べる方針は血糖の観点から一貫して支持される：乱高下を抑えつつ、練習中の燃料供給も確保できる</a:t>
             </a:r>
             <a:endParaRPr lang="en-US" sz="1400" dirty="0"/>
           </a:p>
@@ -9736,7 +12603,7 @@
                 <a:ea typeface="Calibri" pitchFamily="34" charset="-122"/>
                 <a:cs typeface="Calibri" pitchFamily="34" charset="-120"/>
               </a:rPr>
-              <a:t>総糖質量の最適化（糖質減食）は血糖面では明確に効果あり（iAUC 2h ▼39%）が、持久力・爆発力はトレードオフの兆候あり</a:t>
+              <a:t>固形は「血糖が安定」ではなく「練習中の燃料不足」（練習中平均135、他条件の約6割）と解釈すべき</a:t>
             </a:r>
             <a:endParaRPr lang="en-US" sz="1400" dirty="0"/>
           </a:p>
@@ -9834,7 +12701,7 @@
                 <a:ea typeface="Calibri" pitchFamily="34" charset="-122"/>
                 <a:cs typeface="Calibri" pitchFamily="34" charset="-120"/>
               </a:rPr>
-              <a:t>総合評価：現時点では「おにぎり＋スムージー（糖質ノーマル）」が最もバランスの良い候補</a:t>
+              <a:t>総合評価：現時点では「おにぎり＋スムージー（糖質ノーマル、同時摂取）」が最もバランスの良い候補</a:t>
             </a:r>
             <a:endParaRPr lang="en-US" sz="1400" dirty="0"/>
           </a:p>
